--- a/Session Guide/IntroPresentation.pptx
+++ b/Session Guide/IntroPresentation.pptx
@@ -110,6 +110,11 @@
       </a:defRPr>
     </a:lvl9pPr>
   </p:defaultTextStyle>
+  <p:extLst>
+    <p:ext uri="{EFAFB233-063F-42B5-8137-9DF3F51BA10A}">
+      <p15:sldGuideLst xmlns:p15="http://schemas.microsoft.com/office/powerpoint/2012/main"/>
+    </p:ext>
+  </p:extLst>
 </p:presentation>
 </file>
 
@@ -126,7 +131,7 @@
   <pc:docChgLst>
     <pc:chgData name="Hadia Akbar" userId="19362115565_tp_box_2" providerId="OAuth2" clId="{FF77DECD-7ECC-48F4-BF82-9D4D4E0BE774}"/>
     <pc:docChg chg="undo redo custSel addSld delSld modSld sldOrd">
-      <pc:chgData name="Hadia Akbar" userId="19362115565_tp_box_2" providerId="OAuth2" clId="{FF77DECD-7ECC-48F4-BF82-9D4D4E0BE774}" dt="2026-08-04T05:58:23.999" v="1470" actId="403"/>
+      <pc:chgData name="Hadia Akbar" userId="19362115565_tp_box_2" providerId="OAuth2" clId="{FF77DECD-7ECC-48F4-BF82-9D4D4E0BE774}" dt="2026-08-04T18:03:23.726" v="1483" actId="14100"/>
       <pc:docMkLst>
         <pc:docMk/>
       </pc:docMkLst>
@@ -479,13 +484,13 @@
         </pc:picChg>
       </pc:sldChg>
       <pc:sldChg chg="addSp delSp modSp new mod setBg addAnim delAnim delDesignElem">
-        <pc:chgData name="Hadia Akbar" userId="19362115565_tp_box_2" providerId="OAuth2" clId="{FF77DECD-7ECC-48F4-BF82-9D4D4E0BE774}" dt="2026-08-04T05:52:59.640" v="1226" actId="14100"/>
+        <pc:chgData name="Hadia Akbar" userId="19362115565_tp_box_2" providerId="OAuth2" clId="{FF77DECD-7ECC-48F4-BF82-9D4D4E0BE774}" dt="2026-08-04T17:55:09.195" v="1482" actId="1076"/>
         <pc:sldMkLst>
           <pc:docMk/>
           <pc:sldMk cId="1480586688" sldId="260"/>
         </pc:sldMkLst>
         <pc:spChg chg="mod ord">
-          <ac:chgData name="Hadia Akbar" userId="19362115565_tp_box_2" providerId="OAuth2" clId="{FF77DECD-7ECC-48F4-BF82-9D4D4E0BE774}" dt="2026-08-04T05:23:14.850" v="245" actId="1076"/>
+          <ac:chgData name="Hadia Akbar" userId="19362115565_tp_box_2" providerId="OAuth2" clId="{FF77DECD-7ECC-48F4-BF82-9D4D4E0BE774}" dt="2026-08-04T17:55:05.463" v="1480" actId="1076"/>
           <ac:spMkLst>
             <pc:docMk/>
             <pc:sldMk cId="1480586688" sldId="260"/>
@@ -829,7 +834,7 @@
           </ac:picMkLst>
         </pc:picChg>
         <pc:picChg chg="add mod">
-          <ac:chgData name="Hadia Akbar" userId="19362115565_tp_box_2" providerId="OAuth2" clId="{FF77DECD-7ECC-48F4-BF82-9D4D4E0BE774}" dt="2026-08-04T05:22:47.444" v="238" actId="1076"/>
+          <ac:chgData name="Hadia Akbar" userId="19362115565_tp_box_2" providerId="OAuth2" clId="{FF77DECD-7ECC-48F4-BF82-9D4D4E0BE774}" dt="2026-08-04T17:55:09.195" v="1482" actId="1076"/>
           <ac:picMkLst>
             <pc:docMk/>
             <pc:sldMk cId="1480586688" sldId="260"/>
@@ -837,7 +842,7 @@
           </ac:picMkLst>
         </pc:picChg>
         <pc:picChg chg="add mod">
-          <ac:chgData name="Hadia Akbar" userId="19362115565_tp_box_2" providerId="OAuth2" clId="{FF77DECD-7ECC-48F4-BF82-9D4D4E0BE774}" dt="2026-08-04T05:52:59.640" v="1226" actId="14100"/>
+          <ac:chgData name="Hadia Akbar" userId="19362115565_tp_box_2" providerId="OAuth2" clId="{FF77DECD-7ECC-48F4-BF82-9D4D4E0BE774}" dt="2026-08-04T17:55:06.767" v="1481" actId="1076"/>
           <ac:picMkLst>
             <pc:docMk/>
             <pc:sldMk cId="1480586688" sldId="260"/>
@@ -1125,13 +1130,13 @@
         </pc:cxnChg>
       </pc:sldChg>
       <pc:sldChg chg="addSp delSp modSp new mod ord setBg">
-        <pc:chgData name="Hadia Akbar" userId="19362115565_tp_box_2" providerId="OAuth2" clId="{FF77DECD-7ECC-48F4-BF82-9D4D4E0BE774}" dt="2026-08-04T05:58:23.999" v="1470" actId="403"/>
+        <pc:chgData name="Hadia Akbar" userId="19362115565_tp_box_2" providerId="OAuth2" clId="{FF77DECD-7ECC-48F4-BF82-9D4D4E0BE774}" dt="2026-08-04T18:03:23.726" v="1483" actId="14100"/>
         <pc:sldMkLst>
           <pc:docMk/>
           <pc:sldMk cId="1860897597" sldId="262"/>
         </pc:sldMkLst>
         <pc:spChg chg="mod">
-          <ac:chgData name="Hadia Akbar" userId="19362115565_tp_box_2" providerId="OAuth2" clId="{FF77DECD-7ECC-48F4-BF82-9D4D4E0BE774}" dt="2026-08-04T05:58:23.999" v="1470" actId="403"/>
+          <ac:chgData name="Hadia Akbar" userId="19362115565_tp_box_2" providerId="OAuth2" clId="{FF77DECD-7ECC-48F4-BF82-9D4D4E0BE774}" dt="2026-08-04T18:03:23.726" v="1483" actId="14100"/>
           <ac:spMkLst>
             <pc:docMk/>
             <pc:sldMk cId="1860897597" sldId="262"/>
@@ -3991,7 +3996,7 @@
           <a:p>
             <a:fld id="{23F5F05C-4C32-48D7-B5AA-52291E739591}" type="datetimeFigureOut">
               <a:rPr lang="en-US" smtClean="0"/>
-              <a:t>8/3/2026</a:t>
+              <a:t>8/4/2026</a:t>
             </a:fld>
             <a:endParaRPr lang="en-US"/>
           </a:p>
@@ -4489,7 +4494,7 @@
           <a:p>
             <a:fld id="{5518E2ED-ACDD-48AE-BEAE-F9B835E4D922}" type="datetimeFigureOut">
               <a:rPr lang="en-US" smtClean="0"/>
-              <a:t>8/3/2026</a:t>
+              <a:t>8/4/2026</a:t>
             </a:fld>
             <a:endParaRPr lang="en-US"/>
           </a:p>
@@ -4687,7 +4692,7 @@
           <a:p>
             <a:fld id="{5518E2ED-ACDD-48AE-BEAE-F9B835E4D922}" type="datetimeFigureOut">
               <a:rPr lang="en-US" smtClean="0"/>
-              <a:t>8/3/2026</a:t>
+              <a:t>8/4/2026</a:t>
             </a:fld>
             <a:endParaRPr lang="en-US"/>
           </a:p>
@@ -4895,7 +4900,7 @@
           <a:p>
             <a:fld id="{5518E2ED-ACDD-48AE-BEAE-F9B835E4D922}" type="datetimeFigureOut">
               <a:rPr lang="en-US" smtClean="0"/>
-              <a:t>8/3/2026</a:t>
+              <a:t>8/4/2026</a:t>
             </a:fld>
             <a:endParaRPr lang="en-US"/>
           </a:p>
@@ -5093,7 +5098,7 @@
           <a:p>
             <a:fld id="{5518E2ED-ACDD-48AE-BEAE-F9B835E4D922}" type="datetimeFigureOut">
               <a:rPr lang="en-US" smtClean="0"/>
-              <a:t>8/3/2026</a:t>
+              <a:t>8/4/2026</a:t>
             </a:fld>
             <a:endParaRPr lang="en-US"/>
           </a:p>
@@ -5368,7 +5373,7 @@
           <a:p>
             <a:fld id="{5518E2ED-ACDD-48AE-BEAE-F9B835E4D922}" type="datetimeFigureOut">
               <a:rPr lang="en-US" smtClean="0"/>
-              <a:t>8/3/2026</a:t>
+              <a:t>8/4/2026</a:t>
             </a:fld>
             <a:endParaRPr lang="en-US"/>
           </a:p>
@@ -5633,7 +5638,7 @@
           <a:p>
             <a:fld id="{5518E2ED-ACDD-48AE-BEAE-F9B835E4D922}" type="datetimeFigureOut">
               <a:rPr lang="en-US" smtClean="0"/>
-              <a:t>8/3/2026</a:t>
+              <a:t>8/4/2026</a:t>
             </a:fld>
             <a:endParaRPr lang="en-US"/>
           </a:p>
@@ -6045,7 +6050,7 @@
           <a:p>
             <a:fld id="{5518E2ED-ACDD-48AE-BEAE-F9B835E4D922}" type="datetimeFigureOut">
               <a:rPr lang="en-US" smtClean="0"/>
-              <a:t>8/3/2026</a:t>
+              <a:t>8/4/2026</a:t>
             </a:fld>
             <a:endParaRPr lang="en-US"/>
           </a:p>
@@ -6186,7 +6191,7 @@
           <a:p>
             <a:fld id="{5518E2ED-ACDD-48AE-BEAE-F9B835E4D922}" type="datetimeFigureOut">
               <a:rPr lang="en-US" smtClean="0"/>
-              <a:t>8/3/2026</a:t>
+              <a:t>8/4/2026</a:t>
             </a:fld>
             <a:endParaRPr lang="en-US"/>
           </a:p>
@@ -6299,7 +6304,7 @@
           <a:p>
             <a:fld id="{5518E2ED-ACDD-48AE-BEAE-F9B835E4D922}" type="datetimeFigureOut">
               <a:rPr lang="en-US" smtClean="0"/>
-              <a:t>8/3/2026</a:t>
+              <a:t>8/4/2026</a:t>
             </a:fld>
             <a:endParaRPr lang="en-US"/>
           </a:p>
@@ -6610,7 +6615,7 @@
           <a:p>
             <a:fld id="{5518E2ED-ACDD-48AE-BEAE-F9B835E4D922}" type="datetimeFigureOut">
               <a:rPr lang="en-US" smtClean="0"/>
-              <a:t>8/3/2026</a:t>
+              <a:t>8/4/2026</a:t>
             </a:fld>
             <a:endParaRPr lang="en-US"/>
           </a:p>
@@ -6898,7 +6903,7 @@
           <a:p>
             <a:fld id="{5518E2ED-ACDD-48AE-BEAE-F9B835E4D922}" type="datetimeFigureOut">
               <a:rPr lang="en-US" smtClean="0"/>
-              <a:t>8/3/2026</a:t>
+              <a:t>8/4/2026</a:t>
             </a:fld>
             <a:endParaRPr lang="en-US"/>
           </a:p>
@@ -7139,7 +7144,7 @@
           <a:p>
             <a:fld id="{5518E2ED-ACDD-48AE-BEAE-F9B835E4D922}" type="datetimeFigureOut">
               <a:rPr lang="en-US" smtClean="0"/>
-              <a:t>8/3/2026</a:t>
+              <a:t>8/4/2026</a:t>
             </a:fld>
             <a:endParaRPr lang="en-US"/>
           </a:p>
@@ -8485,8 +8490,8 @@
         </p:nvSpPr>
         <p:spPr>
           <a:xfrm>
-            <a:off x="673534" y="412595"/>
-            <a:ext cx="5682661" cy="2611614"/>
+            <a:off x="861794" y="762000"/>
+            <a:ext cx="4436080" cy="1401597"/>
           </a:xfrm>
         </p:spPr>
         <p:txBody>
@@ -8495,8 +8500,9 @@
           </a:bodyPr>
           <a:lstStyle/>
           <a:p>
+            <a:pPr algn="ctr"/>
             <a:r>
-              <a:rPr lang="en-US" sz="6600" dirty="0"/>
+              <a:rPr lang="en-US" sz="4000" dirty="0"/>
               <a:t>A Tri-State Water Bank to Get More Water to the GSL</a:t>
             </a:r>
           </a:p>
@@ -8525,7 +8531,7 @@
         </p:blipFill>
         <p:spPr bwMode="auto">
           <a:xfrm>
-            <a:off x="7082387" y="0"/>
+            <a:off x="6894128" y="73644"/>
             <a:ext cx="4918846" cy="6710711"/>
           </a:xfrm>
           <a:prstGeom prst="rect">
@@ -8562,8 +8568,8 @@
         </p:blipFill>
         <p:spPr>
           <a:xfrm>
-            <a:off x="1765005" y="2752955"/>
-            <a:ext cx="2604479" cy="3614027"/>
+            <a:off x="2223247" y="2634985"/>
+            <a:ext cx="2119343" cy="2940843"/>
           </a:xfrm>
           <a:prstGeom prst="rect">
             <a:avLst/>
@@ -8786,7 +8792,7 @@
         <p:spPr>
           <a:xfrm>
             <a:off x="1045029" y="507160"/>
-            <a:ext cx="2993571" cy="5438730"/>
+            <a:ext cx="3266995" cy="5438730"/>
           </a:xfrm>
         </p:spPr>
         <p:txBody>

--- a/Session Guide/IntroPresentation.pptx
+++ b/Session Guide/IntroPresentation.pptx
@@ -5,13 +5,14 @@
     <p:sldMasterId id="2147483648" r:id="rId1"/>
   </p:sldMasterIdLst>
   <p:notesMasterIdLst>
-    <p:notesMasterId r:id="rId6"/>
+    <p:notesMasterId r:id="rId7"/>
   </p:notesMasterIdLst>
   <p:sldIdLst>
     <p:sldId id="256" r:id="rId2"/>
     <p:sldId id="260" r:id="rId3"/>
     <p:sldId id="262" r:id="rId4"/>
-    <p:sldId id="257" r:id="rId5"/>
+    <p:sldId id="258" r:id="rId5"/>
+    <p:sldId id="263" r:id="rId6"/>
   </p:sldIdLst>
   <p:sldSz cx="12192000" cy="6858000"/>
   <p:notesSz cx="6858000" cy="9144000"/>
@@ -121,7 +122,9 @@
 <file path=ppt/revisionInfo.xml><?xml version="1.0" encoding="utf-8"?>
 <p1510:revInfo xmlns:a="http://schemas.openxmlformats.org/drawingml/2006/main" xmlns:r="http://schemas.openxmlformats.org/officeDocument/2006/relationships" xmlns:p1510="http://schemas.microsoft.com/office/powerpoint/2015/10/main">
   <p1510:revLst>
-    <p1510:client id="{A52F2707-2576-4E9B-8439-987E01D9B64C}" v="50" dt="2026-08-04T05:58:19.818"/>
+    <p1510:client id="{690B3A7B-E81C-46E7-8BEC-E514E51C2AA8}" v="1" dt="2026-08-05T22:58:10.210"/>
+    <p1510:client id="{C41AC06A-C952-4FC7-B486-A623EFA36300}" v="6" dt="2026-08-06T17:28:34.917"/>
+    <p1510:client id="{D389C471-0F27-4572-8BC2-E02D89424FF3}" v="21" dt="2026-08-06T18:03:34.597"/>
   </p1510:revLst>
 </p1510:revInfo>
 </file>
@@ -130,19 +133,19 @@
 <pc:chgInfo xmlns:a="http://schemas.openxmlformats.org/drawingml/2006/main" xmlns:r="http://schemas.openxmlformats.org/officeDocument/2006/relationships" xmlns:ac="http://schemas.microsoft.com/office/drawing/2013/main/command" xmlns:pc="http://schemas.microsoft.com/office/powerpoint/2013/main/command">
   <pc:docChgLst>
     <pc:chgData name="Hadia Akbar" userId="19362115565_tp_box_2" providerId="OAuth2" clId="{FF77DECD-7ECC-48F4-BF82-9D4D4E0BE774}"/>
-    <pc:docChg chg="undo redo custSel addSld delSld modSld sldOrd">
-      <pc:chgData name="Hadia Akbar" userId="19362115565_tp_box_2" providerId="OAuth2" clId="{FF77DECD-7ECC-48F4-BF82-9D4D4E0BE774}" dt="2026-08-04T18:03:23.726" v="1483" actId="14100"/>
+    <pc:docChg chg="undo redo custSel addSld delSld modSld sldOrd delMainMaster">
+      <pc:chgData name="Hadia Akbar" userId="19362115565_tp_box_2" providerId="OAuth2" clId="{FF77DECD-7ECC-48F4-BF82-9D4D4E0BE774}" dt="2026-08-06T18:04:11.900" v="2191" actId="1076"/>
       <pc:docMkLst>
         <pc:docMk/>
       </pc:docMkLst>
-      <pc:sldChg chg="addSp delSp modSp new mod setBg addAnim delDesignElem">
-        <pc:chgData name="Hadia Akbar" userId="19362115565_tp_box_2" providerId="OAuth2" clId="{FF77DECD-7ECC-48F4-BF82-9D4D4E0BE774}" dt="2026-08-04T05:29:38.259" v="407" actId="403"/>
+      <pc:sldChg chg="addSp delSp modSp new mod setBg addAnim modAnim delDesignElem">
+        <pc:chgData name="Hadia Akbar" userId="19362115565_tp_box_2" providerId="OAuth2" clId="{FF77DECD-7ECC-48F4-BF82-9D4D4E0BE774}" dt="2026-08-06T17:26:02.707" v="1889" actId="1076"/>
         <pc:sldMkLst>
           <pc:docMk/>
           <pc:sldMk cId="4246612416" sldId="256"/>
         </pc:sldMkLst>
         <pc:spChg chg="mod">
-          <ac:chgData name="Hadia Akbar" userId="19362115565_tp_box_2" providerId="OAuth2" clId="{FF77DECD-7ECC-48F4-BF82-9D4D4E0BE774}" dt="2026-08-04T05:29:33.063" v="404" actId="26606"/>
+          <ac:chgData name="Hadia Akbar" userId="19362115565_tp_box_2" providerId="OAuth2" clId="{FF77DECD-7ECC-48F4-BF82-9D4D4E0BE774}" dt="2026-08-06T17:26:02.707" v="1889" actId="1076"/>
           <ac:spMkLst>
             <pc:docMk/>
             <pc:sldMk cId="4246612416" sldId="256"/>
@@ -150,15 +153,15 @@
           </ac:spMkLst>
         </pc:spChg>
         <pc:spChg chg="mod">
-          <ac:chgData name="Hadia Akbar" userId="19362115565_tp_box_2" providerId="OAuth2" clId="{FF77DECD-7ECC-48F4-BF82-9D4D4E0BE774}" dt="2026-08-04T05:29:38.259" v="407" actId="403"/>
+          <ac:chgData name="Hadia Akbar" userId="19362115565_tp_box_2" providerId="OAuth2" clId="{FF77DECD-7ECC-48F4-BF82-9D4D4E0BE774}" dt="2026-08-06T17:25:52.923" v="1887" actId="26606"/>
           <ac:spMkLst>
             <pc:docMk/>
             <pc:sldMk cId="4246612416" sldId="256"/>
             <ac:spMk id="3" creationId="{AAFA9286-92DA-528E-C4BD-BD456C809191}"/>
           </ac:spMkLst>
         </pc:spChg>
-        <pc:spChg chg="add">
-          <ac:chgData name="Hadia Akbar" userId="19362115565_tp_box_2" providerId="OAuth2" clId="{FF77DECD-7ECC-48F4-BF82-9D4D4E0BE774}" dt="2026-08-04T05:29:33.063" v="404" actId="26606"/>
+        <pc:spChg chg="add del">
+          <ac:chgData name="Hadia Akbar" userId="19362115565_tp_box_2" providerId="OAuth2" clId="{FF77DECD-7ECC-48F4-BF82-9D4D4E0BE774}" dt="2026-08-06T17:25:35.069" v="1878" actId="26606"/>
           <ac:spMkLst>
             <pc:docMk/>
             <pc:sldMk cId="4246612416" sldId="256"/>
@@ -166,15 +169,7 @@
           </ac:spMkLst>
         </pc:spChg>
         <pc:spChg chg="add del">
-          <ac:chgData name="Hadia Akbar" userId="19362115565_tp_box_2" providerId="OAuth2" clId="{FF77DECD-7ECC-48F4-BF82-9D4D4E0BE774}" dt="2026-08-04T05:23:07.668" v="241"/>
-          <ac:spMkLst>
-            <pc:docMk/>
-            <pc:sldMk cId="4246612416" sldId="256"/>
-            <ac:spMk id="8" creationId="{4522B21E-B2B9-4C72-9A71-C87EFD137480}"/>
-          </ac:spMkLst>
-        </pc:spChg>
-        <pc:spChg chg="add">
-          <ac:chgData name="Hadia Akbar" userId="19362115565_tp_box_2" providerId="OAuth2" clId="{FF77DECD-7ECC-48F4-BF82-9D4D4E0BE774}" dt="2026-08-04T05:29:33.063" v="404" actId="26606"/>
+          <ac:chgData name="Hadia Akbar" userId="19362115565_tp_box_2" providerId="OAuth2" clId="{FF77DECD-7ECC-48F4-BF82-9D4D4E0BE774}" dt="2026-08-06T17:25:35.069" v="1878" actId="26606"/>
           <ac:spMkLst>
             <pc:docMk/>
             <pc:sldMk cId="4246612416" sldId="256"/>
@@ -182,15 +177,7 @@
           </ac:spMkLst>
         </pc:spChg>
         <pc:spChg chg="add del">
-          <ac:chgData name="Hadia Akbar" userId="19362115565_tp_box_2" providerId="OAuth2" clId="{FF77DECD-7ECC-48F4-BF82-9D4D4E0BE774}" dt="2026-08-04T05:23:07.668" v="241"/>
-          <ac:spMkLst>
-            <pc:docMk/>
-            <pc:sldMk cId="4246612416" sldId="256"/>
-            <ac:spMk id="10" creationId="{5EB7D2A2-F448-44D4-938C-DC84CBCB3B1E}"/>
-          </ac:spMkLst>
-        </pc:spChg>
-        <pc:spChg chg="add">
-          <ac:chgData name="Hadia Akbar" userId="19362115565_tp_box_2" providerId="OAuth2" clId="{FF77DECD-7ECC-48F4-BF82-9D4D4E0BE774}" dt="2026-08-04T05:29:33.063" v="404" actId="26606"/>
+          <ac:chgData name="Hadia Akbar" userId="19362115565_tp_box_2" providerId="OAuth2" clId="{FF77DECD-7ECC-48F4-BF82-9D4D4E0BE774}" dt="2026-08-06T17:25:35.069" v="1878" actId="26606"/>
           <ac:spMkLst>
             <pc:docMk/>
             <pc:sldMk cId="4246612416" sldId="256"/>
@@ -198,78 +185,197 @@
           </ac:spMkLst>
         </pc:spChg>
         <pc:spChg chg="add del">
-          <ac:chgData name="Hadia Akbar" userId="19362115565_tp_box_2" providerId="OAuth2" clId="{FF77DECD-7ECC-48F4-BF82-9D4D4E0BE774}" dt="2026-08-04T05:23:07.668" v="241"/>
-          <ac:spMkLst>
-            <pc:docMk/>
-            <pc:sldMk cId="4246612416" sldId="256"/>
-            <ac:spMk id="12" creationId="{871AEA07-1E14-44B4-8E55-64EF049CD66F}"/>
-          </ac:spMkLst>
-        </pc:spChg>
-        <pc:spChg chg="add">
-          <ac:chgData name="Hadia Akbar" userId="19362115565_tp_box_2" providerId="OAuth2" clId="{FF77DECD-7ECC-48F4-BF82-9D4D4E0BE774}" dt="2026-08-04T05:29:33.063" v="404" actId="26606"/>
+          <ac:chgData name="Hadia Akbar" userId="19362115565_tp_box_2" providerId="OAuth2" clId="{FF77DECD-7ECC-48F4-BF82-9D4D4E0BE774}" dt="2026-08-06T17:25:35.069" v="1878" actId="26606"/>
           <ac:spMkLst>
             <pc:docMk/>
             <pc:sldMk cId="4246612416" sldId="256"/>
             <ac:spMk id="16" creationId="{AF2F604E-43BE-4DC3-B983-E071523364F8}"/>
           </ac:spMkLst>
         </pc:spChg>
-        <pc:spChg chg="add">
-          <ac:chgData name="Hadia Akbar" userId="19362115565_tp_box_2" providerId="OAuth2" clId="{FF77DECD-7ECC-48F4-BF82-9D4D4E0BE774}" dt="2026-08-04T05:29:33.063" v="404" actId="26606"/>
+        <pc:spChg chg="add del">
+          <ac:chgData name="Hadia Akbar" userId="19362115565_tp_box_2" providerId="OAuth2" clId="{FF77DECD-7ECC-48F4-BF82-9D4D4E0BE774}" dt="2026-08-06T17:25:52.923" v="1887" actId="26606"/>
           <ac:spMkLst>
             <pc:docMk/>
             <pc:sldMk cId="4246612416" sldId="256"/>
-            <ac:spMk id="18" creationId="{08C9B587-E65E-4B52-B37C-ABEBB6E87928}"/>
+            <ac:spMk id="23" creationId="{A8384FB5-9ADC-4DDC-881B-597D56F5B15D}"/>
           </ac:spMkLst>
         </pc:spChg>
-        <pc:picChg chg="add mod ord">
-          <ac:chgData name="Hadia Akbar" userId="19362115565_tp_box_2" providerId="OAuth2" clId="{FF77DECD-7ECC-48F4-BF82-9D4D4E0BE774}" dt="2026-08-04T05:29:33.063" v="404" actId="26606"/>
+        <pc:spChg chg="add del">
+          <ac:chgData name="Hadia Akbar" userId="19362115565_tp_box_2" providerId="OAuth2" clId="{FF77DECD-7ECC-48F4-BF82-9D4D4E0BE774}" dt="2026-08-06T17:25:52.923" v="1887" actId="26606"/>
+          <ac:spMkLst>
+            <pc:docMk/>
+            <pc:sldMk cId="4246612416" sldId="256"/>
+            <ac:spMk id="25" creationId="{BC05CA36-AD6A-4ABF-9A05-52E5A143D2BB}"/>
+          </ac:spMkLst>
+        </pc:spChg>
+        <pc:spChg chg="add del">
+          <ac:chgData name="Hadia Akbar" userId="19362115565_tp_box_2" providerId="OAuth2" clId="{FF77DECD-7ECC-48F4-BF82-9D4D4E0BE774}" dt="2026-08-06T17:25:52.923" v="1887" actId="26606"/>
+          <ac:spMkLst>
+            <pc:docMk/>
+            <pc:sldMk cId="4246612416" sldId="256"/>
+            <ac:spMk id="27" creationId="{D4331EE8-85A4-4588-8D9E-70E534D477DB}"/>
+          </ac:spMkLst>
+        </pc:spChg>
+        <pc:spChg chg="add del">
+          <ac:chgData name="Hadia Akbar" userId="19362115565_tp_box_2" providerId="OAuth2" clId="{FF77DECD-7ECC-48F4-BF82-9D4D4E0BE774}" dt="2026-08-06T17:25:52.923" v="1887" actId="26606"/>
+          <ac:spMkLst>
+            <pc:docMk/>
+            <pc:sldMk cId="4246612416" sldId="256"/>
+            <ac:spMk id="29" creationId="{49D6C862-61CC-4B46-8080-96583D653BAB}"/>
+          </ac:spMkLst>
+        </pc:spChg>
+        <pc:spChg chg="add del">
+          <ac:chgData name="Hadia Akbar" userId="19362115565_tp_box_2" providerId="OAuth2" clId="{FF77DECD-7ECC-48F4-BF82-9D4D4E0BE774}" dt="2026-08-06T17:25:52.923" v="1886" actId="26606"/>
+          <ac:spMkLst>
+            <pc:docMk/>
+            <pc:sldMk cId="4246612416" sldId="256"/>
+            <ac:spMk id="31" creationId="{E37EECFC-A684-4391-AE85-4CDAF5565F61}"/>
+          </ac:spMkLst>
+        </pc:spChg>
+        <pc:spChg chg="add del">
+          <ac:chgData name="Hadia Akbar" userId="19362115565_tp_box_2" providerId="OAuth2" clId="{FF77DECD-7ECC-48F4-BF82-9D4D4E0BE774}" dt="2026-08-06T17:25:52.569" v="1884" actId="26606"/>
+          <ac:spMkLst>
+            <pc:docMk/>
+            <pc:sldMk cId="4246612416" sldId="256"/>
+            <ac:spMk id="38" creationId="{C3D487F7-9050-4871-B351-34A72ADB296C}"/>
+          </ac:spMkLst>
+        </pc:spChg>
+        <pc:spChg chg="add del">
+          <ac:chgData name="Hadia Akbar" userId="19362115565_tp_box_2" providerId="OAuth2" clId="{FF77DECD-7ECC-48F4-BF82-9D4D4E0BE774}" dt="2026-08-06T17:25:52.569" v="1884" actId="26606"/>
+          <ac:spMkLst>
+            <pc:docMk/>
+            <pc:sldMk cId="4246612416" sldId="256"/>
+            <ac:spMk id="40" creationId="{F43C27DD-EF6A-4C48-9669-C2970E71A814}"/>
+          </ac:spMkLst>
+        </pc:spChg>
+        <pc:spChg chg="add del">
+          <ac:chgData name="Hadia Akbar" userId="19362115565_tp_box_2" providerId="OAuth2" clId="{FF77DECD-7ECC-48F4-BF82-9D4D4E0BE774}" dt="2026-08-06T17:25:52.569" v="1884" actId="26606"/>
+          <ac:spMkLst>
+            <pc:docMk/>
+            <pc:sldMk cId="4246612416" sldId="256"/>
+            <ac:spMk id="42" creationId="{C84384FE-1C88-4CAA-8FB8-2313A3AE734D}"/>
+          </ac:spMkLst>
+        </pc:spChg>
+        <pc:spChg chg="add del">
+          <ac:chgData name="Hadia Akbar" userId="19362115565_tp_box_2" providerId="OAuth2" clId="{FF77DECD-7ECC-48F4-BF82-9D4D4E0BE774}" dt="2026-08-06T17:25:52.569" v="1884" actId="26606"/>
+          <ac:spMkLst>
+            <pc:docMk/>
+            <pc:sldMk cId="4246612416" sldId="256"/>
+            <ac:spMk id="44" creationId="{87B6A113-58CD-406C-BCE4-6E1F1F2BE696}"/>
+          </ac:spMkLst>
+        </pc:spChg>
+        <pc:spChg chg="add del">
+          <ac:chgData name="Hadia Akbar" userId="19362115565_tp_box_2" providerId="OAuth2" clId="{FF77DECD-7ECC-48F4-BF82-9D4D4E0BE774}" dt="2026-08-06T17:25:52.569" v="1884" actId="26606"/>
+          <ac:spMkLst>
+            <pc:docMk/>
+            <pc:sldMk cId="4246612416" sldId="256"/>
+            <ac:spMk id="46" creationId="{05A1AA86-B7E6-4C02-AA34-F1A25CD4CCBD}"/>
+          </ac:spMkLst>
+        </pc:spChg>
+        <pc:spChg chg="add del">
+          <ac:chgData name="Hadia Akbar" userId="19362115565_tp_box_2" providerId="OAuth2" clId="{FF77DECD-7ECC-48F4-BF82-9D4D4E0BE774}" dt="2026-08-06T17:25:52.923" v="1886" actId="26606"/>
+          <ac:spMkLst>
+            <pc:docMk/>
+            <pc:sldMk cId="4246612416" sldId="256"/>
+            <ac:spMk id="48" creationId="{06DA9DF9-31F7-4056-B42E-878CC92417B8}"/>
+          </ac:spMkLst>
+        </pc:spChg>
+        <pc:spChg chg="add">
+          <ac:chgData name="Hadia Akbar" userId="19362115565_tp_box_2" providerId="OAuth2" clId="{FF77DECD-7ECC-48F4-BF82-9D4D4E0BE774}" dt="2026-08-06T17:25:52.923" v="1887" actId="26606"/>
+          <ac:spMkLst>
+            <pc:docMk/>
+            <pc:sldMk cId="4246612416" sldId="256"/>
+            <ac:spMk id="50" creationId="{A8384FB5-9ADC-4DDC-881B-597D56F5B15D}"/>
+          </ac:spMkLst>
+        </pc:spChg>
+        <pc:spChg chg="add">
+          <ac:chgData name="Hadia Akbar" userId="19362115565_tp_box_2" providerId="OAuth2" clId="{FF77DECD-7ECC-48F4-BF82-9D4D4E0BE774}" dt="2026-08-06T17:25:52.923" v="1887" actId="26606"/>
+          <ac:spMkLst>
+            <pc:docMk/>
+            <pc:sldMk cId="4246612416" sldId="256"/>
+            <ac:spMk id="51" creationId="{BC05CA36-AD6A-4ABF-9A05-52E5A143D2BB}"/>
+          </ac:spMkLst>
+        </pc:spChg>
+        <pc:spChg chg="add">
+          <ac:chgData name="Hadia Akbar" userId="19362115565_tp_box_2" providerId="OAuth2" clId="{FF77DECD-7ECC-48F4-BF82-9D4D4E0BE774}" dt="2026-08-06T17:25:52.923" v="1887" actId="26606"/>
+          <ac:spMkLst>
+            <pc:docMk/>
+            <pc:sldMk cId="4246612416" sldId="256"/>
+            <ac:spMk id="52" creationId="{D4331EE8-85A4-4588-8D9E-70E534D477DB}"/>
+          </ac:spMkLst>
+        </pc:spChg>
+        <pc:spChg chg="add">
+          <ac:chgData name="Hadia Akbar" userId="19362115565_tp_box_2" providerId="OAuth2" clId="{FF77DECD-7ECC-48F4-BF82-9D4D4E0BE774}" dt="2026-08-06T17:25:52.923" v="1887" actId="26606"/>
+          <ac:spMkLst>
+            <pc:docMk/>
+            <pc:sldMk cId="4246612416" sldId="256"/>
+            <ac:spMk id="53" creationId="{49D6C862-61CC-4B46-8080-96583D653BAB}"/>
+          </ac:spMkLst>
+        </pc:spChg>
+        <pc:spChg chg="add">
+          <ac:chgData name="Hadia Akbar" userId="19362115565_tp_box_2" providerId="OAuth2" clId="{FF77DECD-7ECC-48F4-BF82-9D4D4E0BE774}" dt="2026-08-06T17:25:52.923" v="1887" actId="26606"/>
+          <ac:spMkLst>
+            <pc:docMk/>
+            <pc:sldMk cId="4246612416" sldId="256"/>
+            <ac:spMk id="54" creationId="{E37EECFC-A684-4391-AE85-4CDAF5565F61}"/>
+          </ac:spMkLst>
+        </pc:spChg>
+        <pc:picChg chg="add del mod ord">
+          <ac:chgData name="Hadia Akbar" userId="19362115565_tp_box_2" providerId="OAuth2" clId="{FF77DECD-7ECC-48F4-BF82-9D4D4E0BE774}" dt="2026-08-06T17:24:46.665" v="1743" actId="478"/>
           <ac:picMkLst>
             <pc:docMk/>
             <pc:sldMk cId="4246612416" sldId="256"/>
             <ac:picMk id="5" creationId="{04C88557-323E-8174-ED33-F9A1E595A5E0}"/>
           </ac:picMkLst>
         </pc:picChg>
-        <pc:cxnChg chg="add del">
-          <ac:chgData name="Hadia Akbar" userId="19362115565_tp_box_2" providerId="OAuth2" clId="{FF77DECD-7ECC-48F4-BF82-9D4D4E0BE774}" dt="2026-08-04T05:23:07.668" v="241"/>
-          <ac:cxnSpMkLst>
+        <pc:picChg chg="add mod">
+          <ac:chgData name="Hadia Akbar" userId="19362115565_tp_box_2" providerId="OAuth2" clId="{FF77DECD-7ECC-48F4-BF82-9D4D4E0BE774}" dt="2026-08-06T17:25:52.923" v="1886" actId="26606"/>
+          <ac:picMkLst>
             <pc:docMk/>
             <pc:sldMk cId="4246612416" sldId="256"/>
-            <ac:cxnSpMk id="14" creationId="{F7C8EA93-3210-4C62-99E9-153C275E3A87}"/>
-          </ac:cxnSpMkLst>
-        </pc:cxnChg>
+            <ac:picMk id="6" creationId="{DB227495-A140-F9B9-9EB3-2A6E168FED00}"/>
+          </ac:picMkLst>
+        </pc:picChg>
       </pc:sldChg>
-      <pc:sldChg chg="addSp delSp modSp new mod ord setBg">
-        <pc:chgData name="Hadia Akbar" userId="19362115565_tp_box_2" providerId="OAuth2" clId="{FF77DECD-7ECC-48F4-BF82-9D4D4E0BE774}" dt="2026-08-04T05:31:03.977" v="417" actId="14100"/>
+      <pc:sldChg chg="addSp delSp modSp add del mod">
+        <pc:chgData name="Hadia Akbar" userId="19362115565_tp_box_2" providerId="OAuth2" clId="{FF77DECD-7ECC-48F4-BF82-9D4D4E0BE774}" dt="2026-08-06T18:03:26.490" v="2170" actId="47"/>
+        <pc:sldMkLst>
+          <pc:docMk/>
+          <pc:sldMk cId="235461169" sldId="257"/>
+        </pc:sldMkLst>
+        <pc:graphicFrameChg chg="mod">
+          <ac:chgData name="Hadia Akbar" userId="19362115565_tp_box_2" providerId="OAuth2" clId="{FF77DECD-7ECC-48F4-BF82-9D4D4E0BE774}" dt="2026-08-06T17:53:47.053" v="2062"/>
+          <ac:graphicFrameMkLst>
+            <pc:docMk/>
+            <pc:sldMk cId="235461169" sldId="257"/>
+            <ac:graphicFrameMk id="6" creationId="{C011B49A-A7CA-8A64-8EE8-705D843C87C8}"/>
+          </ac:graphicFrameMkLst>
+        </pc:graphicFrameChg>
+        <pc:picChg chg="add del">
+          <ac:chgData name="Hadia Akbar" userId="19362115565_tp_box_2" providerId="OAuth2" clId="{FF77DECD-7ECC-48F4-BF82-9D4D4E0BE774}" dt="2026-08-06T17:53:37.069" v="2061" actId="478"/>
+          <ac:picMkLst>
+            <pc:docMk/>
+            <pc:sldMk cId="235461169" sldId="257"/>
+            <ac:picMk id="4" creationId="{DE05265B-DD07-4A86-3EF2-01605D6C02D4}"/>
+          </ac:picMkLst>
+        </pc:picChg>
+        <pc:picChg chg="add del">
+          <ac:chgData name="Hadia Akbar" userId="19362115565_tp_box_2" providerId="OAuth2" clId="{FF77DECD-7ECC-48F4-BF82-9D4D4E0BE774}" dt="2026-08-06T17:53:36.846" v="2060" actId="478"/>
+          <ac:picMkLst>
+            <pc:docMk/>
+            <pc:sldMk cId="235461169" sldId="257"/>
+            <ac:picMk id="10" creationId="{66E918FE-E0FB-7551-5100-FF83D57E226D}"/>
+          </ac:picMkLst>
+        </pc:picChg>
+      </pc:sldChg>
+      <pc:sldChg chg="addSp delSp modSp new del mod ord setBg">
+        <pc:chgData name="Hadia Akbar" userId="19362115565_tp_box_2" providerId="OAuth2" clId="{FF77DECD-7ECC-48F4-BF82-9D4D4E0BE774}" dt="2026-08-06T17:52:28.573" v="2045" actId="47"/>
         <pc:sldMkLst>
           <pc:docMk/>
           <pc:sldMk cId="890402765" sldId="257"/>
         </pc:sldMkLst>
-        <pc:spChg chg="del">
-          <ac:chgData name="Hadia Akbar" userId="19362115565_tp_box_2" providerId="OAuth2" clId="{FF77DECD-7ECC-48F4-BF82-9D4D4E0BE774}" dt="2026-08-04T05:18:19.118" v="150" actId="478"/>
-          <ac:spMkLst>
-            <pc:docMk/>
-            <pc:sldMk cId="890402765" sldId="257"/>
-            <ac:spMk id="2" creationId="{E382A34E-1140-6408-AF9D-39059F1B61F0}"/>
-          </ac:spMkLst>
-        </pc:spChg>
-        <pc:spChg chg="del">
-          <ac:chgData name="Hadia Akbar" userId="19362115565_tp_box_2" providerId="OAuth2" clId="{FF77DECD-7ECC-48F4-BF82-9D4D4E0BE774}" dt="2026-08-04T05:18:22.445" v="151" actId="478"/>
-          <ac:spMkLst>
-            <pc:docMk/>
-            <pc:sldMk cId="890402765" sldId="257"/>
-            <ac:spMk id="3" creationId="{CD099AC8-AEB9-223A-D0DD-5FF51087F95E}"/>
-          </ac:spMkLst>
-        </pc:spChg>
-        <pc:picChg chg="add del mod">
-          <ac:chgData name="Hadia Akbar" userId="19362115565_tp_box_2" providerId="OAuth2" clId="{FF77DECD-7ECC-48F4-BF82-9D4D4E0BE774}" dt="2026-08-04T04:23:11.928" v="136" actId="21"/>
-          <ac:picMkLst>
-            <pc:docMk/>
-            <pc:sldMk cId="890402765" sldId="257"/>
-            <ac:picMk id="5" creationId="{65B28871-3FFB-0013-8997-C0CE0DC3EAF9}"/>
-          </ac:picMkLst>
-        </pc:picChg>
         <pc:picChg chg="add mod">
-          <ac:chgData name="Hadia Akbar" userId="19362115565_tp_box_2" providerId="OAuth2" clId="{FF77DECD-7ECC-48F4-BF82-9D4D4E0BE774}" dt="2026-08-04T05:31:03.977" v="417" actId="14100"/>
+          <ac:chgData name="Hadia Akbar" userId="19362115565_tp_box_2" providerId="OAuth2" clId="{FF77DECD-7ECC-48F4-BF82-9D4D4E0BE774}" dt="2026-08-05T22:58:40.700" v="1715" actId="14100"/>
           <ac:picMkLst>
             <pc:docMk/>
             <pc:sldMk cId="890402765" sldId="257"/>
@@ -277,572 +383,77 @@
           </ac:picMkLst>
         </pc:picChg>
       </pc:sldChg>
-      <pc:sldChg chg="addSp delSp modSp new del mod ord setBg addAnim delAnim">
-        <pc:chgData name="Hadia Akbar" userId="19362115565_tp_box_2" providerId="OAuth2" clId="{FF77DECD-7ECC-48F4-BF82-9D4D4E0BE774}" dt="2026-08-04T05:21:35.404" v="219" actId="47"/>
+      <pc:sldChg chg="addSp delSp modSp add mod">
+        <pc:chgData name="Hadia Akbar" userId="19362115565_tp_box_2" providerId="OAuth2" clId="{FF77DECD-7ECC-48F4-BF82-9D4D4E0BE774}" dt="2026-08-06T18:03:40.726" v="2190" actId="20577"/>
         <pc:sldMkLst>
           <pc:docMk/>
-          <pc:sldMk cId="1027190588" sldId="258"/>
+          <pc:sldMk cId="3397881947" sldId="258"/>
         </pc:sldMkLst>
-        <pc:spChg chg="del mod ord">
-          <ac:chgData name="Hadia Akbar" userId="19362115565_tp_box_2" providerId="OAuth2" clId="{FF77DECD-7ECC-48F4-BF82-9D4D4E0BE774}" dt="2026-08-04T05:21:30.250" v="218" actId="478"/>
+        <pc:spChg chg="add mod">
+          <ac:chgData name="Hadia Akbar" userId="19362115565_tp_box_2" providerId="OAuth2" clId="{FF77DECD-7ECC-48F4-BF82-9D4D4E0BE774}" dt="2026-08-06T17:56:02.933" v="2156" actId="20577"/>
           <ac:spMkLst>
             <pc:docMk/>
-            <pc:sldMk cId="1027190588" sldId="258"/>
-            <ac:spMk id="2" creationId="{46B31A1B-76E3-C845-987A-24C332E643EB}"/>
+            <pc:sldMk cId="3397881947" sldId="258"/>
+            <ac:spMk id="8" creationId="{522E30CC-C1C9-3E29-580D-AD3C7B2F6C14}"/>
           </ac:spMkLst>
         </pc:spChg>
-        <pc:spChg chg="del">
-          <ac:chgData name="Hadia Akbar" userId="19362115565_tp_box_2" providerId="OAuth2" clId="{FF77DECD-7ECC-48F4-BF82-9D4D4E0BE774}" dt="2026-08-04T04:23:34.392" v="141" actId="478"/>
-          <ac:spMkLst>
+        <pc:graphicFrameChg chg="mod modGraphic">
+          <ac:chgData name="Hadia Akbar" userId="19362115565_tp_box_2" providerId="OAuth2" clId="{FF77DECD-7ECC-48F4-BF82-9D4D4E0BE774}" dt="2026-08-06T18:03:40.726" v="2190" actId="20577"/>
+          <ac:graphicFrameMkLst>
             <pc:docMk/>
-            <pc:sldMk cId="1027190588" sldId="258"/>
-            <ac:spMk id="3" creationId="{9F189D32-24C8-542A-79D5-E1F217AE3A59}"/>
-          </ac:spMkLst>
-        </pc:spChg>
-        <pc:spChg chg="add del">
-          <ac:chgData name="Hadia Akbar" userId="19362115565_tp_box_2" providerId="OAuth2" clId="{FF77DECD-7ECC-48F4-BF82-9D4D4E0BE774}" dt="2026-08-04T04:23:43.147" v="143" actId="26606"/>
-          <ac:spMkLst>
+            <pc:sldMk cId="3397881947" sldId="258"/>
+            <ac:graphicFrameMk id="2" creationId="{64291571-4CDA-E81A-0F83-C214C34B52A1}"/>
+          </ac:graphicFrameMkLst>
+        </pc:graphicFrameChg>
+        <pc:graphicFrameChg chg="mod modGraphic">
+          <ac:chgData name="Hadia Akbar" userId="19362115565_tp_box_2" providerId="OAuth2" clId="{FF77DECD-7ECC-48F4-BF82-9D4D4E0BE774}" dt="2026-08-06T17:55:52.711" v="2152" actId="1076"/>
+          <ac:graphicFrameMkLst>
             <pc:docMk/>
-            <pc:sldMk cId="1027190588" sldId="258"/>
-            <ac:spMk id="12" creationId="{AE47195D-EC06-4298-8805-0F0D65997676}"/>
-          </ac:spMkLst>
-        </pc:spChg>
-        <pc:spChg chg="add del">
-          <ac:chgData name="Hadia Akbar" userId="19362115565_tp_box_2" providerId="OAuth2" clId="{FF77DECD-7ECC-48F4-BF82-9D4D4E0BE774}" dt="2026-08-04T04:23:43.147" v="143" actId="26606"/>
-          <ac:spMkLst>
-            <pc:docMk/>
-            <pc:sldMk cId="1027190588" sldId="258"/>
-            <ac:spMk id="14" creationId="{99413ED5-9ED4-4772-BCE4-2BCAE6B12E35}"/>
-          </ac:spMkLst>
-        </pc:spChg>
-        <pc:spChg chg="add del">
-          <ac:chgData name="Hadia Akbar" userId="19362115565_tp_box_2" providerId="OAuth2" clId="{FF77DECD-7ECC-48F4-BF82-9D4D4E0BE774}" dt="2026-08-04T04:23:43.147" v="143" actId="26606"/>
-          <ac:spMkLst>
-            <pc:docMk/>
-            <pc:sldMk cId="1027190588" sldId="258"/>
-            <ac:spMk id="16" creationId="{04357C93-F0CB-4A1C-8F77-4E9063789819}"/>
-          </ac:spMkLst>
-        </pc:spChg>
-        <pc:spChg chg="add del">
-          <ac:chgData name="Hadia Akbar" userId="19362115565_tp_box_2" providerId="OAuth2" clId="{FF77DECD-7ECC-48F4-BF82-9D4D4E0BE774}" dt="2026-08-04T04:23:43.147" v="143" actId="26606"/>
-          <ac:spMkLst>
-            <pc:docMk/>
-            <pc:sldMk cId="1027190588" sldId="258"/>
-            <ac:spMk id="18" creationId="{90F533E9-6690-41A8-A372-4C6C622D028D}"/>
-          </ac:spMkLst>
-        </pc:spChg>
-        <pc:spChg chg="add del">
-          <ac:chgData name="Hadia Akbar" userId="19362115565_tp_box_2" providerId="OAuth2" clId="{FF77DECD-7ECC-48F4-BF82-9D4D4E0BE774}" dt="2026-08-04T04:23:44.807" v="145" actId="26606"/>
-          <ac:spMkLst>
-            <pc:docMk/>
-            <pc:sldMk cId="1027190588" sldId="258"/>
-            <ac:spMk id="20" creationId="{2151139A-886F-4B97-8815-729AD3831BBD}"/>
-          </ac:spMkLst>
-        </pc:spChg>
-        <pc:spChg chg="add del">
-          <ac:chgData name="Hadia Akbar" userId="19362115565_tp_box_2" providerId="OAuth2" clId="{FF77DECD-7ECC-48F4-BF82-9D4D4E0BE774}" dt="2026-08-04T04:23:44.807" v="145" actId="26606"/>
-          <ac:spMkLst>
-            <pc:docMk/>
-            <pc:sldMk cId="1027190588" sldId="258"/>
-            <ac:spMk id="21" creationId="{5428AC11-BFDF-42EF-80FF-717BBF909067}"/>
-          </ac:spMkLst>
-        </pc:spChg>
-        <pc:spChg chg="add del">
-          <ac:chgData name="Hadia Akbar" userId="19362115565_tp_box_2" providerId="OAuth2" clId="{FF77DECD-7ECC-48F4-BF82-9D4D4E0BE774}" dt="2026-08-04T04:23:44.807" v="145" actId="26606"/>
-          <ac:spMkLst>
-            <pc:docMk/>
-            <pc:sldMk cId="1027190588" sldId="258"/>
-            <ac:spMk id="22" creationId="{2CC56AF6-38E4-490B-8E2B-1A1037B4EDD4}"/>
-          </ac:spMkLst>
-        </pc:spChg>
-        <pc:spChg chg="add del">
-          <ac:chgData name="Hadia Akbar" userId="19362115565_tp_box_2" providerId="OAuth2" clId="{FF77DECD-7ECC-48F4-BF82-9D4D4E0BE774}" dt="2026-08-04T04:23:44.807" v="145" actId="26606"/>
-          <ac:spMkLst>
-            <pc:docMk/>
-            <pc:sldMk cId="1027190588" sldId="258"/>
-            <ac:spMk id="23" creationId="{2339A6F5-AD6A-4D80-8AD9-6290D13AC49F}"/>
-          </ac:spMkLst>
-        </pc:spChg>
-        <pc:spChg chg="add">
-          <ac:chgData name="Hadia Akbar" userId="19362115565_tp_box_2" providerId="OAuth2" clId="{FF77DECD-7ECC-48F4-BF82-9D4D4E0BE774}" dt="2026-08-04T04:23:44.819" v="146" actId="26606"/>
-          <ac:spMkLst>
-            <pc:docMk/>
-            <pc:sldMk cId="1027190588" sldId="258"/>
-            <ac:spMk id="25" creationId="{1D50F262-343C-4101-AB3C-9DA1072F7305}"/>
-          </ac:spMkLst>
-        </pc:spChg>
-        <pc:spChg chg="add">
-          <ac:chgData name="Hadia Akbar" userId="19362115565_tp_box_2" providerId="OAuth2" clId="{FF77DECD-7ECC-48F4-BF82-9D4D4E0BE774}" dt="2026-08-04T04:23:44.819" v="146" actId="26606"/>
-          <ac:spMkLst>
-            <pc:docMk/>
-            <pc:sldMk cId="1027190588" sldId="258"/>
-            <ac:spMk id="26" creationId="{6A0924B3-0260-445E-AFD7-9533C0D1B3C9}"/>
-          </ac:spMkLst>
-        </pc:spChg>
-        <pc:spChg chg="add">
-          <ac:chgData name="Hadia Akbar" userId="19362115565_tp_box_2" providerId="OAuth2" clId="{FF77DECD-7ECC-48F4-BF82-9D4D4E0BE774}" dt="2026-08-04T04:23:44.819" v="146" actId="26606"/>
-          <ac:spMkLst>
-            <pc:docMk/>
-            <pc:sldMk cId="1027190588" sldId="258"/>
-            <ac:spMk id="27" creationId="{7C34E8CB-B972-4A94-8469-315C10C2AA93}"/>
-          </ac:spMkLst>
-        </pc:spChg>
-        <pc:spChg chg="add">
-          <ac:chgData name="Hadia Akbar" userId="19362115565_tp_box_2" providerId="OAuth2" clId="{FF77DECD-7ECC-48F4-BF82-9D4D4E0BE774}" dt="2026-08-04T04:23:44.819" v="146" actId="26606"/>
-          <ac:spMkLst>
-            <pc:docMk/>
-            <pc:sldMk cId="1027190588" sldId="258"/>
-            <ac:spMk id="28" creationId="{114A821F-8663-46BA-8CC0-D4C44F639F3A}"/>
-          </ac:spMkLst>
-        </pc:spChg>
-        <pc:spChg chg="add">
-          <ac:chgData name="Hadia Akbar" userId="19362115565_tp_box_2" providerId="OAuth2" clId="{FF77DECD-7ECC-48F4-BF82-9D4D4E0BE774}" dt="2026-08-04T04:23:44.819" v="146" actId="26606"/>
-          <ac:spMkLst>
-            <pc:docMk/>
-            <pc:sldMk cId="1027190588" sldId="258"/>
-            <ac:spMk id="29" creationId="{67EF550F-47CE-4FB2-9DAC-12AD835C833D}"/>
-          </ac:spMkLst>
-        </pc:spChg>
-        <pc:picChg chg="add mod ord">
-          <ac:chgData name="Hadia Akbar" userId="19362115565_tp_box_2" providerId="OAuth2" clId="{FF77DECD-7ECC-48F4-BF82-9D4D4E0BE774}" dt="2026-08-04T04:23:44.819" v="146" actId="26606"/>
+            <pc:sldMk cId="3397881947" sldId="258"/>
+            <ac:graphicFrameMk id="4" creationId="{D3FC7B2A-B870-FA58-8FAD-CE5871DD6A60}"/>
+          </ac:graphicFrameMkLst>
+        </pc:graphicFrameChg>
+        <pc:picChg chg="add del">
+          <ac:chgData name="Hadia Akbar" userId="19362115565_tp_box_2" providerId="OAuth2" clId="{FF77DECD-7ECC-48F4-BF82-9D4D4E0BE774}" dt="2026-08-06T17:53:03.779" v="2047" actId="22"/>
           <ac:picMkLst>
             <pc:docMk/>
-            <pc:sldMk cId="1027190588" sldId="258"/>
-            <ac:picMk id="5" creationId="{D3B59B8C-17AB-89E8-0B00-E82442A63747}"/>
-          </ac:picMkLst>
-        </pc:picChg>
-        <pc:picChg chg="add mod">
-          <ac:chgData name="Hadia Akbar" userId="19362115565_tp_box_2" providerId="OAuth2" clId="{FF77DECD-7ECC-48F4-BF82-9D4D4E0BE774}" dt="2026-08-04T04:23:44.819" v="146" actId="26606"/>
-          <ac:picMkLst>
-            <pc:docMk/>
-            <pc:sldMk cId="1027190588" sldId="258"/>
-            <ac:picMk id="7" creationId="{89787D0B-FC8F-22D7-10CE-8CA6A0071C6F}"/>
+            <pc:sldMk cId="3397881947" sldId="258"/>
+            <ac:picMk id="6" creationId="{0BD05A0F-E136-6927-2665-F65D0A5FD35B}"/>
           </ac:picMkLst>
         </pc:picChg>
       </pc:sldChg>
-      <pc:sldChg chg="delSp modSp add del mod setBg delDesignElem">
-        <pc:chgData name="Hadia Akbar" userId="19362115565_tp_box_2" providerId="OAuth2" clId="{FF77DECD-7ECC-48F4-BF82-9D4D4E0BE774}" dt="2026-08-04T05:31:28.275" v="419" actId="47"/>
-        <pc:sldMkLst>
-          <pc:docMk/>
-          <pc:sldMk cId="235461169" sldId="259"/>
-        </pc:sldMkLst>
-        <pc:spChg chg="mod">
-          <ac:chgData name="Hadia Akbar" userId="19362115565_tp_box_2" providerId="OAuth2" clId="{FF77DECD-7ECC-48F4-BF82-9D4D4E0BE774}" dt="2026-08-04T05:31:17.210" v="418" actId="1076"/>
-          <ac:spMkLst>
-            <pc:docMk/>
-            <pc:sldMk cId="235461169" sldId="259"/>
-            <ac:spMk id="3" creationId="{48F7F7CA-C138-7ECE-6303-ADEDF3084478}"/>
-          </ac:spMkLst>
-        </pc:spChg>
-        <pc:spChg chg="del">
-          <ac:chgData name="Hadia Akbar" userId="19362115565_tp_box_2" providerId="OAuth2" clId="{FF77DECD-7ECC-48F4-BF82-9D4D4E0BE774}" dt="2026-08-04T04:22:20.929" v="119"/>
-          <ac:spMkLst>
-            <pc:docMk/>
-            <pc:sldMk cId="235461169" sldId="259"/>
-            <ac:spMk id="35" creationId="{81E1224E-6618-482E-BE87-321A7FC1CDE8}"/>
-          </ac:spMkLst>
-        </pc:spChg>
-        <pc:spChg chg="del">
-          <ac:chgData name="Hadia Akbar" userId="19362115565_tp_box_2" providerId="OAuth2" clId="{FF77DECD-7ECC-48F4-BF82-9D4D4E0BE774}" dt="2026-08-04T04:22:20.929" v="119"/>
-          <ac:spMkLst>
-            <pc:docMk/>
-            <pc:sldMk cId="235461169" sldId="259"/>
-            <ac:spMk id="36" creationId="{066346BE-FDB4-4772-A696-0719490ABD64}"/>
-          </ac:spMkLst>
-        </pc:spChg>
-        <pc:spChg chg="del">
-          <ac:chgData name="Hadia Akbar" userId="19362115565_tp_box_2" providerId="OAuth2" clId="{FF77DECD-7ECC-48F4-BF82-9D4D4E0BE774}" dt="2026-08-04T04:22:20.929" v="119"/>
-          <ac:spMkLst>
-            <pc:docMk/>
-            <pc:sldMk cId="235461169" sldId="259"/>
-            <ac:spMk id="37" creationId="{FB92FFCE-0C90-454E-AA25-D4EE9A6C39C5}"/>
-          </ac:spMkLst>
-        </pc:spChg>
-        <pc:graphicFrameChg chg="modGraphic">
-          <ac:chgData name="Hadia Akbar" userId="19362115565_tp_box_2" providerId="OAuth2" clId="{FF77DECD-7ECC-48F4-BF82-9D4D4E0BE774}" dt="2026-08-04T04:23:02.331" v="133" actId="20577"/>
-          <ac:graphicFrameMkLst>
-            <pc:docMk/>
-            <pc:sldMk cId="235461169" sldId="259"/>
-            <ac:graphicFrameMk id="6" creationId="{C011B49A-A7CA-8A64-8EE8-705D843C87C8}"/>
-          </ac:graphicFrameMkLst>
-        </pc:graphicFrameChg>
-        <pc:picChg chg="del">
-          <ac:chgData name="Hadia Akbar" userId="19362115565_tp_box_2" providerId="OAuth2" clId="{FF77DECD-7ECC-48F4-BF82-9D4D4E0BE774}" dt="2026-08-04T04:22:24.436" v="122" actId="478"/>
-          <ac:picMkLst>
-            <pc:docMk/>
-            <pc:sldMk cId="235461169" sldId="259"/>
-            <ac:picMk id="4" creationId="{DE05265B-DD07-4A86-3EF2-01605D6C02D4}"/>
-          </ac:picMkLst>
-        </pc:picChg>
-        <pc:picChg chg="del">
-          <ac:chgData name="Hadia Akbar" userId="19362115565_tp_box_2" providerId="OAuth2" clId="{FF77DECD-7ECC-48F4-BF82-9D4D4E0BE774}" dt="2026-08-04T04:22:25.127" v="123" actId="478"/>
-          <ac:picMkLst>
-            <pc:docMk/>
-            <pc:sldMk cId="235461169" sldId="259"/>
-            <ac:picMk id="10" creationId="{66E918FE-E0FB-7551-5100-FF83D57E226D}"/>
-          </ac:picMkLst>
-        </pc:picChg>
-      </pc:sldChg>
-      <pc:sldChg chg="addSp delSp modSp new mod setBg addAnim delAnim delDesignElem">
-        <pc:chgData name="Hadia Akbar" userId="19362115565_tp_box_2" providerId="OAuth2" clId="{FF77DECD-7ECC-48F4-BF82-9D4D4E0BE774}" dt="2026-08-04T17:55:09.195" v="1482" actId="1076"/>
+      <pc:sldChg chg="addSp delSp modSp new mod ord setBg addAnim delAnim delDesignElem">
+        <pc:chgData name="Hadia Akbar" userId="19362115565_tp_box_2" providerId="OAuth2" clId="{FF77DECD-7ECC-48F4-BF82-9D4D4E0BE774}" dt="2026-08-06T17:43:26.877" v="2042"/>
         <pc:sldMkLst>
           <pc:docMk/>
           <pc:sldMk cId="1480586688" sldId="260"/>
         </pc:sldMkLst>
         <pc:spChg chg="mod ord">
-          <ac:chgData name="Hadia Akbar" userId="19362115565_tp_box_2" providerId="OAuth2" clId="{FF77DECD-7ECC-48F4-BF82-9D4D4E0BE774}" dt="2026-08-04T17:55:05.463" v="1480" actId="1076"/>
+          <ac:chgData name="Hadia Akbar" userId="19362115565_tp_box_2" providerId="OAuth2" clId="{FF77DECD-7ECC-48F4-BF82-9D4D4E0BE774}" dt="2026-08-06T17:23:17.051" v="1732" actId="1076"/>
           <ac:spMkLst>
             <pc:docMk/>
             <pc:sldMk cId="1480586688" sldId="260"/>
             <ac:spMk id="2" creationId="{81F1C4B3-9A9B-ACA7-FD33-EA866B5A34CE}"/>
           </ac:spMkLst>
         </pc:spChg>
-        <pc:spChg chg="del">
-          <ac:chgData name="Hadia Akbar" userId="19362115565_tp_box_2" providerId="OAuth2" clId="{FF77DECD-7ECC-48F4-BF82-9D4D4E0BE774}" dt="2026-08-04T05:19:20.873" v="184" actId="478"/>
-          <ac:spMkLst>
-            <pc:docMk/>
-            <pc:sldMk cId="1480586688" sldId="260"/>
-            <ac:spMk id="3" creationId="{FED44AE2-E364-8CA6-A193-42AD0560DF38}"/>
-          </ac:spMkLst>
-        </pc:spChg>
-        <pc:spChg chg="add del">
-          <ac:chgData name="Hadia Akbar" userId="19362115565_tp_box_2" providerId="OAuth2" clId="{FF77DECD-7ECC-48F4-BF82-9D4D4E0BE774}" dt="2026-08-04T05:20:15.758" v="195" actId="26606"/>
-          <ac:spMkLst>
-            <pc:docMk/>
-            <pc:sldMk cId="1480586688" sldId="260"/>
-            <ac:spMk id="11" creationId="{521C4EA8-6B83-4338-913D-D75D3C4F34D6}"/>
-          </ac:spMkLst>
-        </pc:spChg>
-        <pc:spChg chg="add del">
-          <ac:chgData name="Hadia Akbar" userId="19362115565_tp_box_2" providerId="OAuth2" clId="{FF77DECD-7ECC-48F4-BF82-9D4D4E0BE774}" dt="2026-08-04T05:20:15.758" v="195" actId="26606"/>
-          <ac:spMkLst>
-            <pc:docMk/>
-            <pc:sldMk cId="1480586688" sldId="260"/>
-            <ac:spMk id="17" creationId="{04357C93-F0CB-4A1C-8F77-4E9063789819}"/>
-          </ac:spMkLst>
-        </pc:spChg>
-        <pc:spChg chg="add del">
-          <ac:chgData name="Hadia Akbar" userId="19362115565_tp_box_2" providerId="OAuth2" clId="{FF77DECD-7ECC-48F4-BF82-9D4D4E0BE774}" dt="2026-08-04T05:20:31.398" v="200" actId="26606"/>
-          <ac:spMkLst>
-            <pc:docMk/>
-            <pc:sldMk cId="1480586688" sldId="260"/>
-            <ac:spMk id="19" creationId="{67EF550F-47CE-4FB2-9DAC-12AD835C833D}"/>
-          </ac:spMkLst>
-        </pc:spChg>
-        <pc:spChg chg="add del">
-          <ac:chgData name="Hadia Akbar" userId="19362115565_tp_box_2" providerId="OAuth2" clId="{FF77DECD-7ECC-48F4-BF82-9D4D4E0BE774}" dt="2026-08-04T05:20:31.398" v="200" actId="26606"/>
-          <ac:spMkLst>
-            <pc:docMk/>
-            <pc:sldMk cId="1480586688" sldId="260"/>
-            <ac:spMk id="20" creationId="{1D50F262-343C-4101-AB3C-9DA1072F7305}"/>
-          </ac:spMkLst>
-        </pc:spChg>
-        <pc:spChg chg="add del">
-          <ac:chgData name="Hadia Akbar" userId="19362115565_tp_box_2" providerId="OAuth2" clId="{FF77DECD-7ECC-48F4-BF82-9D4D4E0BE774}" dt="2026-08-04T05:20:31.398" v="200" actId="26606"/>
-          <ac:spMkLst>
-            <pc:docMk/>
-            <pc:sldMk cId="1480586688" sldId="260"/>
-            <ac:spMk id="21" creationId="{6A0924B3-0260-445E-AFD7-9533C0D1B3C9}"/>
-          </ac:spMkLst>
-        </pc:spChg>
-        <pc:spChg chg="add del">
-          <ac:chgData name="Hadia Akbar" userId="19362115565_tp_box_2" providerId="OAuth2" clId="{FF77DECD-7ECC-48F4-BF82-9D4D4E0BE774}" dt="2026-08-04T05:20:31.398" v="200" actId="26606"/>
-          <ac:spMkLst>
-            <pc:docMk/>
-            <pc:sldMk cId="1480586688" sldId="260"/>
-            <ac:spMk id="22" creationId="{7C34E8CB-B972-4A94-8469-315C10C2AA93}"/>
-          </ac:spMkLst>
-        </pc:spChg>
-        <pc:spChg chg="add del">
-          <ac:chgData name="Hadia Akbar" userId="19362115565_tp_box_2" providerId="OAuth2" clId="{FF77DECD-7ECC-48F4-BF82-9D4D4E0BE774}" dt="2026-08-04T05:20:31.398" v="200" actId="26606"/>
-          <ac:spMkLst>
-            <pc:docMk/>
-            <pc:sldMk cId="1480586688" sldId="260"/>
-            <ac:spMk id="23" creationId="{114A821F-8663-46BA-8CC0-D4C44F639F3A}"/>
-          </ac:spMkLst>
-        </pc:spChg>
-        <pc:spChg chg="add del">
-          <ac:chgData name="Hadia Akbar" userId="19362115565_tp_box_2" providerId="OAuth2" clId="{FF77DECD-7ECC-48F4-BF82-9D4D4E0BE774}" dt="2026-08-04T05:20:31.396" v="199" actId="26606"/>
-          <ac:spMkLst>
-            <pc:docMk/>
-            <pc:sldMk cId="1480586688" sldId="260"/>
-            <ac:spMk id="28" creationId="{91DC6ABD-215C-4EA8-A483-CEF5B99AB385}"/>
-          </ac:spMkLst>
-        </pc:spChg>
-        <pc:spChg chg="add del">
-          <ac:chgData name="Hadia Akbar" userId="19362115565_tp_box_2" providerId="OAuth2" clId="{FF77DECD-7ECC-48F4-BF82-9D4D4E0BE774}" dt="2026-08-04T05:20:31.396" v="199" actId="26606"/>
-          <ac:spMkLst>
-            <pc:docMk/>
-            <pc:sldMk cId="1480586688" sldId="260"/>
-            <ac:spMk id="34" creationId="{04357C93-F0CB-4A1C-8F77-4E9063789819}"/>
-          </ac:spMkLst>
-        </pc:spChg>
-        <pc:spChg chg="add del">
-          <ac:chgData name="Hadia Akbar" userId="19362115565_tp_box_2" providerId="OAuth2" clId="{FF77DECD-7ECC-48F4-BF82-9D4D4E0BE774}" dt="2026-08-04T05:22:19.958" v="226" actId="26606"/>
-          <ac:spMkLst>
-            <pc:docMk/>
-            <pc:sldMk cId="1480586688" sldId="260"/>
-            <ac:spMk id="36" creationId="{9389D3E0-BA02-41D3-B2AC-8FD6AA893902}"/>
-          </ac:spMkLst>
-        </pc:spChg>
-        <pc:spChg chg="add del">
-          <ac:chgData name="Hadia Akbar" userId="19362115565_tp_box_2" providerId="OAuth2" clId="{FF77DECD-7ECC-48F4-BF82-9D4D4E0BE774}" dt="2026-08-04T05:21:45.513" v="221" actId="26606"/>
-          <ac:spMkLst>
-            <pc:docMk/>
-            <pc:sldMk cId="1480586688" sldId="260"/>
-            <ac:spMk id="38" creationId="{8A94871E-96FC-4ADE-815B-41A636E34F1A}"/>
-          </ac:spMkLst>
-        </pc:spChg>
-        <pc:spChg chg="add del">
-          <ac:chgData name="Hadia Akbar" userId="19362115565_tp_box_2" providerId="OAuth2" clId="{FF77DECD-7ECC-48F4-BF82-9D4D4E0BE774}" dt="2026-08-04T05:21:45.513" v="221" actId="26606"/>
-          <ac:spMkLst>
-            <pc:docMk/>
-            <pc:sldMk cId="1480586688" sldId="260"/>
-            <ac:spMk id="39" creationId="{3FCFB1DE-0B7E-48CC-BA90-B2AB0889F9D6}"/>
-          </ac:spMkLst>
-        </pc:spChg>
-        <pc:spChg chg="add del">
-          <ac:chgData name="Hadia Akbar" userId="19362115565_tp_box_2" providerId="OAuth2" clId="{FF77DECD-7ECC-48F4-BF82-9D4D4E0BE774}" dt="2026-08-04T05:20:57.800" v="205" actId="26606"/>
-          <ac:spMkLst>
-            <pc:docMk/>
-            <pc:sldMk cId="1480586688" sldId="260"/>
-            <ac:spMk id="41" creationId="{9389D3E0-BA02-41D3-B2AC-8FD6AA893902}"/>
-          </ac:spMkLst>
-        </pc:spChg>
-        <pc:spChg chg="add del">
-          <ac:chgData name="Hadia Akbar" userId="19362115565_tp_box_2" providerId="OAuth2" clId="{FF77DECD-7ECC-48F4-BF82-9D4D4E0BE774}" dt="2026-08-04T05:21:55.828" v="223" actId="26606"/>
-          <ac:spMkLst>
-            <pc:docMk/>
-            <pc:sldMk cId="1480586688" sldId="260"/>
-            <ac:spMk id="42" creationId="{55666830-9A19-4E01-8505-D6C7F9AC5665}"/>
-          </ac:spMkLst>
-        </pc:spChg>
-        <pc:spChg chg="add del">
-          <ac:chgData name="Hadia Akbar" userId="19362115565_tp_box_2" providerId="OAuth2" clId="{FF77DECD-7ECC-48F4-BF82-9D4D4E0BE774}" dt="2026-08-04T05:21:01.135" v="207" actId="26606"/>
-          <ac:spMkLst>
-            <pc:docMk/>
-            <pc:sldMk cId="1480586688" sldId="260"/>
-            <ac:spMk id="43" creationId="{AF2F604E-43BE-4DC3-B983-E071523364F8}"/>
-          </ac:spMkLst>
-        </pc:spChg>
-        <pc:spChg chg="add del">
-          <ac:chgData name="Hadia Akbar" userId="19362115565_tp_box_2" providerId="OAuth2" clId="{FF77DECD-7ECC-48F4-BF82-9D4D4E0BE774}" dt="2026-08-04T05:21:01.135" v="207" actId="26606"/>
-          <ac:spMkLst>
-            <pc:docMk/>
-            <pc:sldMk cId="1480586688" sldId="260"/>
-            <ac:spMk id="44" creationId="{68AF5748-FED8-45BA-8631-26D1D10F3246}"/>
-          </ac:spMkLst>
-        </pc:spChg>
-        <pc:spChg chg="add del">
-          <ac:chgData name="Hadia Akbar" userId="19362115565_tp_box_2" providerId="OAuth2" clId="{FF77DECD-7ECC-48F4-BF82-9D4D4E0BE774}" dt="2026-08-04T05:21:01.135" v="207" actId="26606"/>
-          <ac:spMkLst>
-            <pc:docMk/>
-            <pc:sldMk cId="1480586688" sldId="260"/>
-            <ac:spMk id="45" creationId="{08C9B587-E65E-4B52-B37C-ABEBB6E87928}"/>
-          </ac:spMkLst>
-        </pc:spChg>
-        <pc:spChg chg="add del">
-          <ac:chgData name="Hadia Akbar" userId="19362115565_tp_box_2" providerId="OAuth2" clId="{FF77DECD-7ECC-48F4-BF82-9D4D4E0BE774}" dt="2026-08-04T05:21:55.828" v="223" actId="26606"/>
-          <ac:spMkLst>
-            <pc:docMk/>
-            <pc:sldMk cId="1480586688" sldId="260"/>
-            <ac:spMk id="46" creationId="{AE9FC877-7FB6-4D22-9988-35420644E202}"/>
-          </ac:spMkLst>
-        </pc:spChg>
-        <pc:spChg chg="add del">
-          <ac:chgData name="Hadia Akbar" userId="19362115565_tp_box_2" providerId="OAuth2" clId="{FF77DECD-7ECC-48F4-BF82-9D4D4E0BE774}" dt="2026-08-04T05:21:02.697" v="209" actId="26606"/>
-          <ac:spMkLst>
-            <pc:docMk/>
-            <pc:sldMk cId="1480586688" sldId="260"/>
-            <ac:spMk id="47" creationId="{026A84AF-6F58-471A-BF1F-10D8C03511C4}"/>
-          </ac:spMkLst>
-        </pc:spChg>
-        <pc:spChg chg="add del">
-          <ac:chgData name="Hadia Akbar" userId="19362115565_tp_box_2" providerId="OAuth2" clId="{FF77DECD-7ECC-48F4-BF82-9D4D4E0BE774}" dt="2026-08-04T05:21:55.828" v="223" actId="26606"/>
-          <ac:spMkLst>
-            <pc:docMk/>
-            <pc:sldMk cId="1480586688" sldId="260"/>
-            <ac:spMk id="48" creationId="{E41809D1-F12E-46BB-B804-5F209D325E8B}"/>
-          </ac:spMkLst>
-        </pc:spChg>
-        <pc:spChg chg="add del">
-          <ac:chgData name="Hadia Akbar" userId="19362115565_tp_box_2" providerId="OAuth2" clId="{FF77DECD-7ECC-48F4-BF82-9D4D4E0BE774}" dt="2026-08-04T05:21:07.785" v="211" actId="26606"/>
-          <ac:spMkLst>
-            <pc:docMk/>
-            <pc:sldMk cId="1480586688" sldId="260"/>
-            <ac:spMk id="49" creationId="{91DC6ABD-215C-4EA8-A483-CEF5B99AB385}"/>
-          </ac:spMkLst>
-        </pc:spChg>
-        <pc:spChg chg="add del">
-          <ac:chgData name="Hadia Akbar" userId="19362115565_tp_box_2" providerId="OAuth2" clId="{FF77DECD-7ECC-48F4-BF82-9D4D4E0BE774}" dt="2026-08-04T05:21:55.828" v="223" actId="26606"/>
-          <ac:spMkLst>
-            <pc:docMk/>
-            <pc:sldMk cId="1480586688" sldId="260"/>
-            <ac:spMk id="51" creationId="{AF2F604E-43BE-4DC3-B983-E071523364F8}"/>
-          </ac:spMkLst>
-        </pc:spChg>
-        <pc:spChg chg="add del">
-          <ac:chgData name="Hadia Akbar" userId="19362115565_tp_box_2" providerId="OAuth2" clId="{FF77DECD-7ECC-48F4-BF82-9D4D4E0BE774}" dt="2026-08-04T05:21:55.828" v="223" actId="26606"/>
-          <ac:spMkLst>
-            <pc:docMk/>
-            <pc:sldMk cId="1480586688" sldId="260"/>
-            <ac:spMk id="52" creationId="{08C9B587-E65E-4B52-B37C-ABEBB6E87928}"/>
-          </ac:spMkLst>
-        </pc:spChg>
-        <pc:spChg chg="add del">
-          <ac:chgData name="Hadia Akbar" userId="19362115565_tp_box_2" providerId="OAuth2" clId="{FF77DECD-7ECC-48F4-BF82-9D4D4E0BE774}" dt="2026-08-04T05:21:07.785" v="211" actId="26606"/>
-          <ac:spMkLst>
-            <pc:docMk/>
-            <pc:sldMk cId="1480586688" sldId="260"/>
-            <ac:spMk id="53" creationId="{04357C93-F0CB-4A1C-8F77-4E9063789819}"/>
-          </ac:spMkLst>
-        </pc:spChg>
-        <pc:spChg chg="add del">
-          <ac:chgData name="Hadia Akbar" userId="19362115565_tp_box_2" providerId="OAuth2" clId="{FF77DECD-7ECC-48F4-BF82-9D4D4E0BE774}" dt="2026-08-04T05:22:19.958" v="225" actId="26606"/>
-          <ac:spMkLst>
-            <pc:docMk/>
-            <pc:sldMk cId="1480586688" sldId="260"/>
-            <ac:spMk id="54" creationId="{A8384FB5-9ADC-4DDC-881B-597D56F5B15D}"/>
-          </ac:spMkLst>
-        </pc:spChg>
-        <pc:spChg chg="add del">
-          <ac:chgData name="Hadia Akbar" userId="19362115565_tp_box_2" providerId="OAuth2" clId="{FF77DECD-7ECC-48F4-BF82-9D4D4E0BE774}" dt="2026-08-04T05:21:28.101" v="217" actId="26606"/>
-          <ac:spMkLst>
-            <pc:docMk/>
-            <pc:sldMk cId="1480586688" sldId="260"/>
-            <ac:spMk id="55" creationId="{9B7AD9F6-8CE7-4299-8FC6-328F4DCD3FF9}"/>
-          </ac:spMkLst>
-        </pc:spChg>
-        <pc:spChg chg="add del">
-          <ac:chgData name="Hadia Akbar" userId="19362115565_tp_box_2" providerId="OAuth2" clId="{FF77DECD-7ECC-48F4-BF82-9D4D4E0BE774}" dt="2026-08-04T05:21:28.101" v="217" actId="26606"/>
-          <ac:spMkLst>
-            <pc:docMk/>
-            <pc:sldMk cId="1480586688" sldId="260"/>
-            <ac:spMk id="56" creationId="{F49775AF-8896-43EE-92C6-83497D6DC56F}"/>
-          </ac:spMkLst>
-        </pc:spChg>
-        <pc:spChg chg="add del">
-          <ac:chgData name="Hadia Akbar" userId="19362115565_tp_box_2" providerId="OAuth2" clId="{FF77DECD-7ECC-48F4-BF82-9D4D4E0BE774}" dt="2026-08-04T05:22:19.958" v="225" actId="26606"/>
-          <ac:spMkLst>
-            <pc:docMk/>
-            <pc:sldMk cId="1480586688" sldId="260"/>
-            <ac:spMk id="57" creationId="{BC05CA36-AD6A-4ABF-9A05-52E5A143D2BB}"/>
-          </ac:spMkLst>
-        </pc:spChg>
-        <pc:spChg chg="add del">
-          <ac:chgData name="Hadia Akbar" userId="19362115565_tp_box_2" providerId="OAuth2" clId="{FF77DECD-7ECC-48F4-BF82-9D4D4E0BE774}" dt="2026-08-04T05:22:19.958" v="225" actId="26606"/>
-          <ac:spMkLst>
-            <pc:docMk/>
-            <pc:sldMk cId="1480586688" sldId="260"/>
-            <ac:spMk id="58" creationId="{D4331EE8-85A4-4588-8D9E-70E534D477DB}"/>
-          </ac:spMkLst>
-        </pc:spChg>
-        <pc:spChg chg="add del">
-          <ac:chgData name="Hadia Akbar" userId="19362115565_tp_box_2" providerId="OAuth2" clId="{FF77DECD-7ECC-48F4-BF82-9D4D4E0BE774}" dt="2026-08-04T05:22:19.958" v="225" actId="26606"/>
-          <ac:spMkLst>
-            <pc:docMk/>
-            <pc:sldMk cId="1480586688" sldId="260"/>
-            <ac:spMk id="59" creationId="{49D6C862-61CC-4B46-8080-96583D653BAB}"/>
-          </ac:spMkLst>
-        </pc:spChg>
-        <pc:spChg chg="add del">
-          <ac:chgData name="Hadia Akbar" userId="19362115565_tp_box_2" providerId="OAuth2" clId="{FF77DECD-7ECC-48F4-BF82-9D4D4E0BE774}" dt="2026-08-04T05:22:19.958" v="225" actId="26606"/>
-          <ac:spMkLst>
-            <pc:docMk/>
-            <pc:sldMk cId="1480586688" sldId="260"/>
-            <ac:spMk id="60" creationId="{E37EECFC-A684-4391-AE85-4CDAF5565F61}"/>
-          </ac:spMkLst>
-        </pc:spChg>
-        <pc:spChg chg="add del">
-          <ac:chgData name="Hadia Akbar" userId="19362115565_tp_box_2" providerId="OAuth2" clId="{FF77DECD-7ECC-48F4-BF82-9D4D4E0BE774}" dt="2026-08-04T05:23:07.668" v="241"/>
-          <ac:spMkLst>
-            <pc:docMk/>
-            <pc:sldMk cId="1480586688" sldId="260"/>
-            <ac:spMk id="62" creationId="{798FE0E0-D95D-46EF-A375-475D4DB0ED45}"/>
-          </ac:spMkLst>
-        </pc:spChg>
-        <pc:spChg chg="add del">
-          <ac:chgData name="Hadia Akbar" userId="19362115565_tp_box_2" providerId="OAuth2" clId="{FF77DECD-7ECC-48F4-BF82-9D4D4E0BE774}" dt="2026-08-04T05:23:07.668" v="241"/>
-          <ac:spMkLst>
-            <pc:docMk/>
-            <pc:sldMk cId="1480586688" sldId="260"/>
-            <ac:spMk id="63" creationId="{2D82A42F-AEBE-4065-9792-036A904D8564}"/>
-          </ac:spMkLst>
-        </pc:spChg>
-        <pc:grpChg chg="add del">
-          <ac:chgData name="Hadia Akbar" userId="19362115565_tp_box_2" providerId="OAuth2" clId="{FF77DECD-7ECC-48F4-BF82-9D4D4E0BE774}" dt="2026-08-04T05:20:15.758" v="195" actId="26606"/>
-          <ac:grpSpMkLst>
-            <pc:docMk/>
-            <pc:sldMk cId="1480586688" sldId="260"/>
-            <ac:grpSpMk id="13" creationId="{3AF6A671-C637-4547-85F4-51B6D1881399}"/>
-          </ac:grpSpMkLst>
-        </pc:grpChg>
-        <pc:grpChg chg="add del">
-          <ac:chgData name="Hadia Akbar" userId="19362115565_tp_box_2" providerId="OAuth2" clId="{FF77DECD-7ECC-48F4-BF82-9D4D4E0BE774}" dt="2026-08-04T05:20:31.396" v="199" actId="26606"/>
-          <ac:grpSpMkLst>
-            <pc:docMk/>
-            <pc:sldMk cId="1480586688" sldId="260"/>
-            <ac:grpSpMk id="30" creationId="{3AF6A671-C637-4547-85F4-51B6D1881399}"/>
-          </ac:grpSpMkLst>
-        </pc:grpChg>
-        <pc:grpChg chg="add del">
-          <ac:chgData name="Hadia Akbar" userId="19362115565_tp_box_2" providerId="OAuth2" clId="{FF77DECD-7ECC-48F4-BF82-9D4D4E0BE774}" dt="2026-08-04T05:21:07.785" v="211" actId="26606"/>
-          <ac:grpSpMkLst>
-            <pc:docMk/>
-            <pc:sldMk cId="1480586688" sldId="260"/>
-            <ac:grpSpMk id="50" creationId="{3AF6A671-C637-4547-85F4-51B6D1881399}"/>
-          </ac:grpSpMkLst>
-        </pc:grpChg>
-        <pc:picChg chg="add del mod ord">
-          <ac:chgData name="Hadia Akbar" userId="19362115565_tp_box_2" providerId="OAuth2" clId="{FF77DECD-7ECC-48F4-BF82-9D4D4E0BE774}" dt="2026-08-04T05:20:38.312" v="202" actId="21"/>
+        <pc:picChg chg="add mod">
+          <ac:chgData name="Hadia Akbar" userId="19362115565_tp_box_2" providerId="OAuth2" clId="{FF77DECD-7ECC-48F4-BF82-9D4D4E0BE774}" dt="2026-08-06T17:23:43.157" v="1739" actId="1076"/>
           <ac:picMkLst>
             <pc:docMk/>
             <pc:sldMk cId="1480586688" sldId="260"/>
-            <ac:picMk id="4" creationId="{884F03F4-ED6E-9B50-B576-165738CB5612}"/>
+            <ac:picMk id="4" creationId="{24E79CC9-78C3-BC1B-D785-D9BBED37350E}"/>
           </ac:picMkLst>
         </pc:picChg>
         <pc:picChg chg="add del mod">
-          <ac:chgData name="Hadia Akbar" userId="19362115565_tp_box_2" providerId="OAuth2" clId="{FF77DECD-7ECC-48F4-BF82-9D4D4E0BE774}" dt="2026-08-04T05:20:19.851" v="197" actId="21"/>
-          <ac:picMkLst>
-            <pc:docMk/>
-            <pc:sldMk cId="1480586688" sldId="260"/>
-            <ac:picMk id="6" creationId="{C6248BC8-7AA3-CCB1-6C2B-D171F7CEAA0A}"/>
-          </ac:picMkLst>
-        </pc:picChg>
-        <pc:picChg chg="add del mod">
-          <ac:chgData name="Hadia Akbar" userId="19362115565_tp_box_2" providerId="OAuth2" clId="{FF77DECD-7ECC-48F4-BF82-9D4D4E0BE774}" dt="2026-08-04T05:22:29.782" v="232" actId="478"/>
-          <ac:picMkLst>
-            <pc:docMk/>
-            <pc:sldMk cId="1480586688" sldId="260"/>
-            <ac:picMk id="8" creationId="{8EF08997-A492-4560-7DC5-A15458D9BA33}"/>
-          </ac:picMkLst>
-        </pc:picChg>
-        <pc:picChg chg="add del">
-          <ac:chgData name="Hadia Akbar" userId="19362115565_tp_box_2" providerId="OAuth2" clId="{FF77DECD-7ECC-48F4-BF82-9D4D4E0BE774}" dt="2026-08-04T05:21:21.202" v="215" actId="22"/>
-          <ac:picMkLst>
-            <pc:docMk/>
-            <pc:sldMk cId="1480586688" sldId="260"/>
-            <ac:picMk id="10" creationId="{9134E044-FA65-5399-690F-E64B8A5BA37A}"/>
-          </ac:picMkLst>
-        </pc:picChg>
-        <pc:picChg chg="add del mod">
-          <ac:chgData name="Hadia Akbar" userId="19362115565_tp_box_2" providerId="OAuth2" clId="{FF77DECD-7ECC-48F4-BF82-9D4D4E0BE774}" dt="2026-08-04T05:29:27.727" v="402" actId="21"/>
-          <ac:picMkLst>
-            <pc:docMk/>
-            <pc:sldMk cId="1480586688" sldId="260"/>
-            <ac:picMk id="16" creationId="{2F5AB063-768B-A349-DE4E-61EF628393AD}"/>
-          </ac:picMkLst>
-        </pc:picChg>
-        <pc:picChg chg="add mod">
-          <ac:chgData name="Hadia Akbar" userId="19362115565_tp_box_2" providerId="OAuth2" clId="{FF77DECD-7ECC-48F4-BF82-9D4D4E0BE774}" dt="2026-08-04T17:55:09.195" v="1482" actId="1076"/>
+          <ac:chgData name="Hadia Akbar" userId="19362115565_tp_box_2" providerId="OAuth2" clId="{FF77DECD-7ECC-48F4-BF82-9D4D4E0BE774}" dt="2026-08-06T17:23:56.705" v="1742" actId="1076"/>
           <ac:picMkLst>
             <pc:docMk/>
             <pc:sldMk cId="1480586688" sldId="260"/>
             <ac:picMk id="18" creationId="{E9E2FD9A-CEC4-149A-7AA0-B9A9435CC662}"/>
           </ac:picMkLst>
         </pc:picChg>
-        <pc:picChg chg="add mod">
-          <ac:chgData name="Hadia Akbar" userId="19362115565_tp_box_2" providerId="OAuth2" clId="{FF77DECD-7ECC-48F4-BF82-9D4D4E0BE774}" dt="2026-08-04T17:55:06.767" v="1481" actId="1076"/>
+        <pc:picChg chg="add del mod">
+          <ac:chgData name="Hadia Akbar" userId="19362115565_tp_box_2" providerId="OAuth2" clId="{FF77DECD-7ECC-48F4-BF82-9D4D4E0BE774}" dt="2026-08-06T17:22:57.696" v="1725" actId="478"/>
           <ac:picMkLst>
             <pc:docMk/>
             <pc:sldMk cId="1480586688" sldId="260"/>
@@ -850,287 +461,8 @@
           </ac:picMkLst>
         </pc:picChg>
       </pc:sldChg>
-      <pc:sldChg chg="addSp delSp modSp new del mod setBg">
-        <pc:chgData name="Hadia Akbar" userId="19362115565_tp_box_2" providerId="OAuth2" clId="{FF77DECD-7ECC-48F4-BF82-9D4D4E0BE774}" dt="2026-08-04T05:51:58.127" v="1219" actId="47"/>
-        <pc:sldMkLst>
-          <pc:docMk/>
-          <pc:sldMk cId="1373323216" sldId="261"/>
-        </pc:sldMkLst>
-        <pc:spChg chg="mod">
-          <ac:chgData name="Hadia Akbar" userId="19362115565_tp_box_2" providerId="OAuth2" clId="{FF77DECD-7ECC-48F4-BF82-9D4D4E0BE774}" dt="2026-08-04T05:50:57.235" v="1201" actId="122"/>
-          <ac:spMkLst>
-            <pc:docMk/>
-            <pc:sldMk cId="1373323216" sldId="261"/>
-            <ac:spMk id="2" creationId="{0C78470D-9ED1-6EE2-5960-4B49B26B9A79}"/>
-          </ac:spMkLst>
-        </pc:spChg>
-        <pc:spChg chg="add del mod">
-          <ac:chgData name="Hadia Akbar" userId="19362115565_tp_box_2" providerId="OAuth2" clId="{FF77DECD-7ECC-48F4-BF82-9D4D4E0BE774}" dt="2026-08-04T05:28:54.093" v="396" actId="26606"/>
-          <ac:spMkLst>
-            <pc:docMk/>
-            <pc:sldMk cId="1373323216" sldId="261"/>
-            <ac:spMk id="3" creationId="{3C9AD445-1474-C8CD-6A03-1870CA6CA0DE}"/>
-          </ac:spMkLst>
-        </pc:spChg>
-        <pc:spChg chg="add del">
-          <ac:chgData name="Hadia Akbar" userId="19362115565_tp_box_2" providerId="OAuth2" clId="{FF77DECD-7ECC-48F4-BF82-9D4D4E0BE774}" dt="2026-08-04T05:28:54.093" v="396" actId="26606"/>
-          <ac:spMkLst>
-            <pc:docMk/>
-            <pc:sldMk cId="1373323216" sldId="261"/>
-            <ac:spMk id="5" creationId="{DBF61EA3-B236-439E-9C0B-340980D56BEE}"/>
-          </ac:spMkLst>
-        </pc:spChg>
-        <pc:spChg chg="add mod">
-          <ac:chgData name="Hadia Akbar" userId="19362115565_tp_box_2" providerId="OAuth2" clId="{FF77DECD-7ECC-48F4-BF82-9D4D4E0BE774}" dt="2026-08-04T05:51:26.376" v="1204" actId="21"/>
-          <ac:spMkLst>
-            <pc:docMk/>
-            <pc:sldMk cId="1373323216" sldId="261"/>
-            <ac:spMk id="7" creationId="{23A0CEC1-D963-E512-4CB3-24D836BE0D3D}"/>
-          </ac:spMkLst>
-        </pc:spChg>
-        <pc:spChg chg="add del">
-          <ac:chgData name="Hadia Akbar" userId="19362115565_tp_box_2" providerId="OAuth2" clId="{FF77DECD-7ECC-48F4-BF82-9D4D4E0BE774}" dt="2026-08-04T05:26:15.777" v="336" actId="26606"/>
-          <ac:spMkLst>
-            <pc:docMk/>
-            <pc:sldMk cId="1373323216" sldId="261"/>
-            <ac:spMk id="8" creationId="{B6CDA21F-E7AF-4C75-8395-33F58D5B0E45}"/>
-          </ac:spMkLst>
-        </pc:spChg>
-        <pc:spChg chg="add del">
-          <ac:chgData name="Hadia Akbar" userId="19362115565_tp_box_2" providerId="OAuth2" clId="{FF77DECD-7ECC-48F4-BF82-9D4D4E0BE774}" dt="2026-08-04T05:28:54.093" v="396" actId="26606"/>
-          <ac:spMkLst>
-            <pc:docMk/>
-            <pc:sldMk cId="1373323216" sldId="261"/>
-            <ac:spMk id="14" creationId="{E659831F-0D9A-4C63-9EBB-8435B85A440F}"/>
-          </ac:spMkLst>
-        </pc:spChg>
-        <pc:spChg chg="add del">
-          <ac:chgData name="Hadia Akbar" userId="19362115565_tp_box_2" providerId="OAuth2" clId="{FF77DECD-7ECC-48F4-BF82-9D4D4E0BE774}" dt="2026-08-04T05:26:15.777" v="336" actId="26606"/>
-          <ac:spMkLst>
-            <pc:docMk/>
-            <pc:sldMk cId="1373323216" sldId="261"/>
-            <ac:spMk id="15" creationId="{D5B0017B-2ECA-49AF-B397-DC140825DF8D}"/>
-          </ac:spMkLst>
-        </pc:spChg>
-        <pc:spChg chg="add del">
-          <ac:chgData name="Hadia Akbar" userId="19362115565_tp_box_2" providerId="OAuth2" clId="{FF77DECD-7ECC-48F4-BF82-9D4D4E0BE774}" dt="2026-08-04T05:29:14.178" v="398" actId="26606"/>
-          <ac:spMkLst>
-            <pc:docMk/>
-            <pc:sldMk cId="1373323216" sldId="261"/>
-            <ac:spMk id="19" creationId="{081EA652-8C6A-4E69-BEB9-170809474553}"/>
-          </ac:spMkLst>
-        </pc:spChg>
-        <pc:spChg chg="add del">
-          <ac:chgData name="Hadia Akbar" userId="19362115565_tp_box_2" providerId="OAuth2" clId="{FF77DECD-7ECC-48F4-BF82-9D4D4E0BE774}" dt="2026-08-04T05:28:48.830" v="393" actId="26606"/>
-          <ac:spMkLst>
-            <pc:docMk/>
-            <pc:sldMk cId="1373323216" sldId="261"/>
-            <ac:spMk id="20" creationId="{35DB3719-6FDC-4E5D-891D-FF40B7300F64}"/>
-          </ac:spMkLst>
-        </pc:spChg>
-        <pc:spChg chg="add del">
-          <ac:chgData name="Hadia Akbar" userId="19362115565_tp_box_2" providerId="OAuth2" clId="{FF77DECD-7ECC-48F4-BF82-9D4D4E0BE774}" dt="2026-08-04T05:29:14.178" v="398" actId="26606"/>
-          <ac:spMkLst>
-            <pc:docMk/>
-            <pc:sldMk cId="1373323216" sldId="261"/>
-            <ac:spMk id="21" creationId="{5298780A-33B9-4EA2-8F67-DE68AD62841B}"/>
-          </ac:spMkLst>
-        </pc:spChg>
-        <pc:spChg chg="add del">
-          <ac:chgData name="Hadia Akbar" userId="19362115565_tp_box_2" providerId="OAuth2" clId="{FF77DECD-7ECC-48F4-BF82-9D4D4E0BE774}" dt="2026-08-04T05:28:48.830" v="393" actId="26606"/>
-          <ac:spMkLst>
-            <pc:docMk/>
-            <pc:sldMk cId="1373323216" sldId="261"/>
-            <ac:spMk id="22" creationId="{E0CBAC23-2E3F-4A90-BA59-F8299F6A5439}"/>
-          </ac:spMkLst>
-        </pc:spChg>
-        <pc:spChg chg="add del">
-          <ac:chgData name="Hadia Akbar" userId="19362115565_tp_box_2" providerId="OAuth2" clId="{FF77DECD-7ECC-48F4-BF82-9D4D4E0BE774}" dt="2026-08-04T05:29:14.178" v="398" actId="26606"/>
-          <ac:spMkLst>
-            <pc:docMk/>
-            <pc:sldMk cId="1373323216" sldId="261"/>
-            <ac:spMk id="23" creationId="{7F488E8B-4E1E-4402-8935-D4E6C02615C7}"/>
-          </ac:spMkLst>
-        </pc:spChg>
-        <pc:spChg chg="add del">
-          <ac:chgData name="Hadia Akbar" userId="19362115565_tp_box_2" providerId="OAuth2" clId="{FF77DECD-7ECC-48F4-BF82-9D4D4E0BE774}" dt="2026-08-04T05:28:54.076" v="395" actId="26606"/>
-          <ac:spMkLst>
-            <pc:docMk/>
-            <pc:sldMk cId="1373323216" sldId="261"/>
-            <ac:spMk id="24" creationId="{DBF61EA3-B236-439E-9C0B-340980D56BEE}"/>
-          </ac:spMkLst>
-        </pc:spChg>
-        <pc:spChg chg="add del">
-          <ac:chgData name="Hadia Akbar" userId="19362115565_tp_box_2" providerId="OAuth2" clId="{FF77DECD-7ECC-48F4-BF82-9D4D4E0BE774}" dt="2026-08-04T05:28:54.076" v="395" actId="26606"/>
-          <ac:spMkLst>
-            <pc:docMk/>
-            <pc:sldMk cId="1373323216" sldId="261"/>
-            <ac:spMk id="28" creationId="{E659831F-0D9A-4C63-9EBB-8435B85A440F}"/>
-          </ac:spMkLst>
-        </pc:spChg>
-        <pc:spChg chg="add del mod">
-          <ac:chgData name="Hadia Akbar" userId="19362115565_tp_box_2" providerId="OAuth2" clId="{FF77DECD-7ECC-48F4-BF82-9D4D4E0BE774}" dt="2026-08-04T05:37:43.760" v="1089" actId="26606"/>
-          <ac:spMkLst>
-            <pc:docMk/>
-            <pc:sldMk cId="1373323216" sldId="261"/>
-            <ac:spMk id="31" creationId="{3C9AD445-1474-C8CD-6A03-1870CA6CA0DE}"/>
-          </ac:spMkLst>
-        </pc:spChg>
-        <pc:spChg chg="add del">
-          <ac:chgData name="Hadia Akbar" userId="19362115565_tp_box_2" providerId="OAuth2" clId="{FF77DECD-7ECC-48F4-BF82-9D4D4E0BE774}" dt="2026-08-04T05:37:43.760" v="1089" actId="26606"/>
-          <ac:spMkLst>
-            <pc:docMk/>
-            <pc:sldMk cId="1373323216" sldId="261"/>
-            <ac:spMk id="36" creationId="{DAF1966E-FD40-4A4A-B61B-C4DF7FA05F06}"/>
-          </ac:spMkLst>
-        </pc:spChg>
-        <pc:spChg chg="add del">
-          <ac:chgData name="Hadia Akbar" userId="19362115565_tp_box_2" providerId="OAuth2" clId="{FF77DECD-7ECC-48F4-BF82-9D4D4E0BE774}" dt="2026-08-04T05:37:43.760" v="1089" actId="26606"/>
-          <ac:spMkLst>
-            <pc:docMk/>
-            <pc:sldMk cId="1373323216" sldId="261"/>
-            <ac:spMk id="38" creationId="{047BFA19-D45E-416B-A404-7AF2F3F27017}"/>
-          </ac:spMkLst>
-        </pc:spChg>
-        <pc:spChg chg="add del">
-          <ac:chgData name="Hadia Akbar" userId="19362115565_tp_box_2" providerId="OAuth2" clId="{FF77DECD-7ECC-48F4-BF82-9D4D4E0BE774}" dt="2026-08-04T05:37:43.760" v="1089" actId="26606"/>
-          <ac:spMkLst>
-            <pc:docMk/>
-            <pc:sldMk cId="1373323216" sldId="261"/>
-            <ac:spMk id="40" creationId="{8E0105E7-23DB-4CF2-8258-FF47C7620F6E}"/>
-          </ac:spMkLst>
-        </pc:spChg>
-        <pc:spChg chg="add del">
-          <ac:chgData name="Hadia Akbar" userId="19362115565_tp_box_2" providerId="OAuth2" clId="{FF77DECD-7ECC-48F4-BF82-9D4D4E0BE774}" dt="2026-08-04T05:37:43.760" v="1089" actId="26606"/>
-          <ac:spMkLst>
-            <pc:docMk/>
-            <pc:sldMk cId="1373323216" sldId="261"/>
-            <ac:spMk id="42" creationId="{074B4F7D-14B2-478B-8BF5-01E4E0C5D263}"/>
-          </ac:spMkLst>
-        </pc:spChg>
-        <pc:spChg chg="add del">
-          <ac:chgData name="Hadia Akbar" userId="19362115565_tp_box_2" providerId="OAuth2" clId="{FF77DECD-7ECC-48F4-BF82-9D4D4E0BE774}" dt="2026-08-04T05:39:30.110" v="1161" actId="26606"/>
-          <ac:spMkLst>
-            <pc:docMk/>
-            <pc:sldMk cId="1373323216" sldId="261"/>
-            <ac:spMk id="48" creationId="{BACC6370-2D7E-4714-9D71-7542949D7D5D}"/>
-          </ac:spMkLst>
-        </pc:spChg>
-        <pc:spChg chg="add del">
-          <ac:chgData name="Hadia Akbar" userId="19362115565_tp_box_2" providerId="OAuth2" clId="{FF77DECD-7ECC-48F4-BF82-9D4D4E0BE774}" dt="2026-08-04T05:39:30.110" v="1161" actId="26606"/>
-          <ac:spMkLst>
-            <pc:docMk/>
-            <pc:sldMk cId="1373323216" sldId="261"/>
-            <ac:spMk id="50" creationId="{F68B3F68-107C-434F-AA38-110D5EA91B85}"/>
-          </ac:spMkLst>
-        </pc:spChg>
-        <pc:spChg chg="add del">
-          <ac:chgData name="Hadia Akbar" userId="19362115565_tp_box_2" providerId="OAuth2" clId="{FF77DECD-7ECC-48F4-BF82-9D4D4E0BE774}" dt="2026-08-04T05:39:30.110" v="1161" actId="26606"/>
-          <ac:spMkLst>
-            <pc:docMk/>
-            <pc:sldMk cId="1373323216" sldId="261"/>
-            <ac:spMk id="52" creationId="{AAD0DBB9-1A4B-4391-81D4-CB19F9AB918A}"/>
-          </ac:spMkLst>
-        </pc:spChg>
-        <pc:spChg chg="add del">
-          <ac:chgData name="Hadia Akbar" userId="19362115565_tp_box_2" providerId="OAuth2" clId="{FF77DECD-7ECC-48F4-BF82-9D4D4E0BE774}" dt="2026-08-04T05:39:30.110" v="1161" actId="26606"/>
-          <ac:spMkLst>
-            <pc:docMk/>
-            <pc:sldMk cId="1373323216" sldId="261"/>
-            <ac:spMk id="54" creationId="{063BBA22-50EA-4C4D-BE05-F1CE4E63AA56}"/>
-          </ac:spMkLst>
-        </pc:spChg>
-        <pc:spChg chg="add">
-          <ac:chgData name="Hadia Akbar" userId="19362115565_tp_box_2" providerId="OAuth2" clId="{FF77DECD-7ECC-48F4-BF82-9D4D4E0BE774}" dt="2026-08-04T05:39:30.110" v="1161" actId="26606"/>
-          <ac:spMkLst>
-            <pc:docMk/>
-            <pc:sldMk cId="1373323216" sldId="261"/>
-            <ac:spMk id="59" creationId="{BACC6370-2D7E-4714-9D71-7542949D7D5D}"/>
-          </ac:spMkLst>
-        </pc:spChg>
-        <pc:spChg chg="add">
-          <ac:chgData name="Hadia Akbar" userId="19362115565_tp_box_2" providerId="OAuth2" clId="{FF77DECD-7ECC-48F4-BF82-9D4D4E0BE774}" dt="2026-08-04T05:39:30.110" v="1161" actId="26606"/>
-          <ac:spMkLst>
-            <pc:docMk/>
-            <pc:sldMk cId="1373323216" sldId="261"/>
-            <ac:spMk id="61" creationId="{F68B3F68-107C-434F-AA38-110D5EA91B85}"/>
-          </ac:spMkLst>
-        </pc:spChg>
-        <pc:spChg chg="add">
-          <ac:chgData name="Hadia Akbar" userId="19362115565_tp_box_2" providerId="OAuth2" clId="{FF77DECD-7ECC-48F4-BF82-9D4D4E0BE774}" dt="2026-08-04T05:39:30.110" v="1161" actId="26606"/>
-          <ac:spMkLst>
-            <pc:docMk/>
-            <pc:sldMk cId="1373323216" sldId="261"/>
-            <ac:spMk id="63" creationId="{AAD0DBB9-1A4B-4391-81D4-CB19F9AB918A}"/>
-          </ac:spMkLst>
-        </pc:spChg>
-        <pc:spChg chg="add">
-          <ac:chgData name="Hadia Akbar" userId="19362115565_tp_box_2" providerId="OAuth2" clId="{FF77DECD-7ECC-48F4-BF82-9D4D4E0BE774}" dt="2026-08-04T05:39:30.110" v="1161" actId="26606"/>
-          <ac:spMkLst>
-            <pc:docMk/>
-            <pc:sldMk cId="1373323216" sldId="261"/>
-            <ac:spMk id="65" creationId="{063BBA22-50EA-4C4D-BE05-F1CE4E63AA56}"/>
-          </ac:spMkLst>
-        </pc:spChg>
-        <pc:grpChg chg="add del">
-          <ac:chgData name="Hadia Akbar" userId="19362115565_tp_box_2" providerId="OAuth2" clId="{FF77DECD-7ECC-48F4-BF82-9D4D4E0BE774}" dt="2026-08-04T05:28:54.093" v="396" actId="26606"/>
-          <ac:grpSpMkLst>
-            <pc:docMk/>
-            <pc:sldMk cId="1373323216" sldId="261"/>
-            <ac:grpSpMk id="6" creationId="{28FAF094-D087-493F-8DF9-A486C2D6BBAA}"/>
-          </ac:grpSpMkLst>
-        </pc:grpChg>
-        <pc:grpChg chg="add del">
-          <ac:chgData name="Hadia Akbar" userId="19362115565_tp_box_2" providerId="OAuth2" clId="{FF77DECD-7ECC-48F4-BF82-9D4D4E0BE774}" dt="2026-08-04T05:26:15.777" v="336" actId="26606"/>
-          <ac:grpSpMkLst>
-            <pc:docMk/>
-            <pc:sldMk cId="1373323216" sldId="261"/>
-            <ac:grpSpMk id="10" creationId="{AE1C45F0-260A-458C-96ED-C1F6D2151219}"/>
-          </ac:grpSpMkLst>
-        </pc:grpChg>
-        <pc:grpChg chg="add del">
-          <ac:chgData name="Hadia Akbar" userId="19362115565_tp_box_2" providerId="OAuth2" clId="{FF77DECD-7ECC-48F4-BF82-9D4D4E0BE774}" dt="2026-08-04T05:28:54.076" v="395" actId="26606"/>
-          <ac:grpSpMkLst>
-            <pc:docMk/>
-            <pc:sldMk cId="1373323216" sldId="261"/>
-            <ac:grpSpMk id="25" creationId="{28FAF094-D087-493F-8DF9-A486C2D6BBAA}"/>
-          </ac:grpSpMkLst>
-        </pc:grpChg>
-        <pc:graphicFrameChg chg="add del">
-          <ac:chgData name="Hadia Akbar" userId="19362115565_tp_box_2" providerId="OAuth2" clId="{FF77DECD-7ECC-48F4-BF82-9D4D4E0BE774}" dt="2026-08-04T05:28:48.830" v="393" actId="26606"/>
-          <ac:graphicFrameMkLst>
-            <pc:docMk/>
-            <pc:sldMk cId="1373323216" sldId="261"/>
-            <ac:graphicFrameMk id="16" creationId="{BA206EFC-52CA-1D74-35EB-53FFA67EC502}"/>
-          </ac:graphicFrameMkLst>
-        </pc:graphicFrameChg>
-        <pc:graphicFrameChg chg="add del">
-          <ac:chgData name="Hadia Akbar" userId="19362115565_tp_box_2" providerId="OAuth2" clId="{FF77DECD-7ECC-48F4-BF82-9D4D4E0BE774}" dt="2026-08-04T05:28:54.076" v="395" actId="26606"/>
-          <ac:graphicFrameMkLst>
-            <pc:docMk/>
-            <pc:sldMk cId="1373323216" sldId="261"/>
-            <ac:graphicFrameMk id="29" creationId="{05D675BB-14DB-66CA-AB5E-3ECB5BBAE603}"/>
-          </ac:graphicFrameMkLst>
-        </pc:graphicFrameChg>
-        <pc:graphicFrameChg chg="del mod modGraphic">
-          <ac:chgData name="Hadia Akbar" userId="19362115565_tp_box_2" providerId="OAuth2" clId="{FF77DECD-7ECC-48F4-BF82-9D4D4E0BE774}" dt="2026-08-04T05:51:26.376" v="1204" actId="21"/>
-          <ac:graphicFrameMkLst>
-            <pc:docMk/>
-            <pc:sldMk cId="1373323216" sldId="261"/>
-            <ac:graphicFrameMk id="44" creationId="{32770E54-EA9A-8900-77E3-868AFB717EF4}"/>
-          </ac:graphicFrameMkLst>
-        </pc:graphicFrameChg>
-        <pc:cxnChg chg="add del">
-          <ac:chgData name="Hadia Akbar" userId="19362115565_tp_box_2" providerId="OAuth2" clId="{FF77DECD-7ECC-48F4-BF82-9D4D4E0BE774}" dt="2026-08-04T05:26:15.777" v="336" actId="26606"/>
-          <ac:cxnSpMkLst>
-            <pc:docMk/>
-            <pc:sldMk cId="1373323216" sldId="261"/>
-            <ac:cxnSpMk id="17" creationId="{6CF1BAF6-AD41-4082-B212-8A1F9A2E8779}"/>
-          </ac:cxnSpMkLst>
-        </pc:cxnChg>
-      </pc:sldChg>
       <pc:sldChg chg="addSp delSp modSp new mod ord setBg">
-        <pc:chgData name="Hadia Akbar" userId="19362115565_tp_box_2" providerId="OAuth2" clId="{FF77DECD-7ECC-48F4-BF82-9D4D4E0BE774}" dt="2026-08-04T18:03:23.726" v="1483" actId="14100"/>
+        <pc:chgData name="Hadia Akbar" userId="19362115565_tp_box_2" providerId="OAuth2" clId="{FF77DECD-7ECC-48F4-BF82-9D4D4E0BE774}" dt="2026-08-06T17:41:03.925" v="2039" actId="20577"/>
         <pc:sldMkLst>
           <pc:docMk/>
           <pc:sldMk cId="1860897597" sldId="262"/>
@@ -1141,46 +473,6 @@
             <pc:docMk/>
             <pc:sldMk cId="1860897597" sldId="262"/>
             <ac:spMk id="2" creationId="{82135AE4-D2DF-F18B-908D-5801E8171ADD}"/>
-          </ac:spMkLst>
-        </pc:spChg>
-        <pc:spChg chg="del mod">
-          <ac:chgData name="Hadia Akbar" userId="19362115565_tp_box_2" providerId="OAuth2" clId="{FF77DECD-7ECC-48F4-BF82-9D4D4E0BE774}" dt="2026-08-04T05:52:50.624" v="1225" actId="26606"/>
-          <ac:spMkLst>
-            <pc:docMk/>
-            <pc:sldMk cId="1860897597" sldId="262"/>
-            <ac:spMk id="3" creationId="{91978F05-3323-6D1A-D1CF-C2C336595EFC}"/>
-          </ac:spMkLst>
-        </pc:spChg>
-        <pc:spChg chg="add del">
-          <ac:chgData name="Hadia Akbar" userId="19362115565_tp_box_2" providerId="OAuth2" clId="{FF77DECD-7ECC-48F4-BF82-9D4D4E0BE774}" dt="2026-08-04T05:57:03.252" v="1438" actId="26606"/>
-          <ac:spMkLst>
-            <pc:docMk/>
-            <pc:sldMk cId="1860897597" sldId="262"/>
-            <ac:spMk id="10" creationId="{2659FDB4-FCBE-4A89-B46D-43D4FA54464D}"/>
-          </ac:spMkLst>
-        </pc:spChg>
-        <pc:spChg chg="add del">
-          <ac:chgData name="Hadia Akbar" userId="19362115565_tp_box_2" providerId="OAuth2" clId="{FF77DECD-7ECC-48F4-BF82-9D4D4E0BE774}" dt="2026-08-04T05:58:01.491" v="1464" actId="26606"/>
-          <ac:spMkLst>
-            <pc:docMk/>
-            <pc:sldMk cId="1860897597" sldId="262"/>
-            <ac:spMk id="14" creationId="{5F937BBF-9326-4230-AB1B-F1795E350559}"/>
-          </ac:spMkLst>
-        </pc:spChg>
-        <pc:spChg chg="add del">
-          <ac:chgData name="Hadia Akbar" userId="19362115565_tp_box_2" providerId="OAuth2" clId="{FF77DECD-7ECC-48F4-BF82-9D4D4E0BE774}" dt="2026-08-04T05:58:01.491" v="1464" actId="26606"/>
-          <ac:spMkLst>
-            <pc:docMk/>
-            <pc:sldMk cId="1860897597" sldId="262"/>
-            <ac:spMk id="15" creationId="{BC68A55F-7B32-44D8-AEE5-1AF40532656C}"/>
-          </ac:spMkLst>
-        </pc:spChg>
-        <pc:spChg chg="add del">
-          <ac:chgData name="Hadia Akbar" userId="19362115565_tp_box_2" providerId="OAuth2" clId="{FF77DECD-7ECC-48F4-BF82-9D4D4E0BE774}" dt="2026-08-04T05:58:01.491" v="1464" actId="26606"/>
-          <ac:spMkLst>
-            <pc:docMk/>
-            <pc:sldMk cId="1860897597" sldId="262"/>
-            <ac:spMk id="16" creationId="{CD1AAA2C-FBBE-42AA-B869-31D524B7653F}"/>
           </ac:spMkLst>
         </pc:spChg>
         <pc:spChg chg="add">
@@ -1208,60 +500,188 @@
           </ac:spMkLst>
         </pc:spChg>
         <pc:graphicFrameChg chg="add mod modGraphic">
-          <ac:chgData name="Hadia Akbar" userId="19362115565_tp_box_2" providerId="OAuth2" clId="{FF77DECD-7ECC-48F4-BF82-9D4D4E0BE774}" dt="2026-08-04T05:58:19.818" v="1467" actId="12100"/>
+          <ac:chgData name="Hadia Akbar" userId="19362115565_tp_box_2" providerId="OAuth2" clId="{FF77DECD-7ECC-48F4-BF82-9D4D4E0BE774}" dt="2026-08-06T17:41:03.925" v="2039" actId="20577"/>
           <ac:graphicFrameMkLst>
             <pc:docMk/>
             <pc:sldMk cId="1860897597" sldId="262"/>
             <ac:graphicFrameMk id="5" creationId="{7990CB0E-8803-D419-DBC6-4068A222A4E0}"/>
           </ac:graphicFrameMkLst>
         </pc:graphicFrameChg>
-        <pc:cxnChg chg="add del">
-          <ac:chgData name="Hadia Akbar" userId="19362115565_tp_box_2" providerId="OAuth2" clId="{FF77DECD-7ECC-48F4-BF82-9D4D4E0BE774}" dt="2026-08-04T05:57:03.252" v="1438" actId="26606"/>
-          <ac:cxnSpMkLst>
-            <pc:docMk/>
-            <pc:sldMk cId="1860897597" sldId="262"/>
-            <ac:cxnSpMk id="12" creationId="{C8F51B3F-8331-4E4A-AE96-D47B1006EEAD}"/>
-          </ac:cxnSpMkLst>
-        </pc:cxnChg>
       </pc:sldChg>
-      <pc:sldChg chg="new del">
-        <pc:chgData name="Hadia Akbar" userId="19362115565_tp_box_2" providerId="OAuth2" clId="{FF77DECD-7ECC-48F4-BF82-9D4D4E0BE774}" dt="2026-08-04T05:38:54.604" v="1153" actId="680"/>
+      <pc:sldChg chg="addSp delSp modSp new mod">
+        <pc:chgData name="Hadia Akbar" userId="19362115565_tp_box_2" providerId="OAuth2" clId="{FF77DECD-7ECC-48F4-BF82-9D4D4E0BE774}" dt="2026-08-06T18:04:11.900" v="2191" actId="1076"/>
         <pc:sldMkLst>
           <pc:docMk/>
-          <pc:sldMk cId="505686083" sldId="263"/>
-        </pc:sldMkLst>
-      </pc:sldChg>
-      <pc:sldChg chg="addSp delSp modSp new del mod">
-        <pc:chgData name="Hadia Akbar" userId="19362115565_tp_box_2" providerId="OAuth2" clId="{FF77DECD-7ECC-48F4-BF82-9D4D4E0BE774}" dt="2026-08-04T05:56:41.899" v="1414" actId="47"/>
-        <pc:sldMkLst>
-          <pc:docMk/>
-          <pc:sldMk cId="2207539272" sldId="263"/>
+          <pc:sldMk cId="3049088380" sldId="263"/>
         </pc:sldMkLst>
         <pc:spChg chg="mod">
-          <ac:chgData name="Hadia Akbar" userId="19362115565_tp_box_2" providerId="OAuth2" clId="{FF77DECD-7ECC-48F4-BF82-9D4D4E0BE774}" dt="2026-08-04T05:52:14.903" v="1221" actId="403"/>
+          <ac:chgData name="Hadia Akbar" userId="19362115565_tp_box_2" providerId="OAuth2" clId="{FF77DECD-7ECC-48F4-BF82-9D4D4E0BE774}" dt="2026-08-06T18:00:25.263" v="2168" actId="20577"/>
           <ac:spMkLst>
             <pc:docMk/>
-            <pc:sldMk cId="2207539272" sldId="263"/>
-            <ac:spMk id="2" creationId="{EC5BB3DC-9F57-5579-32FA-021D9B6E4B8A}"/>
+            <pc:sldMk cId="3049088380" sldId="263"/>
+            <ac:spMk id="2" creationId="{677397B9-32DC-1DA8-48FB-77181BAFA5D8}"/>
           </ac:spMkLst>
         </pc:spChg>
         <pc:spChg chg="del">
-          <ac:chgData name="Hadia Akbar" userId="19362115565_tp_box_2" providerId="OAuth2" clId="{FF77DECD-7ECC-48F4-BF82-9D4D4E0BE774}" dt="2026-08-04T05:51:42.019" v="1217" actId="478"/>
+          <ac:chgData name="Hadia Akbar" userId="19362115565_tp_box_2" providerId="OAuth2" clId="{FF77DECD-7ECC-48F4-BF82-9D4D4E0BE774}" dt="2026-08-06T17:59:03.295" v="2157" actId="22"/>
           <ac:spMkLst>
             <pc:docMk/>
-            <pc:sldMk cId="2207539272" sldId="263"/>
-            <ac:spMk id="3" creationId="{273C70FF-DD64-21E8-E3DA-C2B7452D6636}"/>
+            <pc:sldMk cId="3049088380" sldId="263"/>
+            <ac:spMk id="3" creationId="{FFE6C4C1-8FDB-0727-F9F3-1462F2116C93}"/>
           </ac:spMkLst>
         </pc:spChg>
-        <pc:graphicFrameChg chg="add del mod">
-          <ac:chgData name="Hadia Akbar" userId="19362115565_tp_box_2" providerId="OAuth2" clId="{FF77DECD-7ECC-48F4-BF82-9D4D4E0BE774}" dt="2026-08-04T05:56:40.265" v="1413" actId="478"/>
-          <ac:graphicFrameMkLst>
+        <pc:spChg chg="add del mod">
+          <ac:chgData name="Hadia Akbar" userId="19362115565_tp_box_2" providerId="OAuth2" clId="{FF77DECD-7ECC-48F4-BF82-9D4D4E0BE774}" dt="2026-08-06T18:00:19.214" v="2165" actId="478"/>
+          <ac:spMkLst>
             <pc:docMk/>
-            <pc:sldMk cId="2207539272" sldId="263"/>
-            <ac:graphicFrameMk id="44" creationId="{32770E54-EA9A-8900-77E3-868AFB717EF4}"/>
-          </ac:graphicFrameMkLst>
-        </pc:graphicFrameChg>
+            <pc:sldMk cId="3049088380" sldId="263"/>
+            <ac:spMk id="7" creationId="{BA761D6F-50C2-58CD-4665-5B1AC974E50C}"/>
+          </ac:spMkLst>
+        </pc:spChg>
+        <pc:picChg chg="add del mod">
+          <ac:chgData name="Hadia Akbar" userId="19362115565_tp_box_2" providerId="OAuth2" clId="{FF77DECD-7ECC-48F4-BF82-9D4D4E0BE774}" dt="2026-08-05T01:52:09.334" v="1489" actId="478"/>
+          <ac:picMkLst>
+            <pc:docMk/>
+            <pc:sldMk cId="3049088380" sldId="263"/>
+            <ac:picMk id="5" creationId="{2DCF294D-696E-B3E7-B4DB-73824B2BC177}"/>
+          </ac:picMkLst>
+        </pc:picChg>
+        <pc:picChg chg="add del mod ord">
+          <ac:chgData name="Hadia Akbar" userId="19362115565_tp_box_2" providerId="OAuth2" clId="{FF77DECD-7ECC-48F4-BF82-9D4D4E0BE774}" dt="2026-08-06T17:59:58.011" v="2161" actId="478"/>
+          <ac:picMkLst>
+            <pc:docMk/>
+            <pc:sldMk cId="3049088380" sldId="263"/>
+            <ac:picMk id="5" creationId="{B07AB3D5-5574-B36A-BB19-BD3B5431A5C2}"/>
+          </ac:picMkLst>
+        </pc:picChg>
+        <pc:picChg chg="add del mod">
+          <ac:chgData name="Hadia Akbar" userId="19362115565_tp_box_2" providerId="OAuth2" clId="{FF77DECD-7ECC-48F4-BF82-9D4D4E0BE774}" dt="2026-08-05T01:56:48.616" v="1504" actId="478"/>
+          <ac:picMkLst>
+            <pc:docMk/>
+            <pc:sldMk cId="3049088380" sldId="263"/>
+            <ac:picMk id="7" creationId="{966DD079-845D-F6BA-0776-163B243F519A}"/>
+          </ac:picMkLst>
+        </pc:picChg>
+        <pc:picChg chg="add mod">
+          <ac:chgData name="Hadia Akbar" userId="19362115565_tp_box_2" providerId="OAuth2" clId="{FF77DECD-7ECC-48F4-BF82-9D4D4E0BE774}" dt="2026-08-06T18:04:11.900" v="2191" actId="1076"/>
+          <ac:picMkLst>
+            <pc:docMk/>
+            <pc:sldMk cId="3049088380" sldId="263"/>
+            <ac:picMk id="9" creationId="{504CD099-FD1D-A9E1-17F7-A5EC85BB4181}"/>
+          </ac:picMkLst>
+        </pc:picChg>
+        <pc:picChg chg="add del">
+          <ac:chgData name="Hadia Akbar" userId="19362115565_tp_box_2" providerId="OAuth2" clId="{FF77DECD-7ECC-48F4-BF82-9D4D4E0BE774}" dt="2026-08-05T01:56:46.597" v="1503" actId="478"/>
+          <ac:picMkLst>
+            <pc:docMk/>
+            <pc:sldMk cId="3049088380" sldId="263"/>
+            <ac:picMk id="9" creationId="{65C44170-AD83-CE40-01F4-39C7DBBA4A43}"/>
+          </ac:picMkLst>
+        </pc:picChg>
+        <pc:picChg chg="add del mod">
+          <ac:chgData name="Hadia Akbar" userId="19362115565_tp_box_2" providerId="OAuth2" clId="{FF77DECD-7ECC-48F4-BF82-9D4D4E0BE774}" dt="2026-08-06T18:00:23.512" v="2166" actId="478"/>
+          <ac:picMkLst>
+            <pc:docMk/>
+            <pc:sldMk cId="3049088380" sldId="263"/>
+            <ac:picMk id="11" creationId="{C917D0C1-D200-6845-C03F-81BCEF6EA8D6}"/>
+          </ac:picMkLst>
+        </pc:picChg>
       </pc:sldChg>
+      <pc:sldMasterChg chg="del delSldLayout">
+        <pc:chgData name="Hadia Akbar" userId="19362115565_tp_box_2" providerId="OAuth2" clId="{FF77DECD-7ECC-48F4-BF82-9D4D4E0BE774}" dt="2026-08-06T18:03:26.490" v="2170" actId="47"/>
+        <pc:sldMasterMkLst>
+          <pc:docMk/>
+          <pc:sldMasterMk cId="1811082288" sldId="2147483660"/>
+        </pc:sldMasterMkLst>
+        <pc:sldLayoutChg chg="del">
+          <pc:chgData name="Hadia Akbar" userId="19362115565_tp_box_2" providerId="OAuth2" clId="{FF77DECD-7ECC-48F4-BF82-9D4D4E0BE774}" dt="2026-08-06T18:03:26.490" v="2170" actId="47"/>
+          <pc:sldLayoutMkLst>
+            <pc:docMk/>
+            <pc:sldMasterMk cId="1811082288" sldId="2147483660"/>
+            <pc:sldLayoutMk cId="858527832" sldId="2147483661"/>
+          </pc:sldLayoutMkLst>
+        </pc:sldLayoutChg>
+        <pc:sldLayoutChg chg="del">
+          <pc:chgData name="Hadia Akbar" userId="19362115565_tp_box_2" providerId="OAuth2" clId="{FF77DECD-7ECC-48F4-BF82-9D4D4E0BE774}" dt="2026-08-06T18:03:26.490" v="2170" actId="47"/>
+          <pc:sldLayoutMkLst>
+            <pc:docMk/>
+            <pc:sldMasterMk cId="1811082288" sldId="2147483660"/>
+            <pc:sldLayoutMk cId="3388879508" sldId="2147483662"/>
+          </pc:sldLayoutMkLst>
+        </pc:sldLayoutChg>
+        <pc:sldLayoutChg chg="del">
+          <pc:chgData name="Hadia Akbar" userId="19362115565_tp_box_2" providerId="OAuth2" clId="{FF77DECD-7ECC-48F4-BF82-9D4D4E0BE774}" dt="2026-08-06T18:03:26.490" v="2170" actId="47"/>
+          <pc:sldLayoutMkLst>
+            <pc:docMk/>
+            <pc:sldMasterMk cId="1811082288" sldId="2147483660"/>
+            <pc:sldLayoutMk cId="592097471" sldId="2147483663"/>
+          </pc:sldLayoutMkLst>
+        </pc:sldLayoutChg>
+        <pc:sldLayoutChg chg="del">
+          <pc:chgData name="Hadia Akbar" userId="19362115565_tp_box_2" providerId="OAuth2" clId="{FF77DECD-7ECC-48F4-BF82-9D4D4E0BE774}" dt="2026-08-06T18:03:26.490" v="2170" actId="47"/>
+          <pc:sldLayoutMkLst>
+            <pc:docMk/>
+            <pc:sldMasterMk cId="1811082288" sldId="2147483660"/>
+            <pc:sldLayoutMk cId="2487724214" sldId="2147483664"/>
+          </pc:sldLayoutMkLst>
+        </pc:sldLayoutChg>
+        <pc:sldLayoutChg chg="del">
+          <pc:chgData name="Hadia Akbar" userId="19362115565_tp_box_2" providerId="OAuth2" clId="{FF77DECD-7ECC-48F4-BF82-9D4D4E0BE774}" dt="2026-08-06T18:03:26.490" v="2170" actId="47"/>
+          <pc:sldLayoutMkLst>
+            <pc:docMk/>
+            <pc:sldMasterMk cId="1811082288" sldId="2147483660"/>
+            <pc:sldLayoutMk cId="3101536712" sldId="2147483665"/>
+          </pc:sldLayoutMkLst>
+        </pc:sldLayoutChg>
+        <pc:sldLayoutChg chg="del">
+          <pc:chgData name="Hadia Akbar" userId="19362115565_tp_box_2" providerId="OAuth2" clId="{FF77DECD-7ECC-48F4-BF82-9D4D4E0BE774}" dt="2026-08-06T18:03:26.490" v="2170" actId="47"/>
+          <pc:sldLayoutMkLst>
+            <pc:docMk/>
+            <pc:sldMasterMk cId="1811082288" sldId="2147483660"/>
+            <pc:sldLayoutMk cId="83738167" sldId="2147483666"/>
+          </pc:sldLayoutMkLst>
+        </pc:sldLayoutChg>
+        <pc:sldLayoutChg chg="del">
+          <pc:chgData name="Hadia Akbar" userId="19362115565_tp_box_2" providerId="OAuth2" clId="{FF77DECD-7ECC-48F4-BF82-9D4D4E0BE774}" dt="2026-08-06T18:03:26.490" v="2170" actId="47"/>
+          <pc:sldLayoutMkLst>
+            <pc:docMk/>
+            <pc:sldMasterMk cId="1811082288" sldId="2147483660"/>
+            <pc:sldLayoutMk cId="3714056911" sldId="2147483667"/>
+          </pc:sldLayoutMkLst>
+        </pc:sldLayoutChg>
+        <pc:sldLayoutChg chg="del">
+          <pc:chgData name="Hadia Akbar" userId="19362115565_tp_box_2" providerId="OAuth2" clId="{FF77DECD-7ECC-48F4-BF82-9D4D4E0BE774}" dt="2026-08-06T18:03:26.490" v="2170" actId="47"/>
+          <pc:sldLayoutMkLst>
+            <pc:docMk/>
+            <pc:sldMasterMk cId="1811082288" sldId="2147483660"/>
+            <pc:sldLayoutMk cId="4157770685" sldId="2147483668"/>
+          </pc:sldLayoutMkLst>
+        </pc:sldLayoutChg>
+        <pc:sldLayoutChg chg="del">
+          <pc:chgData name="Hadia Akbar" userId="19362115565_tp_box_2" providerId="OAuth2" clId="{FF77DECD-7ECC-48F4-BF82-9D4D4E0BE774}" dt="2026-08-06T18:03:26.490" v="2170" actId="47"/>
+          <pc:sldLayoutMkLst>
+            <pc:docMk/>
+            <pc:sldMasterMk cId="1811082288" sldId="2147483660"/>
+            <pc:sldLayoutMk cId="468236508" sldId="2147483669"/>
+          </pc:sldLayoutMkLst>
+        </pc:sldLayoutChg>
+        <pc:sldLayoutChg chg="del">
+          <pc:chgData name="Hadia Akbar" userId="19362115565_tp_box_2" providerId="OAuth2" clId="{FF77DECD-7ECC-48F4-BF82-9D4D4E0BE774}" dt="2026-08-06T18:03:26.490" v="2170" actId="47"/>
+          <pc:sldLayoutMkLst>
+            <pc:docMk/>
+            <pc:sldMasterMk cId="1811082288" sldId="2147483660"/>
+            <pc:sldLayoutMk cId="3331122569" sldId="2147483670"/>
+          </pc:sldLayoutMkLst>
+        </pc:sldLayoutChg>
+        <pc:sldLayoutChg chg="del">
+          <pc:chgData name="Hadia Akbar" userId="19362115565_tp_box_2" providerId="OAuth2" clId="{FF77DECD-7ECC-48F4-BF82-9D4D4E0BE774}" dt="2026-08-06T18:03:26.490" v="2170" actId="47"/>
+          <pc:sldLayoutMkLst>
+            <pc:docMk/>
+            <pc:sldMasterMk cId="1811082288" sldId="2147483660"/>
+            <pc:sldLayoutMk cId="3414839042" sldId="2147483671"/>
+          </pc:sldLayoutMkLst>
+        </pc:sldLayoutChg>
+      </pc:sldMasterChg>
     </pc:docChg>
   </pc:docChgLst>
 </pc:chgInfo>
@@ -2014,11 +1434,758 @@
 </dgm:colorsDef>
 </file>
 
+<file path=ppt/diagrams/colors2.xml><?xml version="1.0" encoding="utf-8"?>
+<dgm:colorsDef xmlns:dgm="http://schemas.openxmlformats.org/drawingml/2006/diagram" xmlns:a="http://schemas.openxmlformats.org/drawingml/2006/main" uniqueId="urn:microsoft.com/office/officeart/2005/8/colors/accent1_2">
+  <dgm:title val=""/>
+  <dgm:desc val=""/>
+  <dgm:catLst>
+    <dgm:cat type="accent1" pri="11200"/>
+  </dgm:catLst>
+  <dgm:styleLbl name="node0">
+    <dgm:fillClrLst meth="repeat">
+      <a:schemeClr val="accent1"/>
+    </dgm:fillClrLst>
+    <dgm:linClrLst meth="repeat">
+      <a:schemeClr val="lt1"/>
+    </dgm:linClrLst>
+    <dgm:effectClrLst/>
+    <dgm:txLinClrLst/>
+    <dgm:txFillClrLst/>
+    <dgm:txEffectClrLst/>
+  </dgm:styleLbl>
+  <dgm:styleLbl name="alignNode1">
+    <dgm:fillClrLst meth="repeat">
+      <a:schemeClr val="accent1"/>
+    </dgm:fillClrLst>
+    <dgm:linClrLst meth="repeat">
+      <a:schemeClr val="accent1"/>
+    </dgm:linClrLst>
+    <dgm:effectClrLst/>
+    <dgm:txLinClrLst/>
+    <dgm:txFillClrLst/>
+    <dgm:txEffectClrLst/>
+  </dgm:styleLbl>
+  <dgm:styleLbl name="node1">
+    <dgm:fillClrLst meth="repeat">
+      <a:schemeClr val="accent1"/>
+    </dgm:fillClrLst>
+    <dgm:linClrLst meth="repeat">
+      <a:schemeClr val="lt1"/>
+    </dgm:linClrLst>
+    <dgm:effectClrLst/>
+    <dgm:txLinClrLst/>
+    <dgm:txFillClrLst/>
+    <dgm:txEffectClrLst/>
+  </dgm:styleLbl>
+  <dgm:styleLbl name="lnNode1">
+    <dgm:fillClrLst meth="repeat">
+      <a:schemeClr val="accent1"/>
+    </dgm:fillClrLst>
+    <dgm:linClrLst meth="repeat">
+      <a:schemeClr val="lt1"/>
+    </dgm:linClrLst>
+    <dgm:effectClrLst/>
+    <dgm:txLinClrLst/>
+    <dgm:txFillClrLst/>
+    <dgm:txEffectClrLst/>
+  </dgm:styleLbl>
+  <dgm:styleLbl name="vennNode1">
+    <dgm:fillClrLst meth="repeat">
+      <a:schemeClr val="accent1">
+        <a:alpha val="50000"/>
+      </a:schemeClr>
+    </dgm:fillClrLst>
+    <dgm:linClrLst meth="repeat">
+      <a:schemeClr val="lt1"/>
+    </dgm:linClrLst>
+    <dgm:effectClrLst/>
+    <dgm:txLinClrLst/>
+    <dgm:txFillClrLst/>
+    <dgm:txEffectClrLst/>
+  </dgm:styleLbl>
+  <dgm:styleLbl name="node2">
+    <dgm:fillClrLst meth="repeat">
+      <a:schemeClr val="accent1"/>
+    </dgm:fillClrLst>
+    <dgm:linClrLst meth="repeat">
+      <a:schemeClr val="lt1"/>
+    </dgm:linClrLst>
+    <dgm:effectClrLst/>
+    <dgm:txLinClrLst/>
+    <dgm:txFillClrLst/>
+    <dgm:txEffectClrLst/>
+  </dgm:styleLbl>
+  <dgm:styleLbl name="node3">
+    <dgm:fillClrLst meth="repeat">
+      <a:schemeClr val="accent1"/>
+    </dgm:fillClrLst>
+    <dgm:linClrLst meth="repeat">
+      <a:schemeClr val="lt1"/>
+    </dgm:linClrLst>
+    <dgm:effectClrLst/>
+    <dgm:txLinClrLst/>
+    <dgm:txFillClrLst/>
+    <dgm:txEffectClrLst/>
+  </dgm:styleLbl>
+  <dgm:styleLbl name="node4">
+    <dgm:fillClrLst meth="repeat">
+      <a:schemeClr val="accent1"/>
+    </dgm:fillClrLst>
+    <dgm:linClrLst meth="repeat">
+      <a:schemeClr val="lt1"/>
+    </dgm:linClrLst>
+    <dgm:effectClrLst/>
+    <dgm:txLinClrLst/>
+    <dgm:txFillClrLst/>
+    <dgm:txEffectClrLst/>
+  </dgm:styleLbl>
+  <dgm:styleLbl name="fgImgPlace1">
+    <dgm:fillClrLst meth="repeat">
+      <a:schemeClr val="accent1">
+        <a:tint val="50000"/>
+      </a:schemeClr>
+    </dgm:fillClrLst>
+    <dgm:linClrLst meth="repeat">
+      <a:schemeClr val="lt1"/>
+    </dgm:linClrLst>
+    <dgm:effectClrLst/>
+    <dgm:txLinClrLst/>
+    <dgm:txFillClrLst meth="repeat">
+      <a:schemeClr val="lt1"/>
+    </dgm:txFillClrLst>
+    <dgm:txEffectClrLst/>
+  </dgm:styleLbl>
+  <dgm:styleLbl name="alignImgPlace1">
+    <dgm:fillClrLst meth="repeat">
+      <a:schemeClr val="accent1">
+        <a:tint val="50000"/>
+      </a:schemeClr>
+    </dgm:fillClrLst>
+    <dgm:linClrLst meth="repeat">
+      <a:schemeClr val="lt1"/>
+    </dgm:linClrLst>
+    <dgm:effectClrLst/>
+    <dgm:txLinClrLst/>
+    <dgm:txFillClrLst meth="repeat">
+      <a:schemeClr val="lt1"/>
+    </dgm:txFillClrLst>
+    <dgm:txEffectClrLst/>
+  </dgm:styleLbl>
+  <dgm:styleLbl name="bgImgPlace1">
+    <dgm:fillClrLst meth="repeat">
+      <a:schemeClr val="accent1">
+        <a:tint val="50000"/>
+      </a:schemeClr>
+    </dgm:fillClrLst>
+    <dgm:linClrLst meth="repeat">
+      <a:schemeClr val="lt1"/>
+    </dgm:linClrLst>
+    <dgm:effectClrLst/>
+    <dgm:txLinClrLst/>
+    <dgm:txFillClrLst meth="repeat">
+      <a:schemeClr val="lt1"/>
+    </dgm:txFillClrLst>
+    <dgm:txEffectClrLst/>
+  </dgm:styleLbl>
+  <dgm:styleLbl name="sibTrans2D1">
+    <dgm:fillClrLst meth="repeat">
+      <a:schemeClr val="accent1">
+        <a:tint val="60000"/>
+      </a:schemeClr>
+    </dgm:fillClrLst>
+    <dgm:linClrLst meth="repeat">
+      <a:schemeClr val="accent1">
+        <a:tint val="60000"/>
+      </a:schemeClr>
+    </dgm:linClrLst>
+    <dgm:effectClrLst/>
+    <dgm:txLinClrLst/>
+    <dgm:txFillClrLst/>
+    <dgm:txEffectClrLst/>
+  </dgm:styleLbl>
+  <dgm:styleLbl name="fgSibTrans2D1">
+    <dgm:fillClrLst meth="repeat">
+      <a:schemeClr val="accent1">
+        <a:tint val="60000"/>
+      </a:schemeClr>
+    </dgm:fillClrLst>
+    <dgm:linClrLst meth="repeat">
+      <a:schemeClr val="accent1">
+        <a:tint val="60000"/>
+      </a:schemeClr>
+    </dgm:linClrLst>
+    <dgm:effectClrLst/>
+    <dgm:txLinClrLst/>
+    <dgm:txFillClrLst/>
+    <dgm:txEffectClrLst/>
+  </dgm:styleLbl>
+  <dgm:styleLbl name="bgSibTrans2D1">
+    <dgm:fillClrLst meth="repeat">
+      <a:schemeClr val="accent1">
+        <a:tint val="60000"/>
+      </a:schemeClr>
+    </dgm:fillClrLst>
+    <dgm:linClrLst meth="repeat">
+      <a:schemeClr val="accent1">
+        <a:tint val="60000"/>
+      </a:schemeClr>
+    </dgm:linClrLst>
+    <dgm:effectClrLst/>
+    <dgm:txLinClrLst/>
+    <dgm:txFillClrLst/>
+    <dgm:txEffectClrLst/>
+  </dgm:styleLbl>
+  <dgm:styleLbl name="sibTrans1D1">
+    <dgm:fillClrLst meth="repeat">
+      <a:schemeClr val="accent1"/>
+    </dgm:fillClrLst>
+    <dgm:linClrLst meth="repeat">
+      <a:schemeClr val="accent1"/>
+    </dgm:linClrLst>
+    <dgm:effectClrLst/>
+    <dgm:txLinClrLst/>
+    <dgm:txFillClrLst meth="repeat">
+      <a:schemeClr val="tx1"/>
+    </dgm:txFillClrLst>
+    <dgm:txEffectClrLst/>
+  </dgm:styleLbl>
+  <dgm:styleLbl name="callout">
+    <dgm:fillClrLst meth="repeat">
+      <a:schemeClr val="accent1"/>
+    </dgm:fillClrLst>
+    <dgm:linClrLst meth="repeat">
+      <a:schemeClr val="accent1">
+        <a:tint val="50000"/>
+      </a:schemeClr>
+    </dgm:linClrLst>
+    <dgm:effectClrLst/>
+    <dgm:txLinClrLst/>
+    <dgm:txFillClrLst meth="repeat">
+      <a:schemeClr val="tx1"/>
+    </dgm:txFillClrLst>
+    <dgm:txEffectClrLst/>
+  </dgm:styleLbl>
+  <dgm:styleLbl name="asst0">
+    <dgm:fillClrLst meth="repeat">
+      <a:schemeClr val="accent1"/>
+    </dgm:fillClrLst>
+    <dgm:linClrLst meth="repeat">
+      <a:schemeClr val="lt1"/>
+    </dgm:linClrLst>
+    <dgm:effectClrLst/>
+    <dgm:txLinClrLst/>
+    <dgm:txFillClrLst/>
+    <dgm:txEffectClrLst/>
+  </dgm:styleLbl>
+  <dgm:styleLbl name="asst1">
+    <dgm:fillClrLst meth="repeat">
+      <a:schemeClr val="accent1"/>
+    </dgm:fillClrLst>
+    <dgm:linClrLst meth="repeat">
+      <a:schemeClr val="lt1"/>
+    </dgm:linClrLst>
+    <dgm:effectClrLst/>
+    <dgm:txLinClrLst/>
+    <dgm:txFillClrLst/>
+    <dgm:txEffectClrLst/>
+  </dgm:styleLbl>
+  <dgm:styleLbl name="asst2">
+    <dgm:fillClrLst meth="repeat">
+      <a:schemeClr val="accent1"/>
+    </dgm:fillClrLst>
+    <dgm:linClrLst meth="repeat">
+      <a:schemeClr val="lt1"/>
+    </dgm:linClrLst>
+    <dgm:effectClrLst/>
+    <dgm:txLinClrLst/>
+    <dgm:txFillClrLst/>
+    <dgm:txEffectClrLst/>
+  </dgm:styleLbl>
+  <dgm:styleLbl name="asst3">
+    <dgm:fillClrLst meth="repeat">
+      <a:schemeClr val="accent1"/>
+    </dgm:fillClrLst>
+    <dgm:linClrLst meth="repeat">
+      <a:schemeClr val="lt1"/>
+    </dgm:linClrLst>
+    <dgm:effectClrLst/>
+    <dgm:txLinClrLst/>
+    <dgm:txFillClrLst/>
+    <dgm:txEffectClrLst/>
+  </dgm:styleLbl>
+  <dgm:styleLbl name="asst4">
+    <dgm:fillClrLst meth="repeat">
+      <a:schemeClr val="accent1"/>
+    </dgm:fillClrLst>
+    <dgm:linClrLst meth="repeat">
+      <a:schemeClr val="lt1"/>
+    </dgm:linClrLst>
+    <dgm:effectClrLst/>
+    <dgm:txLinClrLst/>
+    <dgm:txFillClrLst/>
+    <dgm:txEffectClrLst/>
+  </dgm:styleLbl>
+  <dgm:styleLbl name="parChTrans2D1">
+    <dgm:fillClrLst meth="repeat">
+      <a:schemeClr val="accent1">
+        <a:tint val="60000"/>
+      </a:schemeClr>
+    </dgm:fillClrLst>
+    <dgm:linClrLst meth="repeat">
+      <a:schemeClr val="accent1">
+        <a:tint val="60000"/>
+      </a:schemeClr>
+    </dgm:linClrLst>
+    <dgm:effectClrLst/>
+    <dgm:txLinClrLst/>
+    <dgm:txFillClrLst meth="repeat">
+      <a:schemeClr val="lt1"/>
+    </dgm:txFillClrLst>
+    <dgm:txEffectClrLst/>
+  </dgm:styleLbl>
+  <dgm:styleLbl name="parChTrans2D2">
+    <dgm:fillClrLst meth="repeat">
+      <a:schemeClr val="accent1"/>
+    </dgm:fillClrLst>
+    <dgm:linClrLst meth="repeat">
+      <a:schemeClr val="accent1"/>
+    </dgm:linClrLst>
+    <dgm:effectClrLst/>
+    <dgm:txLinClrLst/>
+    <dgm:txFillClrLst meth="repeat">
+      <a:schemeClr val="lt1"/>
+    </dgm:txFillClrLst>
+    <dgm:txEffectClrLst/>
+  </dgm:styleLbl>
+  <dgm:styleLbl name="parChTrans2D3">
+    <dgm:fillClrLst meth="repeat">
+      <a:schemeClr val="accent1"/>
+    </dgm:fillClrLst>
+    <dgm:linClrLst meth="repeat">
+      <a:schemeClr val="accent1"/>
+    </dgm:linClrLst>
+    <dgm:effectClrLst/>
+    <dgm:txLinClrLst/>
+    <dgm:txFillClrLst meth="repeat">
+      <a:schemeClr val="lt1"/>
+    </dgm:txFillClrLst>
+    <dgm:txEffectClrLst/>
+  </dgm:styleLbl>
+  <dgm:styleLbl name="parChTrans2D4">
+    <dgm:fillClrLst meth="repeat">
+      <a:schemeClr val="accent1"/>
+    </dgm:fillClrLst>
+    <dgm:linClrLst meth="repeat">
+      <a:schemeClr val="accent1"/>
+    </dgm:linClrLst>
+    <dgm:effectClrLst/>
+    <dgm:txLinClrLst/>
+    <dgm:txFillClrLst meth="repeat">
+      <a:schemeClr val="lt1"/>
+    </dgm:txFillClrLst>
+    <dgm:txEffectClrLst/>
+  </dgm:styleLbl>
+  <dgm:styleLbl name="parChTrans1D1">
+    <dgm:fillClrLst meth="repeat">
+      <a:schemeClr val="accent1"/>
+    </dgm:fillClrLst>
+    <dgm:linClrLst meth="repeat">
+      <a:schemeClr val="accent1">
+        <a:shade val="60000"/>
+      </a:schemeClr>
+    </dgm:linClrLst>
+    <dgm:effectClrLst/>
+    <dgm:txLinClrLst/>
+    <dgm:txFillClrLst meth="repeat">
+      <a:schemeClr val="tx1"/>
+    </dgm:txFillClrLst>
+    <dgm:txEffectClrLst/>
+  </dgm:styleLbl>
+  <dgm:styleLbl name="parChTrans1D2">
+    <dgm:fillClrLst meth="repeat">
+      <a:schemeClr val="accent1"/>
+    </dgm:fillClrLst>
+    <dgm:linClrLst meth="repeat">
+      <a:schemeClr val="accent1">
+        <a:shade val="60000"/>
+      </a:schemeClr>
+    </dgm:linClrLst>
+    <dgm:effectClrLst/>
+    <dgm:txLinClrLst/>
+    <dgm:txFillClrLst meth="repeat">
+      <a:schemeClr val="tx1"/>
+    </dgm:txFillClrLst>
+    <dgm:txEffectClrLst/>
+  </dgm:styleLbl>
+  <dgm:styleLbl name="parChTrans1D3">
+    <dgm:fillClrLst meth="repeat">
+      <a:schemeClr val="accent1"/>
+    </dgm:fillClrLst>
+    <dgm:linClrLst meth="repeat">
+      <a:schemeClr val="accent1">
+        <a:shade val="80000"/>
+      </a:schemeClr>
+    </dgm:linClrLst>
+    <dgm:effectClrLst/>
+    <dgm:txLinClrLst/>
+    <dgm:txFillClrLst meth="repeat">
+      <a:schemeClr val="tx1"/>
+    </dgm:txFillClrLst>
+    <dgm:txEffectClrLst/>
+  </dgm:styleLbl>
+  <dgm:styleLbl name="parChTrans1D4">
+    <dgm:fillClrLst meth="repeat">
+      <a:schemeClr val="accent1"/>
+    </dgm:fillClrLst>
+    <dgm:linClrLst meth="repeat">
+      <a:schemeClr val="accent1">
+        <a:shade val="80000"/>
+      </a:schemeClr>
+    </dgm:linClrLst>
+    <dgm:effectClrLst/>
+    <dgm:txLinClrLst/>
+    <dgm:txFillClrLst meth="repeat">
+      <a:schemeClr val="tx1"/>
+    </dgm:txFillClrLst>
+    <dgm:txEffectClrLst/>
+  </dgm:styleLbl>
+  <dgm:styleLbl name="fgAcc1">
+    <dgm:fillClrLst meth="repeat">
+      <a:schemeClr val="lt1">
+        <a:alpha val="90000"/>
+      </a:schemeClr>
+    </dgm:fillClrLst>
+    <dgm:linClrLst meth="repeat">
+      <a:schemeClr val="accent1"/>
+    </dgm:linClrLst>
+    <dgm:effectClrLst/>
+    <dgm:txLinClrLst/>
+    <dgm:txFillClrLst meth="repeat">
+      <a:schemeClr val="dk1"/>
+    </dgm:txFillClrLst>
+    <dgm:txEffectClrLst/>
+  </dgm:styleLbl>
+  <dgm:styleLbl name="conFgAcc1">
+    <dgm:fillClrLst meth="repeat">
+      <a:schemeClr val="lt1">
+        <a:alpha val="90000"/>
+      </a:schemeClr>
+    </dgm:fillClrLst>
+    <dgm:linClrLst meth="repeat">
+      <a:schemeClr val="accent1"/>
+    </dgm:linClrLst>
+    <dgm:effectClrLst/>
+    <dgm:txLinClrLst/>
+    <dgm:txFillClrLst meth="repeat">
+      <a:schemeClr val="dk1"/>
+    </dgm:txFillClrLst>
+    <dgm:txEffectClrLst/>
+  </dgm:styleLbl>
+  <dgm:styleLbl name="alignAcc1">
+    <dgm:fillClrLst meth="repeat">
+      <a:schemeClr val="lt1">
+        <a:alpha val="90000"/>
+      </a:schemeClr>
+    </dgm:fillClrLst>
+    <dgm:linClrLst meth="repeat">
+      <a:schemeClr val="accent1"/>
+    </dgm:linClrLst>
+    <dgm:effectClrLst/>
+    <dgm:txLinClrLst/>
+    <dgm:txFillClrLst meth="repeat">
+      <a:schemeClr val="dk1"/>
+    </dgm:txFillClrLst>
+    <dgm:txEffectClrLst/>
+  </dgm:styleLbl>
+  <dgm:styleLbl name="trAlignAcc1">
+    <dgm:fillClrLst meth="repeat">
+      <a:schemeClr val="lt1">
+        <a:alpha val="40000"/>
+      </a:schemeClr>
+    </dgm:fillClrLst>
+    <dgm:linClrLst meth="repeat">
+      <a:schemeClr val="accent1"/>
+    </dgm:linClrLst>
+    <dgm:effectClrLst/>
+    <dgm:txLinClrLst/>
+    <dgm:txFillClrLst meth="repeat">
+      <a:schemeClr val="dk1"/>
+    </dgm:txFillClrLst>
+    <dgm:txEffectClrLst/>
+  </dgm:styleLbl>
+  <dgm:styleLbl name="bgAcc1">
+    <dgm:fillClrLst meth="repeat">
+      <a:schemeClr val="lt1">
+        <a:alpha val="90000"/>
+      </a:schemeClr>
+    </dgm:fillClrLst>
+    <dgm:linClrLst meth="repeat">
+      <a:schemeClr val="accent1"/>
+    </dgm:linClrLst>
+    <dgm:effectClrLst/>
+    <dgm:txLinClrLst/>
+    <dgm:txFillClrLst meth="repeat">
+      <a:schemeClr val="dk1"/>
+    </dgm:txFillClrLst>
+    <dgm:txEffectClrLst/>
+  </dgm:styleLbl>
+  <dgm:styleLbl name="solidFgAcc1">
+    <dgm:fillClrLst meth="repeat">
+      <a:schemeClr val="lt1"/>
+    </dgm:fillClrLst>
+    <dgm:linClrLst meth="repeat">
+      <a:schemeClr val="accent1"/>
+    </dgm:linClrLst>
+    <dgm:effectClrLst/>
+    <dgm:txLinClrLst/>
+    <dgm:txFillClrLst meth="repeat">
+      <a:schemeClr val="dk1"/>
+    </dgm:txFillClrLst>
+    <dgm:txEffectClrLst/>
+  </dgm:styleLbl>
+  <dgm:styleLbl name="solidAlignAcc1">
+    <dgm:fillClrLst meth="repeat">
+      <a:schemeClr val="lt1"/>
+    </dgm:fillClrLst>
+    <dgm:linClrLst meth="repeat">
+      <a:schemeClr val="accent1"/>
+    </dgm:linClrLst>
+    <dgm:effectClrLst/>
+    <dgm:txLinClrLst/>
+    <dgm:txFillClrLst meth="repeat">
+      <a:schemeClr val="dk1"/>
+    </dgm:txFillClrLst>
+    <dgm:txEffectClrLst/>
+  </dgm:styleLbl>
+  <dgm:styleLbl name="solidBgAcc1">
+    <dgm:fillClrLst meth="repeat">
+      <a:schemeClr val="lt1"/>
+    </dgm:fillClrLst>
+    <dgm:linClrLst meth="repeat">
+      <a:schemeClr val="accent1"/>
+    </dgm:linClrLst>
+    <dgm:effectClrLst/>
+    <dgm:txLinClrLst/>
+    <dgm:txFillClrLst meth="repeat">
+      <a:schemeClr val="dk1"/>
+    </dgm:txFillClrLst>
+    <dgm:txEffectClrLst/>
+  </dgm:styleLbl>
+  <dgm:styleLbl name="fgAccFollowNode1">
+    <dgm:fillClrLst meth="repeat">
+      <a:schemeClr val="accent1">
+        <a:alpha val="90000"/>
+        <a:tint val="40000"/>
+      </a:schemeClr>
+    </dgm:fillClrLst>
+    <dgm:linClrLst meth="repeat">
+      <a:schemeClr val="accent1">
+        <a:alpha val="90000"/>
+        <a:tint val="40000"/>
+      </a:schemeClr>
+    </dgm:linClrLst>
+    <dgm:effectClrLst/>
+    <dgm:txLinClrLst/>
+    <dgm:txFillClrLst meth="repeat">
+      <a:schemeClr val="dk1"/>
+    </dgm:txFillClrLst>
+    <dgm:txEffectClrLst/>
+  </dgm:styleLbl>
+  <dgm:styleLbl name="alignAccFollowNode1">
+    <dgm:fillClrLst meth="repeat">
+      <a:schemeClr val="accent1">
+        <a:alpha val="90000"/>
+        <a:tint val="40000"/>
+      </a:schemeClr>
+    </dgm:fillClrLst>
+    <dgm:linClrLst meth="repeat">
+      <a:schemeClr val="accent1">
+        <a:alpha val="90000"/>
+        <a:tint val="40000"/>
+      </a:schemeClr>
+    </dgm:linClrLst>
+    <dgm:effectClrLst/>
+    <dgm:txLinClrLst/>
+    <dgm:txFillClrLst meth="repeat">
+      <a:schemeClr val="dk1"/>
+    </dgm:txFillClrLst>
+    <dgm:txEffectClrLst/>
+  </dgm:styleLbl>
+  <dgm:styleLbl name="bgAccFollowNode1">
+    <dgm:fillClrLst meth="repeat">
+      <a:schemeClr val="accent1">
+        <a:alpha val="90000"/>
+        <a:tint val="40000"/>
+      </a:schemeClr>
+    </dgm:fillClrLst>
+    <dgm:linClrLst meth="repeat">
+      <a:schemeClr val="accent1">
+        <a:alpha val="90000"/>
+        <a:tint val="40000"/>
+      </a:schemeClr>
+    </dgm:linClrLst>
+    <dgm:effectClrLst/>
+    <dgm:txLinClrLst/>
+    <dgm:txFillClrLst meth="repeat">
+      <a:schemeClr val="dk1"/>
+    </dgm:txFillClrLst>
+    <dgm:txEffectClrLst/>
+  </dgm:styleLbl>
+  <dgm:styleLbl name="fgAcc0">
+    <dgm:fillClrLst meth="repeat">
+      <a:schemeClr val="lt1">
+        <a:alpha val="90000"/>
+      </a:schemeClr>
+    </dgm:fillClrLst>
+    <dgm:linClrLst meth="repeat">
+      <a:schemeClr val="accent1"/>
+    </dgm:linClrLst>
+    <dgm:effectClrLst/>
+    <dgm:txLinClrLst/>
+    <dgm:txFillClrLst meth="repeat">
+      <a:schemeClr val="dk1"/>
+    </dgm:txFillClrLst>
+    <dgm:txEffectClrLst/>
+  </dgm:styleLbl>
+  <dgm:styleLbl name="fgAcc2">
+    <dgm:fillClrLst meth="repeat">
+      <a:schemeClr val="lt1">
+        <a:alpha val="90000"/>
+      </a:schemeClr>
+    </dgm:fillClrLst>
+    <dgm:linClrLst meth="repeat">
+      <a:schemeClr val="accent1"/>
+    </dgm:linClrLst>
+    <dgm:effectClrLst/>
+    <dgm:txLinClrLst/>
+    <dgm:txFillClrLst meth="repeat">
+      <a:schemeClr val="dk1"/>
+    </dgm:txFillClrLst>
+    <dgm:txEffectClrLst/>
+  </dgm:styleLbl>
+  <dgm:styleLbl name="fgAcc3">
+    <dgm:fillClrLst meth="repeat">
+      <a:schemeClr val="lt1">
+        <a:alpha val="90000"/>
+      </a:schemeClr>
+    </dgm:fillClrLst>
+    <dgm:linClrLst meth="repeat">
+      <a:schemeClr val="accent1"/>
+    </dgm:linClrLst>
+    <dgm:effectClrLst/>
+    <dgm:txLinClrLst/>
+    <dgm:txFillClrLst meth="repeat">
+      <a:schemeClr val="dk1"/>
+    </dgm:txFillClrLst>
+    <dgm:txEffectClrLst/>
+  </dgm:styleLbl>
+  <dgm:styleLbl name="fgAcc4">
+    <dgm:fillClrLst meth="repeat">
+      <a:schemeClr val="lt1">
+        <a:alpha val="90000"/>
+      </a:schemeClr>
+    </dgm:fillClrLst>
+    <dgm:linClrLst meth="repeat">
+      <a:schemeClr val="accent1"/>
+    </dgm:linClrLst>
+    <dgm:effectClrLst/>
+    <dgm:txLinClrLst/>
+    <dgm:txFillClrLst meth="repeat">
+      <a:schemeClr val="dk1"/>
+    </dgm:txFillClrLst>
+    <dgm:txEffectClrLst/>
+  </dgm:styleLbl>
+  <dgm:styleLbl name="bgShp">
+    <dgm:fillClrLst meth="repeat">
+      <a:schemeClr val="accent1">
+        <a:tint val="40000"/>
+      </a:schemeClr>
+    </dgm:fillClrLst>
+    <dgm:linClrLst meth="repeat">
+      <a:schemeClr val="accent1"/>
+    </dgm:linClrLst>
+    <dgm:effectClrLst/>
+    <dgm:txLinClrLst/>
+    <dgm:txFillClrLst meth="repeat">
+      <a:schemeClr val="dk1"/>
+    </dgm:txFillClrLst>
+    <dgm:txEffectClrLst/>
+  </dgm:styleLbl>
+  <dgm:styleLbl name="dkBgShp">
+    <dgm:fillClrLst meth="repeat">
+      <a:schemeClr val="accent1">
+        <a:shade val="80000"/>
+      </a:schemeClr>
+    </dgm:fillClrLst>
+    <dgm:linClrLst meth="repeat">
+      <a:schemeClr val="accent1"/>
+    </dgm:linClrLst>
+    <dgm:effectClrLst/>
+    <dgm:txLinClrLst/>
+    <dgm:txFillClrLst meth="repeat">
+      <a:schemeClr val="lt1"/>
+    </dgm:txFillClrLst>
+    <dgm:txEffectClrLst/>
+  </dgm:styleLbl>
+  <dgm:styleLbl name="trBgShp">
+    <dgm:fillClrLst meth="repeat">
+      <a:schemeClr val="accent1">
+        <a:tint val="50000"/>
+        <a:alpha val="40000"/>
+      </a:schemeClr>
+    </dgm:fillClrLst>
+    <dgm:linClrLst meth="repeat">
+      <a:schemeClr val="accent1"/>
+    </dgm:linClrLst>
+    <dgm:effectClrLst/>
+    <dgm:txLinClrLst/>
+    <dgm:txFillClrLst meth="repeat">
+      <a:schemeClr val="lt1"/>
+    </dgm:txFillClrLst>
+    <dgm:txEffectClrLst/>
+  </dgm:styleLbl>
+  <dgm:styleLbl name="fgShp">
+    <dgm:fillClrLst meth="repeat">
+      <a:schemeClr val="accent1">
+        <a:tint val="60000"/>
+      </a:schemeClr>
+    </dgm:fillClrLst>
+    <dgm:linClrLst meth="repeat">
+      <a:schemeClr val="lt1"/>
+    </dgm:linClrLst>
+    <dgm:effectClrLst/>
+    <dgm:txLinClrLst/>
+    <dgm:txFillClrLst meth="repeat">
+      <a:schemeClr val="dk1"/>
+    </dgm:txFillClrLst>
+    <dgm:txEffectClrLst/>
+  </dgm:styleLbl>
+  <dgm:styleLbl name="revTx">
+    <dgm:fillClrLst meth="repeat">
+      <a:schemeClr val="lt1">
+        <a:alpha val="0"/>
+      </a:schemeClr>
+    </dgm:fillClrLst>
+    <dgm:linClrLst meth="repeat">
+      <a:schemeClr val="dk1">
+        <a:alpha val="0"/>
+      </a:schemeClr>
+    </dgm:linClrLst>
+    <dgm:effectClrLst/>
+    <dgm:txLinClrLst/>
+    <dgm:txFillClrLst meth="repeat">
+      <a:schemeClr val="tx1"/>
+    </dgm:txFillClrLst>
+    <dgm:txEffectClrLst/>
+  </dgm:styleLbl>
+</dgm:colorsDef>
+</file>
+
 <file path=ppt/diagrams/data1.xml><?xml version="1.0" encoding="utf-8"?>
 <dgm:dataModel xmlns:dgm="http://schemas.openxmlformats.org/drawingml/2006/diagram" xmlns:a="http://schemas.openxmlformats.org/drawingml/2006/main">
   <dgm:ptLst>
     <dgm:pt modelId="{332819EA-3386-42B9-9077-01AD17EAD6CF}" type="doc">
-      <dgm:prSet loTypeId="urn:microsoft.com/office/officeart/2005/8/layout/vList2" loCatId="list" qsTypeId="urn:microsoft.com/office/officeart/2005/8/quickstyle/simple1" qsCatId="simple" csTypeId="urn:microsoft.com/office/officeart/2005/8/colors/accent1_2" csCatId="accent1" phldr="1"/>
+      <dgm:prSet loTypeId="urn:microsoft.com/office/officeart/2008/layout/LinedList" loCatId="list" qsTypeId="urn:microsoft.com/office/officeart/2005/8/quickstyle/simple1" qsCatId="simple" csTypeId="urn:microsoft.com/office/officeart/2005/8/colors/accent1_2" csCatId="accent1" phldr="1"/>
       <dgm:spPr/>
       <dgm:t>
         <a:bodyPr/>
@@ -2037,7 +2204,7 @@
         <a:p>
           <a:r>
             <a:rPr lang="en-US" dirty="0"/>
-            <a:t>Representing agricultural uses</a:t>
+            <a:t>Representing agricultural uses.</a:t>
           </a:r>
         </a:p>
       </dgm:t>
@@ -2072,8 +2239,8 @@
         <a:lstStyle/>
         <a:p>
           <a:r>
-            <a:rPr lang="en-US"/>
-            <a:t>All depletions occur in summer. </a:t>
+            <a:rPr lang="en-US" dirty="0"/>
+            <a:t>All depletions occur in summer. Winter depletions are negligible.</a:t>
           </a:r>
         </a:p>
       </dgm:t>
@@ -2108,8 +2275,8 @@
         <a:lstStyle/>
         <a:p>
           <a:r>
-            <a:rPr lang="en-US"/>
-            <a:t>Historic water use = proxy to allowable use</a:t>
+            <a:rPr lang="en-US" dirty="0"/>
+            <a:t>Historical water use = proxy to allowable use.</a:t>
           </a:r>
         </a:p>
       </dgm:t>
@@ -2144,8 +2311,8 @@
         <a:lstStyle/>
         <a:p>
           <a:r>
-            <a:rPr lang="en-US"/>
-            <a:t>Store winter flows. Allocate summer natural flows to users based on historic flows.</a:t>
+            <a:rPr lang="en-US" dirty="0"/>
+            <a:t>Users can consume, conserve or sell water.</a:t>
           </a:r>
         </a:p>
       </dgm:t>
@@ -2172,7 +2339,7 @@
         </a:p>
       </dgm:t>
     </dgm:pt>
-    <dgm:pt modelId="{979A6407-7D95-402A-AF18-F494419A9494}">
+    <dgm:pt modelId="{57CB9360-81C7-4F12-96AB-4B40C18E715E}">
       <dgm:prSet/>
       <dgm:spPr/>
       <dgm:t>
@@ -2180,13 +2347,13 @@
         <a:lstStyle/>
         <a:p>
           <a:r>
-            <a:rPr lang="en-US"/>
-            <a:t>Conserved water becomes available for following years, cannot be sold later.</a:t>
+            <a:rPr lang="en-US" dirty="0"/>
+            <a:t>Users can only trade water with the bank.</a:t>
           </a:r>
         </a:p>
       </dgm:t>
     </dgm:pt>
-    <dgm:pt modelId="{FAB09760-03AD-4077-83D7-09E8EA2F46D8}" type="parTrans" cxnId="{7F802EBD-B4DB-400F-84DF-CA1DDD1B1FD7}">
+    <dgm:pt modelId="{5954E269-438B-4D56-AD5B-55F76F561AC1}" type="parTrans" cxnId="{9465E24D-8A86-4401-BA60-A68750971747}">
       <dgm:prSet/>
       <dgm:spPr/>
       <dgm:t>
@@ -2197,7 +2364,7 @@
         </a:p>
       </dgm:t>
     </dgm:pt>
-    <dgm:pt modelId="{73395DF5-8BD2-4F43-A233-CE71101C4E7A}" type="sibTrans" cxnId="{7F802EBD-B4DB-400F-84DF-CA1DDD1B1FD7}">
+    <dgm:pt modelId="{D5589979-3CF9-4289-A2B0-B3975E7FD3D6}" type="sibTrans" cxnId="{9465E24D-8A86-4401-BA60-A68750971747}">
       <dgm:prSet/>
       <dgm:spPr/>
       <dgm:t>
@@ -2208,17 +2375,916 @@
         </a:p>
       </dgm:t>
     </dgm:pt>
-    <dgm:pt modelId="{BB7FB346-4D37-4F3F-B3BE-F14C819901AF}" type="pres">
-      <dgm:prSet presAssocID="{332819EA-3386-42B9-9077-01AD17EAD6CF}" presName="linear" presStyleCnt="0">
+    <dgm:pt modelId="{84C2EB36-16A2-4A6A-9641-7057DAA5B070}">
+      <dgm:prSet/>
+      <dgm:spPr/>
+      <dgm:t>
+        <a:bodyPr/>
+        <a:lstStyle/>
+        <a:p>
+          <a:r>
+            <a:rPr lang="en-US" dirty="0"/>
+            <a:t>One bank, two storage systems</a:t>
+          </a:r>
+        </a:p>
+      </dgm:t>
+    </dgm:pt>
+    <dgm:pt modelId="{DFF66366-F5EF-4E23-A5FE-3CF4DA48EC61}" type="parTrans" cxnId="{548F3688-F6CE-4984-8EE9-109BE0AA8849}">
+      <dgm:prSet/>
+      <dgm:spPr/>
+      <dgm:t>
+        <a:bodyPr/>
+        <a:lstStyle/>
+        <a:p>
+          <a:endParaRPr lang="en-US"/>
+        </a:p>
+      </dgm:t>
+    </dgm:pt>
+    <dgm:pt modelId="{73EC16F2-5279-45F0-A2A7-E18FDFD8EA2C}" type="sibTrans" cxnId="{548F3688-F6CE-4984-8EE9-109BE0AA8849}">
+      <dgm:prSet/>
+      <dgm:spPr/>
+      <dgm:t>
+        <a:bodyPr/>
+        <a:lstStyle/>
+        <a:p>
+          <a:endParaRPr lang="en-US"/>
+        </a:p>
+      </dgm:t>
+    </dgm:pt>
+    <dgm:pt modelId="{E2BF2170-7B6F-4BBF-B2BC-BF20A194864E}" type="pres">
+      <dgm:prSet presAssocID="{332819EA-3386-42B9-9077-01AD17EAD6CF}" presName="vert0" presStyleCnt="0">
         <dgm:presLayoutVars>
+          <dgm:dir/>
+          <dgm:animOne val="branch"/>
+          <dgm:animLvl val="lvl"/>
+        </dgm:presLayoutVars>
+      </dgm:prSet>
+      <dgm:spPr/>
+    </dgm:pt>
+    <dgm:pt modelId="{01695D7F-B7A8-4362-BD48-F172F9EDBCB0}" type="pres">
+      <dgm:prSet presAssocID="{96586CA8-3EC6-48CA-B79D-D07FF68BD529}" presName="thickLine" presStyleLbl="alignNode1" presStyleIdx="0" presStyleCnt="6"/>
+      <dgm:spPr/>
+    </dgm:pt>
+    <dgm:pt modelId="{0BA827C8-F407-4310-A33B-B8CF9D6B0F14}" type="pres">
+      <dgm:prSet presAssocID="{96586CA8-3EC6-48CA-B79D-D07FF68BD529}" presName="horz1" presStyleCnt="0"/>
+      <dgm:spPr/>
+    </dgm:pt>
+    <dgm:pt modelId="{55AA72B8-23FE-456B-83A4-65EB32792DF2}" type="pres">
+      <dgm:prSet presAssocID="{96586CA8-3EC6-48CA-B79D-D07FF68BD529}" presName="tx1" presStyleLbl="revTx" presStyleIdx="0" presStyleCnt="6"/>
+      <dgm:spPr/>
+    </dgm:pt>
+    <dgm:pt modelId="{CFAF459B-4F8E-41AA-8C30-287EFFC128ED}" type="pres">
+      <dgm:prSet presAssocID="{96586CA8-3EC6-48CA-B79D-D07FF68BD529}" presName="vert1" presStyleCnt="0"/>
+      <dgm:spPr/>
+    </dgm:pt>
+    <dgm:pt modelId="{A74DBBE5-9DB1-4282-BF8B-E1DBFBA5D6F3}" type="pres">
+      <dgm:prSet presAssocID="{6191EFCA-CE56-462E-9C65-7FB76756A66E}" presName="thickLine" presStyleLbl="alignNode1" presStyleIdx="1" presStyleCnt="6"/>
+      <dgm:spPr/>
+    </dgm:pt>
+    <dgm:pt modelId="{BB923894-A4B5-4058-A0FE-1E3649FF24D3}" type="pres">
+      <dgm:prSet presAssocID="{6191EFCA-CE56-462E-9C65-7FB76756A66E}" presName="horz1" presStyleCnt="0"/>
+      <dgm:spPr/>
+    </dgm:pt>
+    <dgm:pt modelId="{465CFE53-3071-4FC3-B72D-3B7179862BBE}" type="pres">
+      <dgm:prSet presAssocID="{6191EFCA-CE56-462E-9C65-7FB76756A66E}" presName="tx1" presStyleLbl="revTx" presStyleIdx="1" presStyleCnt="6"/>
+      <dgm:spPr/>
+    </dgm:pt>
+    <dgm:pt modelId="{58570846-4096-44A4-8F23-63DA6C94C284}" type="pres">
+      <dgm:prSet presAssocID="{6191EFCA-CE56-462E-9C65-7FB76756A66E}" presName="vert1" presStyleCnt="0"/>
+      <dgm:spPr/>
+    </dgm:pt>
+    <dgm:pt modelId="{10E447A5-A5C0-4950-844D-36CB1EA1F46A}" type="pres">
+      <dgm:prSet presAssocID="{1BDCAD06-E9C5-40A9-ACE1-32C04E08A483}" presName="thickLine" presStyleLbl="alignNode1" presStyleIdx="2" presStyleCnt="6"/>
+      <dgm:spPr/>
+    </dgm:pt>
+    <dgm:pt modelId="{1CC71BB5-D9B7-43A4-99F6-FA3D8A9B927A}" type="pres">
+      <dgm:prSet presAssocID="{1BDCAD06-E9C5-40A9-ACE1-32C04E08A483}" presName="horz1" presStyleCnt="0"/>
+      <dgm:spPr/>
+    </dgm:pt>
+    <dgm:pt modelId="{293DD15E-E519-4F47-810D-63ABF17274ED}" type="pres">
+      <dgm:prSet presAssocID="{1BDCAD06-E9C5-40A9-ACE1-32C04E08A483}" presName="tx1" presStyleLbl="revTx" presStyleIdx="2" presStyleCnt="6"/>
+      <dgm:spPr/>
+    </dgm:pt>
+    <dgm:pt modelId="{18B0EDFF-4B05-4EEA-89F7-19A3209C6678}" type="pres">
+      <dgm:prSet presAssocID="{1BDCAD06-E9C5-40A9-ACE1-32C04E08A483}" presName="vert1" presStyleCnt="0"/>
+      <dgm:spPr/>
+    </dgm:pt>
+    <dgm:pt modelId="{69B05D12-A7FC-4844-A690-BC519BD3DA19}" type="pres">
+      <dgm:prSet presAssocID="{81732352-DC5F-496D-8C27-4D8928214C72}" presName="thickLine" presStyleLbl="alignNode1" presStyleIdx="3" presStyleCnt="6"/>
+      <dgm:spPr/>
+    </dgm:pt>
+    <dgm:pt modelId="{DEBE4B14-70F4-4452-8EEC-79B54A520328}" type="pres">
+      <dgm:prSet presAssocID="{81732352-DC5F-496D-8C27-4D8928214C72}" presName="horz1" presStyleCnt="0"/>
+      <dgm:spPr/>
+    </dgm:pt>
+    <dgm:pt modelId="{0A76807D-9E6B-4085-BDD6-C4797F7A1F7C}" type="pres">
+      <dgm:prSet presAssocID="{81732352-DC5F-496D-8C27-4D8928214C72}" presName="tx1" presStyleLbl="revTx" presStyleIdx="3" presStyleCnt="6"/>
+      <dgm:spPr/>
+    </dgm:pt>
+    <dgm:pt modelId="{8954E4A4-29AF-49EB-AF18-0EB862753D25}" type="pres">
+      <dgm:prSet presAssocID="{81732352-DC5F-496D-8C27-4D8928214C72}" presName="vert1" presStyleCnt="0"/>
+      <dgm:spPr/>
+    </dgm:pt>
+    <dgm:pt modelId="{3B1D3364-CA82-40D6-BACF-938BBEA3A3BA}" type="pres">
+      <dgm:prSet presAssocID="{57CB9360-81C7-4F12-96AB-4B40C18E715E}" presName="thickLine" presStyleLbl="alignNode1" presStyleIdx="4" presStyleCnt="6"/>
+      <dgm:spPr/>
+    </dgm:pt>
+    <dgm:pt modelId="{33FC9EFF-7242-49DC-933B-050B41AC52DC}" type="pres">
+      <dgm:prSet presAssocID="{57CB9360-81C7-4F12-96AB-4B40C18E715E}" presName="horz1" presStyleCnt="0"/>
+      <dgm:spPr/>
+    </dgm:pt>
+    <dgm:pt modelId="{ACDDD717-6298-464B-B557-85C55205FEAD}" type="pres">
+      <dgm:prSet presAssocID="{57CB9360-81C7-4F12-96AB-4B40C18E715E}" presName="tx1" presStyleLbl="revTx" presStyleIdx="4" presStyleCnt="6"/>
+      <dgm:spPr/>
+    </dgm:pt>
+    <dgm:pt modelId="{C8DBE3DB-1291-4481-8F4B-20E0D1EC5A5B}" type="pres">
+      <dgm:prSet presAssocID="{57CB9360-81C7-4F12-96AB-4B40C18E715E}" presName="vert1" presStyleCnt="0"/>
+      <dgm:spPr/>
+    </dgm:pt>
+    <dgm:pt modelId="{21707B7D-404C-4EC1-B2FE-C4D3BDDFDE7E}" type="pres">
+      <dgm:prSet presAssocID="{84C2EB36-16A2-4A6A-9641-7057DAA5B070}" presName="thickLine" presStyleLbl="alignNode1" presStyleIdx="5" presStyleCnt="6"/>
+      <dgm:spPr/>
+    </dgm:pt>
+    <dgm:pt modelId="{66333B6C-348B-4BBB-88A1-56C8AC7045CD}" type="pres">
+      <dgm:prSet presAssocID="{84C2EB36-16A2-4A6A-9641-7057DAA5B070}" presName="horz1" presStyleCnt="0"/>
+      <dgm:spPr/>
+    </dgm:pt>
+    <dgm:pt modelId="{5728522B-9ADF-4990-8510-2302BF1945E9}" type="pres">
+      <dgm:prSet presAssocID="{84C2EB36-16A2-4A6A-9641-7057DAA5B070}" presName="tx1" presStyleLbl="revTx" presStyleIdx="5" presStyleCnt="6"/>
+      <dgm:spPr/>
+    </dgm:pt>
+    <dgm:pt modelId="{A3F1EE92-68A6-4CF8-BE83-239E24A26831}" type="pres">
+      <dgm:prSet presAssocID="{84C2EB36-16A2-4A6A-9641-7057DAA5B070}" presName="vert1" presStyleCnt="0"/>
+      <dgm:spPr/>
+    </dgm:pt>
+  </dgm:ptLst>
+  <dgm:cxnLst>
+    <dgm:cxn modelId="{D2B7C703-B60D-4CFA-8E1F-64CF90F64DC9}" type="presOf" srcId="{1BDCAD06-E9C5-40A9-ACE1-32C04E08A483}" destId="{293DD15E-E519-4F47-810D-63ABF17274ED}" srcOrd="0" destOrd="0" presId="urn:microsoft.com/office/officeart/2008/layout/LinedList"/>
+    <dgm:cxn modelId="{1D089005-77BA-40C0-BB9A-0277072ED3D5}" type="presOf" srcId="{96586CA8-3EC6-48CA-B79D-D07FF68BD529}" destId="{55AA72B8-23FE-456B-83A4-65EB32792DF2}" srcOrd="0" destOrd="0" presId="urn:microsoft.com/office/officeart/2008/layout/LinedList"/>
+    <dgm:cxn modelId="{C1A2C90B-7042-462F-8766-37E2CF808F6E}" type="presOf" srcId="{81732352-DC5F-496D-8C27-4D8928214C72}" destId="{0A76807D-9E6B-4085-BDD6-C4797F7A1F7C}" srcOrd="0" destOrd="0" presId="urn:microsoft.com/office/officeart/2008/layout/LinedList"/>
+    <dgm:cxn modelId="{DE9EEC1A-77F3-4F2F-98D1-DABA229CF423}" srcId="{332819EA-3386-42B9-9077-01AD17EAD6CF}" destId="{1BDCAD06-E9C5-40A9-ACE1-32C04E08A483}" srcOrd="2" destOrd="0" parTransId="{D9521B96-25A3-4CB8-8A5C-7D7FAA90C562}" sibTransId="{E044F888-5014-4F34-9D1F-5266E59BD480}"/>
+    <dgm:cxn modelId="{5D0CF436-CA4E-4FD3-9822-9757AA3A614C}" type="presOf" srcId="{57CB9360-81C7-4F12-96AB-4B40C18E715E}" destId="{ACDDD717-6298-464B-B557-85C55205FEAD}" srcOrd="0" destOrd="0" presId="urn:microsoft.com/office/officeart/2008/layout/LinedList"/>
+    <dgm:cxn modelId="{99FFD53D-ABD9-4319-B6B8-5817006C37FA}" srcId="{332819EA-3386-42B9-9077-01AD17EAD6CF}" destId="{81732352-DC5F-496D-8C27-4D8928214C72}" srcOrd="3" destOrd="0" parTransId="{99E76306-419E-431E-AA29-923E484297F1}" sibTransId="{AC5229AD-8849-44C5-A507-9AEF0F3D6340}"/>
+    <dgm:cxn modelId="{28C76348-5284-4697-A09F-4A3E3EAF2D51}" srcId="{332819EA-3386-42B9-9077-01AD17EAD6CF}" destId="{96586CA8-3EC6-48CA-B79D-D07FF68BD529}" srcOrd="0" destOrd="0" parTransId="{E7C6BEE5-CAB7-46B6-82B7-A7C9A6D9B278}" sibTransId="{26305A9A-C2C4-4E74-B0F2-9C320C9C54F4}"/>
+    <dgm:cxn modelId="{9465E24D-8A86-4401-BA60-A68750971747}" srcId="{332819EA-3386-42B9-9077-01AD17EAD6CF}" destId="{57CB9360-81C7-4F12-96AB-4B40C18E715E}" srcOrd="4" destOrd="0" parTransId="{5954E269-438B-4D56-AD5B-55F76F561AC1}" sibTransId="{D5589979-3CF9-4289-A2B0-B3975E7FD3D6}"/>
+    <dgm:cxn modelId="{B7321F7A-6E01-4AC4-8C3E-5453F0F7313E}" type="presOf" srcId="{84C2EB36-16A2-4A6A-9641-7057DAA5B070}" destId="{5728522B-9ADF-4990-8510-2302BF1945E9}" srcOrd="0" destOrd="0" presId="urn:microsoft.com/office/officeart/2008/layout/LinedList"/>
+    <dgm:cxn modelId="{548F3688-F6CE-4984-8EE9-109BE0AA8849}" srcId="{332819EA-3386-42B9-9077-01AD17EAD6CF}" destId="{84C2EB36-16A2-4A6A-9641-7057DAA5B070}" srcOrd="5" destOrd="0" parTransId="{DFF66366-F5EF-4E23-A5FE-3CF4DA48EC61}" sibTransId="{73EC16F2-5279-45F0-A2A7-E18FDFD8EA2C}"/>
+    <dgm:cxn modelId="{41FA009E-9CA2-40D5-9CF9-48E2708C75E5}" type="presOf" srcId="{332819EA-3386-42B9-9077-01AD17EAD6CF}" destId="{E2BF2170-7B6F-4BBF-B2BC-BF20A194864E}" srcOrd="0" destOrd="0" presId="urn:microsoft.com/office/officeart/2008/layout/LinedList"/>
+    <dgm:cxn modelId="{58EF06A1-C8A6-4715-A751-1897016FCA27}" srcId="{332819EA-3386-42B9-9077-01AD17EAD6CF}" destId="{6191EFCA-CE56-462E-9C65-7FB76756A66E}" srcOrd="1" destOrd="0" parTransId="{3BB52197-539F-43F6-AE14-6D8B8F35CEEB}" sibTransId="{0B9AFA3A-0187-4307-AB30-91172D67F140}"/>
+    <dgm:cxn modelId="{D46339E8-C517-46C1-AB5E-73238EC06320}" type="presOf" srcId="{6191EFCA-CE56-462E-9C65-7FB76756A66E}" destId="{465CFE53-3071-4FC3-B72D-3B7179862BBE}" srcOrd="0" destOrd="0" presId="urn:microsoft.com/office/officeart/2008/layout/LinedList"/>
+    <dgm:cxn modelId="{CC05BF79-2F68-4ED9-80A4-40EA0C9C7506}" type="presParOf" srcId="{E2BF2170-7B6F-4BBF-B2BC-BF20A194864E}" destId="{01695D7F-B7A8-4362-BD48-F172F9EDBCB0}" srcOrd="0" destOrd="0" presId="urn:microsoft.com/office/officeart/2008/layout/LinedList"/>
+    <dgm:cxn modelId="{B1EFC649-D658-4D59-ADC4-204B004174F2}" type="presParOf" srcId="{E2BF2170-7B6F-4BBF-B2BC-BF20A194864E}" destId="{0BA827C8-F407-4310-A33B-B8CF9D6B0F14}" srcOrd="1" destOrd="0" presId="urn:microsoft.com/office/officeart/2008/layout/LinedList"/>
+    <dgm:cxn modelId="{C3C21211-4A75-4DAC-97AC-EACC36827401}" type="presParOf" srcId="{0BA827C8-F407-4310-A33B-B8CF9D6B0F14}" destId="{55AA72B8-23FE-456B-83A4-65EB32792DF2}" srcOrd="0" destOrd="0" presId="urn:microsoft.com/office/officeart/2008/layout/LinedList"/>
+    <dgm:cxn modelId="{3C5C47A1-2355-4A66-809D-0EB45A1664D9}" type="presParOf" srcId="{0BA827C8-F407-4310-A33B-B8CF9D6B0F14}" destId="{CFAF459B-4F8E-41AA-8C30-287EFFC128ED}" srcOrd="1" destOrd="0" presId="urn:microsoft.com/office/officeart/2008/layout/LinedList"/>
+    <dgm:cxn modelId="{F01721AB-C5B6-4BB5-9A75-1607A3F11F77}" type="presParOf" srcId="{E2BF2170-7B6F-4BBF-B2BC-BF20A194864E}" destId="{A74DBBE5-9DB1-4282-BF8B-E1DBFBA5D6F3}" srcOrd="2" destOrd="0" presId="urn:microsoft.com/office/officeart/2008/layout/LinedList"/>
+    <dgm:cxn modelId="{EFC8FB5B-41EE-4C2F-8F79-2DC9AA7BCAC0}" type="presParOf" srcId="{E2BF2170-7B6F-4BBF-B2BC-BF20A194864E}" destId="{BB923894-A4B5-4058-A0FE-1E3649FF24D3}" srcOrd="3" destOrd="0" presId="urn:microsoft.com/office/officeart/2008/layout/LinedList"/>
+    <dgm:cxn modelId="{DDF746A4-FA90-4866-94AA-5714256A87B9}" type="presParOf" srcId="{BB923894-A4B5-4058-A0FE-1E3649FF24D3}" destId="{465CFE53-3071-4FC3-B72D-3B7179862BBE}" srcOrd="0" destOrd="0" presId="urn:microsoft.com/office/officeart/2008/layout/LinedList"/>
+    <dgm:cxn modelId="{4865C1BC-E000-4097-AE3C-21BB0E1D46EF}" type="presParOf" srcId="{BB923894-A4B5-4058-A0FE-1E3649FF24D3}" destId="{58570846-4096-44A4-8F23-63DA6C94C284}" srcOrd="1" destOrd="0" presId="urn:microsoft.com/office/officeart/2008/layout/LinedList"/>
+    <dgm:cxn modelId="{4E97CEE8-713A-4480-9808-F17A6D7AEB1F}" type="presParOf" srcId="{E2BF2170-7B6F-4BBF-B2BC-BF20A194864E}" destId="{10E447A5-A5C0-4950-844D-36CB1EA1F46A}" srcOrd="4" destOrd="0" presId="urn:microsoft.com/office/officeart/2008/layout/LinedList"/>
+    <dgm:cxn modelId="{12F26B97-5300-4ADC-A470-DA55D02DD40B}" type="presParOf" srcId="{E2BF2170-7B6F-4BBF-B2BC-BF20A194864E}" destId="{1CC71BB5-D9B7-43A4-99F6-FA3D8A9B927A}" srcOrd="5" destOrd="0" presId="urn:microsoft.com/office/officeart/2008/layout/LinedList"/>
+    <dgm:cxn modelId="{777A4CDB-06C9-47E8-980C-21DE0493A4E0}" type="presParOf" srcId="{1CC71BB5-D9B7-43A4-99F6-FA3D8A9B927A}" destId="{293DD15E-E519-4F47-810D-63ABF17274ED}" srcOrd="0" destOrd="0" presId="urn:microsoft.com/office/officeart/2008/layout/LinedList"/>
+    <dgm:cxn modelId="{5B74BF12-B682-4015-A121-BB0A15F3512D}" type="presParOf" srcId="{1CC71BB5-D9B7-43A4-99F6-FA3D8A9B927A}" destId="{18B0EDFF-4B05-4EEA-89F7-19A3209C6678}" srcOrd="1" destOrd="0" presId="urn:microsoft.com/office/officeart/2008/layout/LinedList"/>
+    <dgm:cxn modelId="{7E05420C-01F6-4AA4-A48F-AABDF2D67012}" type="presParOf" srcId="{E2BF2170-7B6F-4BBF-B2BC-BF20A194864E}" destId="{69B05D12-A7FC-4844-A690-BC519BD3DA19}" srcOrd="6" destOrd="0" presId="urn:microsoft.com/office/officeart/2008/layout/LinedList"/>
+    <dgm:cxn modelId="{513EB85C-4791-4287-94B0-2EC32AA7EB21}" type="presParOf" srcId="{E2BF2170-7B6F-4BBF-B2BC-BF20A194864E}" destId="{DEBE4B14-70F4-4452-8EEC-79B54A520328}" srcOrd="7" destOrd="0" presId="urn:microsoft.com/office/officeart/2008/layout/LinedList"/>
+    <dgm:cxn modelId="{2492364D-608D-4BC4-AA04-AB6ACC409898}" type="presParOf" srcId="{DEBE4B14-70F4-4452-8EEC-79B54A520328}" destId="{0A76807D-9E6B-4085-BDD6-C4797F7A1F7C}" srcOrd="0" destOrd="0" presId="urn:microsoft.com/office/officeart/2008/layout/LinedList"/>
+    <dgm:cxn modelId="{2FD55BA2-5DC9-4040-8140-5A48A6C70D57}" type="presParOf" srcId="{DEBE4B14-70F4-4452-8EEC-79B54A520328}" destId="{8954E4A4-29AF-49EB-AF18-0EB862753D25}" srcOrd="1" destOrd="0" presId="urn:microsoft.com/office/officeart/2008/layout/LinedList"/>
+    <dgm:cxn modelId="{A569E9DC-48F9-497F-998A-B6AE3B72B2F0}" type="presParOf" srcId="{E2BF2170-7B6F-4BBF-B2BC-BF20A194864E}" destId="{3B1D3364-CA82-40D6-BACF-938BBEA3A3BA}" srcOrd="8" destOrd="0" presId="urn:microsoft.com/office/officeart/2008/layout/LinedList"/>
+    <dgm:cxn modelId="{C325381B-2F0D-4B4E-96C3-E501731C2772}" type="presParOf" srcId="{E2BF2170-7B6F-4BBF-B2BC-BF20A194864E}" destId="{33FC9EFF-7242-49DC-933B-050B41AC52DC}" srcOrd="9" destOrd="0" presId="urn:microsoft.com/office/officeart/2008/layout/LinedList"/>
+    <dgm:cxn modelId="{10813A73-DD68-446E-BC2D-7AC1B72EB518}" type="presParOf" srcId="{33FC9EFF-7242-49DC-933B-050B41AC52DC}" destId="{ACDDD717-6298-464B-B557-85C55205FEAD}" srcOrd="0" destOrd="0" presId="urn:microsoft.com/office/officeart/2008/layout/LinedList"/>
+    <dgm:cxn modelId="{368A7B5C-45E4-4154-8A4F-2E71C7242C1C}" type="presParOf" srcId="{33FC9EFF-7242-49DC-933B-050B41AC52DC}" destId="{C8DBE3DB-1291-4481-8F4B-20E0D1EC5A5B}" srcOrd="1" destOrd="0" presId="urn:microsoft.com/office/officeart/2008/layout/LinedList"/>
+    <dgm:cxn modelId="{9E6016E2-8866-4F20-A82C-AAB371077EC4}" type="presParOf" srcId="{E2BF2170-7B6F-4BBF-B2BC-BF20A194864E}" destId="{21707B7D-404C-4EC1-B2FE-C4D3BDDFDE7E}" srcOrd="10" destOrd="0" presId="urn:microsoft.com/office/officeart/2008/layout/LinedList"/>
+    <dgm:cxn modelId="{EC6A4E60-5DEB-4DB0-B1D1-6AA7A4FBB0E6}" type="presParOf" srcId="{E2BF2170-7B6F-4BBF-B2BC-BF20A194864E}" destId="{66333B6C-348B-4BBB-88A1-56C8AC7045CD}" srcOrd="11" destOrd="0" presId="urn:microsoft.com/office/officeart/2008/layout/LinedList"/>
+    <dgm:cxn modelId="{44CD41AF-407F-4148-94AC-DBEC2F5EE77E}" type="presParOf" srcId="{66333B6C-348B-4BBB-88A1-56C8AC7045CD}" destId="{5728522B-9ADF-4990-8510-2302BF1945E9}" srcOrd="0" destOrd="0" presId="urn:microsoft.com/office/officeart/2008/layout/LinedList"/>
+    <dgm:cxn modelId="{6237898D-8DB5-4B9F-816C-396A042D11FE}" type="presParOf" srcId="{66333B6C-348B-4BBB-88A1-56C8AC7045CD}" destId="{A3F1EE92-68A6-4CF8-BE83-239E24A26831}" srcOrd="1" destOrd="0" presId="urn:microsoft.com/office/officeart/2008/layout/LinedList"/>
+  </dgm:cxnLst>
+  <dgm:bg/>
+  <dgm:whole/>
+  <dgm:extLst>
+    <a:ext uri="http://schemas.microsoft.com/office/drawing/2008/diagram">
+      <dsp:dataModelExt xmlns:dsp="http://schemas.microsoft.com/office/drawing/2008/diagram" relId="rId6" minVer="http://schemas.openxmlformats.org/drawingml/2006/diagram"/>
+    </a:ext>
+  </dgm:extLst>
+</dgm:dataModel>
+</file>
+
+<file path=ppt/diagrams/data2.xml><?xml version="1.0" encoding="utf-8"?>
+<dgm:dataModel xmlns:dgm="http://schemas.openxmlformats.org/drawingml/2006/diagram" xmlns:a="http://schemas.openxmlformats.org/drawingml/2006/main">
+  <dgm:ptLst>
+    <dgm:pt modelId="{99D1A08B-05C7-4294-99DD-7BE56AF469A8}" type="doc">
+      <dgm:prSet loTypeId="urn:microsoft.com/office/officeart/2005/8/layout/hProcess4" loCatId="process" qsTypeId="urn:microsoft.com/office/officeart/2005/8/quickstyle/simple1" qsCatId="simple" csTypeId="urn:microsoft.com/office/officeart/2005/8/colors/accent1_2" csCatId="accent1" phldr="1"/>
+      <dgm:spPr/>
+      <dgm:t>
+        <a:bodyPr/>
+        <a:lstStyle/>
+        <a:p>
+          <a:endParaRPr lang="en-US"/>
+        </a:p>
+      </dgm:t>
+    </dgm:pt>
+    <dgm:pt modelId="{DCFD0921-E245-4A02-B3A7-0E9B55127B04}">
+      <dgm:prSet phldrT="[Text]" phldr="0" custT="1"/>
+      <dgm:spPr/>
+      <dgm:t>
+        <a:bodyPr/>
+        <a:lstStyle/>
+        <a:p>
+          <a:r>
+            <a:rPr lang="en-US" sz="1600" b="1" dirty="0">
+              <a:solidFill>
+                <a:srgbClr val="00B050"/>
+              </a:solidFill>
+            </a:rPr>
+            <a:t>Winter (Oct-Mar)  Natural Flows</a:t>
+          </a:r>
+        </a:p>
+      </dgm:t>
+    </dgm:pt>
+    <dgm:pt modelId="{70B824C9-F3CD-40A2-B5BA-784C85902FF3}" type="parTrans" cxnId="{440F9726-70B7-42A5-AB88-B53C3894826F}">
+      <dgm:prSet/>
+      <dgm:spPr/>
+      <dgm:t>
+        <a:bodyPr/>
+        <a:lstStyle/>
+        <a:p>
+          <a:endParaRPr lang="en-US"/>
+        </a:p>
+      </dgm:t>
+    </dgm:pt>
+    <dgm:pt modelId="{69013C8D-2C94-4B00-9813-3B8C02617849}" type="sibTrans" cxnId="{440F9726-70B7-42A5-AB88-B53C3894826F}">
+      <dgm:prSet/>
+      <dgm:spPr/>
+      <dgm:t>
+        <a:bodyPr/>
+        <a:lstStyle/>
+        <a:p>
+          <a:endParaRPr lang="en-US"/>
+        </a:p>
+      </dgm:t>
+    </dgm:pt>
+    <dgm:pt modelId="{18DC73F0-EDC3-4451-98EA-91C847F5E375}">
+      <dgm:prSet phldrT="[Text]" phldr="0" custT="1"/>
+      <dgm:spPr/>
+      <dgm:t>
+        <a:bodyPr/>
+        <a:lstStyle/>
+        <a:p>
+          <a:r>
+            <a:rPr lang="en-US" sz="1600" b="1" dirty="0">
+              <a:solidFill>
+                <a:srgbClr val="00B050"/>
+              </a:solidFill>
+            </a:rPr>
+            <a:t>Summer (Apr-Sep) Natural Flows</a:t>
+          </a:r>
+        </a:p>
+      </dgm:t>
+    </dgm:pt>
+    <dgm:pt modelId="{49516162-687F-4DFA-BEBA-7A284363F675}" type="parTrans" cxnId="{8BC42789-7A8C-4F3C-9F4C-2F71DA98F207}">
+      <dgm:prSet/>
+      <dgm:spPr/>
+      <dgm:t>
+        <a:bodyPr/>
+        <a:lstStyle/>
+        <a:p>
+          <a:endParaRPr lang="en-US"/>
+        </a:p>
+      </dgm:t>
+    </dgm:pt>
+    <dgm:pt modelId="{60465BCF-9C95-4637-8D4C-5290976EB2A0}" type="sibTrans" cxnId="{8BC42789-7A8C-4F3C-9F4C-2F71DA98F207}">
+      <dgm:prSet/>
+      <dgm:spPr/>
+      <dgm:t>
+        <a:bodyPr/>
+        <a:lstStyle/>
+        <a:p>
+          <a:endParaRPr lang="en-US"/>
+        </a:p>
+      </dgm:t>
+    </dgm:pt>
+    <dgm:pt modelId="{269C76F2-6A3F-4463-A37D-34DF9557723A}">
+      <dgm:prSet phldrT="[Text]" phldr="0" custT="1"/>
+      <dgm:spPr/>
+      <dgm:t>
+        <a:bodyPr/>
+        <a:lstStyle/>
+        <a:p>
+          <a:r>
+            <a:rPr lang="en-US" sz="1600" b="1" dirty="0">
+              <a:solidFill>
+                <a:srgbClr val="3333FF"/>
+              </a:solidFill>
+            </a:rPr>
+            <a:t>Select from Natural Flow</a:t>
+          </a:r>
+        </a:p>
+      </dgm:t>
+    </dgm:pt>
+    <dgm:pt modelId="{6FBEEE41-A564-4BEC-881C-34C8762D68EC}" type="parTrans" cxnId="{0695140D-8D64-47F6-820C-E3C788A10897}">
+      <dgm:prSet/>
+      <dgm:spPr/>
+      <dgm:t>
+        <a:bodyPr/>
+        <a:lstStyle/>
+        <a:p>
+          <a:endParaRPr lang="en-US"/>
+        </a:p>
+      </dgm:t>
+    </dgm:pt>
+    <dgm:pt modelId="{45AFFE97-47BA-4DAA-829A-7C59AE051FBD}" type="sibTrans" cxnId="{0695140D-8D64-47F6-820C-E3C788A10897}">
+      <dgm:prSet/>
+      <dgm:spPr/>
+      <dgm:t>
+        <a:bodyPr/>
+        <a:lstStyle/>
+        <a:p>
+          <a:endParaRPr lang="en-US"/>
+        </a:p>
+      </dgm:t>
+    </dgm:pt>
+    <dgm:pt modelId="{5C407219-177A-43EE-B67E-B6E75271BA5B}">
+      <dgm:prSet phldrT="[Text]" phldr="0" custT="1"/>
+      <dgm:spPr/>
+      <dgm:t>
+        <a:bodyPr/>
+        <a:lstStyle/>
+        <a:p>
+          <a:r>
+            <a:rPr lang="en-US" sz="2400" b="1" dirty="0"/>
+            <a:t>October 1</a:t>
+          </a:r>
+          <a:r>
+            <a:rPr lang="en-US" sz="2400" b="1" baseline="30000" dirty="0"/>
+            <a:t>st</a:t>
+          </a:r>
+          <a:r>
+            <a:rPr lang="en-US" sz="2400" b="1" dirty="0"/>
+            <a:t> </a:t>
+          </a:r>
+        </a:p>
+      </dgm:t>
+    </dgm:pt>
+    <dgm:pt modelId="{78EA6105-D13A-4F17-AB97-952ED6E1056F}" type="parTrans" cxnId="{46FA7699-0760-422D-95EC-7D257C462A6A}">
+      <dgm:prSet/>
+      <dgm:spPr/>
+      <dgm:t>
+        <a:bodyPr/>
+        <a:lstStyle/>
+        <a:p>
+          <a:endParaRPr lang="en-US"/>
+        </a:p>
+      </dgm:t>
+    </dgm:pt>
+    <dgm:pt modelId="{8E1FD376-005E-46DD-AB7C-3AD5F0C68AF6}" type="sibTrans" cxnId="{46FA7699-0760-422D-95EC-7D257C462A6A}">
+      <dgm:prSet/>
+      <dgm:spPr/>
+      <dgm:t>
+        <a:bodyPr/>
+        <a:lstStyle/>
+        <a:p>
+          <a:endParaRPr lang="en-US"/>
+        </a:p>
+      </dgm:t>
+    </dgm:pt>
+    <dgm:pt modelId="{97225384-B3A3-4246-BB0C-554A34D4B7EE}">
+      <dgm:prSet phldrT="[Text]" phldr="0" custT="1"/>
+      <dgm:spPr/>
+      <dgm:t>
+        <a:bodyPr/>
+        <a:lstStyle/>
+        <a:p>
+          <a:r>
+            <a:rPr lang="en-US" sz="1600" b="1" dirty="0">
+              <a:solidFill>
+                <a:srgbClr val="3333FF"/>
+              </a:solidFill>
+            </a:rPr>
+            <a:t>Specify Bear Lake Level</a:t>
+          </a:r>
+        </a:p>
+      </dgm:t>
+    </dgm:pt>
+    <dgm:pt modelId="{2032F91E-C142-4D3C-947C-7455714058C6}" type="parTrans" cxnId="{E0FBC2CB-959A-4226-9ACB-4CB07C4E9F88}">
+      <dgm:prSet/>
+      <dgm:spPr/>
+      <dgm:t>
+        <a:bodyPr/>
+        <a:lstStyle/>
+        <a:p>
+          <a:endParaRPr lang="en-US"/>
+        </a:p>
+      </dgm:t>
+    </dgm:pt>
+    <dgm:pt modelId="{6E3C3B18-981D-4F6C-AB72-2F298617B885}" type="sibTrans" cxnId="{E0FBC2CB-959A-4226-9ACB-4CB07C4E9F88}">
+      <dgm:prSet/>
+      <dgm:spPr/>
+      <dgm:t>
+        <a:bodyPr/>
+        <a:lstStyle/>
+        <a:p>
+          <a:endParaRPr lang="en-US"/>
+        </a:p>
+      </dgm:t>
+    </dgm:pt>
+    <dgm:pt modelId="{5489487A-AE09-4C57-A8FE-3C88CD528A51}">
+      <dgm:prSet phldrT="[Text]" phldr="0" custT="1"/>
+      <dgm:spPr/>
+      <dgm:t>
+        <a:bodyPr/>
+        <a:lstStyle/>
+        <a:p>
+          <a:r>
+            <a:rPr lang="en-US" sz="2400" b="1" dirty="0"/>
+            <a:t>April 1</a:t>
+          </a:r>
+          <a:r>
+            <a:rPr lang="en-US" sz="2400" b="1" baseline="30000" dirty="0"/>
+            <a:t>st</a:t>
+          </a:r>
+          <a:r>
+            <a:rPr lang="en-US" sz="2400" b="1" dirty="0"/>
+            <a:t> </a:t>
+          </a:r>
+        </a:p>
+      </dgm:t>
+    </dgm:pt>
+    <dgm:pt modelId="{3491C758-4628-4476-8033-6CEC21F5D7B6}" type="parTrans" cxnId="{A778DC99-B49C-4DDC-91A4-BC2F4970DD00}">
+      <dgm:prSet/>
+      <dgm:spPr/>
+      <dgm:t>
+        <a:bodyPr/>
+        <a:lstStyle/>
+        <a:p>
+          <a:endParaRPr lang="en-US"/>
+        </a:p>
+      </dgm:t>
+    </dgm:pt>
+    <dgm:pt modelId="{A5277286-5511-4E9A-9AF8-737B622E3223}" type="sibTrans" cxnId="{A778DC99-B49C-4DDC-91A4-BC2F4970DD00}">
+      <dgm:prSet/>
+      <dgm:spPr/>
+      <dgm:t>
+        <a:bodyPr/>
+        <a:lstStyle/>
+        <a:p>
+          <a:endParaRPr lang="en-US"/>
+        </a:p>
+      </dgm:t>
+    </dgm:pt>
+    <dgm:pt modelId="{36A43055-FF1E-4000-92DC-E1996435069B}">
+      <dgm:prSet phldrT="[Text]" phldr="0" custT="1"/>
+      <dgm:spPr/>
+      <dgm:t>
+        <a:bodyPr/>
+        <a:lstStyle/>
+        <a:p>
+          <a:r>
+            <a:rPr lang="en-US" sz="1600" b="1" dirty="0">
+              <a:solidFill>
+                <a:srgbClr val="3333FF"/>
+              </a:solidFill>
+            </a:rPr>
+            <a:t>Select Potential Target Elevation for Bear Lake</a:t>
+          </a:r>
+        </a:p>
+      </dgm:t>
+    </dgm:pt>
+    <dgm:pt modelId="{F952DEC6-66D8-4998-8A9C-A930577EC2D2}" type="parTrans" cxnId="{BDFEF269-CF52-44E1-90F3-093DB5486581}">
+      <dgm:prSet/>
+      <dgm:spPr/>
+      <dgm:t>
+        <a:bodyPr/>
+        <a:lstStyle/>
+        <a:p>
+          <a:endParaRPr lang="en-US"/>
+        </a:p>
+      </dgm:t>
+    </dgm:pt>
+    <dgm:pt modelId="{86D954EB-E373-4698-A5D0-017BAF56FA0A}" type="sibTrans" cxnId="{BDFEF269-CF52-44E1-90F3-093DB5486581}">
+      <dgm:prSet/>
+      <dgm:spPr/>
+      <dgm:t>
+        <a:bodyPr/>
+        <a:lstStyle/>
+        <a:p>
+          <a:endParaRPr lang="en-US"/>
+        </a:p>
+      </dgm:t>
+    </dgm:pt>
+    <dgm:pt modelId="{1BCB95D6-B1A4-439C-9AD1-CE00E32D68AA}">
+      <dgm:prSet phldrT="[Text]" phldr="0" custT="1"/>
+      <dgm:spPr/>
+      <dgm:t>
+        <a:bodyPr/>
+        <a:lstStyle/>
+        <a:p>
+          <a:r>
+            <a:rPr lang="en-US" sz="2400" b="1" dirty="0"/>
+            <a:t>Summer</a:t>
+          </a:r>
+        </a:p>
+      </dgm:t>
+    </dgm:pt>
+    <dgm:pt modelId="{565DC6A8-BFE9-4A7B-9AAF-B0195AFAE88E}" type="parTrans" cxnId="{8B4A27D9-7DF5-407D-9FE0-9F9C17CD667A}">
+      <dgm:prSet/>
+      <dgm:spPr/>
+      <dgm:t>
+        <a:bodyPr/>
+        <a:lstStyle/>
+        <a:p>
+          <a:endParaRPr lang="en-US"/>
+        </a:p>
+      </dgm:t>
+    </dgm:pt>
+    <dgm:pt modelId="{0C420126-164A-4514-A51E-AB2C4502F253}" type="sibTrans" cxnId="{8B4A27D9-7DF5-407D-9FE0-9F9C17CD667A}">
+      <dgm:prSet/>
+      <dgm:spPr/>
+      <dgm:t>
+        <a:bodyPr/>
+        <a:lstStyle/>
+        <a:p>
+          <a:endParaRPr lang="en-US"/>
+        </a:p>
+      </dgm:t>
+    </dgm:pt>
+    <dgm:pt modelId="{FB1AC2EB-2A73-487E-BFFC-E85DCC33CF70}">
+      <dgm:prSet phldrT="[Text]" phldr="0" custT="1"/>
+      <dgm:spPr/>
+      <dgm:t>
+        <a:bodyPr/>
+        <a:lstStyle/>
+        <a:p>
+          <a:r>
+            <a:rPr lang="en-US" sz="1600" b="1" dirty="0">
+              <a:solidFill>
+                <a:srgbClr val="00B050"/>
+              </a:solidFill>
+            </a:rPr>
+            <a:t>Available water</a:t>
+          </a:r>
+        </a:p>
+      </dgm:t>
+    </dgm:pt>
+    <dgm:pt modelId="{E19BCDDB-747D-419A-A20E-A9AAFEF8A011}" type="parTrans" cxnId="{63DD5235-EEA8-4C62-812F-84E36FEF1592}">
+      <dgm:prSet/>
+      <dgm:spPr/>
+      <dgm:t>
+        <a:bodyPr/>
+        <a:lstStyle/>
+        <a:p>
+          <a:endParaRPr lang="en-US"/>
+        </a:p>
+      </dgm:t>
+    </dgm:pt>
+    <dgm:pt modelId="{86A587C2-A658-4B6E-9679-4F54844F90F0}" type="sibTrans" cxnId="{63DD5235-EEA8-4C62-812F-84E36FEF1592}">
+      <dgm:prSet/>
+      <dgm:spPr/>
+      <dgm:t>
+        <a:bodyPr/>
+        <a:lstStyle/>
+        <a:p>
+          <a:endParaRPr lang="en-US"/>
+        </a:p>
+      </dgm:t>
+    </dgm:pt>
+    <dgm:pt modelId="{EB9EEFA8-E354-4F52-BA0E-F1E23DACFF23}">
+      <dgm:prSet phldrT="[Text]" phldr="0" custT="1"/>
+      <dgm:spPr/>
+      <dgm:t>
+        <a:bodyPr/>
+        <a:lstStyle/>
+        <a:p>
+          <a:r>
+            <a:rPr lang="en-US" sz="1600" b="1">
+              <a:solidFill>
+                <a:srgbClr val="3333FF"/>
+              </a:solidFill>
+            </a:rPr>
+            <a:t>Decide Consumption</a:t>
+          </a:r>
+          <a:endParaRPr lang="en-US" sz="1600" b="1" dirty="0">
+            <a:solidFill>
+              <a:srgbClr val="3333FF"/>
+            </a:solidFill>
+          </a:endParaRPr>
+        </a:p>
+      </dgm:t>
+    </dgm:pt>
+    <dgm:pt modelId="{FBDD0822-3C20-4EF0-B91D-23A882EE7DCF}" type="parTrans" cxnId="{22D14C08-B102-444F-8400-735B14327DF4}">
+      <dgm:prSet/>
+      <dgm:spPr/>
+      <dgm:t>
+        <a:bodyPr/>
+        <a:lstStyle/>
+        <a:p>
+          <a:endParaRPr lang="en-US"/>
+        </a:p>
+      </dgm:t>
+    </dgm:pt>
+    <dgm:pt modelId="{81CF5625-CEBF-44C9-BA20-42ED0CDF8DE9}" type="sibTrans" cxnId="{22D14C08-B102-444F-8400-735B14327DF4}">
+      <dgm:prSet/>
+      <dgm:spPr/>
+      <dgm:t>
+        <a:bodyPr/>
+        <a:lstStyle/>
+        <a:p>
+          <a:endParaRPr lang="en-US"/>
+        </a:p>
+      </dgm:t>
+    </dgm:pt>
+    <dgm:pt modelId="{5DA50F34-C831-4850-8B63-CE799FF6C0D5}">
+      <dgm:prSet phldrT="[Text]" phldr="0" custT="1"/>
+      <dgm:spPr/>
+      <dgm:t>
+        <a:bodyPr/>
+        <a:lstStyle/>
+        <a:p>
+          <a:r>
+            <a:rPr lang="en-US" sz="2400" b="1" dirty="0"/>
+            <a:t>End of Summer</a:t>
+          </a:r>
+        </a:p>
+      </dgm:t>
+    </dgm:pt>
+    <dgm:pt modelId="{B7130E8A-5AA5-407D-9187-C73B81606744}" type="parTrans" cxnId="{792D4403-5B5E-411A-82AE-D483DFE10AAB}">
+      <dgm:prSet/>
+      <dgm:spPr/>
+      <dgm:t>
+        <a:bodyPr/>
+        <a:lstStyle/>
+        <a:p>
+          <a:endParaRPr lang="en-US"/>
+        </a:p>
+      </dgm:t>
+    </dgm:pt>
+    <dgm:pt modelId="{27D0D650-91D1-4215-B213-38A33A97C818}" type="sibTrans" cxnId="{792D4403-5B5E-411A-82AE-D483DFE10AAB}">
+      <dgm:prSet/>
+      <dgm:spPr/>
+      <dgm:t>
+        <a:bodyPr/>
+        <a:lstStyle/>
+        <a:p>
+          <a:endParaRPr lang="en-US"/>
+        </a:p>
+      </dgm:t>
+    </dgm:pt>
+    <dgm:pt modelId="{8111E655-AA73-4919-8D88-D2AFAC6203BA}">
+      <dgm:prSet phldrT="[Text]" phldr="0" custT="1"/>
+      <dgm:spPr/>
+      <dgm:t>
+        <a:bodyPr/>
+        <a:lstStyle/>
+        <a:p>
+          <a:r>
+            <a:rPr lang="en-US" sz="1800" b="1">
+              <a:solidFill>
+                <a:srgbClr val="00B050"/>
+              </a:solidFill>
+            </a:rPr>
+            <a:t>Bank storage in Bear Lake</a:t>
+          </a:r>
+          <a:endParaRPr lang="en-US" sz="1800" b="1" dirty="0">
+            <a:solidFill>
+              <a:srgbClr val="00B050"/>
+            </a:solidFill>
+          </a:endParaRPr>
+        </a:p>
+      </dgm:t>
+    </dgm:pt>
+    <dgm:pt modelId="{1D01C444-95C3-40B7-A96E-5D3C98D5EFB1}" type="parTrans" cxnId="{D4C2C2BA-4EF0-4E8C-8B23-D309E73EFFAB}">
+      <dgm:prSet/>
+      <dgm:spPr/>
+      <dgm:t>
+        <a:bodyPr/>
+        <a:lstStyle/>
+        <a:p>
+          <a:endParaRPr lang="en-US"/>
+        </a:p>
+      </dgm:t>
+    </dgm:pt>
+    <dgm:pt modelId="{734582F4-7C5B-4397-B295-2E2F146BB4BE}" type="sibTrans" cxnId="{D4C2C2BA-4EF0-4E8C-8B23-D309E73EFFAB}">
+      <dgm:prSet/>
+      <dgm:spPr/>
+      <dgm:t>
+        <a:bodyPr/>
+        <a:lstStyle/>
+        <a:p>
+          <a:endParaRPr lang="en-US"/>
+        </a:p>
+      </dgm:t>
+    </dgm:pt>
+    <dgm:pt modelId="{F945E611-CD2E-4C69-9DAE-2D0D3822A0EA}">
+      <dgm:prSet phldrT="[Text]" phldr="0" custT="1"/>
+      <dgm:spPr/>
+      <dgm:t>
+        <a:bodyPr/>
+        <a:lstStyle/>
+        <a:p>
+          <a:r>
+            <a:rPr lang="en-US" sz="1800" b="1">
+              <a:solidFill>
+                <a:srgbClr val="3333FF"/>
+              </a:solidFill>
+            </a:rPr>
+            <a:t>Deliver to GSL from bank storage </a:t>
+          </a:r>
+          <a:endParaRPr lang="en-US" sz="1800" b="1" dirty="0">
+            <a:solidFill>
+              <a:srgbClr val="3333FF"/>
+            </a:solidFill>
+          </a:endParaRPr>
+        </a:p>
+      </dgm:t>
+    </dgm:pt>
+    <dgm:pt modelId="{E05F5CE7-8C2A-4ACE-81D4-21183E002FC5}" type="parTrans" cxnId="{F305BA26-4492-4867-9F9B-5A8ACF3514B4}">
+      <dgm:prSet/>
+      <dgm:spPr/>
+      <dgm:t>
+        <a:bodyPr/>
+        <a:lstStyle/>
+        <a:p>
+          <a:endParaRPr lang="en-US"/>
+        </a:p>
+      </dgm:t>
+    </dgm:pt>
+    <dgm:pt modelId="{25BB5900-0641-407C-8ED9-9C929C16D5E9}" type="sibTrans" cxnId="{F305BA26-4492-4867-9F9B-5A8ACF3514B4}">
+      <dgm:prSet/>
+      <dgm:spPr/>
+      <dgm:t>
+        <a:bodyPr/>
+        <a:lstStyle/>
+        <a:p>
+          <a:endParaRPr lang="en-US"/>
+        </a:p>
+      </dgm:t>
+    </dgm:pt>
+    <dgm:pt modelId="{3679B97A-32D2-4172-BEF9-560A1496BE56}">
+      <dgm:prSet phldrT="[Text]" phldr="0" custT="1"/>
+      <dgm:spPr/>
+      <dgm:t>
+        <a:bodyPr/>
+        <a:lstStyle/>
+        <a:p>
+          <a:r>
+            <a:rPr lang="en-US" sz="1600" b="1" dirty="0">
+              <a:solidFill>
+                <a:srgbClr val="3333FF"/>
+              </a:solidFill>
+            </a:rPr>
+            <a:t>Negotiate Price</a:t>
+          </a:r>
+        </a:p>
+      </dgm:t>
+    </dgm:pt>
+    <dgm:pt modelId="{B180FB7C-C893-47CE-AC8C-F0A6527F33DC}" type="parTrans" cxnId="{A16A5AFB-4236-4673-9CB5-BE389EB3EF8C}">
+      <dgm:prSet/>
+      <dgm:spPr/>
+      <dgm:t>
+        <a:bodyPr/>
+        <a:lstStyle/>
+        <a:p>
+          <a:endParaRPr lang="en-US"/>
+        </a:p>
+      </dgm:t>
+    </dgm:pt>
+    <dgm:pt modelId="{0D2383D4-47E1-4D36-90BF-8D7B53F07E5B}" type="sibTrans" cxnId="{A16A5AFB-4236-4673-9CB5-BE389EB3EF8C}">
+      <dgm:prSet/>
+      <dgm:spPr/>
+      <dgm:t>
+        <a:bodyPr/>
+        <a:lstStyle/>
+        <a:p>
+          <a:endParaRPr lang="en-US"/>
+        </a:p>
+      </dgm:t>
+    </dgm:pt>
+    <dgm:pt modelId="{428AB112-F44A-4DBD-9A72-307227A48835}">
+      <dgm:prSet phldrT="[Text]" phldr="0" custT="1"/>
+      <dgm:spPr/>
+      <dgm:t>
+        <a:bodyPr/>
+        <a:lstStyle/>
+        <a:p>
+          <a:r>
+            <a:rPr lang="en-US" sz="1600" b="1" dirty="0">
+              <a:solidFill>
+                <a:srgbClr val="3333FF"/>
+              </a:solidFill>
+            </a:rPr>
+            <a:t>Sell or Conserve remaining water</a:t>
+          </a:r>
+        </a:p>
+      </dgm:t>
+    </dgm:pt>
+    <dgm:pt modelId="{DE48C9E4-0BEC-4D80-A91C-82920DE858EA}" type="parTrans" cxnId="{6B257843-4F5E-4AFE-A2EB-DCD7EC2836DE}">
+      <dgm:prSet/>
+      <dgm:spPr/>
+      <dgm:t>
+        <a:bodyPr/>
+        <a:lstStyle/>
+        <a:p>
+          <a:endParaRPr lang="en-US"/>
+        </a:p>
+      </dgm:t>
+    </dgm:pt>
+    <dgm:pt modelId="{364B18D5-CB61-44ED-85B8-E92D9EE279E9}" type="sibTrans" cxnId="{6B257843-4F5E-4AFE-A2EB-DCD7EC2836DE}">
+      <dgm:prSet/>
+      <dgm:spPr/>
+      <dgm:t>
+        <a:bodyPr/>
+        <a:lstStyle/>
+        <a:p>
+          <a:endParaRPr lang="en-US"/>
+        </a:p>
+      </dgm:t>
+    </dgm:pt>
+    <dgm:pt modelId="{1641139E-5806-4ED1-AA40-CDBBD9ABB873}" type="pres">
+      <dgm:prSet presAssocID="{99D1A08B-05C7-4294-99DD-7BE56AF469A8}" presName="Name0" presStyleCnt="0">
+        <dgm:presLayoutVars>
+          <dgm:dir/>
           <dgm:animLvl val="lvl"/>
           <dgm:resizeHandles val="exact"/>
         </dgm:presLayoutVars>
       </dgm:prSet>
       <dgm:spPr/>
     </dgm:pt>
-    <dgm:pt modelId="{58336DFE-FB7D-4F4F-89A5-C15DB3DFC1C3}" type="pres">
-      <dgm:prSet presAssocID="{96586CA8-3EC6-48CA-B79D-D07FF68BD529}" presName="parentText" presStyleLbl="node1" presStyleIdx="0" presStyleCnt="5">
+    <dgm:pt modelId="{A69DC343-962C-4193-B759-C426D90ADEBE}" type="pres">
+      <dgm:prSet presAssocID="{99D1A08B-05C7-4294-99DD-7BE56AF469A8}" presName="tSp" presStyleCnt="0"/>
+      <dgm:spPr/>
+    </dgm:pt>
+    <dgm:pt modelId="{D44F98B8-7C0E-44E6-B339-45D9858C4485}" type="pres">
+      <dgm:prSet presAssocID="{99D1A08B-05C7-4294-99DD-7BE56AF469A8}" presName="bSp" presStyleCnt="0"/>
+      <dgm:spPr/>
+    </dgm:pt>
+    <dgm:pt modelId="{D414F4B2-7830-4056-8693-7152B494301A}" type="pres">
+      <dgm:prSet presAssocID="{99D1A08B-05C7-4294-99DD-7BE56AF469A8}" presName="process" presStyleCnt="0"/>
+      <dgm:spPr/>
+    </dgm:pt>
+    <dgm:pt modelId="{31228088-885C-49E3-AE4E-7F1B0118071C}" type="pres">
+      <dgm:prSet presAssocID="{5C407219-177A-43EE-B67E-B6E75271BA5B}" presName="composite1" presStyleCnt="0"/>
+      <dgm:spPr/>
+    </dgm:pt>
+    <dgm:pt modelId="{FCC3BD23-997E-4674-8B26-CC365D097590}" type="pres">
+      <dgm:prSet presAssocID="{5C407219-177A-43EE-B67E-B6E75271BA5B}" presName="dummyNode1" presStyleLbl="node1" presStyleIdx="0" presStyleCnt="4"/>
+      <dgm:spPr/>
+    </dgm:pt>
+    <dgm:pt modelId="{30DD4CDA-4812-46C7-BA95-FF21DAD772D9}" type="pres">
+      <dgm:prSet presAssocID="{5C407219-177A-43EE-B67E-B6E75271BA5B}" presName="childNode1" presStyleLbl="bgAcc1" presStyleIdx="0" presStyleCnt="4">
+        <dgm:presLayoutVars>
+          <dgm:bulletEnabled val="1"/>
+        </dgm:presLayoutVars>
+      </dgm:prSet>
+      <dgm:spPr/>
+    </dgm:pt>
+    <dgm:pt modelId="{21C25EF7-5122-4CB4-922C-C536D59390E7}" type="pres">
+      <dgm:prSet presAssocID="{5C407219-177A-43EE-B67E-B6E75271BA5B}" presName="childNode1tx" presStyleLbl="bgAcc1" presStyleIdx="0" presStyleCnt="4">
+        <dgm:presLayoutVars>
+          <dgm:bulletEnabled val="1"/>
+        </dgm:presLayoutVars>
+      </dgm:prSet>
+      <dgm:spPr/>
+    </dgm:pt>
+    <dgm:pt modelId="{22CBB4AF-36EB-417C-B703-FAF0662ACF49}" type="pres">
+      <dgm:prSet presAssocID="{5C407219-177A-43EE-B67E-B6E75271BA5B}" presName="parentNode1" presStyleLbl="node1" presStyleIdx="0" presStyleCnt="4" custLinFactNeighborY="7777">
+        <dgm:presLayoutVars>
+          <dgm:chMax val="1"/>
+          <dgm:bulletEnabled val="1"/>
+        </dgm:presLayoutVars>
+      </dgm:prSet>
+      <dgm:spPr/>
+    </dgm:pt>
+    <dgm:pt modelId="{CD953644-E5C6-4A75-8B8E-A06C97C3F536}" type="pres">
+      <dgm:prSet presAssocID="{5C407219-177A-43EE-B67E-B6E75271BA5B}" presName="connSite1" presStyleCnt="0"/>
+      <dgm:spPr/>
+    </dgm:pt>
+    <dgm:pt modelId="{464DE029-02A1-4763-8666-F53A13C6FAAD}" type="pres">
+      <dgm:prSet presAssocID="{8E1FD376-005E-46DD-AB7C-3AD5F0C68AF6}" presName="Name9" presStyleLbl="sibTrans2D1" presStyleIdx="0" presStyleCnt="3"/>
+      <dgm:spPr/>
+    </dgm:pt>
+    <dgm:pt modelId="{AFDFC40E-DDD3-4BC8-8BEB-A1A8244FD812}" type="pres">
+      <dgm:prSet presAssocID="{5489487A-AE09-4C57-A8FE-3C88CD528A51}" presName="composite2" presStyleCnt="0"/>
+      <dgm:spPr/>
+    </dgm:pt>
+    <dgm:pt modelId="{3D3FE732-BEE4-4789-B501-EFE8520C98A6}" type="pres">
+      <dgm:prSet presAssocID="{5489487A-AE09-4C57-A8FE-3C88CD528A51}" presName="dummyNode2" presStyleLbl="node1" presStyleIdx="0" presStyleCnt="4"/>
+      <dgm:spPr/>
+    </dgm:pt>
+    <dgm:pt modelId="{D9BDC29B-7D63-4495-A3B2-7C07F9B8C330}" type="pres">
+      <dgm:prSet presAssocID="{5489487A-AE09-4C57-A8FE-3C88CD528A51}" presName="childNode2" presStyleLbl="bgAcc1" presStyleIdx="1" presStyleCnt="4">
+        <dgm:presLayoutVars>
+          <dgm:bulletEnabled val="1"/>
+        </dgm:presLayoutVars>
+      </dgm:prSet>
+      <dgm:spPr/>
+    </dgm:pt>
+    <dgm:pt modelId="{3A5BFE43-F020-43A7-BFCC-87B32E6976A9}" type="pres">
+      <dgm:prSet presAssocID="{5489487A-AE09-4C57-A8FE-3C88CD528A51}" presName="childNode2tx" presStyleLbl="bgAcc1" presStyleIdx="1" presStyleCnt="4">
+        <dgm:presLayoutVars>
+          <dgm:bulletEnabled val="1"/>
+        </dgm:presLayoutVars>
+      </dgm:prSet>
+      <dgm:spPr/>
+    </dgm:pt>
+    <dgm:pt modelId="{57A9CED2-870E-4BB2-8BB0-97EB3CDBF401}" type="pres">
+      <dgm:prSet presAssocID="{5489487A-AE09-4C57-A8FE-3C88CD528A51}" presName="parentNode2" presStyleLbl="node1" presStyleIdx="1" presStyleCnt="4">
         <dgm:presLayoutVars>
           <dgm:chMax val="0"/>
           <dgm:bulletEnabled val="1"/>
@@ -2226,12 +3292,81 @@
       </dgm:prSet>
       <dgm:spPr/>
     </dgm:pt>
-    <dgm:pt modelId="{6BBFA29F-A02E-4C2B-B069-A99753A6B9E2}" type="pres">
-      <dgm:prSet presAssocID="{26305A9A-C2C4-4E74-B0F2-9C320C9C54F4}" presName="spacer" presStyleCnt="0"/>
+    <dgm:pt modelId="{9A6587D4-7582-4D83-A90E-1B1B29100CB4}" type="pres">
+      <dgm:prSet presAssocID="{5489487A-AE09-4C57-A8FE-3C88CD528A51}" presName="connSite2" presStyleCnt="0"/>
       <dgm:spPr/>
     </dgm:pt>
-    <dgm:pt modelId="{E17F7417-71EF-47F6-9FD3-E5C8543F8F06}" type="pres">
-      <dgm:prSet presAssocID="{6191EFCA-CE56-462E-9C65-7FB76756A66E}" presName="parentText" presStyleLbl="node1" presStyleIdx="1" presStyleCnt="5">
+    <dgm:pt modelId="{1C299799-9D54-457B-A3C7-0FB93A410866}" type="pres">
+      <dgm:prSet presAssocID="{A5277286-5511-4E9A-9AF8-737B622E3223}" presName="Name18" presStyleLbl="sibTrans2D1" presStyleIdx="1" presStyleCnt="3"/>
+      <dgm:spPr/>
+    </dgm:pt>
+    <dgm:pt modelId="{64364D03-C473-454F-AF21-95C000F5F884}" type="pres">
+      <dgm:prSet presAssocID="{1BCB95D6-B1A4-439C-9AD1-CE00E32D68AA}" presName="composite1" presStyleCnt="0"/>
+      <dgm:spPr/>
+    </dgm:pt>
+    <dgm:pt modelId="{44F76157-1425-47BB-9E5D-B9F240E12A0A}" type="pres">
+      <dgm:prSet presAssocID="{1BCB95D6-B1A4-439C-9AD1-CE00E32D68AA}" presName="dummyNode1" presStyleLbl="node1" presStyleIdx="1" presStyleCnt="4"/>
+      <dgm:spPr/>
+    </dgm:pt>
+    <dgm:pt modelId="{686EF4F2-C186-45B2-85A0-F6687D978556}" type="pres">
+      <dgm:prSet presAssocID="{1BCB95D6-B1A4-439C-9AD1-CE00E32D68AA}" presName="childNode1" presStyleLbl="bgAcc1" presStyleIdx="2" presStyleCnt="4">
+        <dgm:presLayoutVars>
+          <dgm:bulletEnabled val="1"/>
+        </dgm:presLayoutVars>
+      </dgm:prSet>
+      <dgm:spPr/>
+    </dgm:pt>
+    <dgm:pt modelId="{22FAA828-71BC-4F47-855C-19152EC671EC}" type="pres">
+      <dgm:prSet presAssocID="{1BCB95D6-B1A4-439C-9AD1-CE00E32D68AA}" presName="childNode1tx" presStyleLbl="bgAcc1" presStyleIdx="2" presStyleCnt="4">
+        <dgm:presLayoutVars>
+          <dgm:bulletEnabled val="1"/>
+        </dgm:presLayoutVars>
+      </dgm:prSet>
+      <dgm:spPr/>
+    </dgm:pt>
+    <dgm:pt modelId="{94FE265A-D377-4872-8AAD-6D9586E0C18A}" type="pres">
+      <dgm:prSet presAssocID="{1BCB95D6-B1A4-439C-9AD1-CE00E32D68AA}" presName="parentNode1" presStyleLbl="node1" presStyleIdx="2" presStyleCnt="4">
+        <dgm:presLayoutVars>
+          <dgm:chMax val="1"/>
+          <dgm:bulletEnabled val="1"/>
+        </dgm:presLayoutVars>
+      </dgm:prSet>
+      <dgm:spPr/>
+    </dgm:pt>
+    <dgm:pt modelId="{B6B4BA71-2269-473A-9B34-EE3A92EF3F26}" type="pres">
+      <dgm:prSet presAssocID="{1BCB95D6-B1A4-439C-9AD1-CE00E32D68AA}" presName="connSite1" presStyleCnt="0"/>
+      <dgm:spPr/>
+    </dgm:pt>
+    <dgm:pt modelId="{74F3F80A-8B0F-4F29-B321-AD28639C9105}" type="pres">
+      <dgm:prSet presAssocID="{0C420126-164A-4514-A51E-AB2C4502F253}" presName="Name9" presStyleLbl="sibTrans2D1" presStyleIdx="2" presStyleCnt="3"/>
+      <dgm:spPr/>
+    </dgm:pt>
+    <dgm:pt modelId="{EA78CE16-E317-4FEA-996D-E0EE0A893B5C}" type="pres">
+      <dgm:prSet presAssocID="{5DA50F34-C831-4850-8B63-CE799FF6C0D5}" presName="composite2" presStyleCnt="0"/>
+      <dgm:spPr/>
+    </dgm:pt>
+    <dgm:pt modelId="{60BAA0C7-18DD-413F-B007-B92B7FACDBD8}" type="pres">
+      <dgm:prSet presAssocID="{5DA50F34-C831-4850-8B63-CE799FF6C0D5}" presName="dummyNode2" presStyleLbl="node1" presStyleIdx="2" presStyleCnt="4"/>
+      <dgm:spPr/>
+    </dgm:pt>
+    <dgm:pt modelId="{DE4AC59B-B8E8-4AE0-82DC-3BD6B4ADF27A}" type="pres">
+      <dgm:prSet presAssocID="{5DA50F34-C831-4850-8B63-CE799FF6C0D5}" presName="childNode2" presStyleLbl="bgAcc1" presStyleIdx="3" presStyleCnt="4">
+        <dgm:presLayoutVars>
+          <dgm:bulletEnabled val="1"/>
+        </dgm:presLayoutVars>
+      </dgm:prSet>
+      <dgm:spPr/>
+    </dgm:pt>
+    <dgm:pt modelId="{3C445FF9-93F1-4683-A6D2-EC9DB43AA93D}" type="pres">
+      <dgm:prSet presAssocID="{5DA50F34-C831-4850-8B63-CE799FF6C0D5}" presName="childNode2tx" presStyleLbl="bgAcc1" presStyleIdx="3" presStyleCnt="4">
+        <dgm:presLayoutVars>
+          <dgm:bulletEnabled val="1"/>
+        </dgm:presLayoutVars>
+      </dgm:prSet>
+      <dgm:spPr/>
+    </dgm:pt>
+    <dgm:pt modelId="{C4D9AE61-43FF-44EC-9E2D-7446ED243914}" type="pres">
+      <dgm:prSet presAssocID="{5DA50F34-C831-4850-8B63-CE799FF6C0D5}" presName="parentNode2" presStyleLbl="node1" presStyleIdx="3" presStyleCnt="4">
         <dgm:presLayoutVars>
           <dgm:chMax val="0"/>
           <dgm:bulletEnabled val="1"/>
@@ -2239,73 +3374,93 @@
       </dgm:prSet>
       <dgm:spPr/>
     </dgm:pt>
-    <dgm:pt modelId="{7F932AF3-9C5C-4A04-A625-F6D36BDEFD20}" type="pres">
-      <dgm:prSet presAssocID="{0B9AFA3A-0187-4307-AB30-91172D67F140}" presName="spacer" presStyleCnt="0"/>
-      <dgm:spPr/>
-    </dgm:pt>
-    <dgm:pt modelId="{C0326A5D-C028-4AD8-A208-71E1C9E1173A}" type="pres">
-      <dgm:prSet presAssocID="{1BDCAD06-E9C5-40A9-ACE1-32C04E08A483}" presName="parentText" presStyleLbl="node1" presStyleIdx="2" presStyleCnt="5">
-        <dgm:presLayoutVars>
-          <dgm:chMax val="0"/>
-          <dgm:bulletEnabled val="1"/>
-        </dgm:presLayoutVars>
-      </dgm:prSet>
-      <dgm:spPr/>
-    </dgm:pt>
-    <dgm:pt modelId="{74E381AB-6A09-4538-B60D-C00709A9ED73}" type="pres">
-      <dgm:prSet presAssocID="{E044F888-5014-4F34-9D1F-5266E59BD480}" presName="spacer" presStyleCnt="0"/>
-      <dgm:spPr/>
-    </dgm:pt>
-    <dgm:pt modelId="{79E31495-6943-4F1A-A771-5E3E2983A4BE}" type="pres">
-      <dgm:prSet presAssocID="{81732352-DC5F-496D-8C27-4D8928214C72}" presName="parentText" presStyleLbl="node1" presStyleIdx="3" presStyleCnt="5">
-        <dgm:presLayoutVars>
-          <dgm:chMax val="0"/>
-          <dgm:bulletEnabled val="1"/>
-        </dgm:presLayoutVars>
-      </dgm:prSet>
-      <dgm:spPr/>
-    </dgm:pt>
-    <dgm:pt modelId="{45A6B852-44A5-42E7-9445-7B5E1A1C56C4}" type="pres">
-      <dgm:prSet presAssocID="{AC5229AD-8849-44C5-A507-9AEF0F3D6340}" presName="spacer" presStyleCnt="0"/>
-      <dgm:spPr/>
-    </dgm:pt>
-    <dgm:pt modelId="{3DF2B3B6-3B2F-4B1F-A43E-B945C0780DEA}" type="pres">
-      <dgm:prSet presAssocID="{979A6407-7D95-402A-AF18-F494419A9494}" presName="parentText" presStyleLbl="node1" presStyleIdx="4" presStyleCnt="5">
-        <dgm:presLayoutVars>
-          <dgm:chMax val="0"/>
-          <dgm:bulletEnabled val="1"/>
-        </dgm:presLayoutVars>
-      </dgm:prSet>
+    <dgm:pt modelId="{B20B26B3-AC24-4A72-B831-B92A331552E8}" type="pres">
+      <dgm:prSet presAssocID="{5DA50F34-C831-4850-8B63-CE799FF6C0D5}" presName="connSite2" presStyleCnt="0"/>
       <dgm:spPr/>
     </dgm:pt>
   </dgm:ptLst>
   <dgm:cxnLst>
-    <dgm:cxn modelId="{BEB60903-B9FD-409C-A856-01C7DF0D6CA1}" type="presOf" srcId="{96586CA8-3EC6-48CA-B79D-D07FF68BD529}" destId="{58336DFE-FB7D-4F4F-89A5-C15DB3DFC1C3}" srcOrd="0" destOrd="0" presId="urn:microsoft.com/office/officeart/2005/8/layout/vList2"/>
-    <dgm:cxn modelId="{DE9EEC1A-77F3-4F2F-98D1-DABA229CF423}" srcId="{332819EA-3386-42B9-9077-01AD17EAD6CF}" destId="{1BDCAD06-E9C5-40A9-ACE1-32C04E08A483}" srcOrd="2" destOrd="0" parTransId="{D9521B96-25A3-4CB8-8A5C-7D7FAA90C562}" sibTransId="{E044F888-5014-4F34-9D1F-5266E59BD480}"/>
-    <dgm:cxn modelId="{E6538B34-7F10-4029-BBB0-CA18E3AEE73B}" type="presOf" srcId="{1BDCAD06-E9C5-40A9-ACE1-32C04E08A483}" destId="{C0326A5D-C028-4AD8-A208-71E1C9E1173A}" srcOrd="0" destOrd="0" presId="urn:microsoft.com/office/officeart/2005/8/layout/vList2"/>
-    <dgm:cxn modelId="{99FFD53D-ABD9-4319-B6B8-5817006C37FA}" srcId="{332819EA-3386-42B9-9077-01AD17EAD6CF}" destId="{81732352-DC5F-496D-8C27-4D8928214C72}" srcOrd="3" destOrd="0" parTransId="{99E76306-419E-431E-AA29-923E484297F1}" sibTransId="{AC5229AD-8849-44C5-A507-9AEF0F3D6340}"/>
-    <dgm:cxn modelId="{648E0066-5FBE-40AE-9B87-68EFBF5AE146}" type="presOf" srcId="{979A6407-7D95-402A-AF18-F494419A9494}" destId="{3DF2B3B6-3B2F-4B1F-A43E-B945C0780DEA}" srcOrd="0" destOrd="0" presId="urn:microsoft.com/office/officeart/2005/8/layout/vList2"/>
-    <dgm:cxn modelId="{28C76348-5284-4697-A09F-4A3E3EAF2D51}" srcId="{332819EA-3386-42B9-9077-01AD17EAD6CF}" destId="{96586CA8-3EC6-48CA-B79D-D07FF68BD529}" srcOrd="0" destOrd="0" parTransId="{E7C6BEE5-CAB7-46B6-82B7-A7C9A6D9B278}" sibTransId="{26305A9A-C2C4-4E74-B0F2-9C320C9C54F4}"/>
-    <dgm:cxn modelId="{19BF5E7A-E250-4B3B-979D-312BA2030CA9}" type="presOf" srcId="{332819EA-3386-42B9-9077-01AD17EAD6CF}" destId="{BB7FB346-4D37-4F3F-B3BE-F14C819901AF}" srcOrd="0" destOrd="0" presId="urn:microsoft.com/office/officeart/2005/8/layout/vList2"/>
-    <dgm:cxn modelId="{58EF06A1-C8A6-4715-A751-1897016FCA27}" srcId="{332819EA-3386-42B9-9077-01AD17EAD6CF}" destId="{6191EFCA-CE56-462E-9C65-7FB76756A66E}" srcOrd="1" destOrd="0" parTransId="{3BB52197-539F-43F6-AE14-6D8B8F35CEEB}" sibTransId="{0B9AFA3A-0187-4307-AB30-91172D67F140}"/>
-    <dgm:cxn modelId="{7F802EBD-B4DB-400F-84DF-CA1DDD1B1FD7}" srcId="{332819EA-3386-42B9-9077-01AD17EAD6CF}" destId="{979A6407-7D95-402A-AF18-F494419A9494}" srcOrd="4" destOrd="0" parTransId="{FAB09760-03AD-4077-83D7-09E8EA2F46D8}" sibTransId="{73395DF5-8BD2-4F43-A233-CE71101C4E7A}"/>
-    <dgm:cxn modelId="{EE92F8BE-38B8-4384-A9E7-C9EE84E51E9A}" type="presOf" srcId="{81732352-DC5F-496D-8C27-4D8928214C72}" destId="{79E31495-6943-4F1A-A771-5E3E2983A4BE}" srcOrd="0" destOrd="0" presId="urn:microsoft.com/office/officeart/2005/8/layout/vList2"/>
-    <dgm:cxn modelId="{ECD03EF0-E02B-417D-B496-60F9CE7E6F44}" type="presOf" srcId="{6191EFCA-CE56-462E-9C65-7FB76756A66E}" destId="{E17F7417-71EF-47F6-9FD3-E5C8543F8F06}" srcOrd="0" destOrd="0" presId="urn:microsoft.com/office/officeart/2005/8/layout/vList2"/>
-    <dgm:cxn modelId="{6B3D7F04-D94A-4FFF-8E7A-5CDD8E7965EA}" type="presParOf" srcId="{BB7FB346-4D37-4F3F-B3BE-F14C819901AF}" destId="{58336DFE-FB7D-4F4F-89A5-C15DB3DFC1C3}" srcOrd="0" destOrd="0" presId="urn:microsoft.com/office/officeart/2005/8/layout/vList2"/>
-    <dgm:cxn modelId="{1F62C2B4-8009-4887-8210-B5423BC26676}" type="presParOf" srcId="{BB7FB346-4D37-4F3F-B3BE-F14C819901AF}" destId="{6BBFA29F-A02E-4C2B-B069-A99753A6B9E2}" srcOrd="1" destOrd="0" presId="urn:microsoft.com/office/officeart/2005/8/layout/vList2"/>
-    <dgm:cxn modelId="{EAA332BF-C5BE-401A-90A8-47733B364B1D}" type="presParOf" srcId="{BB7FB346-4D37-4F3F-B3BE-F14C819901AF}" destId="{E17F7417-71EF-47F6-9FD3-E5C8543F8F06}" srcOrd="2" destOrd="0" presId="urn:microsoft.com/office/officeart/2005/8/layout/vList2"/>
-    <dgm:cxn modelId="{35DC138E-F6B5-423A-99FB-CEEE7C92B941}" type="presParOf" srcId="{BB7FB346-4D37-4F3F-B3BE-F14C819901AF}" destId="{7F932AF3-9C5C-4A04-A625-F6D36BDEFD20}" srcOrd="3" destOrd="0" presId="urn:microsoft.com/office/officeart/2005/8/layout/vList2"/>
-    <dgm:cxn modelId="{F80B63F2-C70B-4E94-BBCD-6F42A3A9669C}" type="presParOf" srcId="{BB7FB346-4D37-4F3F-B3BE-F14C819901AF}" destId="{C0326A5D-C028-4AD8-A208-71E1C9E1173A}" srcOrd="4" destOrd="0" presId="urn:microsoft.com/office/officeart/2005/8/layout/vList2"/>
-    <dgm:cxn modelId="{44E1656F-62B4-4C62-B71E-FD154820BED0}" type="presParOf" srcId="{BB7FB346-4D37-4F3F-B3BE-F14C819901AF}" destId="{74E381AB-6A09-4538-B60D-C00709A9ED73}" srcOrd="5" destOrd="0" presId="urn:microsoft.com/office/officeart/2005/8/layout/vList2"/>
-    <dgm:cxn modelId="{8AA7DE18-CBFA-4D35-9A1B-9EF0EF13E746}" type="presParOf" srcId="{BB7FB346-4D37-4F3F-B3BE-F14C819901AF}" destId="{79E31495-6943-4F1A-A771-5E3E2983A4BE}" srcOrd="6" destOrd="0" presId="urn:microsoft.com/office/officeart/2005/8/layout/vList2"/>
-    <dgm:cxn modelId="{ACA4C36E-FA0C-45E3-91DC-8D764D1BA25F}" type="presParOf" srcId="{BB7FB346-4D37-4F3F-B3BE-F14C819901AF}" destId="{45A6B852-44A5-42E7-9445-7B5E1A1C56C4}" srcOrd="7" destOrd="0" presId="urn:microsoft.com/office/officeart/2005/8/layout/vList2"/>
-    <dgm:cxn modelId="{ADBCC014-F458-4AC0-B630-75AE43427E2F}" type="presParOf" srcId="{BB7FB346-4D37-4F3F-B3BE-F14C819901AF}" destId="{3DF2B3B6-3B2F-4B1F-A43E-B945C0780DEA}" srcOrd="8" destOrd="0" presId="urn:microsoft.com/office/officeart/2005/8/layout/vList2"/>
+    <dgm:cxn modelId="{792D4403-5B5E-411A-82AE-D483DFE10AAB}" srcId="{99D1A08B-05C7-4294-99DD-7BE56AF469A8}" destId="{5DA50F34-C831-4850-8B63-CE799FF6C0D5}" srcOrd="3" destOrd="0" parTransId="{B7130E8A-5AA5-407D-9187-C73B81606744}" sibTransId="{27D0D650-91D1-4215-B213-38A33A97C818}"/>
+    <dgm:cxn modelId="{22D14C08-B102-444F-8400-735B14327DF4}" srcId="{1BCB95D6-B1A4-439C-9AD1-CE00E32D68AA}" destId="{EB9EEFA8-E354-4F52-BA0E-F1E23DACFF23}" srcOrd="1" destOrd="0" parTransId="{FBDD0822-3C20-4EF0-B91D-23A882EE7DCF}" sibTransId="{81CF5625-CEBF-44C9-BA20-42ED0CDF8DE9}"/>
+    <dgm:cxn modelId="{3AA8EF0A-0856-4B67-8239-D4811C9B9A20}" type="presOf" srcId="{36A43055-FF1E-4000-92DC-E1996435069B}" destId="{3A5BFE43-F020-43A7-BFCC-87B32E6976A9}" srcOrd="1" destOrd="0" presId="urn:microsoft.com/office/officeart/2005/8/layout/hProcess4"/>
+    <dgm:cxn modelId="{0695140D-8D64-47F6-820C-E3C788A10897}" srcId="{5C407219-177A-43EE-B67E-B6E75271BA5B}" destId="{269C76F2-6A3F-4463-A37D-34DF9557723A}" srcOrd="1" destOrd="0" parTransId="{6FBEEE41-A564-4BEC-881C-34C8762D68EC}" sibTransId="{45AFFE97-47BA-4DAA-829A-7C59AE051FBD}"/>
+    <dgm:cxn modelId="{E2C1BF0F-D514-4126-8BC4-A61CBF22795D}" type="presOf" srcId="{FB1AC2EB-2A73-487E-BFFC-E85DCC33CF70}" destId="{686EF4F2-C186-45B2-85A0-F6687D978556}" srcOrd="0" destOrd="0" presId="urn:microsoft.com/office/officeart/2005/8/layout/hProcess4"/>
+    <dgm:cxn modelId="{C28AC818-B414-421E-8463-AB316EB8EB6D}" type="presOf" srcId="{97225384-B3A3-4246-BB0C-554A34D4B7EE}" destId="{21C25EF7-5122-4CB4-922C-C536D59390E7}" srcOrd="1" destOrd="0" presId="urn:microsoft.com/office/officeart/2005/8/layout/hProcess4"/>
+    <dgm:cxn modelId="{64ECB721-0461-41EC-8F41-CB09C952C4FE}" type="presOf" srcId="{5C407219-177A-43EE-B67E-B6E75271BA5B}" destId="{22CBB4AF-36EB-417C-B703-FAF0662ACF49}" srcOrd="0" destOrd="0" presId="urn:microsoft.com/office/officeart/2005/8/layout/hProcess4"/>
+    <dgm:cxn modelId="{440F9726-70B7-42A5-AB88-B53C3894826F}" srcId="{269C76F2-6A3F-4463-A37D-34DF9557723A}" destId="{DCFD0921-E245-4A02-B3A7-0E9B55127B04}" srcOrd="0" destOrd="0" parTransId="{70B824C9-F3CD-40A2-B5BA-784C85902FF3}" sibTransId="{69013C8D-2C94-4B00-9813-3B8C02617849}"/>
+    <dgm:cxn modelId="{F305BA26-4492-4867-9F9B-5A8ACF3514B4}" srcId="{5DA50F34-C831-4850-8B63-CE799FF6C0D5}" destId="{F945E611-CD2E-4C69-9DAE-2D0D3822A0EA}" srcOrd="1" destOrd="0" parTransId="{E05F5CE7-8C2A-4ACE-81D4-21183E002FC5}" sibTransId="{25BB5900-0641-407C-8ED9-9C929C16D5E9}"/>
+    <dgm:cxn modelId="{5997E327-E8CC-401F-8736-7BC1AA7001BC}" type="presOf" srcId="{8111E655-AA73-4919-8D88-D2AFAC6203BA}" destId="{3C445FF9-93F1-4683-A6D2-EC9DB43AA93D}" srcOrd="1" destOrd="0" presId="urn:microsoft.com/office/officeart/2005/8/layout/hProcess4"/>
+    <dgm:cxn modelId="{E8CA3328-6D59-4724-88B8-D6684CCFD216}" type="presOf" srcId="{F945E611-CD2E-4C69-9DAE-2D0D3822A0EA}" destId="{3C445FF9-93F1-4683-A6D2-EC9DB43AA93D}" srcOrd="1" destOrd="1" presId="urn:microsoft.com/office/officeart/2005/8/layout/hProcess4"/>
+    <dgm:cxn modelId="{1D8D772B-181D-4909-B145-E899F3EF30EF}" type="presOf" srcId="{99D1A08B-05C7-4294-99DD-7BE56AF469A8}" destId="{1641139E-5806-4ED1-AA40-CDBBD9ABB873}" srcOrd="0" destOrd="0" presId="urn:microsoft.com/office/officeart/2005/8/layout/hProcess4"/>
+    <dgm:cxn modelId="{F1D3D530-B984-418C-B652-57E1E301F4DE}" type="presOf" srcId="{0C420126-164A-4514-A51E-AB2C4502F253}" destId="{74F3F80A-8B0F-4F29-B321-AD28639C9105}" srcOrd="0" destOrd="0" presId="urn:microsoft.com/office/officeart/2005/8/layout/hProcess4"/>
+    <dgm:cxn modelId="{1629ED30-2BD7-424A-906E-0DAD0AA696C2}" type="presOf" srcId="{F945E611-CD2E-4C69-9DAE-2D0D3822A0EA}" destId="{DE4AC59B-B8E8-4AE0-82DC-3BD6B4ADF27A}" srcOrd="0" destOrd="1" presId="urn:microsoft.com/office/officeart/2005/8/layout/hProcess4"/>
+    <dgm:cxn modelId="{63DD5235-EEA8-4C62-812F-84E36FEF1592}" srcId="{1BCB95D6-B1A4-439C-9AD1-CE00E32D68AA}" destId="{FB1AC2EB-2A73-487E-BFFC-E85DCC33CF70}" srcOrd="0" destOrd="0" parTransId="{E19BCDDB-747D-419A-A20E-A9AAFEF8A011}" sibTransId="{86A587C2-A658-4B6E-9679-4F54844F90F0}"/>
+    <dgm:cxn modelId="{178C6A5B-5781-42D4-90C0-2603702C6FEC}" type="presOf" srcId="{3679B97A-32D2-4172-BEF9-560A1496BE56}" destId="{22FAA828-71BC-4F47-855C-19152EC671EC}" srcOrd="1" destOrd="3" presId="urn:microsoft.com/office/officeart/2005/8/layout/hProcess4"/>
+    <dgm:cxn modelId="{B640D65E-9BAB-40E1-9A90-1DF268BFCE38}" type="presOf" srcId="{8E1FD376-005E-46DD-AB7C-3AD5F0C68AF6}" destId="{464DE029-02A1-4763-8666-F53A13C6FAAD}" srcOrd="0" destOrd="0" presId="urn:microsoft.com/office/officeart/2005/8/layout/hProcess4"/>
+    <dgm:cxn modelId="{CA3F9942-3020-409B-85BB-456C14616609}" type="presOf" srcId="{18DC73F0-EDC3-4451-98EA-91C847F5E375}" destId="{3A5BFE43-F020-43A7-BFCC-87B32E6976A9}" srcOrd="1" destOrd="1" presId="urn:microsoft.com/office/officeart/2005/8/layout/hProcess4"/>
+    <dgm:cxn modelId="{6B257843-4F5E-4AFE-A2EB-DCD7EC2836DE}" srcId="{EB9EEFA8-E354-4F52-BA0E-F1E23DACFF23}" destId="{428AB112-F44A-4DBD-9A72-307227A48835}" srcOrd="0" destOrd="0" parTransId="{DE48C9E4-0BEC-4D80-A91C-82920DE858EA}" sibTransId="{364B18D5-CB61-44ED-85B8-E92D9EE279E9}"/>
+    <dgm:cxn modelId="{BDFEF269-CF52-44E1-90F3-093DB5486581}" srcId="{5489487A-AE09-4C57-A8FE-3C88CD528A51}" destId="{36A43055-FF1E-4000-92DC-E1996435069B}" srcOrd="0" destOrd="0" parTransId="{F952DEC6-66D8-4998-8A9C-A930577EC2D2}" sibTransId="{86D954EB-E373-4698-A5D0-017BAF56FA0A}"/>
+    <dgm:cxn modelId="{9F09F24A-90A1-422B-B5DA-B38130F44CE8}" type="presOf" srcId="{36A43055-FF1E-4000-92DC-E1996435069B}" destId="{D9BDC29B-7D63-4495-A3B2-7C07F9B8C330}" srcOrd="0" destOrd="0" presId="urn:microsoft.com/office/officeart/2005/8/layout/hProcess4"/>
+    <dgm:cxn modelId="{3BA51A6D-6778-4A76-81C2-F27BF63FFE4F}" type="presOf" srcId="{428AB112-F44A-4DBD-9A72-307227A48835}" destId="{22FAA828-71BC-4F47-855C-19152EC671EC}" srcOrd="1" destOrd="2" presId="urn:microsoft.com/office/officeart/2005/8/layout/hProcess4"/>
+    <dgm:cxn modelId="{05D31F52-AB99-41FE-B518-7A810335A1BA}" type="presOf" srcId="{FB1AC2EB-2A73-487E-BFFC-E85DCC33CF70}" destId="{22FAA828-71BC-4F47-855C-19152EC671EC}" srcOrd="1" destOrd="0" presId="urn:microsoft.com/office/officeart/2005/8/layout/hProcess4"/>
+    <dgm:cxn modelId="{284B5854-B03F-43A1-A980-1E2CA9E3F355}" type="presOf" srcId="{8111E655-AA73-4919-8D88-D2AFAC6203BA}" destId="{DE4AC59B-B8E8-4AE0-82DC-3BD6B4ADF27A}" srcOrd="0" destOrd="0" presId="urn:microsoft.com/office/officeart/2005/8/layout/hProcess4"/>
+    <dgm:cxn modelId="{AF464776-F375-42C1-A960-13E9CEAD8FA3}" type="presOf" srcId="{A5277286-5511-4E9A-9AF8-737B622E3223}" destId="{1C299799-9D54-457B-A3C7-0FB93A410866}" srcOrd="0" destOrd="0" presId="urn:microsoft.com/office/officeart/2005/8/layout/hProcess4"/>
+    <dgm:cxn modelId="{B4C2015A-3E27-4822-AFDD-CB4131CA6FDC}" type="presOf" srcId="{428AB112-F44A-4DBD-9A72-307227A48835}" destId="{686EF4F2-C186-45B2-85A0-F6687D978556}" srcOrd="0" destOrd="2" presId="urn:microsoft.com/office/officeart/2005/8/layout/hProcess4"/>
+    <dgm:cxn modelId="{E402FD5A-86DA-4AA4-BB63-19D2FC1A9CFA}" type="presOf" srcId="{3679B97A-32D2-4172-BEF9-560A1496BE56}" destId="{686EF4F2-C186-45B2-85A0-F6687D978556}" srcOrd="0" destOrd="3" presId="urn:microsoft.com/office/officeart/2005/8/layout/hProcess4"/>
+    <dgm:cxn modelId="{8BC42789-7A8C-4F3C-9F4C-2F71DA98F207}" srcId="{5489487A-AE09-4C57-A8FE-3C88CD528A51}" destId="{18DC73F0-EDC3-4451-98EA-91C847F5E375}" srcOrd="1" destOrd="0" parTransId="{49516162-687F-4DFA-BEBA-7A284363F675}" sibTransId="{60465BCF-9C95-4637-8D4C-5290976EB2A0}"/>
+    <dgm:cxn modelId="{2A4DB68A-A8F5-4013-BA1D-CB9791661462}" type="presOf" srcId="{1BCB95D6-B1A4-439C-9AD1-CE00E32D68AA}" destId="{94FE265A-D377-4872-8AAD-6D9586E0C18A}" srcOrd="0" destOrd="0" presId="urn:microsoft.com/office/officeart/2005/8/layout/hProcess4"/>
+    <dgm:cxn modelId="{46FA7699-0760-422D-95EC-7D257C462A6A}" srcId="{99D1A08B-05C7-4294-99DD-7BE56AF469A8}" destId="{5C407219-177A-43EE-B67E-B6E75271BA5B}" srcOrd="0" destOrd="0" parTransId="{78EA6105-D13A-4F17-AB97-952ED6E1056F}" sibTransId="{8E1FD376-005E-46DD-AB7C-3AD5F0C68AF6}"/>
+    <dgm:cxn modelId="{A778DC99-B49C-4DDC-91A4-BC2F4970DD00}" srcId="{99D1A08B-05C7-4294-99DD-7BE56AF469A8}" destId="{5489487A-AE09-4C57-A8FE-3C88CD528A51}" srcOrd="1" destOrd="0" parTransId="{3491C758-4628-4476-8033-6CEC21F5D7B6}" sibTransId="{A5277286-5511-4E9A-9AF8-737B622E3223}"/>
+    <dgm:cxn modelId="{8589B7AB-6823-4989-8C6C-DD6B72F4F6E1}" type="presOf" srcId="{5489487A-AE09-4C57-A8FE-3C88CD528A51}" destId="{57A9CED2-870E-4BB2-8BB0-97EB3CDBF401}" srcOrd="0" destOrd="0" presId="urn:microsoft.com/office/officeart/2005/8/layout/hProcess4"/>
+    <dgm:cxn modelId="{EE041FAD-318D-41BF-A178-1F05CAEA8438}" type="presOf" srcId="{EB9EEFA8-E354-4F52-BA0E-F1E23DACFF23}" destId="{686EF4F2-C186-45B2-85A0-F6687D978556}" srcOrd="0" destOrd="1" presId="urn:microsoft.com/office/officeart/2005/8/layout/hProcess4"/>
+    <dgm:cxn modelId="{680D46B5-D7AA-4A7A-9B62-35116464C916}" type="presOf" srcId="{5DA50F34-C831-4850-8B63-CE799FF6C0D5}" destId="{C4D9AE61-43FF-44EC-9E2D-7446ED243914}" srcOrd="0" destOrd="0" presId="urn:microsoft.com/office/officeart/2005/8/layout/hProcess4"/>
+    <dgm:cxn modelId="{D4C2C2BA-4EF0-4E8C-8B23-D309E73EFFAB}" srcId="{5DA50F34-C831-4850-8B63-CE799FF6C0D5}" destId="{8111E655-AA73-4919-8D88-D2AFAC6203BA}" srcOrd="0" destOrd="0" parTransId="{1D01C444-95C3-40B7-A96E-5D3C98D5EFB1}" sibTransId="{734582F4-7C5B-4397-B295-2E2F146BB4BE}"/>
+    <dgm:cxn modelId="{E0FBC2CB-959A-4226-9ACB-4CB07C4E9F88}" srcId="{5C407219-177A-43EE-B67E-B6E75271BA5B}" destId="{97225384-B3A3-4246-BB0C-554A34D4B7EE}" srcOrd="0" destOrd="0" parTransId="{2032F91E-C142-4D3C-947C-7455714058C6}" sibTransId="{6E3C3B18-981D-4F6C-AB72-2F298617B885}"/>
+    <dgm:cxn modelId="{2FD1C1D0-5F39-44A4-B0CC-E3EB141EBCCB}" type="presOf" srcId="{97225384-B3A3-4246-BB0C-554A34D4B7EE}" destId="{30DD4CDA-4812-46C7-BA95-FF21DAD772D9}" srcOrd="0" destOrd="0" presId="urn:microsoft.com/office/officeart/2005/8/layout/hProcess4"/>
+    <dgm:cxn modelId="{8B4A27D9-7DF5-407D-9FE0-9F9C17CD667A}" srcId="{99D1A08B-05C7-4294-99DD-7BE56AF469A8}" destId="{1BCB95D6-B1A4-439C-9AD1-CE00E32D68AA}" srcOrd="2" destOrd="0" parTransId="{565DC6A8-BFE9-4A7B-9AAF-B0195AFAE88E}" sibTransId="{0C420126-164A-4514-A51E-AB2C4502F253}"/>
+    <dgm:cxn modelId="{5B3F16EF-AC5B-440F-8E59-25BAE29FFE54}" type="presOf" srcId="{269C76F2-6A3F-4463-A37D-34DF9557723A}" destId="{30DD4CDA-4812-46C7-BA95-FF21DAD772D9}" srcOrd="0" destOrd="1" presId="urn:microsoft.com/office/officeart/2005/8/layout/hProcess4"/>
+    <dgm:cxn modelId="{F10086F6-2B83-44CF-93ED-1F8A2C82CF12}" type="presOf" srcId="{DCFD0921-E245-4A02-B3A7-0E9B55127B04}" destId="{21C25EF7-5122-4CB4-922C-C536D59390E7}" srcOrd="1" destOrd="2" presId="urn:microsoft.com/office/officeart/2005/8/layout/hProcess4"/>
+    <dgm:cxn modelId="{4B33FAF7-D5A5-4826-B602-E6AE618B2650}" type="presOf" srcId="{18DC73F0-EDC3-4451-98EA-91C847F5E375}" destId="{D9BDC29B-7D63-4495-A3B2-7C07F9B8C330}" srcOrd="0" destOrd="1" presId="urn:microsoft.com/office/officeart/2005/8/layout/hProcess4"/>
+    <dgm:cxn modelId="{A16A5AFB-4236-4673-9CB5-BE389EB3EF8C}" srcId="{EB9EEFA8-E354-4F52-BA0E-F1E23DACFF23}" destId="{3679B97A-32D2-4172-BEF9-560A1496BE56}" srcOrd="1" destOrd="0" parTransId="{B180FB7C-C893-47CE-AC8C-F0A6527F33DC}" sibTransId="{0D2383D4-47E1-4D36-90BF-8D7B53F07E5B}"/>
+    <dgm:cxn modelId="{1E13F9FB-220A-448A-8179-D4B3A4973A41}" type="presOf" srcId="{DCFD0921-E245-4A02-B3A7-0E9B55127B04}" destId="{30DD4CDA-4812-46C7-BA95-FF21DAD772D9}" srcOrd="0" destOrd="2" presId="urn:microsoft.com/office/officeart/2005/8/layout/hProcess4"/>
+    <dgm:cxn modelId="{173BCDFC-1277-40BA-BD6B-344D8C682E92}" type="presOf" srcId="{EB9EEFA8-E354-4F52-BA0E-F1E23DACFF23}" destId="{22FAA828-71BC-4F47-855C-19152EC671EC}" srcOrd="1" destOrd="1" presId="urn:microsoft.com/office/officeart/2005/8/layout/hProcess4"/>
+    <dgm:cxn modelId="{823F82FE-5345-496E-965A-8D2A66E30149}" type="presOf" srcId="{269C76F2-6A3F-4463-A37D-34DF9557723A}" destId="{21C25EF7-5122-4CB4-922C-C536D59390E7}" srcOrd="1" destOrd="1" presId="urn:microsoft.com/office/officeart/2005/8/layout/hProcess4"/>
+    <dgm:cxn modelId="{868EC685-D5D7-444D-89C5-13F64F183C9F}" type="presParOf" srcId="{1641139E-5806-4ED1-AA40-CDBBD9ABB873}" destId="{A69DC343-962C-4193-B759-C426D90ADEBE}" srcOrd="0" destOrd="0" presId="urn:microsoft.com/office/officeart/2005/8/layout/hProcess4"/>
+    <dgm:cxn modelId="{1D10B392-4277-486F-AB90-8A3420E1DE74}" type="presParOf" srcId="{1641139E-5806-4ED1-AA40-CDBBD9ABB873}" destId="{D44F98B8-7C0E-44E6-B339-45D9858C4485}" srcOrd="1" destOrd="0" presId="urn:microsoft.com/office/officeart/2005/8/layout/hProcess4"/>
+    <dgm:cxn modelId="{8B76E9A5-6F1E-4C8C-82BF-ECCC8C5C15E0}" type="presParOf" srcId="{1641139E-5806-4ED1-AA40-CDBBD9ABB873}" destId="{D414F4B2-7830-4056-8693-7152B494301A}" srcOrd="2" destOrd="0" presId="urn:microsoft.com/office/officeart/2005/8/layout/hProcess4"/>
+    <dgm:cxn modelId="{6484AFA7-8DC6-495D-8242-9DD0439C76B9}" type="presParOf" srcId="{D414F4B2-7830-4056-8693-7152B494301A}" destId="{31228088-885C-49E3-AE4E-7F1B0118071C}" srcOrd="0" destOrd="0" presId="urn:microsoft.com/office/officeart/2005/8/layout/hProcess4"/>
+    <dgm:cxn modelId="{F2E60E5F-8F6C-4E87-9E82-C801329E65FF}" type="presParOf" srcId="{31228088-885C-49E3-AE4E-7F1B0118071C}" destId="{FCC3BD23-997E-4674-8B26-CC365D097590}" srcOrd="0" destOrd="0" presId="urn:microsoft.com/office/officeart/2005/8/layout/hProcess4"/>
+    <dgm:cxn modelId="{B2680729-65C5-49AA-953C-C2B390DB0607}" type="presParOf" srcId="{31228088-885C-49E3-AE4E-7F1B0118071C}" destId="{30DD4CDA-4812-46C7-BA95-FF21DAD772D9}" srcOrd="1" destOrd="0" presId="urn:microsoft.com/office/officeart/2005/8/layout/hProcess4"/>
+    <dgm:cxn modelId="{C89937A3-E3D0-41E1-B6E0-D64ADEA7C4D4}" type="presParOf" srcId="{31228088-885C-49E3-AE4E-7F1B0118071C}" destId="{21C25EF7-5122-4CB4-922C-C536D59390E7}" srcOrd="2" destOrd="0" presId="urn:microsoft.com/office/officeart/2005/8/layout/hProcess4"/>
+    <dgm:cxn modelId="{C6DE746F-5EA4-4A57-BDA5-3B68A59F2A80}" type="presParOf" srcId="{31228088-885C-49E3-AE4E-7F1B0118071C}" destId="{22CBB4AF-36EB-417C-B703-FAF0662ACF49}" srcOrd="3" destOrd="0" presId="urn:microsoft.com/office/officeart/2005/8/layout/hProcess4"/>
+    <dgm:cxn modelId="{840EF5FC-C947-4712-BDB8-67DCF9F4EFD4}" type="presParOf" srcId="{31228088-885C-49E3-AE4E-7F1B0118071C}" destId="{CD953644-E5C6-4A75-8B8E-A06C97C3F536}" srcOrd="4" destOrd="0" presId="urn:microsoft.com/office/officeart/2005/8/layout/hProcess4"/>
+    <dgm:cxn modelId="{46355112-69E3-4666-89F1-1090E9564E88}" type="presParOf" srcId="{D414F4B2-7830-4056-8693-7152B494301A}" destId="{464DE029-02A1-4763-8666-F53A13C6FAAD}" srcOrd="1" destOrd="0" presId="urn:microsoft.com/office/officeart/2005/8/layout/hProcess4"/>
+    <dgm:cxn modelId="{7764998B-92B0-428C-99FC-2B9BBB6C85B5}" type="presParOf" srcId="{D414F4B2-7830-4056-8693-7152B494301A}" destId="{AFDFC40E-DDD3-4BC8-8BEB-A1A8244FD812}" srcOrd="2" destOrd="0" presId="urn:microsoft.com/office/officeart/2005/8/layout/hProcess4"/>
+    <dgm:cxn modelId="{8071F2CA-3430-428B-A83B-C7333389DC8D}" type="presParOf" srcId="{AFDFC40E-DDD3-4BC8-8BEB-A1A8244FD812}" destId="{3D3FE732-BEE4-4789-B501-EFE8520C98A6}" srcOrd="0" destOrd="0" presId="urn:microsoft.com/office/officeart/2005/8/layout/hProcess4"/>
+    <dgm:cxn modelId="{8DE57368-5989-4A99-B116-BE07676BA4CE}" type="presParOf" srcId="{AFDFC40E-DDD3-4BC8-8BEB-A1A8244FD812}" destId="{D9BDC29B-7D63-4495-A3B2-7C07F9B8C330}" srcOrd="1" destOrd="0" presId="urn:microsoft.com/office/officeart/2005/8/layout/hProcess4"/>
+    <dgm:cxn modelId="{3C7E37CD-5A38-4A43-B6DC-219012EC2D82}" type="presParOf" srcId="{AFDFC40E-DDD3-4BC8-8BEB-A1A8244FD812}" destId="{3A5BFE43-F020-43A7-BFCC-87B32E6976A9}" srcOrd="2" destOrd="0" presId="urn:microsoft.com/office/officeart/2005/8/layout/hProcess4"/>
+    <dgm:cxn modelId="{DCD055DB-A0B8-49B5-8E0B-6F67F1DA1339}" type="presParOf" srcId="{AFDFC40E-DDD3-4BC8-8BEB-A1A8244FD812}" destId="{57A9CED2-870E-4BB2-8BB0-97EB3CDBF401}" srcOrd="3" destOrd="0" presId="urn:microsoft.com/office/officeart/2005/8/layout/hProcess4"/>
+    <dgm:cxn modelId="{C6B7BA88-7E61-4407-BF9F-E01006E93A57}" type="presParOf" srcId="{AFDFC40E-DDD3-4BC8-8BEB-A1A8244FD812}" destId="{9A6587D4-7582-4D83-A90E-1B1B29100CB4}" srcOrd="4" destOrd="0" presId="urn:microsoft.com/office/officeart/2005/8/layout/hProcess4"/>
+    <dgm:cxn modelId="{72695B40-C40F-4D8E-AFA0-2FEBF87B179D}" type="presParOf" srcId="{D414F4B2-7830-4056-8693-7152B494301A}" destId="{1C299799-9D54-457B-A3C7-0FB93A410866}" srcOrd="3" destOrd="0" presId="urn:microsoft.com/office/officeart/2005/8/layout/hProcess4"/>
+    <dgm:cxn modelId="{B07C2893-6AE9-4493-B502-8C87EB7E097F}" type="presParOf" srcId="{D414F4B2-7830-4056-8693-7152B494301A}" destId="{64364D03-C473-454F-AF21-95C000F5F884}" srcOrd="4" destOrd="0" presId="urn:microsoft.com/office/officeart/2005/8/layout/hProcess4"/>
+    <dgm:cxn modelId="{B2B8AF69-7887-4ABC-B586-557C62451496}" type="presParOf" srcId="{64364D03-C473-454F-AF21-95C000F5F884}" destId="{44F76157-1425-47BB-9E5D-B9F240E12A0A}" srcOrd="0" destOrd="0" presId="urn:microsoft.com/office/officeart/2005/8/layout/hProcess4"/>
+    <dgm:cxn modelId="{75013056-5681-4951-8F5F-75A39543F466}" type="presParOf" srcId="{64364D03-C473-454F-AF21-95C000F5F884}" destId="{686EF4F2-C186-45B2-85A0-F6687D978556}" srcOrd="1" destOrd="0" presId="urn:microsoft.com/office/officeart/2005/8/layout/hProcess4"/>
+    <dgm:cxn modelId="{A985696B-6300-40F9-AEDF-0FA5046B4F5D}" type="presParOf" srcId="{64364D03-C473-454F-AF21-95C000F5F884}" destId="{22FAA828-71BC-4F47-855C-19152EC671EC}" srcOrd="2" destOrd="0" presId="urn:microsoft.com/office/officeart/2005/8/layout/hProcess4"/>
+    <dgm:cxn modelId="{AC328C89-0436-4032-A154-250E0CAD91E4}" type="presParOf" srcId="{64364D03-C473-454F-AF21-95C000F5F884}" destId="{94FE265A-D377-4872-8AAD-6D9586E0C18A}" srcOrd="3" destOrd="0" presId="urn:microsoft.com/office/officeart/2005/8/layout/hProcess4"/>
+    <dgm:cxn modelId="{69A2CD07-030E-41AC-AF4B-980188515A39}" type="presParOf" srcId="{64364D03-C473-454F-AF21-95C000F5F884}" destId="{B6B4BA71-2269-473A-9B34-EE3A92EF3F26}" srcOrd="4" destOrd="0" presId="urn:microsoft.com/office/officeart/2005/8/layout/hProcess4"/>
+    <dgm:cxn modelId="{7CCD34AB-813D-4C41-8F6C-AF4294376AA8}" type="presParOf" srcId="{D414F4B2-7830-4056-8693-7152B494301A}" destId="{74F3F80A-8B0F-4F29-B321-AD28639C9105}" srcOrd="5" destOrd="0" presId="urn:microsoft.com/office/officeart/2005/8/layout/hProcess4"/>
+    <dgm:cxn modelId="{5E906BC3-28C0-467D-B483-43C158B8EF07}" type="presParOf" srcId="{D414F4B2-7830-4056-8693-7152B494301A}" destId="{EA78CE16-E317-4FEA-996D-E0EE0A893B5C}" srcOrd="6" destOrd="0" presId="urn:microsoft.com/office/officeart/2005/8/layout/hProcess4"/>
+    <dgm:cxn modelId="{FAEF8719-B83A-428A-886D-0F5DC26E5929}" type="presParOf" srcId="{EA78CE16-E317-4FEA-996D-E0EE0A893B5C}" destId="{60BAA0C7-18DD-413F-B007-B92B7FACDBD8}" srcOrd="0" destOrd="0" presId="urn:microsoft.com/office/officeart/2005/8/layout/hProcess4"/>
+    <dgm:cxn modelId="{0837C6E1-A9B4-496C-9C14-3287438F8F61}" type="presParOf" srcId="{EA78CE16-E317-4FEA-996D-E0EE0A893B5C}" destId="{DE4AC59B-B8E8-4AE0-82DC-3BD6B4ADF27A}" srcOrd="1" destOrd="0" presId="urn:microsoft.com/office/officeart/2005/8/layout/hProcess4"/>
+    <dgm:cxn modelId="{78CCDABC-5B6F-417A-8408-6379AA8A9341}" type="presParOf" srcId="{EA78CE16-E317-4FEA-996D-E0EE0A893B5C}" destId="{3C445FF9-93F1-4683-A6D2-EC9DB43AA93D}" srcOrd="2" destOrd="0" presId="urn:microsoft.com/office/officeart/2005/8/layout/hProcess4"/>
+    <dgm:cxn modelId="{A73D4E6C-3615-4D7E-8C81-9F9C2170771C}" type="presParOf" srcId="{EA78CE16-E317-4FEA-996D-E0EE0A893B5C}" destId="{C4D9AE61-43FF-44EC-9E2D-7446ED243914}" srcOrd="3" destOrd="0" presId="urn:microsoft.com/office/officeart/2005/8/layout/hProcess4"/>
+    <dgm:cxn modelId="{82E58ECF-A263-4E52-981B-7A8BB5397FF7}" type="presParOf" srcId="{EA78CE16-E317-4FEA-996D-E0EE0A893B5C}" destId="{B20B26B3-AC24-4A72-B831-B92A331552E8}" srcOrd="4" destOrd="0" presId="urn:microsoft.com/office/officeart/2005/8/layout/hProcess4"/>
   </dgm:cxnLst>
   <dgm:bg/>
   <dgm:whole/>
   <dgm:extLst>
     <a:ext uri="http://schemas.microsoft.com/office/drawing/2008/diagram">
-      <dsp:dataModelExt xmlns:dsp="http://schemas.microsoft.com/office/drawing/2008/diagram" relId="rId6" minVer="http://schemas.openxmlformats.org/drawingml/2006/diagram"/>
+      <dsp:dataModelExt xmlns:dsp="http://schemas.microsoft.com/office/drawing/2008/diagram" relId="rId7" minVer="http://schemas.openxmlformats.org/drawingml/2006/diagram"/>
     </a:ext>
   </dgm:extLst>
 </dgm:dataModel>
@@ -2319,18 +3474,867 @@
       <dsp:cNvGrpSpPr/>
     </dsp:nvGrpSpPr>
     <dsp:grpSpPr/>
-    <dsp:sp modelId="{58336DFE-FB7D-4F4F-89A5-C15DB3DFC1C3}">
+    <dsp:sp modelId="{01695D7F-B7A8-4362-BD48-F172F9EDBCB0}">
       <dsp:nvSpPr>
         <dsp:cNvPr id="0" name=""/>
         <dsp:cNvSpPr/>
       </dsp:nvSpPr>
       <dsp:spPr>
         <a:xfrm>
-          <a:off x="0" y="541244"/>
-          <a:ext cx="6830568" cy="1078008"/>
+          <a:off x="0" y="3312"/>
+          <a:ext cx="6830568" cy="0"/>
+        </a:xfrm>
+        <a:prstGeom prst="line">
+          <a:avLst/>
+        </a:prstGeom>
+        <a:solidFill>
+          <a:schemeClr val="accent1">
+            <a:hueOff val="0"/>
+            <a:satOff val="0"/>
+            <a:lumOff val="0"/>
+            <a:alphaOff val="0"/>
+          </a:schemeClr>
+        </a:solidFill>
+        <a:ln w="19050" cap="flat" cmpd="sng" algn="ctr">
+          <a:solidFill>
+            <a:schemeClr val="accent1">
+              <a:hueOff val="0"/>
+              <a:satOff val="0"/>
+              <a:lumOff val="0"/>
+              <a:alphaOff val="0"/>
+            </a:schemeClr>
+          </a:solidFill>
+          <a:prstDash val="solid"/>
+          <a:miter lim="800000"/>
+        </a:ln>
+        <a:effectLst/>
+      </dsp:spPr>
+      <dsp:style>
+        <a:lnRef idx="2">
+          <a:scrgbClr r="0" g="0" b="0"/>
+        </a:lnRef>
+        <a:fillRef idx="1">
+          <a:scrgbClr r="0" g="0" b="0"/>
+        </a:fillRef>
+        <a:effectRef idx="0">
+          <a:scrgbClr r="0" g="0" b="0"/>
+        </a:effectRef>
+        <a:fontRef idx="minor">
+          <a:schemeClr val="lt1"/>
+        </a:fontRef>
+      </dsp:style>
+    </dsp:sp>
+    <dsp:sp modelId="{55AA72B8-23FE-456B-83A4-65EB32792DF2}">
+      <dsp:nvSpPr>
+        <dsp:cNvPr id="0" name=""/>
+        <dsp:cNvSpPr/>
+      </dsp:nvSpPr>
+      <dsp:spPr>
+        <a:xfrm>
+          <a:off x="0" y="3312"/>
+          <a:ext cx="6830568" cy="1129491"/>
+        </a:xfrm>
+        <a:prstGeom prst="rect">
+          <a:avLst/>
+        </a:prstGeom>
+        <a:noFill/>
+        <a:ln>
+          <a:noFill/>
+        </a:ln>
+        <a:effectLst/>
+      </dsp:spPr>
+      <dsp:style>
+        <a:lnRef idx="0">
+          <a:scrgbClr r="0" g="0" b="0"/>
+        </a:lnRef>
+        <a:fillRef idx="0">
+          <a:scrgbClr r="0" g="0" b="0"/>
+        </a:fillRef>
+        <a:effectRef idx="0">
+          <a:scrgbClr r="0" g="0" b="0"/>
+        </a:effectRef>
+        <a:fontRef idx="minor"/>
+      </dsp:style>
+      <dsp:txBody>
+        <a:bodyPr spcFirstLastPara="0" vert="horz" wrap="square" lIns="118110" tIns="118110" rIns="118110" bIns="118110" numCol="1" spcCol="1270" anchor="t" anchorCtr="0">
+          <a:noAutofit/>
+        </a:bodyPr>
+        <a:lstStyle/>
+        <a:p>
+          <a:pPr marL="0" lvl="0" indent="0" algn="l" defTabSz="1377950">
+            <a:lnSpc>
+              <a:spcPct val="90000"/>
+            </a:lnSpc>
+            <a:spcBef>
+              <a:spcPct val="0"/>
+            </a:spcBef>
+            <a:spcAft>
+              <a:spcPct val="35000"/>
+            </a:spcAft>
+            <a:buNone/>
+          </a:pPr>
+          <a:r>
+            <a:rPr lang="en-US" sz="3100" kern="1200" dirty="0"/>
+            <a:t>Representing agricultural uses.</a:t>
+          </a:r>
+        </a:p>
+      </dsp:txBody>
+      <dsp:txXfrm>
+        <a:off x="0" y="3312"/>
+        <a:ext cx="6830568" cy="1129491"/>
+      </dsp:txXfrm>
+    </dsp:sp>
+    <dsp:sp modelId="{A74DBBE5-9DB1-4282-BF8B-E1DBFBA5D6F3}">
+      <dsp:nvSpPr>
+        <dsp:cNvPr id="0" name=""/>
+        <dsp:cNvSpPr/>
+      </dsp:nvSpPr>
+      <dsp:spPr>
+        <a:xfrm>
+          <a:off x="0" y="1132803"/>
+          <a:ext cx="6830568" cy="0"/>
+        </a:xfrm>
+        <a:prstGeom prst="line">
+          <a:avLst/>
+        </a:prstGeom>
+        <a:solidFill>
+          <a:schemeClr val="accent1">
+            <a:hueOff val="0"/>
+            <a:satOff val="0"/>
+            <a:lumOff val="0"/>
+            <a:alphaOff val="0"/>
+          </a:schemeClr>
+        </a:solidFill>
+        <a:ln w="19050" cap="flat" cmpd="sng" algn="ctr">
+          <a:solidFill>
+            <a:schemeClr val="accent1">
+              <a:hueOff val="0"/>
+              <a:satOff val="0"/>
+              <a:lumOff val="0"/>
+              <a:alphaOff val="0"/>
+            </a:schemeClr>
+          </a:solidFill>
+          <a:prstDash val="solid"/>
+          <a:miter lim="800000"/>
+        </a:ln>
+        <a:effectLst/>
+      </dsp:spPr>
+      <dsp:style>
+        <a:lnRef idx="2">
+          <a:scrgbClr r="0" g="0" b="0"/>
+        </a:lnRef>
+        <a:fillRef idx="1">
+          <a:scrgbClr r="0" g="0" b="0"/>
+        </a:fillRef>
+        <a:effectRef idx="0">
+          <a:scrgbClr r="0" g="0" b="0"/>
+        </a:effectRef>
+        <a:fontRef idx="minor">
+          <a:schemeClr val="lt1"/>
+        </a:fontRef>
+      </dsp:style>
+    </dsp:sp>
+    <dsp:sp modelId="{465CFE53-3071-4FC3-B72D-3B7179862BBE}">
+      <dsp:nvSpPr>
+        <dsp:cNvPr id="0" name=""/>
+        <dsp:cNvSpPr/>
+      </dsp:nvSpPr>
+      <dsp:spPr>
+        <a:xfrm>
+          <a:off x="0" y="1132803"/>
+          <a:ext cx="6830568" cy="1129491"/>
+        </a:xfrm>
+        <a:prstGeom prst="rect">
+          <a:avLst/>
+        </a:prstGeom>
+        <a:noFill/>
+        <a:ln>
+          <a:noFill/>
+        </a:ln>
+        <a:effectLst/>
+      </dsp:spPr>
+      <dsp:style>
+        <a:lnRef idx="0">
+          <a:scrgbClr r="0" g="0" b="0"/>
+        </a:lnRef>
+        <a:fillRef idx="0">
+          <a:scrgbClr r="0" g="0" b="0"/>
+        </a:fillRef>
+        <a:effectRef idx="0">
+          <a:scrgbClr r="0" g="0" b="0"/>
+        </a:effectRef>
+        <a:fontRef idx="minor"/>
+      </dsp:style>
+      <dsp:txBody>
+        <a:bodyPr spcFirstLastPara="0" vert="horz" wrap="square" lIns="118110" tIns="118110" rIns="118110" bIns="118110" numCol="1" spcCol="1270" anchor="t" anchorCtr="0">
+          <a:noAutofit/>
+        </a:bodyPr>
+        <a:lstStyle/>
+        <a:p>
+          <a:pPr marL="0" lvl="0" indent="0" algn="l" defTabSz="1377950">
+            <a:lnSpc>
+              <a:spcPct val="90000"/>
+            </a:lnSpc>
+            <a:spcBef>
+              <a:spcPct val="0"/>
+            </a:spcBef>
+            <a:spcAft>
+              <a:spcPct val="35000"/>
+            </a:spcAft>
+            <a:buNone/>
+          </a:pPr>
+          <a:r>
+            <a:rPr lang="en-US" sz="3100" kern="1200" dirty="0"/>
+            <a:t>All depletions occur in summer. Winter depletions are negligible.</a:t>
+          </a:r>
+        </a:p>
+      </dsp:txBody>
+      <dsp:txXfrm>
+        <a:off x="0" y="1132803"/>
+        <a:ext cx="6830568" cy="1129491"/>
+      </dsp:txXfrm>
+    </dsp:sp>
+    <dsp:sp modelId="{10E447A5-A5C0-4950-844D-36CB1EA1F46A}">
+      <dsp:nvSpPr>
+        <dsp:cNvPr id="0" name=""/>
+        <dsp:cNvSpPr/>
+      </dsp:nvSpPr>
+      <dsp:spPr>
+        <a:xfrm>
+          <a:off x="0" y="2262294"/>
+          <a:ext cx="6830568" cy="0"/>
+        </a:xfrm>
+        <a:prstGeom prst="line">
+          <a:avLst/>
+        </a:prstGeom>
+        <a:solidFill>
+          <a:schemeClr val="accent1">
+            <a:hueOff val="0"/>
+            <a:satOff val="0"/>
+            <a:lumOff val="0"/>
+            <a:alphaOff val="0"/>
+          </a:schemeClr>
+        </a:solidFill>
+        <a:ln w="19050" cap="flat" cmpd="sng" algn="ctr">
+          <a:solidFill>
+            <a:schemeClr val="accent1">
+              <a:hueOff val="0"/>
+              <a:satOff val="0"/>
+              <a:lumOff val="0"/>
+              <a:alphaOff val="0"/>
+            </a:schemeClr>
+          </a:solidFill>
+          <a:prstDash val="solid"/>
+          <a:miter lim="800000"/>
+        </a:ln>
+        <a:effectLst/>
+      </dsp:spPr>
+      <dsp:style>
+        <a:lnRef idx="2">
+          <a:scrgbClr r="0" g="0" b="0"/>
+        </a:lnRef>
+        <a:fillRef idx="1">
+          <a:scrgbClr r="0" g="0" b="0"/>
+        </a:fillRef>
+        <a:effectRef idx="0">
+          <a:scrgbClr r="0" g="0" b="0"/>
+        </a:effectRef>
+        <a:fontRef idx="minor">
+          <a:schemeClr val="lt1"/>
+        </a:fontRef>
+      </dsp:style>
+    </dsp:sp>
+    <dsp:sp modelId="{293DD15E-E519-4F47-810D-63ABF17274ED}">
+      <dsp:nvSpPr>
+        <dsp:cNvPr id="0" name=""/>
+        <dsp:cNvSpPr/>
+      </dsp:nvSpPr>
+      <dsp:spPr>
+        <a:xfrm>
+          <a:off x="0" y="2262294"/>
+          <a:ext cx="6830568" cy="1129491"/>
+        </a:xfrm>
+        <a:prstGeom prst="rect">
+          <a:avLst/>
+        </a:prstGeom>
+        <a:noFill/>
+        <a:ln>
+          <a:noFill/>
+        </a:ln>
+        <a:effectLst/>
+      </dsp:spPr>
+      <dsp:style>
+        <a:lnRef idx="0">
+          <a:scrgbClr r="0" g="0" b="0"/>
+        </a:lnRef>
+        <a:fillRef idx="0">
+          <a:scrgbClr r="0" g="0" b="0"/>
+        </a:fillRef>
+        <a:effectRef idx="0">
+          <a:scrgbClr r="0" g="0" b="0"/>
+        </a:effectRef>
+        <a:fontRef idx="minor"/>
+      </dsp:style>
+      <dsp:txBody>
+        <a:bodyPr spcFirstLastPara="0" vert="horz" wrap="square" lIns="118110" tIns="118110" rIns="118110" bIns="118110" numCol="1" spcCol="1270" anchor="t" anchorCtr="0">
+          <a:noAutofit/>
+        </a:bodyPr>
+        <a:lstStyle/>
+        <a:p>
+          <a:pPr marL="0" lvl="0" indent="0" algn="l" defTabSz="1377950">
+            <a:lnSpc>
+              <a:spcPct val="90000"/>
+            </a:lnSpc>
+            <a:spcBef>
+              <a:spcPct val="0"/>
+            </a:spcBef>
+            <a:spcAft>
+              <a:spcPct val="35000"/>
+            </a:spcAft>
+            <a:buNone/>
+          </a:pPr>
+          <a:r>
+            <a:rPr lang="en-US" sz="3100" kern="1200" dirty="0"/>
+            <a:t>Historical water use = proxy to allowable use.</a:t>
+          </a:r>
+        </a:p>
+      </dsp:txBody>
+      <dsp:txXfrm>
+        <a:off x="0" y="2262294"/>
+        <a:ext cx="6830568" cy="1129491"/>
+      </dsp:txXfrm>
+    </dsp:sp>
+    <dsp:sp modelId="{69B05D12-A7FC-4844-A690-BC519BD3DA19}">
+      <dsp:nvSpPr>
+        <dsp:cNvPr id="0" name=""/>
+        <dsp:cNvSpPr/>
+      </dsp:nvSpPr>
+      <dsp:spPr>
+        <a:xfrm>
+          <a:off x="0" y="3391786"/>
+          <a:ext cx="6830568" cy="0"/>
+        </a:xfrm>
+        <a:prstGeom prst="line">
+          <a:avLst/>
+        </a:prstGeom>
+        <a:solidFill>
+          <a:schemeClr val="accent1">
+            <a:hueOff val="0"/>
+            <a:satOff val="0"/>
+            <a:lumOff val="0"/>
+            <a:alphaOff val="0"/>
+          </a:schemeClr>
+        </a:solidFill>
+        <a:ln w="19050" cap="flat" cmpd="sng" algn="ctr">
+          <a:solidFill>
+            <a:schemeClr val="accent1">
+              <a:hueOff val="0"/>
+              <a:satOff val="0"/>
+              <a:lumOff val="0"/>
+              <a:alphaOff val="0"/>
+            </a:schemeClr>
+          </a:solidFill>
+          <a:prstDash val="solid"/>
+          <a:miter lim="800000"/>
+        </a:ln>
+        <a:effectLst/>
+      </dsp:spPr>
+      <dsp:style>
+        <a:lnRef idx="2">
+          <a:scrgbClr r="0" g="0" b="0"/>
+        </a:lnRef>
+        <a:fillRef idx="1">
+          <a:scrgbClr r="0" g="0" b="0"/>
+        </a:fillRef>
+        <a:effectRef idx="0">
+          <a:scrgbClr r="0" g="0" b="0"/>
+        </a:effectRef>
+        <a:fontRef idx="minor">
+          <a:schemeClr val="lt1"/>
+        </a:fontRef>
+      </dsp:style>
+    </dsp:sp>
+    <dsp:sp modelId="{0A76807D-9E6B-4085-BDD6-C4797F7A1F7C}">
+      <dsp:nvSpPr>
+        <dsp:cNvPr id="0" name=""/>
+        <dsp:cNvSpPr/>
+      </dsp:nvSpPr>
+      <dsp:spPr>
+        <a:xfrm>
+          <a:off x="0" y="3391786"/>
+          <a:ext cx="6830568" cy="1129491"/>
+        </a:xfrm>
+        <a:prstGeom prst="rect">
+          <a:avLst/>
+        </a:prstGeom>
+        <a:noFill/>
+        <a:ln>
+          <a:noFill/>
+        </a:ln>
+        <a:effectLst/>
+      </dsp:spPr>
+      <dsp:style>
+        <a:lnRef idx="0">
+          <a:scrgbClr r="0" g="0" b="0"/>
+        </a:lnRef>
+        <a:fillRef idx="0">
+          <a:scrgbClr r="0" g="0" b="0"/>
+        </a:fillRef>
+        <a:effectRef idx="0">
+          <a:scrgbClr r="0" g="0" b="0"/>
+        </a:effectRef>
+        <a:fontRef idx="minor"/>
+      </dsp:style>
+      <dsp:txBody>
+        <a:bodyPr spcFirstLastPara="0" vert="horz" wrap="square" lIns="118110" tIns="118110" rIns="118110" bIns="118110" numCol="1" spcCol="1270" anchor="t" anchorCtr="0">
+          <a:noAutofit/>
+        </a:bodyPr>
+        <a:lstStyle/>
+        <a:p>
+          <a:pPr marL="0" lvl="0" indent="0" algn="l" defTabSz="1377950">
+            <a:lnSpc>
+              <a:spcPct val="90000"/>
+            </a:lnSpc>
+            <a:spcBef>
+              <a:spcPct val="0"/>
+            </a:spcBef>
+            <a:spcAft>
+              <a:spcPct val="35000"/>
+            </a:spcAft>
+            <a:buNone/>
+          </a:pPr>
+          <a:r>
+            <a:rPr lang="en-US" sz="3100" kern="1200" dirty="0"/>
+            <a:t>Users can consume, conserve or sell water.</a:t>
+          </a:r>
+        </a:p>
+      </dsp:txBody>
+      <dsp:txXfrm>
+        <a:off x="0" y="3391786"/>
+        <a:ext cx="6830568" cy="1129491"/>
+      </dsp:txXfrm>
+    </dsp:sp>
+    <dsp:sp modelId="{3B1D3364-CA82-40D6-BACF-938BBEA3A3BA}">
+      <dsp:nvSpPr>
+        <dsp:cNvPr id="0" name=""/>
+        <dsp:cNvSpPr/>
+      </dsp:nvSpPr>
+      <dsp:spPr>
+        <a:xfrm>
+          <a:off x="0" y="4521277"/>
+          <a:ext cx="6830568" cy="0"/>
+        </a:xfrm>
+        <a:prstGeom prst="line">
+          <a:avLst/>
+        </a:prstGeom>
+        <a:solidFill>
+          <a:schemeClr val="accent1">
+            <a:hueOff val="0"/>
+            <a:satOff val="0"/>
+            <a:lumOff val="0"/>
+            <a:alphaOff val="0"/>
+          </a:schemeClr>
+        </a:solidFill>
+        <a:ln w="19050" cap="flat" cmpd="sng" algn="ctr">
+          <a:solidFill>
+            <a:schemeClr val="accent1">
+              <a:hueOff val="0"/>
+              <a:satOff val="0"/>
+              <a:lumOff val="0"/>
+              <a:alphaOff val="0"/>
+            </a:schemeClr>
+          </a:solidFill>
+          <a:prstDash val="solid"/>
+          <a:miter lim="800000"/>
+        </a:ln>
+        <a:effectLst/>
+      </dsp:spPr>
+      <dsp:style>
+        <a:lnRef idx="2">
+          <a:scrgbClr r="0" g="0" b="0"/>
+        </a:lnRef>
+        <a:fillRef idx="1">
+          <a:scrgbClr r="0" g="0" b="0"/>
+        </a:fillRef>
+        <a:effectRef idx="0">
+          <a:scrgbClr r="0" g="0" b="0"/>
+        </a:effectRef>
+        <a:fontRef idx="minor">
+          <a:schemeClr val="lt1"/>
+        </a:fontRef>
+      </dsp:style>
+    </dsp:sp>
+    <dsp:sp modelId="{ACDDD717-6298-464B-B557-85C55205FEAD}">
+      <dsp:nvSpPr>
+        <dsp:cNvPr id="0" name=""/>
+        <dsp:cNvSpPr/>
+      </dsp:nvSpPr>
+      <dsp:spPr>
+        <a:xfrm>
+          <a:off x="0" y="4521277"/>
+          <a:ext cx="6830568" cy="1129491"/>
+        </a:xfrm>
+        <a:prstGeom prst="rect">
+          <a:avLst/>
+        </a:prstGeom>
+        <a:noFill/>
+        <a:ln>
+          <a:noFill/>
+        </a:ln>
+        <a:effectLst/>
+      </dsp:spPr>
+      <dsp:style>
+        <a:lnRef idx="0">
+          <a:scrgbClr r="0" g="0" b="0"/>
+        </a:lnRef>
+        <a:fillRef idx="0">
+          <a:scrgbClr r="0" g="0" b="0"/>
+        </a:fillRef>
+        <a:effectRef idx="0">
+          <a:scrgbClr r="0" g="0" b="0"/>
+        </a:effectRef>
+        <a:fontRef idx="minor"/>
+      </dsp:style>
+      <dsp:txBody>
+        <a:bodyPr spcFirstLastPara="0" vert="horz" wrap="square" lIns="118110" tIns="118110" rIns="118110" bIns="118110" numCol="1" spcCol="1270" anchor="t" anchorCtr="0">
+          <a:noAutofit/>
+        </a:bodyPr>
+        <a:lstStyle/>
+        <a:p>
+          <a:pPr marL="0" lvl="0" indent="0" algn="l" defTabSz="1377950">
+            <a:lnSpc>
+              <a:spcPct val="90000"/>
+            </a:lnSpc>
+            <a:spcBef>
+              <a:spcPct val="0"/>
+            </a:spcBef>
+            <a:spcAft>
+              <a:spcPct val="35000"/>
+            </a:spcAft>
+            <a:buNone/>
+          </a:pPr>
+          <a:r>
+            <a:rPr lang="en-US" sz="3100" kern="1200" dirty="0"/>
+            <a:t>Users can only trade water with the bank.</a:t>
+          </a:r>
+        </a:p>
+      </dsp:txBody>
+      <dsp:txXfrm>
+        <a:off x="0" y="4521277"/>
+        <a:ext cx="6830568" cy="1129491"/>
+      </dsp:txXfrm>
+    </dsp:sp>
+    <dsp:sp modelId="{21707B7D-404C-4EC1-B2FE-C4D3BDDFDE7E}">
+      <dsp:nvSpPr>
+        <dsp:cNvPr id="0" name=""/>
+        <dsp:cNvSpPr/>
+      </dsp:nvSpPr>
+      <dsp:spPr>
+        <a:xfrm>
+          <a:off x="0" y="5650768"/>
+          <a:ext cx="6830568" cy="0"/>
+        </a:xfrm>
+        <a:prstGeom prst="line">
+          <a:avLst/>
+        </a:prstGeom>
+        <a:solidFill>
+          <a:schemeClr val="accent1">
+            <a:hueOff val="0"/>
+            <a:satOff val="0"/>
+            <a:lumOff val="0"/>
+            <a:alphaOff val="0"/>
+          </a:schemeClr>
+        </a:solidFill>
+        <a:ln w="19050" cap="flat" cmpd="sng" algn="ctr">
+          <a:solidFill>
+            <a:schemeClr val="accent1">
+              <a:hueOff val="0"/>
+              <a:satOff val="0"/>
+              <a:lumOff val="0"/>
+              <a:alphaOff val="0"/>
+            </a:schemeClr>
+          </a:solidFill>
+          <a:prstDash val="solid"/>
+          <a:miter lim="800000"/>
+        </a:ln>
+        <a:effectLst/>
+      </dsp:spPr>
+      <dsp:style>
+        <a:lnRef idx="2">
+          <a:scrgbClr r="0" g="0" b="0"/>
+        </a:lnRef>
+        <a:fillRef idx="1">
+          <a:scrgbClr r="0" g="0" b="0"/>
+        </a:fillRef>
+        <a:effectRef idx="0">
+          <a:scrgbClr r="0" g="0" b="0"/>
+        </a:effectRef>
+        <a:fontRef idx="minor">
+          <a:schemeClr val="lt1"/>
+        </a:fontRef>
+      </dsp:style>
+    </dsp:sp>
+    <dsp:sp modelId="{5728522B-9ADF-4990-8510-2302BF1945E9}">
+      <dsp:nvSpPr>
+        <dsp:cNvPr id="0" name=""/>
+        <dsp:cNvSpPr/>
+      </dsp:nvSpPr>
+      <dsp:spPr>
+        <a:xfrm>
+          <a:off x="0" y="5650768"/>
+          <a:ext cx="6830568" cy="1129491"/>
+        </a:xfrm>
+        <a:prstGeom prst="rect">
+          <a:avLst/>
+        </a:prstGeom>
+        <a:noFill/>
+        <a:ln>
+          <a:noFill/>
+        </a:ln>
+        <a:effectLst/>
+      </dsp:spPr>
+      <dsp:style>
+        <a:lnRef idx="0">
+          <a:scrgbClr r="0" g="0" b="0"/>
+        </a:lnRef>
+        <a:fillRef idx="0">
+          <a:scrgbClr r="0" g="0" b="0"/>
+        </a:fillRef>
+        <a:effectRef idx="0">
+          <a:scrgbClr r="0" g="0" b="0"/>
+        </a:effectRef>
+        <a:fontRef idx="minor"/>
+      </dsp:style>
+      <dsp:txBody>
+        <a:bodyPr spcFirstLastPara="0" vert="horz" wrap="square" lIns="118110" tIns="118110" rIns="118110" bIns="118110" numCol="1" spcCol="1270" anchor="t" anchorCtr="0">
+          <a:noAutofit/>
+        </a:bodyPr>
+        <a:lstStyle/>
+        <a:p>
+          <a:pPr marL="0" lvl="0" indent="0" algn="l" defTabSz="1377950">
+            <a:lnSpc>
+              <a:spcPct val="90000"/>
+            </a:lnSpc>
+            <a:spcBef>
+              <a:spcPct val="0"/>
+            </a:spcBef>
+            <a:spcAft>
+              <a:spcPct val="35000"/>
+            </a:spcAft>
+            <a:buNone/>
+          </a:pPr>
+          <a:r>
+            <a:rPr lang="en-US" sz="3100" kern="1200" dirty="0"/>
+            <a:t>One bank, two storage systems</a:t>
+          </a:r>
+        </a:p>
+      </dsp:txBody>
+      <dsp:txXfrm>
+        <a:off x="0" y="5650768"/>
+        <a:ext cx="6830568" cy="1129491"/>
+      </dsp:txXfrm>
+    </dsp:sp>
+  </dsp:spTree>
+</dsp:drawing>
+</file>
+
+<file path=ppt/diagrams/drawing2.xml><?xml version="1.0" encoding="utf-8"?>
+<dsp:drawing xmlns:dgm="http://schemas.openxmlformats.org/drawingml/2006/diagram" xmlns:dsp="http://schemas.microsoft.com/office/drawing/2008/diagram" xmlns:a="http://schemas.openxmlformats.org/drawingml/2006/main">
+  <dsp:spTree>
+    <dsp:nvGrpSpPr>
+      <dsp:cNvPr id="0" name=""/>
+      <dsp:cNvGrpSpPr/>
+    </dsp:nvGrpSpPr>
+    <dsp:grpSpPr/>
+    <dsp:sp modelId="{30DD4CDA-4812-46C7-BA95-FF21DAD772D9}">
+      <dsp:nvSpPr>
+        <dsp:cNvPr id="0" name=""/>
+        <dsp:cNvSpPr/>
+      </dsp:nvSpPr>
+      <dsp:spPr>
+        <a:xfrm>
+          <a:off x="9648" y="2694975"/>
+          <a:ext cx="2450927" cy="2021502"/>
         </a:xfrm>
         <a:prstGeom prst="roundRect">
-          <a:avLst/>
+          <a:avLst>
+            <a:gd name="adj" fmla="val 10000"/>
+          </a:avLst>
+        </a:prstGeom>
+        <a:solidFill>
+          <a:schemeClr val="lt1">
+            <a:alpha val="90000"/>
+            <a:hueOff val="0"/>
+            <a:satOff val="0"/>
+            <a:lumOff val="0"/>
+            <a:alphaOff val="0"/>
+          </a:schemeClr>
+        </a:solidFill>
+        <a:ln w="19050" cap="flat" cmpd="sng" algn="ctr">
+          <a:solidFill>
+            <a:schemeClr val="accent1">
+              <a:hueOff val="0"/>
+              <a:satOff val="0"/>
+              <a:lumOff val="0"/>
+              <a:alphaOff val="0"/>
+            </a:schemeClr>
+          </a:solidFill>
+          <a:prstDash val="solid"/>
+          <a:miter lim="800000"/>
+        </a:ln>
+        <a:effectLst/>
+      </dsp:spPr>
+      <dsp:style>
+        <a:lnRef idx="2">
+          <a:scrgbClr r="0" g="0" b="0"/>
+        </a:lnRef>
+        <a:fillRef idx="1">
+          <a:scrgbClr r="0" g="0" b="0"/>
+        </a:fillRef>
+        <a:effectRef idx="0">
+          <a:scrgbClr r="0" g="0" b="0"/>
+        </a:effectRef>
+        <a:fontRef idx="minor"/>
+      </dsp:style>
+      <dsp:txBody>
+        <a:bodyPr spcFirstLastPara="0" vert="horz" wrap="square" lIns="123825" tIns="123825" rIns="123825" bIns="123825" numCol="1" spcCol="1270" anchor="t" anchorCtr="0">
+          <a:noAutofit/>
+        </a:bodyPr>
+        <a:lstStyle/>
+        <a:p>
+          <a:pPr marL="171450" lvl="1" indent="-171450" algn="l" defTabSz="711200">
+            <a:lnSpc>
+              <a:spcPct val="90000"/>
+            </a:lnSpc>
+            <a:spcBef>
+              <a:spcPct val="0"/>
+            </a:spcBef>
+            <a:spcAft>
+              <a:spcPct val="15000"/>
+            </a:spcAft>
+            <a:buChar char="•"/>
+          </a:pPr>
+          <a:r>
+            <a:rPr lang="en-US" sz="1600" b="1" kern="1200" dirty="0">
+              <a:solidFill>
+                <a:srgbClr val="3333FF"/>
+              </a:solidFill>
+            </a:rPr>
+            <a:t>Specify Bear Lake Level</a:t>
+          </a:r>
+        </a:p>
+        <a:p>
+          <a:pPr marL="171450" lvl="1" indent="-171450" algn="l" defTabSz="711200">
+            <a:lnSpc>
+              <a:spcPct val="90000"/>
+            </a:lnSpc>
+            <a:spcBef>
+              <a:spcPct val="0"/>
+            </a:spcBef>
+            <a:spcAft>
+              <a:spcPct val="15000"/>
+            </a:spcAft>
+            <a:buChar char="•"/>
+          </a:pPr>
+          <a:r>
+            <a:rPr lang="en-US" sz="1600" b="1" kern="1200" dirty="0">
+              <a:solidFill>
+                <a:srgbClr val="3333FF"/>
+              </a:solidFill>
+            </a:rPr>
+            <a:t>Select from Natural Flow</a:t>
+          </a:r>
+        </a:p>
+        <a:p>
+          <a:pPr marL="342900" lvl="2" indent="-171450" algn="l" defTabSz="711200">
+            <a:lnSpc>
+              <a:spcPct val="90000"/>
+            </a:lnSpc>
+            <a:spcBef>
+              <a:spcPct val="0"/>
+            </a:spcBef>
+            <a:spcAft>
+              <a:spcPct val="15000"/>
+            </a:spcAft>
+            <a:buChar char="•"/>
+          </a:pPr>
+          <a:r>
+            <a:rPr lang="en-US" sz="1600" b="1" kern="1200" dirty="0">
+              <a:solidFill>
+                <a:srgbClr val="00B050"/>
+              </a:solidFill>
+            </a:rPr>
+            <a:t>Winter (Oct-Mar)  Natural Flows</a:t>
+          </a:r>
+        </a:p>
+      </dsp:txBody>
+      <dsp:txXfrm>
+        <a:off x="56168" y="2741495"/>
+        <a:ext cx="2357887" cy="1495283"/>
+      </dsp:txXfrm>
+    </dsp:sp>
+    <dsp:sp modelId="{464DE029-02A1-4763-8666-F53A13C6FAAD}">
+      <dsp:nvSpPr>
+        <dsp:cNvPr id="0" name=""/>
+        <dsp:cNvSpPr/>
+      </dsp:nvSpPr>
+      <dsp:spPr>
+        <a:xfrm>
+          <a:off x="1389830" y="3290574"/>
+          <a:ext cx="2584390" cy="2584390"/>
+        </a:xfrm>
+        <a:prstGeom prst="leftCircularArrow">
+          <a:avLst>
+            <a:gd name="adj1" fmla="val 2693"/>
+            <a:gd name="adj2" fmla="val 327803"/>
+            <a:gd name="adj3" fmla="val 1993841"/>
+            <a:gd name="adj4" fmla="val 8915017"/>
+            <a:gd name="adj5" fmla="val 3141"/>
+          </a:avLst>
+        </a:prstGeom>
+        <a:solidFill>
+          <a:schemeClr val="accent1">
+            <a:tint val="60000"/>
+            <a:hueOff val="0"/>
+            <a:satOff val="0"/>
+            <a:lumOff val="0"/>
+            <a:alphaOff val="0"/>
+          </a:schemeClr>
+        </a:solidFill>
+        <a:ln>
+          <a:noFill/>
+        </a:ln>
+        <a:effectLst/>
+      </dsp:spPr>
+      <dsp:style>
+        <a:lnRef idx="0">
+          <a:scrgbClr r="0" g="0" b="0"/>
+        </a:lnRef>
+        <a:fillRef idx="1">
+          <a:scrgbClr r="0" g="0" b="0"/>
+        </a:fillRef>
+        <a:effectRef idx="0">
+          <a:scrgbClr r="0" g="0" b="0"/>
+        </a:effectRef>
+        <a:fontRef idx="minor">
+          <a:schemeClr val="lt1"/>
+        </a:fontRef>
+      </dsp:style>
+    </dsp:sp>
+    <dsp:sp modelId="{22CBB4AF-36EB-417C-B703-FAF0662ACF49}">
+      <dsp:nvSpPr>
+        <dsp:cNvPr id="0" name=""/>
+        <dsp:cNvSpPr/>
+      </dsp:nvSpPr>
+      <dsp:spPr>
+        <a:xfrm>
+          <a:off x="554299" y="4350675"/>
+          <a:ext cx="2178602" cy="866358"/>
+        </a:xfrm>
+        <a:prstGeom prst="roundRect">
+          <a:avLst>
+            <a:gd name="adj" fmla="val 10000"/>
+          </a:avLst>
         </a:prstGeom>
         <a:solidFill>
           <a:schemeClr val="accent1">
@@ -2369,12 +4373,12 @@
         </a:fontRef>
       </dsp:style>
       <dsp:txBody>
-        <a:bodyPr spcFirstLastPara="0" vert="horz" wrap="square" lIns="102870" tIns="102870" rIns="102870" bIns="102870" numCol="1" spcCol="1270" anchor="ctr" anchorCtr="0">
+        <a:bodyPr spcFirstLastPara="0" vert="horz" wrap="square" lIns="45720" tIns="30480" rIns="45720" bIns="30480" numCol="1" spcCol="1270" anchor="ctr" anchorCtr="0">
           <a:noAutofit/>
         </a:bodyPr>
         <a:lstStyle/>
         <a:p>
-          <a:pPr marL="0" lvl="0" indent="0" algn="l" defTabSz="1200150">
+          <a:pPr marL="0" lvl="0" indent="0" algn="ctr" defTabSz="1066800">
             <a:lnSpc>
               <a:spcPct val="90000"/>
             </a:lnSpc>
@@ -2387,28 +4391,191 @@
             <a:buNone/>
           </a:pPr>
           <a:r>
-            <a:rPr lang="en-US" sz="2700" kern="1200" dirty="0"/>
-            <a:t>Representing agricultural uses</a:t>
+            <a:rPr lang="en-US" sz="2400" b="1" kern="1200" dirty="0"/>
+            <a:t>October 1</a:t>
+          </a:r>
+          <a:r>
+            <a:rPr lang="en-US" sz="2400" b="1" kern="1200" baseline="30000" dirty="0"/>
+            <a:t>st</a:t>
+          </a:r>
+          <a:r>
+            <a:rPr lang="en-US" sz="2400" b="1" kern="1200" dirty="0"/>
+            <a:t> </a:t>
           </a:r>
         </a:p>
       </dsp:txBody>
       <dsp:txXfrm>
-        <a:off x="52624" y="593868"/>
-        <a:ext cx="6725320" cy="972760"/>
+        <a:off x="579674" y="4376050"/>
+        <a:ext cx="2127852" cy="815608"/>
       </dsp:txXfrm>
     </dsp:sp>
-    <dsp:sp modelId="{E17F7417-71EF-47F6-9FD3-E5C8543F8F06}">
+    <dsp:sp modelId="{D9BDC29B-7D63-4495-A3B2-7C07F9B8C330}">
       <dsp:nvSpPr>
         <dsp:cNvPr id="0" name=""/>
         <dsp:cNvSpPr/>
       </dsp:nvSpPr>
       <dsp:spPr>
         <a:xfrm>
-          <a:off x="0" y="1697012"/>
-          <a:ext cx="6830568" cy="1078008"/>
+          <a:off x="3064282" y="2694975"/>
+          <a:ext cx="2450927" cy="2021502"/>
         </a:xfrm>
         <a:prstGeom prst="roundRect">
-          <a:avLst/>
+          <a:avLst>
+            <a:gd name="adj" fmla="val 10000"/>
+          </a:avLst>
+        </a:prstGeom>
+        <a:solidFill>
+          <a:schemeClr val="lt1">
+            <a:alpha val="90000"/>
+            <a:hueOff val="0"/>
+            <a:satOff val="0"/>
+            <a:lumOff val="0"/>
+            <a:alphaOff val="0"/>
+          </a:schemeClr>
+        </a:solidFill>
+        <a:ln w="19050" cap="flat" cmpd="sng" algn="ctr">
+          <a:solidFill>
+            <a:schemeClr val="accent1">
+              <a:hueOff val="0"/>
+              <a:satOff val="0"/>
+              <a:lumOff val="0"/>
+              <a:alphaOff val="0"/>
+            </a:schemeClr>
+          </a:solidFill>
+          <a:prstDash val="solid"/>
+          <a:miter lim="800000"/>
+        </a:ln>
+        <a:effectLst/>
+      </dsp:spPr>
+      <dsp:style>
+        <a:lnRef idx="2">
+          <a:scrgbClr r="0" g="0" b="0"/>
+        </a:lnRef>
+        <a:fillRef idx="1">
+          <a:scrgbClr r="0" g="0" b="0"/>
+        </a:fillRef>
+        <a:effectRef idx="0">
+          <a:scrgbClr r="0" g="0" b="0"/>
+        </a:effectRef>
+        <a:fontRef idx="minor"/>
+      </dsp:style>
+      <dsp:txBody>
+        <a:bodyPr spcFirstLastPara="0" vert="horz" wrap="square" lIns="123825" tIns="123825" rIns="123825" bIns="123825" numCol="1" spcCol="1270" anchor="t" anchorCtr="0">
+          <a:noAutofit/>
+        </a:bodyPr>
+        <a:lstStyle/>
+        <a:p>
+          <a:pPr marL="171450" lvl="1" indent="-171450" algn="l" defTabSz="711200">
+            <a:lnSpc>
+              <a:spcPct val="90000"/>
+            </a:lnSpc>
+            <a:spcBef>
+              <a:spcPct val="0"/>
+            </a:spcBef>
+            <a:spcAft>
+              <a:spcPct val="15000"/>
+            </a:spcAft>
+            <a:buChar char="•"/>
+          </a:pPr>
+          <a:r>
+            <a:rPr lang="en-US" sz="1600" b="1" kern="1200" dirty="0">
+              <a:solidFill>
+                <a:srgbClr val="3333FF"/>
+              </a:solidFill>
+            </a:rPr>
+            <a:t>Select Potential Target Elevation for Bear Lake</a:t>
+          </a:r>
+        </a:p>
+        <a:p>
+          <a:pPr marL="171450" lvl="1" indent="-171450" algn="l" defTabSz="711200">
+            <a:lnSpc>
+              <a:spcPct val="90000"/>
+            </a:lnSpc>
+            <a:spcBef>
+              <a:spcPct val="0"/>
+            </a:spcBef>
+            <a:spcAft>
+              <a:spcPct val="15000"/>
+            </a:spcAft>
+            <a:buChar char="•"/>
+          </a:pPr>
+          <a:r>
+            <a:rPr lang="en-US" sz="1600" b="1" kern="1200" dirty="0">
+              <a:solidFill>
+                <a:srgbClr val="00B050"/>
+              </a:solidFill>
+            </a:rPr>
+            <a:t>Summer (Apr-Sep) Natural Flows</a:t>
+          </a:r>
+        </a:p>
+      </dsp:txBody>
+      <dsp:txXfrm>
+        <a:off x="3110802" y="3174674"/>
+        <a:ext cx="2357887" cy="1495283"/>
+      </dsp:txXfrm>
+    </dsp:sp>
+    <dsp:sp modelId="{1C299799-9D54-457B-A3C7-0FB93A410866}">
+      <dsp:nvSpPr>
+        <dsp:cNvPr id="0" name=""/>
+        <dsp:cNvSpPr/>
+      </dsp:nvSpPr>
+      <dsp:spPr>
+        <a:xfrm>
+          <a:off x="4443787" y="1491532"/>
+          <a:ext cx="2896330" cy="2896330"/>
+        </a:xfrm>
+        <a:prstGeom prst="circularArrow">
+          <a:avLst>
+            <a:gd name="adj1" fmla="val 2403"/>
+            <a:gd name="adj2" fmla="val 290535"/>
+            <a:gd name="adj3" fmla="val 19533954"/>
+            <a:gd name="adj4" fmla="val 12575511"/>
+            <a:gd name="adj5" fmla="val 2803"/>
+          </a:avLst>
+        </a:prstGeom>
+        <a:solidFill>
+          <a:schemeClr val="accent1">
+            <a:tint val="60000"/>
+            <a:hueOff val="0"/>
+            <a:satOff val="0"/>
+            <a:lumOff val="0"/>
+            <a:alphaOff val="0"/>
+          </a:schemeClr>
+        </a:solidFill>
+        <a:ln>
+          <a:noFill/>
+        </a:ln>
+        <a:effectLst/>
+      </dsp:spPr>
+      <dsp:style>
+        <a:lnRef idx="0">
+          <a:scrgbClr r="0" g="0" b="0"/>
+        </a:lnRef>
+        <a:fillRef idx="1">
+          <a:scrgbClr r="0" g="0" b="0"/>
+        </a:fillRef>
+        <a:effectRef idx="0">
+          <a:scrgbClr r="0" g="0" b="0"/>
+        </a:effectRef>
+        <a:fontRef idx="minor">
+          <a:schemeClr val="lt1"/>
+        </a:fontRef>
+      </dsp:style>
+    </dsp:sp>
+    <dsp:sp modelId="{57A9CED2-870E-4BB2-8BB0-97EB3CDBF401}">
+      <dsp:nvSpPr>
+        <dsp:cNvPr id="0" name=""/>
+        <dsp:cNvSpPr/>
+      </dsp:nvSpPr>
+      <dsp:spPr>
+        <a:xfrm>
+          <a:off x="3608933" y="2261795"/>
+          <a:ext cx="2178602" cy="866358"/>
+        </a:xfrm>
+        <a:prstGeom prst="roundRect">
+          <a:avLst>
+            <a:gd name="adj" fmla="val 10000"/>
+          </a:avLst>
         </a:prstGeom>
         <a:solidFill>
           <a:schemeClr val="accent1">
@@ -2447,12 +4614,12 @@
         </a:fontRef>
       </dsp:style>
       <dsp:txBody>
-        <a:bodyPr spcFirstLastPara="0" vert="horz" wrap="square" lIns="102870" tIns="102870" rIns="102870" bIns="102870" numCol="1" spcCol="1270" anchor="ctr" anchorCtr="0">
+        <a:bodyPr spcFirstLastPara="0" vert="horz" wrap="square" lIns="45720" tIns="30480" rIns="45720" bIns="30480" numCol="1" spcCol="1270" anchor="ctr" anchorCtr="0">
           <a:noAutofit/>
         </a:bodyPr>
         <a:lstStyle/>
         <a:p>
-          <a:pPr marL="0" lvl="0" indent="0" algn="l" defTabSz="1200150">
+          <a:pPr marL="0" lvl="0" indent="0" algn="ctr" defTabSz="1066800">
             <a:lnSpc>
               <a:spcPct val="90000"/>
             </a:lnSpc>
@@ -2465,28 +4632,240 @@
             <a:buNone/>
           </a:pPr>
           <a:r>
-            <a:rPr lang="en-US" sz="2700" kern="1200"/>
-            <a:t>All depletions occur in summer. </a:t>
+            <a:rPr lang="en-US" sz="2400" b="1" kern="1200" dirty="0"/>
+            <a:t>April 1</a:t>
+          </a:r>
+          <a:r>
+            <a:rPr lang="en-US" sz="2400" b="1" kern="1200" baseline="30000" dirty="0"/>
+            <a:t>st</a:t>
+          </a:r>
+          <a:r>
+            <a:rPr lang="en-US" sz="2400" b="1" kern="1200" dirty="0"/>
+            <a:t> </a:t>
           </a:r>
         </a:p>
       </dsp:txBody>
       <dsp:txXfrm>
-        <a:off x="52624" y="1749636"/>
-        <a:ext cx="6725320" cy="972760"/>
+        <a:off x="3634308" y="2287170"/>
+        <a:ext cx="2127852" cy="815608"/>
       </dsp:txXfrm>
     </dsp:sp>
-    <dsp:sp modelId="{C0326A5D-C028-4AD8-A208-71E1C9E1173A}">
+    <dsp:sp modelId="{686EF4F2-C186-45B2-85A0-F6687D978556}">
       <dsp:nvSpPr>
         <dsp:cNvPr id="0" name=""/>
         <dsp:cNvSpPr/>
       </dsp:nvSpPr>
       <dsp:spPr>
         <a:xfrm>
-          <a:off x="0" y="2852781"/>
-          <a:ext cx="6830568" cy="1078008"/>
+          <a:off x="6118916" y="2694975"/>
+          <a:ext cx="2450927" cy="2021502"/>
         </a:xfrm>
         <a:prstGeom prst="roundRect">
-          <a:avLst/>
+          <a:avLst>
+            <a:gd name="adj" fmla="val 10000"/>
+          </a:avLst>
+        </a:prstGeom>
+        <a:solidFill>
+          <a:schemeClr val="lt1">
+            <a:alpha val="90000"/>
+            <a:hueOff val="0"/>
+            <a:satOff val="0"/>
+            <a:lumOff val="0"/>
+            <a:alphaOff val="0"/>
+          </a:schemeClr>
+        </a:solidFill>
+        <a:ln w="19050" cap="flat" cmpd="sng" algn="ctr">
+          <a:solidFill>
+            <a:schemeClr val="accent1">
+              <a:hueOff val="0"/>
+              <a:satOff val="0"/>
+              <a:lumOff val="0"/>
+              <a:alphaOff val="0"/>
+            </a:schemeClr>
+          </a:solidFill>
+          <a:prstDash val="solid"/>
+          <a:miter lim="800000"/>
+        </a:ln>
+        <a:effectLst/>
+      </dsp:spPr>
+      <dsp:style>
+        <a:lnRef idx="2">
+          <a:scrgbClr r="0" g="0" b="0"/>
+        </a:lnRef>
+        <a:fillRef idx="1">
+          <a:scrgbClr r="0" g="0" b="0"/>
+        </a:fillRef>
+        <a:effectRef idx="0">
+          <a:scrgbClr r="0" g="0" b="0"/>
+        </a:effectRef>
+        <a:fontRef idx="minor"/>
+      </dsp:style>
+      <dsp:txBody>
+        <a:bodyPr spcFirstLastPara="0" vert="horz" wrap="square" lIns="123825" tIns="123825" rIns="123825" bIns="123825" numCol="1" spcCol="1270" anchor="t" anchorCtr="0">
+          <a:noAutofit/>
+        </a:bodyPr>
+        <a:lstStyle/>
+        <a:p>
+          <a:pPr marL="171450" lvl="1" indent="-171450" algn="l" defTabSz="711200">
+            <a:lnSpc>
+              <a:spcPct val="90000"/>
+            </a:lnSpc>
+            <a:spcBef>
+              <a:spcPct val="0"/>
+            </a:spcBef>
+            <a:spcAft>
+              <a:spcPct val="15000"/>
+            </a:spcAft>
+            <a:buChar char="•"/>
+          </a:pPr>
+          <a:r>
+            <a:rPr lang="en-US" sz="1600" b="1" kern="1200" dirty="0">
+              <a:solidFill>
+                <a:srgbClr val="00B050"/>
+              </a:solidFill>
+            </a:rPr>
+            <a:t>Available water</a:t>
+          </a:r>
+        </a:p>
+        <a:p>
+          <a:pPr marL="171450" lvl="1" indent="-171450" algn="l" defTabSz="711200">
+            <a:lnSpc>
+              <a:spcPct val="90000"/>
+            </a:lnSpc>
+            <a:spcBef>
+              <a:spcPct val="0"/>
+            </a:spcBef>
+            <a:spcAft>
+              <a:spcPct val="15000"/>
+            </a:spcAft>
+            <a:buChar char="•"/>
+          </a:pPr>
+          <a:r>
+            <a:rPr lang="en-US" sz="1600" b="1" kern="1200">
+              <a:solidFill>
+                <a:srgbClr val="3333FF"/>
+              </a:solidFill>
+            </a:rPr>
+            <a:t>Decide Consumption</a:t>
+          </a:r>
+          <a:endParaRPr lang="en-US" sz="1600" b="1" kern="1200" dirty="0">
+            <a:solidFill>
+              <a:srgbClr val="3333FF"/>
+            </a:solidFill>
+          </a:endParaRPr>
+        </a:p>
+        <a:p>
+          <a:pPr marL="342900" lvl="2" indent="-171450" algn="l" defTabSz="711200">
+            <a:lnSpc>
+              <a:spcPct val="90000"/>
+            </a:lnSpc>
+            <a:spcBef>
+              <a:spcPct val="0"/>
+            </a:spcBef>
+            <a:spcAft>
+              <a:spcPct val="15000"/>
+            </a:spcAft>
+            <a:buChar char="•"/>
+          </a:pPr>
+          <a:r>
+            <a:rPr lang="en-US" sz="1600" b="1" kern="1200" dirty="0">
+              <a:solidFill>
+                <a:srgbClr val="3333FF"/>
+              </a:solidFill>
+            </a:rPr>
+            <a:t>Sell or Conserve remaining water</a:t>
+          </a:r>
+        </a:p>
+        <a:p>
+          <a:pPr marL="342900" lvl="2" indent="-171450" algn="l" defTabSz="711200">
+            <a:lnSpc>
+              <a:spcPct val="90000"/>
+            </a:lnSpc>
+            <a:spcBef>
+              <a:spcPct val="0"/>
+            </a:spcBef>
+            <a:spcAft>
+              <a:spcPct val="15000"/>
+            </a:spcAft>
+            <a:buChar char="•"/>
+          </a:pPr>
+          <a:r>
+            <a:rPr lang="en-US" sz="1600" b="1" kern="1200" dirty="0">
+              <a:solidFill>
+                <a:srgbClr val="3333FF"/>
+              </a:solidFill>
+            </a:rPr>
+            <a:t>Negotiate Price</a:t>
+          </a:r>
+        </a:p>
+      </dsp:txBody>
+      <dsp:txXfrm>
+        <a:off x="6165436" y="2741495"/>
+        <a:ext cx="2357887" cy="1495283"/>
+      </dsp:txXfrm>
+    </dsp:sp>
+    <dsp:sp modelId="{74F3F80A-8B0F-4F29-B321-AD28639C9105}">
+      <dsp:nvSpPr>
+        <dsp:cNvPr id="0" name=""/>
+        <dsp:cNvSpPr/>
+      </dsp:nvSpPr>
+      <dsp:spPr>
+        <a:xfrm>
+          <a:off x="7518845" y="3257502"/>
+          <a:ext cx="2583156" cy="2583156"/>
+        </a:xfrm>
+        <a:prstGeom prst="leftCircularArrow">
+          <a:avLst>
+            <a:gd name="adj1" fmla="val 2694"/>
+            <a:gd name="adj2" fmla="val 327969"/>
+            <a:gd name="adj3" fmla="val 2103480"/>
+            <a:gd name="adj4" fmla="val 9024489"/>
+            <a:gd name="adj5" fmla="val 3143"/>
+          </a:avLst>
+        </a:prstGeom>
+        <a:solidFill>
+          <a:schemeClr val="accent1">
+            <a:tint val="60000"/>
+            <a:hueOff val="0"/>
+            <a:satOff val="0"/>
+            <a:lumOff val="0"/>
+            <a:alphaOff val="0"/>
+          </a:schemeClr>
+        </a:solidFill>
+        <a:ln>
+          <a:noFill/>
+        </a:ln>
+        <a:effectLst/>
+      </dsp:spPr>
+      <dsp:style>
+        <a:lnRef idx="0">
+          <a:scrgbClr r="0" g="0" b="0"/>
+        </a:lnRef>
+        <a:fillRef idx="1">
+          <a:scrgbClr r="0" g="0" b="0"/>
+        </a:fillRef>
+        <a:effectRef idx="0">
+          <a:scrgbClr r="0" g="0" b="0"/>
+        </a:effectRef>
+        <a:fontRef idx="minor">
+          <a:schemeClr val="lt1"/>
+        </a:fontRef>
+      </dsp:style>
+    </dsp:sp>
+    <dsp:sp modelId="{94FE265A-D377-4872-8AAD-6D9586E0C18A}">
+      <dsp:nvSpPr>
+        <dsp:cNvPr id="0" name=""/>
+        <dsp:cNvSpPr/>
+      </dsp:nvSpPr>
+      <dsp:spPr>
+        <a:xfrm>
+          <a:off x="6663566" y="4283298"/>
+          <a:ext cx="2178602" cy="866358"/>
+        </a:xfrm>
+        <a:prstGeom prst="roundRect">
+          <a:avLst>
+            <a:gd name="adj" fmla="val 10000"/>
+          </a:avLst>
         </a:prstGeom>
         <a:solidFill>
           <a:schemeClr val="accent1">
@@ -2525,12 +4904,12 @@
         </a:fontRef>
       </dsp:style>
       <dsp:txBody>
-        <a:bodyPr spcFirstLastPara="0" vert="horz" wrap="square" lIns="102870" tIns="102870" rIns="102870" bIns="102870" numCol="1" spcCol="1270" anchor="ctr" anchorCtr="0">
+        <a:bodyPr spcFirstLastPara="0" vert="horz" wrap="square" lIns="45720" tIns="30480" rIns="45720" bIns="30480" numCol="1" spcCol="1270" anchor="ctr" anchorCtr="0">
           <a:noAutofit/>
         </a:bodyPr>
         <a:lstStyle/>
         <a:p>
-          <a:pPr marL="0" lvl="0" indent="0" algn="l" defTabSz="1200150">
+          <a:pPr marL="0" lvl="0" indent="0" algn="ctr" defTabSz="1066800">
             <a:lnSpc>
               <a:spcPct val="90000"/>
             </a:lnSpc>
@@ -2543,28 +4922,145 @@
             <a:buNone/>
           </a:pPr>
           <a:r>
-            <a:rPr lang="en-US" sz="2700" kern="1200"/>
-            <a:t>Historic water use = proxy to allowable use</a:t>
+            <a:rPr lang="en-US" sz="2400" b="1" kern="1200" dirty="0"/>
+            <a:t>Summer</a:t>
           </a:r>
         </a:p>
       </dsp:txBody>
       <dsp:txXfrm>
-        <a:off x="52624" y="2905405"/>
-        <a:ext cx="6725320" cy="972760"/>
+        <a:off x="6688941" y="4308673"/>
+        <a:ext cx="2127852" cy="815608"/>
       </dsp:txXfrm>
     </dsp:sp>
-    <dsp:sp modelId="{79E31495-6943-4F1A-A771-5E3E2983A4BE}">
+    <dsp:sp modelId="{DE4AC59B-B8E8-4AE0-82DC-3BD6B4ADF27A}">
       <dsp:nvSpPr>
         <dsp:cNvPr id="0" name=""/>
         <dsp:cNvSpPr/>
       </dsp:nvSpPr>
       <dsp:spPr>
         <a:xfrm>
-          <a:off x="0" y="4008550"/>
-          <a:ext cx="6830568" cy="1078008"/>
+          <a:off x="9173550" y="2694975"/>
+          <a:ext cx="2450927" cy="2021502"/>
         </a:xfrm>
         <a:prstGeom prst="roundRect">
-          <a:avLst/>
+          <a:avLst>
+            <a:gd name="adj" fmla="val 10000"/>
+          </a:avLst>
+        </a:prstGeom>
+        <a:solidFill>
+          <a:schemeClr val="lt1">
+            <a:alpha val="90000"/>
+            <a:hueOff val="0"/>
+            <a:satOff val="0"/>
+            <a:lumOff val="0"/>
+            <a:alphaOff val="0"/>
+          </a:schemeClr>
+        </a:solidFill>
+        <a:ln w="19050" cap="flat" cmpd="sng" algn="ctr">
+          <a:solidFill>
+            <a:schemeClr val="accent1">
+              <a:hueOff val="0"/>
+              <a:satOff val="0"/>
+              <a:lumOff val="0"/>
+              <a:alphaOff val="0"/>
+            </a:schemeClr>
+          </a:solidFill>
+          <a:prstDash val="solid"/>
+          <a:miter lim="800000"/>
+        </a:ln>
+        <a:effectLst/>
+      </dsp:spPr>
+      <dsp:style>
+        <a:lnRef idx="2">
+          <a:scrgbClr r="0" g="0" b="0"/>
+        </a:lnRef>
+        <a:fillRef idx="1">
+          <a:scrgbClr r="0" g="0" b="0"/>
+        </a:fillRef>
+        <a:effectRef idx="0">
+          <a:scrgbClr r="0" g="0" b="0"/>
+        </a:effectRef>
+        <a:fontRef idx="minor"/>
+      </dsp:style>
+      <dsp:txBody>
+        <a:bodyPr spcFirstLastPara="0" vert="horz" wrap="square" lIns="123825" tIns="123825" rIns="123825" bIns="123825" numCol="1" spcCol="1270" anchor="t" anchorCtr="0">
+          <a:noAutofit/>
+        </a:bodyPr>
+        <a:lstStyle/>
+        <a:p>
+          <a:pPr marL="171450" lvl="1" indent="-171450" algn="l" defTabSz="800100">
+            <a:lnSpc>
+              <a:spcPct val="90000"/>
+            </a:lnSpc>
+            <a:spcBef>
+              <a:spcPct val="0"/>
+            </a:spcBef>
+            <a:spcAft>
+              <a:spcPct val="15000"/>
+            </a:spcAft>
+            <a:buChar char="•"/>
+          </a:pPr>
+          <a:r>
+            <a:rPr lang="en-US" sz="1800" b="1" kern="1200">
+              <a:solidFill>
+                <a:srgbClr val="00B050"/>
+              </a:solidFill>
+            </a:rPr>
+            <a:t>Bank storage in Bear Lake</a:t>
+          </a:r>
+          <a:endParaRPr lang="en-US" sz="1800" b="1" kern="1200" dirty="0">
+            <a:solidFill>
+              <a:srgbClr val="00B050"/>
+            </a:solidFill>
+          </a:endParaRPr>
+        </a:p>
+        <a:p>
+          <a:pPr marL="171450" lvl="1" indent="-171450" algn="l" defTabSz="800100">
+            <a:lnSpc>
+              <a:spcPct val="90000"/>
+            </a:lnSpc>
+            <a:spcBef>
+              <a:spcPct val="0"/>
+            </a:spcBef>
+            <a:spcAft>
+              <a:spcPct val="15000"/>
+            </a:spcAft>
+            <a:buChar char="•"/>
+          </a:pPr>
+          <a:r>
+            <a:rPr lang="en-US" sz="1800" b="1" kern="1200">
+              <a:solidFill>
+                <a:srgbClr val="3333FF"/>
+              </a:solidFill>
+            </a:rPr>
+            <a:t>Deliver to GSL from bank storage </a:t>
+          </a:r>
+          <a:endParaRPr lang="en-US" sz="1800" b="1" kern="1200" dirty="0">
+            <a:solidFill>
+              <a:srgbClr val="3333FF"/>
+            </a:solidFill>
+          </a:endParaRPr>
+        </a:p>
+      </dsp:txBody>
+      <dsp:txXfrm>
+        <a:off x="9220070" y="3174674"/>
+        <a:ext cx="2357887" cy="1495283"/>
+      </dsp:txXfrm>
+    </dsp:sp>
+    <dsp:sp modelId="{C4D9AE61-43FF-44EC-9E2D-7446ED243914}">
+      <dsp:nvSpPr>
+        <dsp:cNvPr id="0" name=""/>
+        <dsp:cNvSpPr/>
+      </dsp:nvSpPr>
+      <dsp:spPr>
+        <a:xfrm>
+          <a:off x="9718200" y="2261795"/>
+          <a:ext cx="2178602" cy="866358"/>
+        </a:xfrm>
+        <a:prstGeom prst="roundRect">
+          <a:avLst>
+            <a:gd name="adj" fmla="val 10000"/>
+          </a:avLst>
         </a:prstGeom>
         <a:solidFill>
           <a:schemeClr val="accent1">
@@ -2603,12 +5099,12 @@
         </a:fontRef>
       </dsp:style>
       <dsp:txBody>
-        <a:bodyPr spcFirstLastPara="0" vert="horz" wrap="square" lIns="102870" tIns="102870" rIns="102870" bIns="102870" numCol="1" spcCol="1270" anchor="ctr" anchorCtr="0">
+        <a:bodyPr spcFirstLastPara="0" vert="horz" wrap="square" lIns="45720" tIns="30480" rIns="45720" bIns="30480" numCol="1" spcCol="1270" anchor="ctr" anchorCtr="0">
           <a:noAutofit/>
         </a:bodyPr>
         <a:lstStyle/>
         <a:p>
-          <a:pPr marL="0" lvl="0" indent="0" algn="l" defTabSz="1200150">
+          <a:pPr marL="0" lvl="0" indent="0" algn="ctr" defTabSz="1066800">
             <a:lnSpc>
               <a:spcPct val="90000"/>
             </a:lnSpc>
@@ -2621,92 +5117,14 @@
             <a:buNone/>
           </a:pPr>
           <a:r>
-            <a:rPr lang="en-US" sz="2700" kern="1200"/>
-            <a:t>Store winter flows. Allocate summer natural flows to users based on historic flows.</a:t>
+            <a:rPr lang="en-US" sz="2400" b="1" kern="1200" dirty="0"/>
+            <a:t>End of Summer</a:t>
           </a:r>
         </a:p>
       </dsp:txBody>
       <dsp:txXfrm>
-        <a:off x="52624" y="4061174"/>
-        <a:ext cx="6725320" cy="972760"/>
-      </dsp:txXfrm>
-    </dsp:sp>
-    <dsp:sp modelId="{3DF2B3B6-3B2F-4B1F-A43E-B945C0780DEA}">
-      <dsp:nvSpPr>
-        <dsp:cNvPr id="0" name=""/>
-        <dsp:cNvSpPr/>
-      </dsp:nvSpPr>
-      <dsp:spPr>
-        <a:xfrm>
-          <a:off x="0" y="5164319"/>
-          <a:ext cx="6830568" cy="1078008"/>
-        </a:xfrm>
-        <a:prstGeom prst="roundRect">
-          <a:avLst/>
-        </a:prstGeom>
-        <a:solidFill>
-          <a:schemeClr val="accent1">
-            <a:hueOff val="0"/>
-            <a:satOff val="0"/>
-            <a:lumOff val="0"/>
-            <a:alphaOff val="0"/>
-          </a:schemeClr>
-        </a:solidFill>
-        <a:ln w="19050" cap="flat" cmpd="sng" algn="ctr">
-          <a:solidFill>
-            <a:schemeClr val="lt1">
-              <a:hueOff val="0"/>
-              <a:satOff val="0"/>
-              <a:lumOff val="0"/>
-              <a:alphaOff val="0"/>
-            </a:schemeClr>
-          </a:solidFill>
-          <a:prstDash val="solid"/>
-          <a:miter lim="800000"/>
-        </a:ln>
-        <a:effectLst/>
-      </dsp:spPr>
-      <dsp:style>
-        <a:lnRef idx="2">
-          <a:scrgbClr r="0" g="0" b="0"/>
-        </a:lnRef>
-        <a:fillRef idx="1">
-          <a:scrgbClr r="0" g="0" b="0"/>
-        </a:fillRef>
-        <a:effectRef idx="0">
-          <a:scrgbClr r="0" g="0" b="0"/>
-        </a:effectRef>
-        <a:fontRef idx="minor">
-          <a:schemeClr val="lt1"/>
-        </a:fontRef>
-      </dsp:style>
-      <dsp:txBody>
-        <a:bodyPr spcFirstLastPara="0" vert="horz" wrap="square" lIns="102870" tIns="102870" rIns="102870" bIns="102870" numCol="1" spcCol="1270" anchor="ctr" anchorCtr="0">
-          <a:noAutofit/>
-        </a:bodyPr>
-        <a:lstStyle/>
-        <a:p>
-          <a:pPr marL="0" lvl="0" indent="0" algn="l" defTabSz="1200150">
-            <a:lnSpc>
-              <a:spcPct val="90000"/>
-            </a:lnSpc>
-            <a:spcBef>
-              <a:spcPct val="0"/>
-            </a:spcBef>
-            <a:spcAft>
-              <a:spcPct val="35000"/>
-            </a:spcAft>
-            <a:buNone/>
-          </a:pPr>
-          <a:r>
-            <a:rPr lang="en-US" sz="2700" kern="1200"/>
-            <a:t>Conserved water becomes available for following years, cannot be sold later.</a:t>
-          </a:r>
-        </a:p>
-      </dsp:txBody>
-      <dsp:txXfrm>
-        <a:off x="52624" y="5216943"/>
-        <a:ext cx="6725320" cy="972760"/>
+        <a:off x="9743575" y="2287170"/>
+        <a:ext cx="2127852" cy="815608"/>
       </dsp:txXfrm>
     </dsp:sp>
   </dsp:spTree>
@@ -2714,12 +5132,12 @@
 </file>
 
 <file path=ppt/diagrams/layout1.xml><?xml version="1.0" encoding="utf-8"?>
-<dgm:layoutDef xmlns:dgm="http://schemas.openxmlformats.org/drawingml/2006/diagram" xmlns:a="http://schemas.openxmlformats.org/drawingml/2006/main" uniqueId="urn:microsoft.com/office/officeart/2005/8/layout/vList2">
+<dgm:layoutDef xmlns:dgm="http://schemas.openxmlformats.org/drawingml/2006/diagram" xmlns:a="http://schemas.openxmlformats.org/drawingml/2006/main" uniqueId="urn:microsoft.com/office/officeart/2008/layout/LinedList">
   <dgm:title val=""/>
   <dgm:desc val=""/>
   <dgm:catLst>
-    <dgm:cat type="list" pri="3000"/>
-    <dgm:cat type="convert" pri="1000"/>
+    <dgm:cat type="hierarchy" pri="8000"/>
+    <dgm:cat type="list" pri="2500"/>
   </dgm:catLst>
   <dgm:sampData>
     <dgm:dataModel>
@@ -2731,18 +5149,503 @@
         <dgm:pt modelId="11">
           <dgm:prSet phldr="1"/>
         </dgm:pt>
+        <dgm:pt modelId="12">
+          <dgm:prSet phldr="1"/>
+        </dgm:pt>
+        <dgm:pt modelId="13">
+          <dgm:prSet phldr="1"/>
+        </dgm:pt>
+      </dgm:ptLst>
+      <dgm:cxnLst>
+        <dgm:cxn modelId="2" srcId="0" destId="1" srcOrd="0" destOrd="0"/>
+        <dgm:cxn modelId="3" srcId="1" destId="11" srcOrd="0" destOrd="0"/>
+        <dgm:cxn modelId="4" srcId="1" destId="12" srcOrd="1" destOrd="0"/>
+        <dgm:cxn modelId="5" srcId="1" destId="13" srcOrd="2" destOrd="0"/>
+      </dgm:cxnLst>
+      <dgm:bg/>
+      <dgm:whole/>
+    </dgm:dataModel>
+  </dgm:sampData>
+  <dgm:styleData>
+    <dgm:dataModel>
+      <dgm:ptLst>
+        <dgm:pt modelId="0" type="doc"/>
+        <dgm:pt modelId="1">
+          <dgm:prSet phldr="1"/>
+        </dgm:pt>
+        <dgm:pt modelId="11">
+          <dgm:prSet phldr="1"/>
+        </dgm:pt>
+        <dgm:pt modelId="12">
+          <dgm:prSet phldr="1"/>
+        </dgm:pt>
+      </dgm:ptLst>
+      <dgm:cxnLst>
+        <dgm:cxn modelId="2" srcId="0" destId="1" srcOrd="0" destOrd="0"/>
+        <dgm:cxn modelId="3" srcId="1" destId="11" srcOrd="0" destOrd="0"/>
+        <dgm:cxn modelId="4" srcId="1" destId="12" srcOrd="1" destOrd="0"/>
+      </dgm:cxnLst>
+      <dgm:bg/>
+      <dgm:whole/>
+    </dgm:dataModel>
+  </dgm:styleData>
+  <dgm:clrData>
+    <dgm:dataModel>
+      <dgm:ptLst>
+        <dgm:pt modelId="0" type="doc"/>
+        <dgm:pt modelId="1">
+          <dgm:prSet phldr="1"/>
+        </dgm:pt>
+        <dgm:pt modelId="11">
+          <dgm:prSet phldr="1"/>
+        </dgm:pt>
+        <dgm:pt modelId="12">
+          <dgm:prSet phldr="1"/>
+        </dgm:pt>
+      </dgm:ptLst>
+      <dgm:cxnLst>
+        <dgm:cxn modelId="2" srcId="0" destId="1" srcOrd="0" destOrd="0"/>
+        <dgm:cxn modelId="3" srcId="1" destId="11" srcOrd="0" destOrd="0"/>
+        <dgm:cxn modelId="4" srcId="1" destId="12" srcOrd="1" destOrd="0"/>
+      </dgm:cxnLst>
+      <dgm:bg/>
+      <dgm:whole/>
+    </dgm:dataModel>
+  </dgm:clrData>
+  <dgm:layoutNode name="vert0">
+    <dgm:varLst>
+      <dgm:dir/>
+      <dgm:animOne val="branch"/>
+      <dgm:animLvl val="lvl"/>
+    </dgm:varLst>
+    <dgm:choose name="Name0">
+      <dgm:if name="Name1" func="var" arg="dir" op="equ" val="norm">
+        <dgm:alg type="lin">
+          <dgm:param type="linDir" val="fromT"/>
+          <dgm:param type="nodeHorzAlign" val="l"/>
+        </dgm:alg>
+      </dgm:if>
+      <dgm:else name="Name2">
+        <dgm:alg type="lin">
+          <dgm:param type="linDir" val="fromT"/>
+          <dgm:param type="nodeHorzAlign" val="r"/>
+        </dgm:alg>
+      </dgm:else>
+    </dgm:choose>
+    <dgm:shape xmlns:r="http://schemas.openxmlformats.org/officeDocument/2006/relationships" r:blip="">
+      <dgm:adjLst/>
+    </dgm:shape>
+    <dgm:presOf/>
+    <dgm:constrLst>
+      <dgm:constr type="w" for="ch" forName="horz1" refType="w"/>
+      <dgm:constr type="h" for="ch" forName="horz1" refType="h"/>
+      <dgm:constr type="h" for="des" forName="vert1" refType="h"/>
+      <dgm:constr type="h" for="des" forName="tx1" refType="h"/>
+      <dgm:constr type="h" for="des" forName="horz2" refType="h"/>
+      <dgm:constr type="h" for="des" forName="vert2" refType="h"/>
+      <dgm:constr type="h" for="des" forName="horz3" refType="h"/>
+      <dgm:constr type="h" for="des" forName="vert3" refType="h"/>
+      <dgm:constr type="h" for="des" forName="horz4" refType="h"/>
+      <dgm:constr type="h" for="des" ptType="node" refType="h"/>
+      <dgm:constr type="primFontSz" for="des" forName="tx1" op="equ" val="65"/>
+      <dgm:constr type="primFontSz" for="des" forName="tx2" op="equ" val="65"/>
+      <dgm:constr type="primFontSz" for="des" forName="tx3" op="equ" val="65"/>
+      <dgm:constr type="primFontSz" for="des" forName="tx4" op="equ" val="65"/>
+      <dgm:constr type="w" for="des" forName="thickLine" refType="w"/>
+      <dgm:constr type="h" for="des" forName="thickLine"/>
+      <dgm:constr type="h" for="des" forName="thinLine1"/>
+      <dgm:constr type="h" for="des" forName="thinLine2b"/>
+      <dgm:constr type="h" for="des" forName="thinLine3"/>
+      <dgm:constr type="h" for="des" forName="vertSpace2a" refType="h" fact="0.05"/>
+      <dgm:constr type="h" for="des" forName="vertSpace2b" refType="h" refFor="des" refForName="vertSpace2a"/>
+    </dgm:constrLst>
+    <dgm:forEach name="Name3" axis="ch" ptType="node">
+      <dgm:layoutNode name="thickLine" styleLbl="alignNode1">
+        <dgm:alg type="sp"/>
+        <dgm:shape xmlns:r="http://schemas.openxmlformats.org/officeDocument/2006/relationships" type="line" r:blip="">
+          <dgm:adjLst/>
+        </dgm:shape>
+        <dgm:presOf/>
+      </dgm:layoutNode>
+      <dgm:layoutNode name="horz1">
+        <dgm:choose name="Name4">
+          <dgm:if name="Name5" func="var" arg="dir" op="equ" val="norm">
+            <dgm:alg type="lin">
+              <dgm:param type="linDir" val="fromL"/>
+              <dgm:param type="nodeVertAlign" val="t"/>
+            </dgm:alg>
+          </dgm:if>
+          <dgm:else name="Name6">
+            <dgm:alg type="lin">
+              <dgm:param type="linDir" val="fromR"/>
+              <dgm:param type="nodeVertAlign" val="t"/>
+            </dgm:alg>
+          </dgm:else>
+        </dgm:choose>
+        <dgm:shape xmlns:r="http://schemas.openxmlformats.org/officeDocument/2006/relationships" r:blip="">
+          <dgm:adjLst/>
+        </dgm:shape>
+        <dgm:presOf/>
+        <dgm:choose name="Name7">
+          <dgm:if name="Name8" axis="root des" func="maxDepth" op="equ" val="1">
+            <dgm:constrLst>
+              <dgm:constr type="w" for="ch" forName="tx1" refType="w"/>
+            </dgm:constrLst>
+          </dgm:if>
+          <dgm:if name="Name9" axis="root des" func="maxDepth" op="equ" val="2">
+            <dgm:constrLst>
+              <dgm:constr type="w" for="ch" forName="tx1" refType="w" fact="0.2"/>
+              <dgm:constr type="w" for="des" forName="tx2" refType="w" fact="0.785"/>
+              <dgm:constr type="w" for="des" forName="horzSpace2" refType="w" fact="0.015"/>
+              <dgm:constr type="w" for="des" forName="thinLine2b" refType="w" fact="0.8"/>
+            </dgm:constrLst>
+          </dgm:if>
+          <dgm:if name="Name10" axis="root des" func="maxDepth" op="equ" val="3">
+            <dgm:constrLst>
+              <dgm:constr type="w" for="ch" forName="tx1" refType="w" fact="0.2"/>
+              <dgm:constr type="w" for="des" forName="tx2" refType="w" fact="0.385"/>
+              <dgm:constr type="w" for="des" forName="tx3" refType="w" fact="0.385"/>
+              <dgm:constr type="w" for="des" forName="horzSpace2" refType="w" fact="0.015"/>
+              <dgm:constr type="w" for="des" forName="horzSpace3" refType="w" fact="0.015"/>
+              <dgm:constr type="w" for="des" forName="thinLine2b" refType="w" fact="0.8"/>
+              <dgm:constr type="w" for="des" forName="thinLine3" refType="w" fact="0.385"/>
+            </dgm:constrLst>
+          </dgm:if>
+          <dgm:if name="Name11" axis="root des" func="maxDepth" op="gte" val="4">
+            <dgm:constrLst>
+              <dgm:constr type="w" for="ch" forName="tx1" refType="w" fact="0.2"/>
+              <dgm:constr type="w" for="des" forName="tx2" refType="w" fact="0.2516"/>
+              <dgm:constr type="w" for="des" forName="tx3" refType="w" fact="0.2516"/>
+              <dgm:constr type="w" for="des" forName="tx4" refType="w" fact="0.2516"/>
+              <dgm:constr type="w" for="des" forName="horzSpace2" refType="w" fact="0.015"/>
+              <dgm:constr type="w" for="des" forName="horzSpace3" refType="w" fact="0.015"/>
+              <dgm:constr type="w" for="des" forName="horzSpace4" refType="w" fact="0.015"/>
+              <dgm:constr type="w" for="des" forName="thinLine2b" refType="w" fact="0.8"/>
+              <dgm:constr type="w" for="des" forName="thinLine3" refType="w" fact="0.5332"/>
+            </dgm:constrLst>
+          </dgm:if>
+          <dgm:else name="Name12"/>
+        </dgm:choose>
+        <dgm:layoutNode name="tx1" styleLbl="revTx">
+          <dgm:alg type="tx">
+            <dgm:param type="parTxLTRAlign" val="l"/>
+            <dgm:param type="parTxRTLAlign" val="r"/>
+            <dgm:param type="txAnchorVert" val="t"/>
+          </dgm:alg>
+          <dgm:shape xmlns:r="http://schemas.openxmlformats.org/officeDocument/2006/relationships" type="rect" r:blip="">
+            <dgm:adjLst/>
+          </dgm:shape>
+          <dgm:presOf axis="self"/>
+          <dgm:constrLst>
+            <dgm:constr type="tMarg" refType="primFontSz" fact="0.3"/>
+            <dgm:constr type="bMarg" refType="primFontSz" fact="0.3"/>
+            <dgm:constr type="lMarg" refType="primFontSz" fact="0.3"/>
+            <dgm:constr type="rMarg" refType="primFontSz" fact="0.3"/>
+          </dgm:constrLst>
+          <dgm:ruleLst>
+            <dgm:rule type="primFontSz" val="5" fact="NaN" max="NaN"/>
+          </dgm:ruleLst>
+        </dgm:layoutNode>
+        <dgm:layoutNode name="vert1">
+          <dgm:choose name="Name13">
+            <dgm:if name="Name14" func="var" arg="dir" op="equ" val="norm">
+              <dgm:alg type="lin">
+                <dgm:param type="linDir" val="fromT"/>
+                <dgm:param type="nodeHorzAlign" val="l"/>
+              </dgm:alg>
+            </dgm:if>
+            <dgm:else name="Name15">
+              <dgm:alg type="lin">
+                <dgm:param type="linDir" val="fromT"/>
+                <dgm:param type="nodeHorzAlign" val="r"/>
+              </dgm:alg>
+            </dgm:else>
+          </dgm:choose>
+          <dgm:shape xmlns:r="http://schemas.openxmlformats.org/officeDocument/2006/relationships" r:blip="">
+            <dgm:adjLst/>
+          </dgm:shape>
+          <dgm:presOf/>
+          <dgm:forEach name="Name16" axis="ch" ptType="node">
+            <dgm:choose name="Name17">
+              <dgm:if name="Name18" axis="self" ptType="node" func="pos" op="equ" val="1">
+                <dgm:layoutNode name="vertSpace2a">
+                  <dgm:alg type="sp"/>
+                  <dgm:shape xmlns:r="http://schemas.openxmlformats.org/officeDocument/2006/relationships" r:blip="">
+                    <dgm:adjLst/>
+                  </dgm:shape>
+                  <dgm:presOf/>
+                </dgm:layoutNode>
+              </dgm:if>
+              <dgm:else name="Name19"/>
+            </dgm:choose>
+            <dgm:layoutNode name="horz2">
+              <dgm:choose name="Name20">
+                <dgm:if name="Name21" func="var" arg="dir" op="equ" val="norm">
+                  <dgm:alg type="lin">
+                    <dgm:param type="linDir" val="fromL"/>
+                    <dgm:param type="nodeVertAlign" val="t"/>
+                  </dgm:alg>
+                </dgm:if>
+                <dgm:else name="Name22">
+                  <dgm:alg type="lin">
+                    <dgm:param type="linDir" val="fromR"/>
+                    <dgm:param type="nodeVertAlign" val="t"/>
+                  </dgm:alg>
+                </dgm:else>
+              </dgm:choose>
+              <dgm:shape xmlns:r="http://schemas.openxmlformats.org/officeDocument/2006/relationships" r:blip="">
+                <dgm:adjLst/>
+              </dgm:shape>
+              <dgm:presOf/>
+              <dgm:layoutNode name="horzSpace2">
+                <dgm:alg type="sp"/>
+                <dgm:shape xmlns:r="http://schemas.openxmlformats.org/officeDocument/2006/relationships" r:blip="">
+                  <dgm:adjLst/>
+                </dgm:shape>
+                <dgm:presOf/>
+              </dgm:layoutNode>
+              <dgm:layoutNode name="tx2" styleLbl="revTx">
+                <dgm:alg type="tx">
+                  <dgm:param type="parTxLTRAlign" val="l"/>
+                  <dgm:param type="parTxRTLAlign" val="r"/>
+                  <dgm:param type="txAnchorVert" val="t"/>
+                </dgm:alg>
+                <dgm:shape xmlns:r="http://schemas.openxmlformats.org/officeDocument/2006/relationships" type="rect" r:blip="">
+                  <dgm:adjLst/>
+                </dgm:shape>
+                <dgm:presOf axis="self"/>
+                <dgm:constrLst>
+                  <dgm:constr type="tMarg" refType="primFontSz" fact="0.3"/>
+                  <dgm:constr type="bMarg" refType="primFontSz" fact="0.3"/>
+                  <dgm:constr type="lMarg" refType="primFontSz" fact="0.3"/>
+                  <dgm:constr type="rMarg" refType="primFontSz" fact="0.3"/>
+                </dgm:constrLst>
+                <dgm:ruleLst>
+                  <dgm:rule type="primFontSz" val="5" fact="NaN" max="NaN"/>
+                </dgm:ruleLst>
+              </dgm:layoutNode>
+              <dgm:layoutNode name="vert2">
+                <dgm:choose name="Name23">
+                  <dgm:if name="Name24" func="var" arg="dir" op="equ" val="norm">
+                    <dgm:alg type="lin">
+                      <dgm:param type="linDir" val="fromT"/>
+                      <dgm:param type="nodeHorzAlign" val="l"/>
+                    </dgm:alg>
+                  </dgm:if>
+                  <dgm:else name="Name25">
+                    <dgm:alg type="lin">
+                      <dgm:param type="linDir" val="fromT"/>
+                      <dgm:param type="nodeHorzAlign" val="r"/>
+                    </dgm:alg>
+                  </dgm:else>
+                </dgm:choose>
+                <dgm:shape xmlns:r="http://schemas.openxmlformats.org/officeDocument/2006/relationships" r:blip="">
+                  <dgm:adjLst/>
+                </dgm:shape>
+                <dgm:presOf/>
+                <dgm:forEach name="Name26" axis="ch" ptType="node">
+                  <dgm:layoutNode name="horz3">
+                    <dgm:choose name="Name27">
+                      <dgm:if name="Name28" func="var" arg="dir" op="equ" val="norm">
+                        <dgm:alg type="lin">
+                          <dgm:param type="linDir" val="fromL"/>
+                          <dgm:param type="nodeVertAlign" val="t"/>
+                        </dgm:alg>
+                      </dgm:if>
+                      <dgm:else name="Name29">
+                        <dgm:alg type="lin">
+                          <dgm:param type="linDir" val="fromR"/>
+                          <dgm:param type="nodeVertAlign" val="t"/>
+                        </dgm:alg>
+                      </dgm:else>
+                    </dgm:choose>
+                    <dgm:shape xmlns:r="http://schemas.openxmlformats.org/officeDocument/2006/relationships" r:blip="">
+                      <dgm:adjLst/>
+                    </dgm:shape>
+                    <dgm:presOf/>
+                    <dgm:layoutNode name="horzSpace3">
+                      <dgm:alg type="sp"/>
+                      <dgm:shape xmlns:r="http://schemas.openxmlformats.org/officeDocument/2006/relationships" r:blip="">
+                        <dgm:adjLst/>
+                      </dgm:shape>
+                      <dgm:presOf/>
+                    </dgm:layoutNode>
+                    <dgm:layoutNode name="tx3" styleLbl="revTx">
+                      <dgm:alg type="tx">
+                        <dgm:param type="parTxLTRAlign" val="l"/>
+                        <dgm:param type="parTxRTLAlign" val="r"/>
+                        <dgm:param type="txAnchorVert" val="t"/>
+                      </dgm:alg>
+                      <dgm:shape xmlns:r="http://schemas.openxmlformats.org/officeDocument/2006/relationships" type="rect" r:blip="">
+                        <dgm:adjLst/>
+                      </dgm:shape>
+                      <dgm:presOf axis="self"/>
+                      <dgm:constrLst>
+                        <dgm:constr type="tMarg" refType="primFontSz" fact="0.3"/>
+                        <dgm:constr type="bMarg" refType="primFontSz" fact="0.3"/>
+                        <dgm:constr type="lMarg" refType="primFontSz" fact="0.3"/>
+                        <dgm:constr type="rMarg" refType="primFontSz" fact="0.3"/>
+                      </dgm:constrLst>
+                      <dgm:ruleLst>
+                        <dgm:rule type="primFontSz" val="5" fact="NaN" max="NaN"/>
+                      </dgm:ruleLst>
+                    </dgm:layoutNode>
+                    <dgm:layoutNode name="vert3">
+                      <dgm:choose name="Name30">
+                        <dgm:if name="Name31" func="var" arg="dir" op="equ" val="norm">
+                          <dgm:alg type="lin">
+                            <dgm:param type="linDir" val="fromT"/>
+                            <dgm:param type="nodeHorzAlign" val="l"/>
+                          </dgm:alg>
+                        </dgm:if>
+                        <dgm:else name="Name32">
+                          <dgm:alg type="lin">
+                            <dgm:param type="linDir" val="fromT"/>
+                            <dgm:param type="nodeHorzAlign" val="r"/>
+                          </dgm:alg>
+                        </dgm:else>
+                      </dgm:choose>
+                      <dgm:shape xmlns:r="http://schemas.openxmlformats.org/officeDocument/2006/relationships" r:blip="">
+                        <dgm:adjLst/>
+                      </dgm:shape>
+                      <dgm:presOf/>
+                      <dgm:forEach name="Name33" axis="ch" ptType="node">
+                        <dgm:layoutNode name="horz4">
+                          <dgm:choose name="Name34">
+                            <dgm:if name="Name35" func="var" arg="dir" op="equ" val="norm">
+                              <dgm:alg type="lin">
+                                <dgm:param type="linDir" val="fromL"/>
+                                <dgm:param type="nodeVertAlign" val="t"/>
+                              </dgm:alg>
+                            </dgm:if>
+                            <dgm:else name="Name36">
+                              <dgm:alg type="lin">
+                                <dgm:param type="linDir" val="fromR"/>
+                                <dgm:param type="nodeVertAlign" val="t"/>
+                              </dgm:alg>
+                            </dgm:else>
+                          </dgm:choose>
+                          <dgm:shape xmlns:r="http://schemas.openxmlformats.org/officeDocument/2006/relationships" r:blip="">
+                            <dgm:adjLst/>
+                          </dgm:shape>
+                          <dgm:presOf/>
+                          <dgm:layoutNode name="horzSpace4">
+                            <dgm:alg type="sp"/>
+                            <dgm:shape xmlns:r="http://schemas.openxmlformats.org/officeDocument/2006/relationships" r:blip="">
+                              <dgm:adjLst/>
+                            </dgm:shape>
+                            <dgm:presOf/>
+                          </dgm:layoutNode>
+                          <dgm:layoutNode name="tx4" styleLbl="revTx">
+                            <dgm:varLst>
+                              <dgm:bulletEnabled val="1"/>
+                            </dgm:varLst>
+                            <dgm:alg type="tx">
+                              <dgm:param type="parTxLTRAlign" val="l"/>
+                              <dgm:param type="parTxRTLAlign" val="r"/>
+                              <dgm:param type="txAnchorVert" val="t"/>
+                            </dgm:alg>
+                            <dgm:shape xmlns:r="http://schemas.openxmlformats.org/officeDocument/2006/relationships" type="rect" r:blip="">
+                              <dgm:adjLst/>
+                            </dgm:shape>
+                            <dgm:presOf axis="desOrSelf" ptType="node"/>
+                            <dgm:constrLst>
+                              <dgm:constr type="tMarg" refType="primFontSz" fact="0.3"/>
+                              <dgm:constr type="bMarg" refType="primFontSz" fact="0.3"/>
+                              <dgm:constr type="lMarg" refType="primFontSz" fact="0.3"/>
+                              <dgm:constr type="rMarg" refType="primFontSz" fact="0.3"/>
+                            </dgm:constrLst>
+                            <dgm:ruleLst>
+                              <dgm:rule type="primFontSz" val="5" fact="NaN" max="NaN"/>
+                            </dgm:ruleLst>
+                          </dgm:layoutNode>
+                        </dgm:layoutNode>
+                      </dgm:forEach>
+                    </dgm:layoutNode>
+                  </dgm:layoutNode>
+                  <dgm:forEach name="Name37" axis="followSib" ptType="sibTrans" cnt="1">
+                    <dgm:layoutNode name="thinLine3" styleLbl="callout">
+                      <dgm:alg type="sp"/>
+                      <dgm:shape xmlns:r="http://schemas.openxmlformats.org/officeDocument/2006/relationships" type="line" r:blip="">
+                        <dgm:adjLst/>
+                      </dgm:shape>
+                      <dgm:presOf/>
+                    </dgm:layoutNode>
+                  </dgm:forEach>
+                </dgm:forEach>
+              </dgm:layoutNode>
+            </dgm:layoutNode>
+            <dgm:layoutNode name="thinLine2b" styleLbl="callout">
+              <dgm:alg type="sp"/>
+              <dgm:shape xmlns:r="http://schemas.openxmlformats.org/officeDocument/2006/relationships" type="line" r:blip="">
+                <dgm:adjLst/>
+              </dgm:shape>
+              <dgm:presOf/>
+            </dgm:layoutNode>
+            <dgm:layoutNode name="vertSpace2b">
+              <dgm:alg type="sp"/>
+              <dgm:shape xmlns:r="http://schemas.openxmlformats.org/officeDocument/2006/relationships" r:blip="">
+                <dgm:adjLst/>
+              </dgm:shape>
+              <dgm:presOf/>
+            </dgm:layoutNode>
+          </dgm:forEach>
+        </dgm:layoutNode>
+      </dgm:layoutNode>
+    </dgm:forEach>
+  </dgm:layoutNode>
+</dgm:layoutDef>
+</file>
+
+<file path=ppt/diagrams/layout2.xml><?xml version="1.0" encoding="utf-8"?>
+<dgm:layoutDef xmlns:dgm="http://schemas.openxmlformats.org/drawingml/2006/diagram" xmlns:a="http://schemas.openxmlformats.org/drawingml/2006/main" uniqueId="urn:microsoft.com/office/officeart/2005/8/layout/hProcess4">
+  <dgm:title val=""/>
+  <dgm:desc val=""/>
+  <dgm:catLst>
+    <dgm:cat type="process" pri="4000"/>
+  </dgm:catLst>
+  <dgm:sampData>
+    <dgm:dataModel>
+      <dgm:ptLst>
+        <dgm:pt modelId="0" type="doc"/>
+        <dgm:pt modelId="1">
+          <dgm:prSet phldr="1"/>
+        </dgm:pt>
+        <dgm:pt modelId="11">
+          <dgm:prSet phldr="1"/>
+        </dgm:pt>
+        <dgm:pt modelId="12">
+          <dgm:prSet phldr="1"/>
+        </dgm:pt>
         <dgm:pt modelId="2">
           <dgm:prSet phldr="1"/>
         </dgm:pt>
         <dgm:pt modelId="21">
           <dgm:prSet phldr="1"/>
         </dgm:pt>
+        <dgm:pt modelId="22">
+          <dgm:prSet phldr="1"/>
+        </dgm:pt>
+        <dgm:pt modelId="3">
+          <dgm:prSet phldr="1"/>
+        </dgm:pt>
+        <dgm:pt modelId="31">
+          <dgm:prSet phldr="1"/>
+        </dgm:pt>
+        <dgm:pt modelId="32">
+          <dgm:prSet phldr="1"/>
+        </dgm:pt>
       </dgm:ptLst>
       <dgm:cxnLst>
         <dgm:cxn modelId="4" srcId="0" destId="1" srcOrd="0" destOrd="0"/>
         <dgm:cxn modelId="5" srcId="0" destId="2" srcOrd="1" destOrd="0"/>
-        <dgm:cxn modelId="12" srcId="1" destId="11" srcOrd="0" destOrd="0"/>
+        <dgm:cxn modelId="6" srcId="0" destId="3" srcOrd="2" destOrd="0"/>
+        <dgm:cxn modelId="13" srcId="1" destId="11" srcOrd="0" destOrd="0"/>
+        <dgm:cxn modelId="14" srcId="1" destId="12" srcOrd="1" destOrd="0"/>
         <dgm:cxn modelId="23" srcId="2" destId="21" srcOrd="0" destOrd="0"/>
+        <dgm:cxn modelId="24" srcId="2" destId="22" srcOrd="1" destOrd="0"/>
+        <dgm:cxn modelId="33" srcId="3" destId="31" srcOrd="0" destOrd="0"/>
+        <dgm:cxn modelId="34" srcId="3" destId="32" srcOrd="1" destOrd="0"/>
       </dgm:cxnLst>
       <dgm:bg/>
       <dgm:whole/>
@@ -2753,11 +5656,15 @@
       <dgm:ptLst>
         <dgm:pt modelId="0" type="doc"/>
         <dgm:pt modelId="1"/>
+        <dgm:pt modelId="11"/>
         <dgm:pt modelId="2"/>
+        <dgm:pt modelId="21"/>
       </dgm:ptLst>
       <dgm:cxnLst>
-        <dgm:cxn modelId="3" srcId="0" destId="1" srcOrd="0" destOrd="0"/>
-        <dgm:cxn modelId="4" srcId="0" destId="2" srcOrd="1" destOrd="0"/>
+        <dgm:cxn modelId="4" srcId="0" destId="1" srcOrd="0" destOrd="0"/>
+        <dgm:cxn modelId="5" srcId="0" destId="2" srcOrd="1" destOrd="0"/>
+        <dgm:cxn modelId="13" srcId="1" destId="11" srcOrd="0" destOrd="0"/>
+        <dgm:cxn modelId="23" srcId="2" destId="21" srcOrd="0" destOrd="0"/>
       </dgm:cxnLst>
       <dgm:bg/>
       <dgm:whole/>
@@ -2768,119 +5675,1507 @@
       <dgm:ptLst>
         <dgm:pt modelId="0" type="doc"/>
         <dgm:pt modelId="1"/>
+        <dgm:pt modelId="11"/>
         <dgm:pt modelId="2"/>
+        <dgm:pt modelId="21"/>
         <dgm:pt modelId="3"/>
+        <dgm:pt modelId="31"/>
         <dgm:pt modelId="4"/>
+        <dgm:pt modelId="41"/>
       </dgm:ptLst>
       <dgm:cxnLst>
         <dgm:cxn modelId="5" srcId="0" destId="1" srcOrd="0" destOrd="0"/>
         <dgm:cxn modelId="6" srcId="0" destId="2" srcOrd="1" destOrd="0"/>
         <dgm:cxn modelId="7" srcId="0" destId="3" srcOrd="2" destOrd="0"/>
         <dgm:cxn modelId="8" srcId="0" destId="4" srcOrd="3" destOrd="0"/>
+        <dgm:cxn modelId="13" srcId="1" destId="11" srcOrd="0" destOrd="0"/>
+        <dgm:cxn modelId="23" srcId="2" destId="21" srcOrd="0" destOrd="0"/>
+        <dgm:cxn modelId="33" srcId="3" destId="31" srcOrd="0" destOrd="0"/>
+        <dgm:cxn modelId="43" srcId="4" destId="41" srcOrd="0" destOrd="0"/>
       </dgm:cxnLst>
       <dgm:bg/>
       <dgm:whole/>
     </dgm:dataModel>
   </dgm:clrData>
-  <dgm:layoutNode name="linear">
+  <dgm:layoutNode name="Name0">
     <dgm:varLst>
+      <dgm:dir/>
       <dgm:animLvl val="lvl"/>
       <dgm:resizeHandles val="exact"/>
     </dgm:varLst>
-    <dgm:alg type="lin">
-      <dgm:param type="linDir" val="fromT"/>
-      <dgm:param type="vertAlign" val="mid"/>
-    </dgm:alg>
+    <dgm:alg type="composite"/>
     <dgm:shape xmlns:r="http://schemas.openxmlformats.org/officeDocument/2006/relationships" r:blip="">
       <dgm:adjLst/>
     </dgm:shape>
     <dgm:presOf/>
     <dgm:constrLst>
-      <dgm:constr type="w" for="ch" forName="parentText" refType="w"/>
-      <dgm:constr type="h" for="ch" forName="parentText" refType="primFontSz" refFor="ch" refForName="parentText" fact="0.52"/>
-      <dgm:constr type="w" for="ch" forName="childText" refType="w"/>
-      <dgm:constr type="h" for="ch" forName="childText" refType="primFontSz" refFor="ch" refForName="parentText" fact="0.46"/>
-      <dgm:constr type="h" for="ch" forName="parentText" op="equ"/>
-      <dgm:constr type="primFontSz" for="ch" forName="parentText" op="equ" val="65"/>
-      <dgm:constr type="primFontSz" for="ch" forName="childText" refType="primFontSz" refFor="ch" refForName="parentText" op="equ"/>
-      <dgm:constr type="h" for="ch" forName="spacer" refType="primFontSz" refFor="ch" refForName="parentText" fact="0.08"/>
+      <dgm:constr type="w" for="ch" forName="tSp" refType="w"/>
+      <dgm:constr type="h" for="ch" forName="tSp" refType="h" fact="0.15"/>
+      <dgm:constr type="l" for="ch" forName="tSp"/>
+      <dgm:constr type="t" for="ch" forName="tSp"/>
+      <dgm:constr type="w" for="ch" forName="bSp" refType="w"/>
+      <dgm:constr type="h" for="ch" forName="bSp" refType="h" fact="0.15"/>
+      <dgm:constr type="l" for="ch" forName="bSp"/>
+      <dgm:constr type="t" for="ch" forName="bSp" refType="h" fact="0.85"/>
+      <dgm:constr type="w" for="ch" forName="process" refType="w"/>
+      <dgm:constr type="h" for="ch" forName="process" refType="h" fact="0.7"/>
+      <dgm:constr type="l" for="ch" forName="process"/>
+      <dgm:constr type="t" for="ch" forName="process" refType="h" fact="0.15"/>
     </dgm:constrLst>
-    <dgm:ruleLst>
-      <dgm:rule type="primFontSz" for="ch" forName="parentText" val="5" fact="NaN" max="NaN"/>
-    </dgm:ruleLst>
-    <dgm:forEach name="Name0" axis="ch" ptType="node">
-      <dgm:layoutNode name="parentText" styleLbl="node1">
-        <dgm:varLst>
-          <dgm:chMax val="0"/>
-          <dgm:bulletEnabled val="1"/>
-        </dgm:varLst>
-        <dgm:alg type="tx">
-          <dgm:param type="parTxLTRAlign" val="l"/>
-          <dgm:param type="parTxRTLAlign" val="r"/>
-        </dgm:alg>
-        <dgm:shape xmlns:r="http://schemas.openxmlformats.org/officeDocument/2006/relationships" type="roundRect" r:blip="">
-          <dgm:adjLst/>
-        </dgm:shape>
-        <dgm:presOf axis="self"/>
-        <dgm:constrLst>
-          <dgm:constr type="tMarg" refType="primFontSz" fact="0.3"/>
-          <dgm:constr type="bMarg" refType="primFontSz" fact="0.3"/>
-          <dgm:constr type="lMarg" refType="primFontSz" fact="0.3"/>
-          <dgm:constr type="rMarg" refType="primFontSz" fact="0.3"/>
-        </dgm:constrLst>
-        <dgm:ruleLst>
-          <dgm:rule type="h" val="INF" fact="NaN" max="NaN"/>
-        </dgm:ruleLst>
-      </dgm:layoutNode>
+    <dgm:ruleLst/>
+    <dgm:layoutNode name="tSp">
+      <dgm:alg type="sp"/>
+      <dgm:shape xmlns:r="http://schemas.openxmlformats.org/officeDocument/2006/relationships" r:blip="">
+        <dgm:adjLst/>
+      </dgm:shape>
+      <dgm:presOf/>
+      <dgm:constrLst/>
+      <dgm:ruleLst/>
+    </dgm:layoutNode>
+    <dgm:layoutNode name="bSp">
+      <dgm:alg type="sp"/>
+      <dgm:shape xmlns:r="http://schemas.openxmlformats.org/officeDocument/2006/relationships" r:blip="">
+        <dgm:adjLst/>
+      </dgm:shape>
+      <dgm:presOf/>
+      <dgm:constrLst/>
+      <dgm:ruleLst/>
+    </dgm:layoutNode>
+    <dgm:layoutNode name="process">
       <dgm:choose name="Name1">
-        <dgm:if name="Name2" axis="ch" ptType="node" func="cnt" op="gte" val="1">
-          <dgm:layoutNode name="childText" styleLbl="revTx">
+        <dgm:if name="Name2" func="var" arg="dir" op="equ" val="norm">
+          <dgm:alg type="lin">
+            <dgm:param type="linDir" val="fromL"/>
+          </dgm:alg>
+        </dgm:if>
+        <dgm:else name="Name3">
+          <dgm:alg type="lin">
+            <dgm:param type="linDir" val="fromR"/>
+          </dgm:alg>
+        </dgm:else>
+      </dgm:choose>
+      <dgm:shape xmlns:r="http://schemas.openxmlformats.org/officeDocument/2006/relationships" r:blip="">
+        <dgm:adjLst/>
+      </dgm:shape>
+      <dgm:presOf/>
+      <dgm:constrLst>
+        <dgm:constr type="w" for="ch" forName="composite1" refType="w"/>
+        <dgm:constr type="w" for="ch" forName="composite2" refType="w" refFor="ch" refForName="composite1" op="equ"/>
+        <dgm:constr type="h" for="ch" forName="composite1" refType="h"/>
+        <dgm:constr type="h" for="ch" forName="composite2" refType="h" refFor="ch" refForName="composite1" op="equ"/>
+        <dgm:constr type="primFontSz" for="des" forName="parentNode1" val="65"/>
+        <dgm:constr type="primFontSz" for="des" forName="parentNode2" refType="primFontSz" refFor="des" refForName="parentNode1" op="equ"/>
+        <dgm:constr type="secFontSz" for="des" forName="childNode1tx" val="65"/>
+        <dgm:constr type="secFontSz" for="des" forName="childNode2tx" refType="secFontSz" refFor="des" refForName="childNode1tx" op="equ"/>
+        <dgm:constr type="w" for="des" ptType="sibTrans" refType="w" refFor="ch" refForName="composite1" op="equ" fact="0.05"/>
+      </dgm:constrLst>
+      <dgm:ruleLst/>
+      <dgm:forEach name="Name4" axis="ch" ptType="node" step="2">
+        <dgm:layoutNode name="composite1">
+          <dgm:alg type="composite">
+            <dgm:param type="ar" val="0.943"/>
+          </dgm:alg>
+          <dgm:shape xmlns:r="http://schemas.openxmlformats.org/officeDocument/2006/relationships" r:blip="">
+            <dgm:adjLst/>
+          </dgm:shape>
+          <dgm:presOf/>
+          <dgm:choose name="Name5">
+            <dgm:if name="Name6" func="var" arg="dir" op="equ" val="norm">
+              <dgm:constrLst>
+                <dgm:constr type="h" refType="w" fact="1.06"/>
+                <dgm:constr type="w" for="ch" forName="dummyNode1" refType="w"/>
+                <dgm:constr type="h" for="ch" forName="dummyNode1" refType="h"/>
+                <dgm:constr type="t" for="ch" forName="dummyNode1"/>
+                <dgm:constr type="l" for="ch" forName="dummyNode1"/>
+                <dgm:constr type="w" for="ch" forName="childNode1" refType="w" fact="0.9"/>
+                <dgm:constr type="h" for="ch" forName="childNode1" refType="h" fact="0.7"/>
+                <dgm:constr type="t" for="ch" forName="childNode1" refType="h" fact="0.15"/>
+                <dgm:constr type="l" for="ch" forName="childNode1"/>
+                <dgm:constr type="w" for="ch" forName="childNode1tx" refType="w" fact="0.9"/>
+                <dgm:constr type="h" for="ch" forName="childNode1tx" refType="h" fact="0.55"/>
+                <dgm:constr type="t" for="ch" forName="childNode1tx" refType="h" fact="0.15"/>
+                <dgm:constr type="l" for="ch" forName="childNode1tx"/>
+                <dgm:constr type="w" for="ch" forName="parentNode1" refType="w" fact="0.8"/>
+                <dgm:constr type="h" for="ch" forName="parentNode1" refType="h" fact="0.3"/>
+                <dgm:constr type="t" for="ch" forName="parentNode1" refType="h" fact="0.7"/>
+                <dgm:constr type="l" for="ch" forName="parentNode1" refType="w" fact="0.2"/>
+                <dgm:constr type="w" for="ch" forName="connSite1" refType="w" fact="0.01"/>
+                <dgm:constr type="h" for="ch" forName="connSite1" refType="h" fact="0.01"/>
+                <dgm:constr type="t" for="ch" forName="connSite1"/>
+                <dgm:constr type="l" for="ch" forName="connSite1" refType="w" fact="0.35"/>
+              </dgm:constrLst>
+            </dgm:if>
+            <dgm:else name="Name7">
+              <dgm:constrLst>
+                <dgm:constr type="h" refType="w" fact="1.06"/>
+                <dgm:constr type="w" for="ch" forName="dummyNode1" refType="w"/>
+                <dgm:constr type="h" for="ch" forName="dummyNode1" refType="h"/>
+                <dgm:constr type="t" for="ch" forName="dummyNode1"/>
+                <dgm:constr type="l" for="ch" forName="dummyNode1"/>
+                <dgm:constr type="w" for="ch" forName="childNode1" refType="w" fact="0.9"/>
+                <dgm:constr type="h" for="ch" forName="childNode1" refType="h" fact="0.7"/>
+                <dgm:constr type="t" for="ch" forName="childNode1" refType="h" fact="0.15"/>
+                <dgm:constr type="l" for="ch" forName="childNode1" refType="w" fact="0.1"/>
+                <dgm:constr type="w" for="ch" forName="childNode1tx" refType="w" fact="0.9"/>
+                <dgm:constr type="h" for="ch" forName="childNode1tx" refType="h" fact="0.55"/>
+                <dgm:constr type="t" for="ch" forName="childNode1tx" refType="h" fact="0.15"/>
+                <dgm:constr type="l" for="ch" forName="childNode1tx" refType="w" fact="0.1"/>
+                <dgm:constr type="w" for="ch" forName="parentNode1" refType="w" fact="0.8"/>
+                <dgm:constr type="h" for="ch" forName="parentNode1" refType="h" fact="0.3"/>
+                <dgm:constr type="t" for="ch" forName="parentNode1" refType="h" fact="0.7"/>
+                <dgm:constr type="l" for="ch" forName="parentNode1"/>
+                <dgm:constr type="w" for="ch" forName="connSite1" refType="w" fact="0.01"/>
+                <dgm:constr type="h" for="ch" forName="connSite1" refType="h" fact="0.01"/>
+                <dgm:constr type="t" for="ch" forName="connSite1"/>
+                <dgm:constr type="l" for="ch" forName="connSite1" refType="w" fact="0.65"/>
+              </dgm:constrLst>
+            </dgm:else>
+          </dgm:choose>
+          <dgm:ruleLst/>
+          <dgm:layoutNode name="dummyNode1">
+            <dgm:alg type="sp"/>
+            <dgm:shape xmlns:r="http://schemas.openxmlformats.org/officeDocument/2006/relationships" type="rect" r:blip="" hideGeom="1">
+              <dgm:adjLst/>
+            </dgm:shape>
+            <dgm:presOf/>
+            <dgm:constrLst/>
+            <dgm:ruleLst/>
+          </dgm:layoutNode>
+          <dgm:layoutNode name="childNode1" styleLbl="bgAcc1">
+            <dgm:varLst>
+              <dgm:bulletEnabled val="1"/>
+            </dgm:varLst>
+            <dgm:alg type="sp"/>
+            <dgm:shape xmlns:r="http://schemas.openxmlformats.org/officeDocument/2006/relationships" type="roundRect" r:blip="">
+              <dgm:adjLst>
+                <dgm:adj idx="1" val="0.1"/>
+              </dgm:adjLst>
+            </dgm:shape>
+            <dgm:presOf axis="des" ptType="node"/>
+            <dgm:constrLst/>
+            <dgm:ruleLst/>
+          </dgm:layoutNode>
+          <dgm:layoutNode name="childNode1tx" styleLbl="bgAcc1">
             <dgm:varLst>
               <dgm:bulletEnabled val="1"/>
             </dgm:varLst>
             <dgm:alg type="tx">
               <dgm:param type="stBulletLvl" val="1"/>
-              <dgm:param type="lnSpAfChP" val="20"/>
             </dgm:alg>
-            <dgm:shape xmlns:r="http://schemas.openxmlformats.org/officeDocument/2006/relationships" type="rect" r:blip="">
-              <dgm:adjLst/>
+            <dgm:shape xmlns:r="http://schemas.openxmlformats.org/officeDocument/2006/relationships" type="roundRect" r:blip="" hideGeom="1">
+              <dgm:adjLst>
+                <dgm:adj idx="1" val="0.1"/>
+              </dgm:adjLst>
             </dgm:shape>
             <dgm:presOf axis="des" ptType="node"/>
             <dgm:constrLst>
+              <dgm:constr type="secFontSz" val="65"/>
+              <dgm:constr type="primFontSz" refType="secFontSz"/>
+              <dgm:constr type="tMarg" refType="secFontSz" fact="0.15"/>
+              <dgm:constr type="bMarg" refType="secFontSz" fact="0.15"/>
+              <dgm:constr type="lMarg" refType="secFontSz" fact="0.15"/>
+              <dgm:constr type="rMarg" refType="secFontSz" fact="0.15"/>
+            </dgm:constrLst>
+            <dgm:ruleLst>
+              <dgm:rule type="secFontSz" val="5" fact="NaN" max="NaN"/>
+            </dgm:ruleLst>
+          </dgm:layoutNode>
+          <dgm:layoutNode name="parentNode1" styleLbl="node1">
+            <dgm:varLst>
+              <dgm:chMax val="1"/>
+              <dgm:bulletEnabled val="1"/>
+            </dgm:varLst>
+            <dgm:alg type="tx"/>
+            <dgm:shape xmlns:r="http://schemas.openxmlformats.org/officeDocument/2006/relationships" type="roundRect" r:blip="">
+              <dgm:adjLst>
+                <dgm:adj idx="1" val="0.1"/>
+              </dgm:adjLst>
+            </dgm:shape>
+            <dgm:presOf axis="self"/>
+            <dgm:constrLst>
               <dgm:constr type="tMarg" refType="primFontSz" fact="0.1"/>
               <dgm:constr type="bMarg" refType="primFontSz" fact="0.1"/>
-              <dgm:constr type="lMarg" refType="w" fact="0.09"/>
+              <dgm:constr type="lMarg" refType="primFontSz" fact="0.15"/>
+              <dgm:constr type="rMarg" refType="primFontSz" fact="0.15"/>
             </dgm:constrLst>
             <dgm:ruleLst>
-              <dgm:rule type="h" val="INF" fact="NaN" max="NaN"/>
+              <dgm:rule type="primFontSz" val="5" fact="NaN" max="NaN"/>
             </dgm:ruleLst>
           </dgm:layoutNode>
-        </dgm:if>
-        <dgm:else name="Name3">
-          <dgm:choose name="Name4">
-            <dgm:if name="Name5" axis="par ch" ptType="doc node" func="cnt" op="gte" val="2">
-              <dgm:forEach name="Name6" axis="followSib" ptType="sibTrans" cnt="1">
-                <dgm:layoutNode name="spacer">
-                  <dgm:alg type="sp"/>
-                  <dgm:shape xmlns:r="http://schemas.openxmlformats.org/officeDocument/2006/relationships" r:blip="">
-                    <dgm:adjLst/>
-                  </dgm:shape>
-                  <dgm:presOf/>
-                  <dgm:constrLst/>
-                  <dgm:ruleLst/>
-                </dgm:layoutNode>
-              </dgm:forEach>
-            </dgm:if>
-            <dgm:else name="Name7"/>
-          </dgm:choose>
-        </dgm:else>
-      </dgm:choose>
-    </dgm:forEach>
+          <dgm:layoutNode name="connSite1" moveWith="childNode1">
+            <dgm:alg type="sp"/>
+            <dgm:shape xmlns:r="http://schemas.openxmlformats.org/officeDocument/2006/relationships" r:blip="">
+              <dgm:adjLst/>
+            </dgm:shape>
+            <dgm:presOf/>
+            <dgm:constrLst/>
+            <dgm:ruleLst/>
+          </dgm:layoutNode>
+        </dgm:layoutNode>
+        <dgm:forEach name="Name8" axis="followSib" ptType="sibTrans" cnt="1">
+          <dgm:layoutNode name="Name9">
+            <dgm:alg type="conn">
+              <dgm:param type="connRout" val="curve"/>
+              <dgm:param type="srcNode" val="parentNode1"/>
+              <dgm:param type="dstNode" val="connSite2"/>
+              <dgm:param type="begPts" val="bCtr"/>
+              <dgm:param type="endPts" val="bCtr"/>
+            </dgm:alg>
+            <dgm:shape xmlns:r="http://schemas.openxmlformats.org/officeDocument/2006/relationships" type="conn" r:blip="" zOrderOff="-2">
+              <dgm:adjLst/>
+            </dgm:shape>
+            <dgm:presOf axis="self"/>
+            <dgm:choose name="Name10">
+              <dgm:if name="Name11" func="var" arg="dir" op="equ" val="norm">
+                <dgm:constrLst>
+                  <dgm:constr type="h" refType="w" fact="0.35"/>
+                  <dgm:constr type="wArH" refType="h"/>
+                  <dgm:constr type="hArH" refType="h"/>
+                  <dgm:constr type="connDist"/>
+                  <dgm:constr type="diam" refType="connDist" fact="-1.15"/>
+                  <dgm:constr type="begPad"/>
+                  <dgm:constr type="endPad"/>
+                </dgm:constrLst>
+              </dgm:if>
+              <dgm:else name="Name12">
+                <dgm:constrLst>
+                  <dgm:constr type="h" refType="w" fact="0.35"/>
+                  <dgm:constr type="wArH" refType="h"/>
+                  <dgm:constr type="hArH" refType="h"/>
+                  <dgm:constr type="connDist"/>
+                  <dgm:constr type="diam" refType="connDist" fact="1.15"/>
+                  <dgm:constr type="begPad"/>
+                  <dgm:constr type="endPad"/>
+                </dgm:constrLst>
+              </dgm:else>
+            </dgm:choose>
+            <dgm:ruleLst/>
+          </dgm:layoutNode>
+        </dgm:forEach>
+        <dgm:forEach name="Name13" axis="followSib" ptType="node" cnt="1">
+          <dgm:layoutNode name="composite2">
+            <dgm:alg type="composite">
+              <dgm:param type="ar" val="0.943"/>
+            </dgm:alg>
+            <dgm:shape xmlns:r="http://schemas.openxmlformats.org/officeDocument/2006/relationships" r:blip="">
+              <dgm:adjLst/>
+            </dgm:shape>
+            <dgm:presOf/>
+            <dgm:choose name="Name14">
+              <dgm:if name="Name15" func="var" arg="dir" op="equ" val="norm">
+                <dgm:constrLst>
+                  <dgm:constr type="h" refType="w" fact="1.06"/>
+                  <dgm:constr type="w" for="ch" forName="dummyNode2" refType="w"/>
+                  <dgm:constr type="h" for="ch" forName="dummyNode2" refType="h"/>
+                  <dgm:constr type="t" for="ch" forName="dummyNode2"/>
+                  <dgm:constr type="l" for="ch" forName="dummyNode2"/>
+                  <dgm:constr type="w" for="ch" forName="childNode2" refType="w" fact="0.9"/>
+                  <dgm:constr type="h" for="ch" forName="childNode2" refType="h" fact="0.7"/>
+                  <dgm:constr type="t" for="ch" forName="childNode2" refType="h" fact="0.15"/>
+                  <dgm:constr type="l" for="ch" forName="childNode2"/>
+                  <dgm:constr type="w" for="ch" forName="childNode2tx" refType="w" fact="0.9"/>
+                  <dgm:constr type="h" for="ch" forName="childNode2tx" refType="h" fact="0.55"/>
+                  <dgm:constr type="t" for="ch" forName="childNode2tx" refType="h" fact="0.3"/>
+                  <dgm:constr type="l" for="ch" forName="childNode2tx"/>
+                  <dgm:constr type="w" for="ch" forName="parentNode2" refType="w" fact="0.8"/>
+                  <dgm:constr type="h" for="ch" forName="parentNode2" refType="h" fact="0.3"/>
+                  <dgm:constr type="t" for="ch" forName="parentNode2"/>
+                  <dgm:constr type="l" for="ch" forName="parentNode2" refType="w" fact="0.2"/>
+                  <dgm:constr type="w" for="ch" forName="connSite2" refType="w" fact="0.01"/>
+                  <dgm:constr type="h" for="ch" forName="connSite2" refType="h" fact="0.01"/>
+                  <dgm:constr type="t" for="ch" forName="connSite2" refType="h" fact="0.99"/>
+                  <dgm:constr type="l" for="ch" forName="connSite2" refType="w" fact="0.25"/>
+                </dgm:constrLst>
+              </dgm:if>
+              <dgm:else name="Name16">
+                <dgm:constrLst>
+                  <dgm:constr type="h" refType="w" fact="1.06"/>
+                  <dgm:constr type="w" for="ch" forName="dummyNode2" refType="w"/>
+                  <dgm:constr type="h" for="ch" forName="dummyNode2" refType="h"/>
+                  <dgm:constr type="t" for="ch" forName="dummyNode2"/>
+                  <dgm:constr type="l" for="ch" forName="dummyNode2"/>
+                  <dgm:constr type="w" for="ch" forName="childNode2" refType="w" fact="0.9"/>
+                  <dgm:constr type="h" for="ch" forName="childNode2" refType="h" fact="0.7"/>
+                  <dgm:constr type="t" for="ch" forName="childNode2" refType="h" fact="0.15"/>
+                  <dgm:constr type="l" for="ch" forName="childNode2" refType="w" fact="0.1"/>
+                  <dgm:constr type="w" for="ch" forName="childNode2tx" refType="w" fact="0.9"/>
+                  <dgm:constr type="h" for="ch" forName="childNode2tx" refType="h" fact="0.55"/>
+                  <dgm:constr type="t" for="ch" forName="childNode2tx" refType="h" fact="0.3"/>
+                  <dgm:constr type="l" for="ch" forName="childNode2tx" refType="w" fact="0.1"/>
+                  <dgm:constr type="w" for="ch" forName="parentNode2" refType="w" fact="0.8"/>
+                  <dgm:constr type="h" for="ch" forName="parentNode2" refType="h" fact="0.3"/>
+                  <dgm:constr type="t" for="ch" forName="parentNode2"/>
+                  <dgm:constr type="l" for="ch" forName="parentNode2"/>
+                  <dgm:constr type="w" for="ch" forName="connSite2" refType="w" fact="0.01"/>
+                  <dgm:constr type="h" for="ch" forName="connSite2" refType="h" fact="0.01"/>
+                  <dgm:constr type="t" for="ch" forName="connSite2" refType="h" fact="0.99"/>
+                  <dgm:constr type="l" for="ch" forName="connSite2" refType="w" fact="0.85"/>
+                </dgm:constrLst>
+              </dgm:else>
+            </dgm:choose>
+            <dgm:ruleLst/>
+            <dgm:layoutNode name="dummyNode2">
+              <dgm:alg type="sp"/>
+              <dgm:shape xmlns:r="http://schemas.openxmlformats.org/officeDocument/2006/relationships" type="rect" r:blip="" hideGeom="1">
+                <dgm:adjLst/>
+              </dgm:shape>
+              <dgm:presOf/>
+              <dgm:constrLst/>
+              <dgm:ruleLst/>
+            </dgm:layoutNode>
+            <dgm:layoutNode name="childNode2" styleLbl="bgAcc1">
+              <dgm:varLst>
+                <dgm:bulletEnabled val="1"/>
+              </dgm:varLst>
+              <dgm:alg type="sp"/>
+              <dgm:shape xmlns:r="http://schemas.openxmlformats.org/officeDocument/2006/relationships" type="roundRect" r:blip="">
+                <dgm:adjLst>
+                  <dgm:adj idx="1" val="0.1"/>
+                </dgm:adjLst>
+              </dgm:shape>
+              <dgm:presOf axis="des" ptType="node"/>
+              <dgm:constrLst/>
+              <dgm:ruleLst/>
+            </dgm:layoutNode>
+            <dgm:layoutNode name="childNode2tx" styleLbl="bgAcc1">
+              <dgm:varLst>
+                <dgm:bulletEnabled val="1"/>
+              </dgm:varLst>
+              <dgm:alg type="tx">
+                <dgm:param type="stBulletLvl" val="1"/>
+              </dgm:alg>
+              <dgm:shape xmlns:r="http://schemas.openxmlformats.org/officeDocument/2006/relationships" type="roundRect" r:blip="" hideGeom="1">
+                <dgm:adjLst>
+                  <dgm:adj idx="1" val="0.1"/>
+                </dgm:adjLst>
+              </dgm:shape>
+              <dgm:presOf axis="des" ptType="node"/>
+              <dgm:constrLst>
+                <dgm:constr type="secFontSz" val="65"/>
+                <dgm:constr type="primFontSz" refType="secFontSz"/>
+                <dgm:constr type="tMarg" refType="secFontSz" fact="0.15"/>
+                <dgm:constr type="bMarg" refType="secFontSz" fact="0.15"/>
+                <dgm:constr type="lMarg" refType="secFontSz" fact="0.15"/>
+                <dgm:constr type="rMarg" refType="secFontSz" fact="0.15"/>
+              </dgm:constrLst>
+              <dgm:ruleLst>
+                <dgm:rule type="secFontSz" val="5" fact="NaN" max="NaN"/>
+              </dgm:ruleLst>
+            </dgm:layoutNode>
+            <dgm:layoutNode name="parentNode2" styleLbl="node1">
+              <dgm:varLst>
+                <dgm:chMax val="0"/>
+                <dgm:bulletEnabled val="1"/>
+              </dgm:varLst>
+              <dgm:alg type="tx"/>
+              <dgm:shape xmlns:r="http://schemas.openxmlformats.org/officeDocument/2006/relationships" type="roundRect" r:blip="">
+                <dgm:adjLst>
+                  <dgm:adj idx="1" val="0.1"/>
+                </dgm:adjLst>
+              </dgm:shape>
+              <dgm:presOf axis="self"/>
+              <dgm:constrLst>
+                <dgm:constr type="tMarg" refType="primFontSz" fact="0.1"/>
+                <dgm:constr type="bMarg" refType="primFontSz" fact="0.1"/>
+                <dgm:constr type="lMarg" refType="primFontSz" fact="0.15"/>
+                <dgm:constr type="rMarg" refType="primFontSz" fact="0.15"/>
+              </dgm:constrLst>
+              <dgm:ruleLst>
+                <dgm:rule type="primFontSz" val="5" fact="NaN" max="NaN"/>
+              </dgm:ruleLst>
+            </dgm:layoutNode>
+            <dgm:layoutNode name="connSite2" moveWith="childNode2">
+              <dgm:alg type="sp"/>
+              <dgm:shape xmlns:r="http://schemas.openxmlformats.org/officeDocument/2006/relationships" r:blip="">
+                <dgm:adjLst/>
+              </dgm:shape>
+              <dgm:presOf/>
+              <dgm:constrLst/>
+              <dgm:ruleLst/>
+            </dgm:layoutNode>
+          </dgm:layoutNode>
+          <dgm:forEach name="Name17" axis="followSib" ptType="sibTrans" cnt="1">
+            <dgm:layoutNode name="Name18">
+              <dgm:alg type="conn">
+                <dgm:param type="connRout" val="curve"/>
+                <dgm:param type="srcNode" val="parentNode2"/>
+                <dgm:param type="dstNode" val="connSite1"/>
+                <dgm:param type="begPts" val="tCtr"/>
+                <dgm:param type="endPts" val="tCtr"/>
+              </dgm:alg>
+              <dgm:shape xmlns:r="http://schemas.openxmlformats.org/officeDocument/2006/relationships" type="conn" r:blip="" zOrderOff="-2">
+                <dgm:adjLst/>
+              </dgm:shape>
+              <dgm:presOf axis="self"/>
+              <dgm:choose name="Name19">
+                <dgm:if name="Name20" func="var" arg="dir" op="equ" val="norm">
+                  <dgm:constrLst>
+                    <dgm:constr type="h" refType="w" fact="0.35"/>
+                    <dgm:constr type="wArH" refType="h"/>
+                    <dgm:constr type="hArH" refType="h"/>
+                    <dgm:constr type="connDist"/>
+                    <dgm:constr type="diam" refType="connDist" fact="1.15"/>
+                    <dgm:constr type="begPad"/>
+                    <dgm:constr type="endPad"/>
+                  </dgm:constrLst>
+                </dgm:if>
+                <dgm:else name="Name21">
+                  <dgm:constrLst>
+                    <dgm:constr type="h" refType="w" fact="0.35"/>
+                    <dgm:constr type="wArH" refType="h"/>
+                    <dgm:constr type="hArH" refType="h"/>
+                    <dgm:constr type="connDist"/>
+                    <dgm:constr type="diam" refType="connDist" fact="-1.15"/>
+                    <dgm:constr type="begPad"/>
+                    <dgm:constr type="endPad"/>
+                  </dgm:constrLst>
+                </dgm:else>
+              </dgm:choose>
+              <dgm:ruleLst/>
+            </dgm:layoutNode>
+          </dgm:forEach>
+        </dgm:forEach>
+      </dgm:forEach>
+    </dgm:layoutNode>
   </dgm:layoutNode>
 </dgm:layoutDef>
 </file>
 
 <file path=ppt/diagrams/quickStyle1.xml><?xml version="1.0" encoding="utf-8"?>
+<dgm:styleDef xmlns:dgm="http://schemas.openxmlformats.org/drawingml/2006/diagram" xmlns:a="http://schemas.openxmlformats.org/drawingml/2006/main" uniqueId="urn:microsoft.com/office/officeart/2005/8/quickstyle/simple1">
+  <dgm:title val=""/>
+  <dgm:desc val=""/>
+  <dgm:catLst>
+    <dgm:cat type="simple" pri="10100"/>
+  </dgm:catLst>
+  <dgm:scene3d>
+    <a:camera prst="orthographicFront"/>
+    <a:lightRig rig="threePt" dir="t"/>
+  </dgm:scene3d>
+  <dgm:styleLbl name="node0">
+    <dgm:scene3d>
+      <a:camera prst="orthographicFront"/>
+      <a:lightRig rig="threePt" dir="t"/>
+    </dgm:scene3d>
+    <dgm:sp3d/>
+    <dgm:txPr/>
+    <dgm:style>
+      <a:lnRef idx="2">
+        <a:scrgbClr r="0" g="0" b="0"/>
+      </a:lnRef>
+      <a:fillRef idx="1">
+        <a:scrgbClr r="0" g="0" b="0"/>
+      </a:fillRef>
+      <a:effectRef idx="0">
+        <a:scrgbClr r="0" g="0" b="0"/>
+      </a:effectRef>
+      <a:fontRef idx="minor">
+        <a:schemeClr val="lt1"/>
+      </a:fontRef>
+    </dgm:style>
+  </dgm:styleLbl>
+  <dgm:styleLbl name="lnNode1">
+    <dgm:scene3d>
+      <a:camera prst="orthographicFront"/>
+      <a:lightRig rig="threePt" dir="t"/>
+    </dgm:scene3d>
+    <dgm:sp3d/>
+    <dgm:txPr/>
+    <dgm:style>
+      <a:lnRef idx="2">
+        <a:scrgbClr r="0" g="0" b="0"/>
+      </a:lnRef>
+      <a:fillRef idx="1">
+        <a:scrgbClr r="0" g="0" b="0"/>
+      </a:fillRef>
+      <a:effectRef idx="0">
+        <a:scrgbClr r="0" g="0" b="0"/>
+      </a:effectRef>
+      <a:fontRef idx="minor">
+        <a:schemeClr val="lt1"/>
+      </a:fontRef>
+    </dgm:style>
+  </dgm:styleLbl>
+  <dgm:styleLbl name="vennNode1">
+    <dgm:scene3d>
+      <a:camera prst="orthographicFront"/>
+      <a:lightRig rig="threePt" dir="t"/>
+    </dgm:scene3d>
+    <dgm:sp3d/>
+    <dgm:txPr/>
+    <dgm:style>
+      <a:lnRef idx="2">
+        <a:scrgbClr r="0" g="0" b="0"/>
+      </a:lnRef>
+      <a:fillRef idx="1">
+        <a:scrgbClr r="0" g="0" b="0"/>
+      </a:fillRef>
+      <a:effectRef idx="0">
+        <a:scrgbClr r="0" g="0" b="0"/>
+      </a:effectRef>
+      <a:fontRef idx="minor">
+        <a:schemeClr val="tx1"/>
+      </a:fontRef>
+    </dgm:style>
+  </dgm:styleLbl>
+  <dgm:styleLbl name="alignNode1">
+    <dgm:scene3d>
+      <a:camera prst="orthographicFront"/>
+      <a:lightRig rig="threePt" dir="t"/>
+    </dgm:scene3d>
+    <dgm:sp3d/>
+    <dgm:txPr/>
+    <dgm:style>
+      <a:lnRef idx="2">
+        <a:scrgbClr r="0" g="0" b="0"/>
+      </a:lnRef>
+      <a:fillRef idx="1">
+        <a:scrgbClr r="0" g="0" b="0"/>
+      </a:fillRef>
+      <a:effectRef idx="0">
+        <a:scrgbClr r="0" g="0" b="0"/>
+      </a:effectRef>
+      <a:fontRef idx="minor">
+        <a:schemeClr val="lt1"/>
+      </a:fontRef>
+    </dgm:style>
+  </dgm:styleLbl>
+  <dgm:styleLbl name="node1">
+    <dgm:scene3d>
+      <a:camera prst="orthographicFront"/>
+      <a:lightRig rig="threePt" dir="t"/>
+    </dgm:scene3d>
+    <dgm:sp3d/>
+    <dgm:txPr/>
+    <dgm:style>
+      <a:lnRef idx="2">
+        <a:scrgbClr r="0" g="0" b="0"/>
+      </a:lnRef>
+      <a:fillRef idx="1">
+        <a:scrgbClr r="0" g="0" b="0"/>
+      </a:fillRef>
+      <a:effectRef idx="0">
+        <a:scrgbClr r="0" g="0" b="0"/>
+      </a:effectRef>
+      <a:fontRef idx="minor">
+        <a:schemeClr val="lt1"/>
+      </a:fontRef>
+    </dgm:style>
+  </dgm:styleLbl>
+  <dgm:styleLbl name="node2">
+    <dgm:scene3d>
+      <a:camera prst="orthographicFront"/>
+      <a:lightRig rig="threePt" dir="t"/>
+    </dgm:scene3d>
+    <dgm:sp3d/>
+    <dgm:txPr/>
+    <dgm:style>
+      <a:lnRef idx="2">
+        <a:scrgbClr r="0" g="0" b="0"/>
+      </a:lnRef>
+      <a:fillRef idx="1">
+        <a:scrgbClr r="0" g="0" b="0"/>
+      </a:fillRef>
+      <a:effectRef idx="0">
+        <a:scrgbClr r="0" g="0" b="0"/>
+      </a:effectRef>
+      <a:fontRef idx="minor">
+        <a:schemeClr val="lt1"/>
+      </a:fontRef>
+    </dgm:style>
+  </dgm:styleLbl>
+  <dgm:styleLbl name="node3">
+    <dgm:scene3d>
+      <a:camera prst="orthographicFront"/>
+      <a:lightRig rig="threePt" dir="t"/>
+    </dgm:scene3d>
+    <dgm:sp3d/>
+    <dgm:txPr/>
+    <dgm:style>
+      <a:lnRef idx="2">
+        <a:scrgbClr r="0" g="0" b="0"/>
+      </a:lnRef>
+      <a:fillRef idx="1">
+        <a:scrgbClr r="0" g="0" b="0"/>
+      </a:fillRef>
+      <a:effectRef idx="0">
+        <a:scrgbClr r="0" g="0" b="0"/>
+      </a:effectRef>
+      <a:fontRef idx="minor">
+        <a:schemeClr val="lt1"/>
+      </a:fontRef>
+    </dgm:style>
+  </dgm:styleLbl>
+  <dgm:styleLbl name="node4">
+    <dgm:scene3d>
+      <a:camera prst="orthographicFront"/>
+      <a:lightRig rig="threePt" dir="t"/>
+    </dgm:scene3d>
+    <dgm:sp3d/>
+    <dgm:txPr/>
+    <dgm:style>
+      <a:lnRef idx="2">
+        <a:scrgbClr r="0" g="0" b="0"/>
+      </a:lnRef>
+      <a:fillRef idx="1">
+        <a:scrgbClr r="0" g="0" b="0"/>
+      </a:fillRef>
+      <a:effectRef idx="0">
+        <a:scrgbClr r="0" g="0" b="0"/>
+      </a:effectRef>
+      <a:fontRef idx="minor">
+        <a:schemeClr val="lt1"/>
+      </a:fontRef>
+    </dgm:style>
+  </dgm:styleLbl>
+  <dgm:styleLbl name="fgImgPlace1">
+    <dgm:scene3d>
+      <a:camera prst="orthographicFront"/>
+      <a:lightRig rig="threePt" dir="t"/>
+    </dgm:scene3d>
+    <dgm:sp3d/>
+    <dgm:txPr/>
+    <dgm:style>
+      <a:lnRef idx="2">
+        <a:scrgbClr r="0" g="0" b="0"/>
+      </a:lnRef>
+      <a:fillRef idx="1">
+        <a:scrgbClr r="0" g="0" b="0"/>
+      </a:fillRef>
+      <a:effectRef idx="0">
+        <a:scrgbClr r="0" g="0" b="0"/>
+      </a:effectRef>
+      <a:fontRef idx="minor"/>
+    </dgm:style>
+  </dgm:styleLbl>
+  <dgm:styleLbl name="alignImgPlace1">
+    <dgm:scene3d>
+      <a:camera prst="orthographicFront"/>
+      <a:lightRig rig="threePt" dir="t"/>
+    </dgm:scene3d>
+    <dgm:sp3d/>
+    <dgm:txPr/>
+    <dgm:style>
+      <a:lnRef idx="2">
+        <a:scrgbClr r="0" g="0" b="0"/>
+      </a:lnRef>
+      <a:fillRef idx="1">
+        <a:scrgbClr r="0" g="0" b="0"/>
+      </a:fillRef>
+      <a:effectRef idx="0">
+        <a:scrgbClr r="0" g="0" b="0"/>
+      </a:effectRef>
+      <a:fontRef idx="minor"/>
+    </dgm:style>
+  </dgm:styleLbl>
+  <dgm:styleLbl name="bgImgPlace1">
+    <dgm:scene3d>
+      <a:camera prst="orthographicFront"/>
+      <a:lightRig rig="threePt" dir="t"/>
+    </dgm:scene3d>
+    <dgm:sp3d/>
+    <dgm:txPr/>
+    <dgm:style>
+      <a:lnRef idx="2">
+        <a:scrgbClr r="0" g="0" b="0"/>
+      </a:lnRef>
+      <a:fillRef idx="1">
+        <a:scrgbClr r="0" g="0" b="0"/>
+      </a:fillRef>
+      <a:effectRef idx="0">
+        <a:scrgbClr r="0" g="0" b="0"/>
+      </a:effectRef>
+      <a:fontRef idx="minor"/>
+    </dgm:style>
+  </dgm:styleLbl>
+  <dgm:styleLbl name="sibTrans2D1">
+    <dgm:scene3d>
+      <a:camera prst="orthographicFront"/>
+      <a:lightRig rig="threePt" dir="t"/>
+    </dgm:scene3d>
+    <dgm:sp3d/>
+    <dgm:txPr/>
+    <dgm:style>
+      <a:lnRef idx="0">
+        <a:scrgbClr r="0" g="0" b="0"/>
+      </a:lnRef>
+      <a:fillRef idx="1">
+        <a:scrgbClr r="0" g="0" b="0"/>
+      </a:fillRef>
+      <a:effectRef idx="0">
+        <a:scrgbClr r="0" g="0" b="0"/>
+      </a:effectRef>
+      <a:fontRef idx="minor">
+        <a:schemeClr val="lt1"/>
+      </a:fontRef>
+    </dgm:style>
+  </dgm:styleLbl>
+  <dgm:styleLbl name="fgSibTrans2D1">
+    <dgm:scene3d>
+      <a:camera prst="orthographicFront"/>
+      <a:lightRig rig="threePt" dir="t"/>
+    </dgm:scene3d>
+    <dgm:sp3d/>
+    <dgm:txPr/>
+    <dgm:style>
+      <a:lnRef idx="0">
+        <a:scrgbClr r="0" g="0" b="0"/>
+      </a:lnRef>
+      <a:fillRef idx="1">
+        <a:scrgbClr r="0" g="0" b="0"/>
+      </a:fillRef>
+      <a:effectRef idx="0">
+        <a:scrgbClr r="0" g="0" b="0"/>
+      </a:effectRef>
+      <a:fontRef idx="minor">
+        <a:schemeClr val="lt1"/>
+      </a:fontRef>
+    </dgm:style>
+  </dgm:styleLbl>
+  <dgm:styleLbl name="bgSibTrans2D1">
+    <dgm:scene3d>
+      <a:camera prst="orthographicFront"/>
+      <a:lightRig rig="threePt" dir="t"/>
+    </dgm:scene3d>
+    <dgm:sp3d/>
+    <dgm:txPr/>
+    <dgm:style>
+      <a:lnRef idx="0">
+        <a:scrgbClr r="0" g="0" b="0"/>
+      </a:lnRef>
+      <a:fillRef idx="1">
+        <a:scrgbClr r="0" g="0" b="0"/>
+      </a:fillRef>
+      <a:effectRef idx="0">
+        <a:scrgbClr r="0" g="0" b="0"/>
+      </a:effectRef>
+      <a:fontRef idx="minor">
+        <a:schemeClr val="lt1"/>
+      </a:fontRef>
+    </dgm:style>
+  </dgm:styleLbl>
+  <dgm:styleLbl name="sibTrans1D1">
+    <dgm:scene3d>
+      <a:camera prst="orthographicFront"/>
+      <a:lightRig rig="threePt" dir="t"/>
+    </dgm:scene3d>
+    <dgm:sp3d/>
+    <dgm:txPr/>
+    <dgm:style>
+      <a:lnRef idx="1">
+        <a:scrgbClr r="0" g="0" b="0"/>
+      </a:lnRef>
+      <a:fillRef idx="0">
+        <a:scrgbClr r="0" g="0" b="0"/>
+      </a:fillRef>
+      <a:effectRef idx="0">
+        <a:scrgbClr r="0" g="0" b="0"/>
+      </a:effectRef>
+      <a:fontRef idx="minor"/>
+    </dgm:style>
+  </dgm:styleLbl>
+  <dgm:styleLbl name="callout">
+    <dgm:scene3d>
+      <a:camera prst="orthographicFront"/>
+      <a:lightRig rig="threePt" dir="t"/>
+    </dgm:scene3d>
+    <dgm:sp3d/>
+    <dgm:txPr/>
+    <dgm:style>
+      <a:lnRef idx="2">
+        <a:scrgbClr r="0" g="0" b="0"/>
+      </a:lnRef>
+      <a:fillRef idx="1">
+        <a:scrgbClr r="0" g="0" b="0"/>
+      </a:fillRef>
+      <a:effectRef idx="0">
+        <a:scrgbClr r="0" g="0" b="0"/>
+      </a:effectRef>
+      <a:fontRef idx="minor"/>
+    </dgm:style>
+  </dgm:styleLbl>
+  <dgm:styleLbl name="asst0">
+    <dgm:scene3d>
+      <a:camera prst="orthographicFront"/>
+      <a:lightRig rig="threePt" dir="t"/>
+    </dgm:scene3d>
+    <dgm:sp3d/>
+    <dgm:txPr/>
+    <dgm:style>
+      <a:lnRef idx="2">
+        <a:scrgbClr r="0" g="0" b="0"/>
+      </a:lnRef>
+      <a:fillRef idx="1">
+        <a:scrgbClr r="0" g="0" b="0"/>
+      </a:fillRef>
+      <a:effectRef idx="0">
+        <a:scrgbClr r="0" g="0" b="0"/>
+      </a:effectRef>
+      <a:fontRef idx="minor">
+        <a:schemeClr val="lt1"/>
+      </a:fontRef>
+    </dgm:style>
+  </dgm:styleLbl>
+  <dgm:styleLbl name="asst1">
+    <dgm:scene3d>
+      <a:camera prst="orthographicFront"/>
+      <a:lightRig rig="threePt" dir="t"/>
+    </dgm:scene3d>
+    <dgm:sp3d/>
+    <dgm:txPr/>
+    <dgm:style>
+      <a:lnRef idx="2">
+        <a:scrgbClr r="0" g="0" b="0"/>
+      </a:lnRef>
+      <a:fillRef idx="1">
+        <a:scrgbClr r="0" g="0" b="0"/>
+      </a:fillRef>
+      <a:effectRef idx="0">
+        <a:scrgbClr r="0" g="0" b="0"/>
+      </a:effectRef>
+      <a:fontRef idx="minor">
+        <a:schemeClr val="lt1"/>
+      </a:fontRef>
+    </dgm:style>
+  </dgm:styleLbl>
+  <dgm:styleLbl name="asst2">
+    <dgm:scene3d>
+      <a:camera prst="orthographicFront"/>
+      <a:lightRig rig="threePt" dir="t"/>
+    </dgm:scene3d>
+    <dgm:sp3d/>
+    <dgm:txPr/>
+    <dgm:style>
+      <a:lnRef idx="2">
+        <a:scrgbClr r="0" g="0" b="0"/>
+      </a:lnRef>
+      <a:fillRef idx="1">
+        <a:scrgbClr r="0" g="0" b="0"/>
+      </a:fillRef>
+      <a:effectRef idx="0">
+        <a:scrgbClr r="0" g="0" b="0"/>
+      </a:effectRef>
+      <a:fontRef idx="minor">
+        <a:schemeClr val="lt1"/>
+      </a:fontRef>
+    </dgm:style>
+  </dgm:styleLbl>
+  <dgm:styleLbl name="asst3">
+    <dgm:scene3d>
+      <a:camera prst="orthographicFront"/>
+      <a:lightRig rig="threePt" dir="t"/>
+    </dgm:scene3d>
+    <dgm:sp3d/>
+    <dgm:txPr/>
+    <dgm:style>
+      <a:lnRef idx="2">
+        <a:scrgbClr r="0" g="0" b="0"/>
+      </a:lnRef>
+      <a:fillRef idx="1">
+        <a:scrgbClr r="0" g="0" b="0"/>
+      </a:fillRef>
+      <a:effectRef idx="0">
+        <a:scrgbClr r="0" g="0" b="0"/>
+      </a:effectRef>
+      <a:fontRef idx="minor">
+        <a:schemeClr val="lt1"/>
+      </a:fontRef>
+    </dgm:style>
+  </dgm:styleLbl>
+  <dgm:styleLbl name="asst4">
+    <dgm:scene3d>
+      <a:camera prst="orthographicFront"/>
+      <a:lightRig rig="threePt" dir="t"/>
+    </dgm:scene3d>
+    <dgm:sp3d/>
+    <dgm:txPr/>
+    <dgm:style>
+      <a:lnRef idx="2">
+        <a:scrgbClr r="0" g="0" b="0"/>
+      </a:lnRef>
+      <a:fillRef idx="1">
+        <a:scrgbClr r="0" g="0" b="0"/>
+      </a:fillRef>
+      <a:effectRef idx="0">
+        <a:scrgbClr r="0" g="0" b="0"/>
+      </a:effectRef>
+      <a:fontRef idx="minor">
+        <a:schemeClr val="lt1"/>
+      </a:fontRef>
+    </dgm:style>
+  </dgm:styleLbl>
+  <dgm:styleLbl name="parChTrans2D1">
+    <dgm:scene3d>
+      <a:camera prst="orthographicFront"/>
+      <a:lightRig rig="threePt" dir="t"/>
+    </dgm:scene3d>
+    <dgm:sp3d/>
+    <dgm:txPr/>
+    <dgm:style>
+      <a:lnRef idx="2">
+        <a:scrgbClr r="0" g="0" b="0"/>
+      </a:lnRef>
+      <a:fillRef idx="1">
+        <a:scrgbClr r="0" g="0" b="0"/>
+      </a:fillRef>
+      <a:effectRef idx="0">
+        <a:scrgbClr r="0" g="0" b="0"/>
+      </a:effectRef>
+      <a:fontRef idx="minor">
+        <a:schemeClr val="lt1"/>
+      </a:fontRef>
+    </dgm:style>
+  </dgm:styleLbl>
+  <dgm:styleLbl name="parChTrans2D2">
+    <dgm:scene3d>
+      <a:camera prst="orthographicFront"/>
+      <a:lightRig rig="threePt" dir="t"/>
+    </dgm:scene3d>
+    <dgm:sp3d/>
+    <dgm:txPr/>
+    <dgm:style>
+      <a:lnRef idx="2">
+        <a:scrgbClr r="0" g="0" b="0"/>
+      </a:lnRef>
+      <a:fillRef idx="1">
+        <a:scrgbClr r="0" g="0" b="0"/>
+      </a:fillRef>
+      <a:effectRef idx="0">
+        <a:scrgbClr r="0" g="0" b="0"/>
+      </a:effectRef>
+      <a:fontRef idx="minor">
+        <a:schemeClr val="lt1"/>
+      </a:fontRef>
+    </dgm:style>
+  </dgm:styleLbl>
+  <dgm:styleLbl name="parChTrans2D3">
+    <dgm:scene3d>
+      <a:camera prst="orthographicFront"/>
+      <a:lightRig rig="threePt" dir="t"/>
+    </dgm:scene3d>
+    <dgm:sp3d/>
+    <dgm:txPr/>
+    <dgm:style>
+      <a:lnRef idx="2">
+        <a:scrgbClr r="0" g="0" b="0"/>
+      </a:lnRef>
+      <a:fillRef idx="1">
+        <a:scrgbClr r="0" g="0" b="0"/>
+      </a:fillRef>
+      <a:effectRef idx="0">
+        <a:scrgbClr r="0" g="0" b="0"/>
+      </a:effectRef>
+      <a:fontRef idx="minor">
+        <a:schemeClr val="lt1"/>
+      </a:fontRef>
+    </dgm:style>
+  </dgm:styleLbl>
+  <dgm:styleLbl name="parChTrans2D4">
+    <dgm:scene3d>
+      <a:camera prst="orthographicFront"/>
+      <a:lightRig rig="threePt" dir="t"/>
+    </dgm:scene3d>
+    <dgm:sp3d/>
+    <dgm:txPr/>
+    <dgm:style>
+      <a:lnRef idx="2">
+        <a:scrgbClr r="0" g="0" b="0"/>
+      </a:lnRef>
+      <a:fillRef idx="1">
+        <a:scrgbClr r="0" g="0" b="0"/>
+      </a:fillRef>
+      <a:effectRef idx="0">
+        <a:scrgbClr r="0" g="0" b="0"/>
+      </a:effectRef>
+      <a:fontRef idx="minor">
+        <a:schemeClr val="lt1"/>
+      </a:fontRef>
+    </dgm:style>
+  </dgm:styleLbl>
+  <dgm:styleLbl name="parChTrans1D1">
+    <dgm:scene3d>
+      <a:camera prst="orthographicFront"/>
+      <a:lightRig rig="threePt" dir="t"/>
+    </dgm:scene3d>
+    <dgm:sp3d/>
+    <dgm:txPr/>
+    <dgm:style>
+      <a:lnRef idx="2">
+        <a:scrgbClr r="0" g="0" b="0"/>
+      </a:lnRef>
+      <a:fillRef idx="0">
+        <a:scrgbClr r="0" g="0" b="0"/>
+      </a:fillRef>
+      <a:effectRef idx="0">
+        <a:scrgbClr r="0" g="0" b="0"/>
+      </a:effectRef>
+      <a:fontRef idx="minor"/>
+    </dgm:style>
+  </dgm:styleLbl>
+  <dgm:styleLbl name="parChTrans1D2">
+    <dgm:scene3d>
+      <a:camera prst="orthographicFront"/>
+      <a:lightRig rig="threePt" dir="t"/>
+    </dgm:scene3d>
+    <dgm:sp3d/>
+    <dgm:txPr/>
+    <dgm:style>
+      <a:lnRef idx="2">
+        <a:scrgbClr r="0" g="0" b="0"/>
+      </a:lnRef>
+      <a:fillRef idx="0">
+        <a:scrgbClr r="0" g="0" b="0"/>
+      </a:fillRef>
+      <a:effectRef idx="0">
+        <a:scrgbClr r="0" g="0" b="0"/>
+      </a:effectRef>
+      <a:fontRef idx="minor"/>
+    </dgm:style>
+  </dgm:styleLbl>
+  <dgm:styleLbl name="parChTrans1D3">
+    <dgm:scene3d>
+      <a:camera prst="orthographicFront"/>
+      <a:lightRig rig="threePt" dir="t"/>
+    </dgm:scene3d>
+    <dgm:sp3d/>
+    <dgm:txPr/>
+    <dgm:style>
+      <a:lnRef idx="2">
+        <a:scrgbClr r="0" g="0" b="0"/>
+      </a:lnRef>
+      <a:fillRef idx="0">
+        <a:scrgbClr r="0" g="0" b="0"/>
+      </a:fillRef>
+      <a:effectRef idx="0">
+        <a:scrgbClr r="0" g="0" b="0"/>
+      </a:effectRef>
+      <a:fontRef idx="minor"/>
+    </dgm:style>
+  </dgm:styleLbl>
+  <dgm:styleLbl name="parChTrans1D4">
+    <dgm:scene3d>
+      <a:camera prst="orthographicFront"/>
+      <a:lightRig rig="threePt" dir="t"/>
+    </dgm:scene3d>
+    <dgm:sp3d/>
+    <dgm:txPr/>
+    <dgm:style>
+      <a:lnRef idx="2">
+        <a:scrgbClr r="0" g="0" b="0"/>
+      </a:lnRef>
+      <a:fillRef idx="0">
+        <a:scrgbClr r="0" g="0" b="0"/>
+      </a:fillRef>
+      <a:effectRef idx="0">
+        <a:scrgbClr r="0" g="0" b="0"/>
+      </a:effectRef>
+      <a:fontRef idx="minor"/>
+    </dgm:style>
+  </dgm:styleLbl>
+  <dgm:styleLbl name="fgAcc1">
+    <dgm:scene3d>
+      <a:camera prst="orthographicFront"/>
+      <a:lightRig rig="threePt" dir="t"/>
+    </dgm:scene3d>
+    <dgm:sp3d/>
+    <dgm:txPr/>
+    <dgm:style>
+      <a:lnRef idx="2">
+        <a:scrgbClr r="0" g="0" b="0"/>
+      </a:lnRef>
+      <a:fillRef idx="1">
+        <a:scrgbClr r="0" g="0" b="0"/>
+      </a:fillRef>
+      <a:effectRef idx="0">
+        <a:scrgbClr r="0" g="0" b="0"/>
+      </a:effectRef>
+      <a:fontRef idx="minor"/>
+    </dgm:style>
+  </dgm:styleLbl>
+  <dgm:styleLbl name="conFgAcc1">
+    <dgm:scene3d>
+      <a:camera prst="orthographicFront"/>
+      <a:lightRig rig="threePt" dir="t"/>
+    </dgm:scene3d>
+    <dgm:sp3d/>
+    <dgm:txPr/>
+    <dgm:style>
+      <a:lnRef idx="2">
+        <a:scrgbClr r="0" g="0" b="0"/>
+      </a:lnRef>
+      <a:fillRef idx="1">
+        <a:scrgbClr r="0" g="0" b="0"/>
+      </a:fillRef>
+      <a:effectRef idx="0">
+        <a:scrgbClr r="0" g="0" b="0"/>
+      </a:effectRef>
+      <a:fontRef idx="minor"/>
+    </dgm:style>
+  </dgm:styleLbl>
+  <dgm:styleLbl name="alignAcc1">
+    <dgm:scene3d>
+      <a:camera prst="orthographicFront"/>
+      <a:lightRig rig="threePt" dir="t"/>
+    </dgm:scene3d>
+    <dgm:sp3d/>
+    <dgm:txPr/>
+    <dgm:style>
+      <a:lnRef idx="2">
+        <a:scrgbClr r="0" g="0" b="0"/>
+      </a:lnRef>
+      <a:fillRef idx="1">
+        <a:scrgbClr r="0" g="0" b="0"/>
+      </a:fillRef>
+      <a:effectRef idx="0">
+        <a:scrgbClr r="0" g="0" b="0"/>
+      </a:effectRef>
+      <a:fontRef idx="minor"/>
+    </dgm:style>
+  </dgm:styleLbl>
+  <dgm:styleLbl name="trAlignAcc1">
+    <dgm:scene3d>
+      <a:camera prst="orthographicFront"/>
+      <a:lightRig rig="threePt" dir="t"/>
+    </dgm:scene3d>
+    <dgm:sp3d/>
+    <dgm:txPr/>
+    <dgm:style>
+      <a:lnRef idx="1">
+        <a:scrgbClr r="0" g="0" b="0"/>
+      </a:lnRef>
+      <a:fillRef idx="1">
+        <a:scrgbClr r="0" g="0" b="0"/>
+      </a:fillRef>
+      <a:effectRef idx="0">
+        <a:scrgbClr r="0" g="0" b="0"/>
+      </a:effectRef>
+      <a:fontRef idx="minor"/>
+    </dgm:style>
+  </dgm:styleLbl>
+  <dgm:styleLbl name="bgAcc1">
+    <dgm:scene3d>
+      <a:camera prst="orthographicFront"/>
+      <a:lightRig rig="threePt" dir="t"/>
+    </dgm:scene3d>
+    <dgm:sp3d/>
+    <dgm:txPr/>
+    <dgm:style>
+      <a:lnRef idx="2">
+        <a:scrgbClr r="0" g="0" b="0"/>
+      </a:lnRef>
+      <a:fillRef idx="1">
+        <a:scrgbClr r="0" g="0" b="0"/>
+      </a:fillRef>
+      <a:effectRef idx="0">
+        <a:scrgbClr r="0" g="0" b="0"/>
+      </a:effectRef>
+      <a:fontRef idx="minor"/>
+    </dgm:style>
+  </dgm:styleLbl>
+  <dgm:styleLbl name="solidFgAcc1">
+    <dgm:scene3d>
+      <a:camera prst="orthographicFront"/>
+      <a:lightRig rig="threePt" dir="t"/>
+    </dgm:scene3d>
+    <dgm:sp3d/>
+    <dgm:txPr/>
+    <dgm:style>
+      <a:lnRef idx="2">
+        <a:scrgbClr r="0" g="0" b="0"/>
+      </a:lnRef>
+      <a:fillRef idx="1">
+        <a:scrgbClr r="0" g="0" b="0"/>
+      </a:fillRef>
+      <a:effectRef idx="0">
+        <a:scrgbClr r="0" g="0" b="0"/>
+      </a:effectRef>
+      <a:fontRef idx="minor"/>
+    </dgm:style>
+  </dgm:styleLbl>
+  <dgm:styleLbl name="solidAlignAcc1">
+    <dgm:scene3d>
+      <a:camera prst="orthographicFront"/>
+      <a:lightRig rig="threePt" dir="t"/>
+    </dgm:scene3d>
+    <dgm:sp3d/>
+    <dgm:txPr/>
+    <dgm:style>
+      <a:lnRef idx="2">
+        <a:scrgbClr r="0" g="0" b="0"/>
+      </a:lnRef>
+      <a:fillRef idx="1">
+        <a:scrgbClr r="0" g="0" b="0"/>
+      </a:fillRef>
+      <a:effectRef idx="0">
+        <a:scrgbClr r="0" g="0" b="0"/>
+      </a:effectRef>
+      <a:fontRef idx="minor"/>
+    </dgm:style>
+  </dgm:styleLbl>
+  <dgm:styleLbl name="solidBgAcc1">
+    <dgm:scene3d>
+      <a:camera prst="orthographicFront"/>
+      <a:lightRig rig="threePt" dir="t"/>
+    </dgm:scene3d>
+    <dgm:sp3d/>
+    <dgm:txPr/>
+    <dgm:style>
+      <a:lnRef idx="2">
+        <a:scrgbClr r="0" g="0" b="0"/>
+      </a:lnRef>
+      <a:fillRef idx="1">
+        <a:scrgbClr r="0" g="0" b="0"/>
+      </a:fillRef>
+      <a:effectRef idx="0">
+        <a:scrgbClr r="0" g="0" b="0"/>
+      </a:effectRef>
+      <a:fontRef idx="minor"/>
+    </dgm:style>
+  </dgm:styleLbl>
+  <dgm:styleLbl name="fgAccFollowNode1">
+    <dgm:scene3d>
+      <a:camera prst="orthographicFront"/>
+      <a:lightRig rig="threePt" dir="t"/>
+    </dgm:scene3d>
+    <dgm:sp3d/>
+    <dgm:txPr/>
+    <dgm:style>
+      <a:lnRef idx="2">
+        <a:scrgbClr r="0" g="0" b="0"/>
+      </a:lnRef>
+      <a:fillRef idx="1">
+        <a:scrgbClr r="0" g="0" b="0"/>
+      </a:fillRef>
+      <a:effectRef idx="0">
+        <a:scrgbClr r="0" g="0" b="0"/>
+      </a:effectRef>
+      <a:fontRef idx="minor"/>
+    </dgm:style>
+  </dgm:styleLbl>
+  <dgm:styleLbl name="alignAccFollowNode1">
+    <dgm:scene3d>
+      <a:camera prst="orthographicFront"/>
+      <a:lightRig rig="threePt" dir="t"/>
+    </dgm:scene3d>
+    <dgm:sp3d/>
+    <dgm:txPr/>
+    <dgm:style>
+      <a:lnRef idx="2">
+        <a:scrgbClr r="0" g="0" b="0"/>
+      </a:lnRef>
+      <a:fillRef idx="1">
+        <a:scrgbClr r="0" g="0" b="0"/>
+      </a:fillRef>
+      <a:effectRef idx="0">
+        <a:scrgbClr r="0" g="0" b="0"/>
+      </a:effectRef>
+      <a:fontRef idx="minor"/>
+    </dgm:style>
+  </dgm:styleLbl>
+  <dgm:styleLbl name="bgAccFollowNode1">
+    <dgm:scene3d>
+      <a:camera prst="orthographicFront"/>
+      <a:lightRig rig="threePt" dir="t"/>
+    </dgm:scene3d>
+    <dgm:sp3d/>
+    <dgm:txPr/>
+    <dgm:style>
+      <a:lnRef idx="2">
+        <a:scrgbClr r="0" g="0" b="0"/>
+      </a:lnRef>
+      <a:fillRef idx="1">
+        <a:scrgbClr r="0" g="0" b="0"/>
+      </a:fillRef>
+      <a:effectRef idx="0">
+        <a:scrgbClr r="0" g="0" b="0"/>
+      </a:effectRef>
+      <a:fontRef idx="minor"/>
+    </dgm:style>
+  </dgm:styleLbl>
+  <dgm:styleLbl name="fgAcc0">
+    <dgm:scene3d>
+      <a:camera prst="orthographicFront"/>
+      <a:lightRig rig="threePt" dir="t"/>
+    </dgm:scene3d>
+    <dgm:sp3d/>
+    <dgm:txPr/>
+    <dgm:style>
+      <a:lnRef idx="2">
+        <a:scrgbClr r="0" g="0" b="0"/>
+      </a:lnRef>
+      <a:fillRef idx="1">
+        <a:scrgbClr r="0" g="0" b="0"/>
+      </a:fillRef>
+      <a:effectRef idx="0">
+        <a:scrgbClr r="0" g="0" b="0"/>
+      </a:effectRef>
+      <a:fontRef idx="minor"/>
+    </dgm:style>
+  </dgm:styleLbl>
+  <dgm:styleLbl name="fgAcc2">
+    <dgm:scene3d>
+      <a:camera prst="orthographicFront"/>
+      <a:lightRig rig="threePt" dir="t"/>
+    </dgm:scene3d>
+    <dgm:sp3d/>
+    <dgm:txPr/>
+    <dgm:style>
+      <a:lnRef idx="2">
+        <a:scrgbClr r="0" g="0" b="0"/>
+      </a:lnRef>
+      <a:fillRef idx="1">
+        <a:scrgbClr r="0" g="0" b="0"/>
+      </a:fillRef>
+      <a:effectRef idx="0">
+        <a:scrgbClr r="0" g="0" b="0"/>
+      </a:effectRef>
+      <a:fontRef idx="minor"/>
+    </dgm:style>
+  </dgm:styleLbl>
+  <dgm:styleLbl name="fgAcc3">
+    <dgm:scene3d>
+      <a:camera prst="orthographicFront"/>
+      <a:lightRig rig="threePt" dir="t"/>
+    </dgm:scene3d>
+    <dgm:sp3d/>
+    <dgm:txPr/>
+    <dgm:style>
+      <a:lnRef idx="2">
+        <a:scrgbClr r="0" g="0" b="0"/>
+      </a:lnRef>
+      <a:fillRef idx="1">
+        <a:scrgbClr r="0" g="0" b="0"/>
+      </a:fillRef>
+      <a:effectRef idx="0">
+        <a:scrgbClr r="0" g="0" b="0"/>
+      </a:effectRef>
+      <a:fontRef idx="minor"/>
+    </dgm:style>
+  </dgm:styleLbl>
+  <dgm:styleLbl name="fgAcc4">
+    <dgm:scene3d>
+      <a:camera prst="orthographicFront"/>
+      <a:lightRig rig="threePt" dir="t"/>
+    </dgm:scene3d>
+    <dgm:sp3d/>
+    <dgm:txPr/>
+    <dgm:style>
+      <a:lnRef idx="2">
+        <a:scrgbClr r="0" g="0" b="0"/>
+      </a:lnRef>
+      <a:fillRef idx="1">
+        <a:scrgbClr r="0" g="0" b="0"/>
+      </a:fillRef>
+      <a:effectRef idx="0">
+        <a:scrgbClr r="0" g="0" b="0"/>
+      </a:effectRef>
+      <a:fontRef idx="minor"/>
+    </dgm:style>
+  </dgm:styleLbl>
+  <dgm:styleLbl name="bgShp">
+    <dgm:scene3d>
+      <a:camera prst="orthographicFront"/>
+      <a:lightRig rig="threePt" dir="t"/>
+    </dgm:scene3d>
+    <dgm:sp3d/>
+    <dgm:txPr/>
+    <dgm:style>
+      <a:lnRef idx="0">
+        <a:scrgbClr r="0" g="0" b="0"/>
+      </a:lnRef>
+      <a:fillRef idx="1">
+        <a:scrgbClr r="0" g="0" b="0"/>
+      </a:fillRef>
+      <a:effectRef idx="0">
+        <a:scrgbClr r="0" g="0" b="0"/>
+      </a:effectRef>
+      <a:fontRef idx="minor"/>
+    </dgm:style>
+  </dgm:styleLbl>
+  <dgm:styleLbl name="dkBgShp">
+    <dgm:scene3d>
+      <a:camera prst="orthographicFront"/>
+      <a:lightRig rig="threePt" dir="t"/>
+    </dgm:scene3d>
+    <dgm:sp3d/>
+    <dgm:txPr/>
+    <dgm:style>
+      <a:lnRef idx="0">
+        <a:scrgbClr r="0" g="0" b="0"/>
+      </a:lnRef>
+      <a:fillRef idx="1">
+        <a:scrgbClr r="0" g="0" b="0"/>
+      </a:fillRef>
+      <a:effectRef idx="0">
+        <a:scrgbClr r="0" g="0" b="0"/>
+      </a:effectRef>
+      <a:fontRef idx="minor"/>
+    </dgm:style>
+  </dgm:styleLbl>
+  <dgm:styleLbl name="trBgShp">
+    <dgm:scene3d>
+      <a:camera prst="orthographicFront"/>
+      <a:lightRig rig="threePt" dir="t"/>
+    </dgm:scene3d>
+    <dgm:sp3d/>
+    <dgm:txPr/>
+    <dgm:style>
+      <a:lnRef idx="0">
+        <a:scrgbClr r="0" g="0" b="0"/>
+      </a:lnRef>
+      <a:fillRef idx="1">
+        <a:scrgbClr r="0" g="0" b="0"/>
+      </a:fillRef>
+      <a:effectRef idx="0">
+        <a:scrgbClr r="0" g="0" b="0"/>
+      </a:effectRef>
+      <a:fontRef idx="minor"/>
+    </dgm:style>
+  </dgm:styleLbl>
+  <dgm:styleLbl name="fgShp">
+    <dgm:scene3d>
+      <a:camera prst="orthographicFront"/>
+      <a:lightRig rig="threePt" dir="t"/>
+    </dgm:scene3d>
+    <dgm:sp3d/>
+    <dgm:txPr/>
+    <dgm:style>
+      <a:lnRef idx="2">
+        <a:scrgbClr r="0" g="0" b="0"/>
+      </a:lnRef>
+      <a:fillRef idx="1">
+        <a:scrgbClr r="0" g="0" b="0"/>
+      </a:fillRef>
+      <a:effectRef idx="0">
+        <a:scrgbClr r="0" g="0" b="0"/>
+      </a:effectRef>
+      <a:fontRef idx="minor"/>
+    </dgm:style>
+  </dgm:styleLbl>
+  <dgm:styleLbl name="revTx">
+    <dgm:scene3d>
+      <a:camera prst="orthographicFront"/>
+      <a:lightRig rig="threePt" dir="t"/>
+    </dgm:scene3d>
+    <dgm:sp3d/>
+    <dgm:txPr/>
+    <dgm:style>
+      <a:lnRef idx="0">
+        <a:scrgbClr r="0" g="0" b="0"/>
+      </a:lnRef>
+      <a:fillRef idx="0">
+        <a:scrgbClr r="0" g="0" b="0"/>
+      </a:fillRef>
+      <a:effectRef idx="0">
+        <a:scrgbClr r="0" g="0" b="0"/>
+      </a:effectRef>
+      <a:fontRef idx="minor"/>
+    </dgm:style>
+  </dgm:styleLbl>
+</dgm:styleDef>
+</file>
+
+<file path=ppt/diagrams/quickStyle2.xml><?xml version="1.0" encoding="utf-8"?>
 <dgm:styleDef xmlns:dgm="http://schemas.openxmlformats.org/drawingml/2006/diagram" xmlns:a="http://schemas.openxmlformats.org/drawingml/2006/main" uniqueId="urn:microsoft.com/office/officeart/2005/8/quickstyle/simple1">
   <dgm:title val=""/>
   <dgm:desc val=""/>
@@ -3996,7 +8291,7 @@
           <a:p>
             <a:fld id="{23F5F05C-4C32-48D7-B5AA-52291E739591}" type="datetimeFigureOut">
               <a:rPr lang="en-US" smtClean="0"/>
-              <a:t>8/4/2026</a:t>
+              <a:t>8/6/2026</a:t>
             </a:fld>
             <a:endParaRPr lang="en-US"/>
           </a:p>
@@ -4347,6 +8642,150 @@
 </p:notes>
 </file>
 
+<file path=ppt/notesSlides/notesSlide2.xml><?xml version="1.0" encoding="utf-8"?>
+<p:notes xmlns:a="http://schemas.openxmlformats.org/drawingml/2006/main" xmlns:r="http://schemas.openxmlformats.org/officeDocument/2006/relationships" xmlns:p="http://schemas.openxmlformats.org/presentationml/2006/main">
+  <p:cSld>
+    <p:spTree>
+      <p:nvGrpSpPr>
+        <p:cNvPr id="1" name=""/>
+        <p:cNvGrpSpPr/>
+        <p:nvPr/>
+      </p:nvGrpSpPr>
+      <p:grpSpPr>
+        <a:xfrm>
+          <a:off x="0" y="0"/>
+          <a:ext cx="0" cy="0"/>
+          <a:chOff x="0" y="0"/>
+          <a:chExt cx="0" cy="0"/>
+        </a:xfrm>
+      </p:grpSpPr>
+      <p:sp>
+        <p:nvSpPr>
+          <p:cNvPr id="2" name="Slide Image Placeholder 1"/>
+          <p:cNvSpPr>
+            <a:spLocks noGrp="1" noRot="1" noChangeAspect="1"/>
+          </p:cNvSpPr>
+          <p:nvPr>
+            <p:ph type="sldImg"/>
+          </p:nvPr>
+        </p:nvSpPr>
+        <p:spPr/>
+      </p:sp>
+      <p:sp>
+        <p:nvSpPr>
+          <p:cNvPr id="3" name="Notes Placeholder 2"/>
+          <p:cNvSpPr>
+            <a:spLocks noGrp="1"/>
+          </p:cNvSpPr>
+          <p:nvPr>
+            <p:ph type="body" idx="1"/>
+          </p:nvPr>
+        </p:nvSpPr>
+        <p:spPr/>
+        <p:txBody>
+          <a:bodyPr/>
+          <a:lstStyle/>
+          <a:p>
+            <a:endParaRPr lang="en-US" dirty="0"/>
+          </a:p>
+        </p:txBody>
+      </p:sp>
+      <p:sp>
+        <p:nvSpPr>
+          <p:cNvPr id="4" name="Slide Number Placeholder 3"/>
+          <p:cNvSpPr>
+            <a:spLocks noGrp="1"/>
+          </p:cNvSpPr>
+          <p:nvPr>
+            <p:ph type="sldNum" sz="quarter" idx="5"/>
+          </p:nvPr>
+        </p:nvSpPr>
+        <p:spPr/>
+        <p:txBody>
+          <a:bodyPr/>
+          <a:lstStyle/>
+          <a:p>
+            <a:pPr marL="0" marR="0" lvl="0" indent="0" algn="r" defTabSz="914400" rtl="0" eaLnBrk="1" fontAlgn="auto" latinLnBrk="0" hangingPunct="1">
+              <a:lnSpc>
+                <a:spcPct val="100000"/>
+              </a:lnSpc>
+              <a:spcBef>
+                <a:spcPts val="0"/>
+              </a:spcBef>
+              <a:spcAft>
+                <a:spcPts val="0"/>
+              </a:spcAft>
+              <a:buClrTx/>
+              <a:buSzTx/>
+              <a:buFontTx/>
+              <a:buNone/>
+              <a:tabLst/>
+              <a:defRPr/>
+            </a:pPr>
+            <a:fld id="{708EC5D3-468C-424F-B52A-7AEC4637D895}" type="slidenum">
+              <a:rPr kumimoji="0" lang="en-US" sz="1200" b="0" i="0" u="none" strike="noStrike" kern="1200" cap="none" spc="0" normalizeH="0" baseline="0" noProof="0" smtClean="0">
+                <a:ln>
+                  <a:noFill/>
+                </a:ln>
+                <a:solidFill>
+                  <a:prstClr val="black"/>
+                </a:solidFill>
+                <a:effectLst/>
+                <a:uLnTx/>
+                <a:uFillTx/>
+                <a:latin typeface="Aptos" panose="02110004020202020204"/>
+                <a:ea typeface="+mn-ea"/>
+                <a:cs typeface="+mn-cs"/>
+              </a:rPr>
+              <a:pPr marL="0" marR="0" lvl="0" indent="0" algn="r" defTabSz="914400" rtl="0" eaLnBrk="1" fontAlgn="auto" latinLnBrk="0" hangingPunct="1">
+                <a:lnSpc>
+                  <a:spcPct val="100000"/>
+                </a:lnSpc>
+                <a:spcBef>
+                  <a:spcPts val="0"/>
+                </a:spcBef>
+                <a:spcAft>
+                  <a:spcPts val="0"/>
+                </a:spcAft>
+                <a:buClrTx/>
+                <a:buSzTx/>
+                <a:buFontTx/>
+                <a:buNone/>
+                <a:tabLst/>
+                <a:defRPr/>
+              </a:pPr>
+              <a:t>4</a:t>
+            </a:fld>
+            <a:endParaRPr kumimoji="0" lang="en-US" sz="1200" b="0" i="0" u="none" strike="noStrike" kern="1200" cap="none" spc="0" normalizeH="0" baseline="0" noProof="0">
+              <a:ln>
+                <a:noFill/>
+              </a:ln>
+              <a:solidFill>
+                <a:prstClr val="black"/>
+              </a:solidFill>
+              <a:effectLst/>
+              <a:uLnTx/>
+              <a:uFillTx/>
+              <a:latin typeface="Aptos" panose="02110004020202020204"/>
+              <a:ea typeface="+mn-ea"/>
+              <a:cs typeface="+mn-cs"/>
+            </a:endParaRPr>
+          </a:p>
+        </p:txBody>
+      </p:sp>
+    </p:spTree>
+    <p:extLst>
+      <p:ext uri="{BB962C8B-B14F-4D97-AF65-F5344CB8AC3E}">
+        <p14:creationId xmlns:p14="http://schemas.microsoft.com/office/powerpoint/2010/main" val="660676660"/>
+      </p:ext>
+    </p:extLst>
+  </p:cSld>
+  <p:clrMapOvr>
+    <a:masterClrMapping/>
+  </p:clrMapOvr>
+</p:notes>
+</file>
+
 <file path=ppt/slideLayouts/slideLayout1.xml><?xml version="1.0" encoding="utf-8"?>
 <p:sldLayout xmlns:a="http://schemas.openxmlformats.org/drawingml/2006/main" xmlns:r="http://schemas.openxmlformats.org/officeDocument/2006/relationships" xmlns:p="http://schemas.openxmlformats.org/presentationml/2006/main" type="title" preserve="1">
   <p:cSld name="Title Slide">
@@ -4494,7 +8933,7 @@
           <a:p>
             <a:fld id="{5518E2ED-ACDD-48AE-BEAE-F9B835E4D922}" type="datetimeFigureOut">
               <a:rPr lang="en-US" smtClean="0"/>
-              <a:t>8/4/2026</a:t>
+              <a:t>8/6/2026</a:t>
             </a:fld>
             <a:endParaRPr lang="en-US"/>
           </a:p>
@@ -4692,7 +9131,7 @@
           <a:p>
             <a:fld id="{5518E2ED-ACDD-48AE-BEAE-F9B835E4D922}" type="datetimeFigureOut">
               <a:rPr lang="en-US" smtClean="0"/>
-              <a:t>8/4/2026</a:t>
+              <a:t>8/6/2026</a:t>
             </a:fld>
             <a:endParaRPr lang="en-US"/>
           </a:p>
@@ -4900,7 +9339,7 @@
           <a:p>
             <a:fld id="{5518E2ED-ACDD-48AE-BEAE-F9B835E4D922}" type="datetimeFigureOut">
               <a:rPr lang="en-US" smtClean="0"/>
-              <a:t>8/4/2026</a:t>
+              <a:t>8/6/2026</a:t>
             </a:fld>
             <a:endParaRPr lang="en-US"/>
           </a:p>
@@ -5098,7 +9537,7 @@
           <a:p>
             <a:fld id="{5518E2ED-ACDD-48AE-BEAE-F9B835E4D922}" type="datetimeFigureOut">
               <a:rPr lang="en-US" smtClean="0"/>
-              <a:t>8/4/2026</a:t>
+              <a:t>8/6/2026</a:t>
             </a:fld>
             <a:endParaRPr lang="en-US"/>
           </a:p>
@@ -5373,7 +9812,7 @@
           <a:p>
             <a:fld id="{5518E2ED-ACDD-48AE-BEAE-F9B835E4D922}" type="datetimeFigureOut">
               <a:rPr lang="en-US" smtClean="0"/>
-              <a:t>8/4/2026</a:t>
+              <a:t>8/6/2026</a:t>
             </a:fld>
             <a:endParaRPr lang="en-US"/>
           </a:p>
@@ -5638,7 +10077,7 @@
           <a:p>
             <a:fld id="{5518E2ED-ACDD-48AE-BEAE-F9B835E4D922}" type="datetimeFigureOut">
               <a:rPr lang="en-US" smtClean="0"/>
-              <a:t>8/4/2026</a:t>
+              <a:t>8/6/2026</a:t>
             </a:fld>
             <a:endParaRPr lang="en-US"/>
           </a:p>
@@ -6050,7 +10489,7 @@
           <a:p>
             <a:fld id="{5518E2ED-ACDD-48AE-BEAE-F9B835E4D922}" type="datetimeFigureOut">
               <a:rPr lang="en-US" smtClean="0"/>
-              <a:t>8/4/2026</a:t>
+              <a:t>8/6/2026</a:t>
             </a:fld>
             <a:endParaRPr lang="en-US"/>
           </a:p>
@@ -6191,7 +10630,7 @@
           <a:p>
             <a:fld id="{5518E2ED-ACDD-48AE-BEAE-F9B835E4D922}" type="datetimeFigureOut">
               <a:rPr lang="en-US" smtClean="0"/>
-              <a:t>8/4/2026</a:t>
+              <a:t>8/6/2026</a:t>
             </a:fld>
             <a:endParaRPr lang="en-US"/>
           </a:p>
@@ -6304,7 +10743,7 @@
           <a:p>
             <a:fld id="{5518E2ED-ACDD-48AE-BEAE-F9B835E4D922}" type="datetimeFigureOut">
               <a:rPr lang="en-US" smtClean="0"/>
-              <a:t>8/4/2026</a:t>
+              <a:t>8/6/2026</a:t>
             </a:fld>
             <a:endParaRPr lang="en-US"/>
           </a:p>
@@ -6615,7 +11054,7 @@
           <a:p>
             <a:fld id="{5518E2ED-ACDD-48AE-BEAE-F9B835E4D922}" type="datetimeFigureOut">
               <a:rPr lang="en-US" smtClean="0"/>
-              <a:t>8/4/2026</a:t>
+              <a:t>8/6/2026</a:t>
             </a:fld>
             <a:endParaRPr lang="en-US"/>
           </a:p>
@@ -6903,7 +11342,7 @@
           <a:p>
             <a:fld id="{5518E2ED-ACDD-48AE-BEAE-F9B835E4D922}" type="datetimeFigureOut">
               <a:rPr lang="en-US" smtClean="0"/>
-              <a:t>8/4/2026</a:t>
+              <a:t>8/6/2026</a:t>
             </a:fld>
             <a:endParaRPr lang="en-US"/>
           </a:p>
@@ -7144,7 +11583,7 @@
           <a:p>
             <a:fld id="{5518E2ED-ACDD-48AE-BEAE-F9B835E4D922}" type="datetimeFigureOut">
               <a:rPr lang="en-US" smtClean="0"/>
-              <a:t>8/4/2026</a:t>
+              <a:t>8/6/2026</a:t>
             </a:fld>
             <a:endParaRPr lang="en-US"/>
           </a:p>
@@ -7571,10 +12010,10 @@
       </p:grpSpPr>
       <p:sp useBgFill="1">
         <p:nvSpPr>
-          <p:cNvPr id="7" name="Rectangle 6">
+          <p:cNvPr id="50" name="Rectangle 49">
             <a:extLst>
               <a:ext uri="{FF2B5EF4-FFF2-40B4-BE49-F238E27FC236}">
-                <a16:creationId xmlns:a16="http://schemas.microsoft.com/office/drawing/2014/main" id="{55666830-9A19-4E01-8505-D6C7F9AC5665}"/>
+                <a16:creationId xmlns:a16="http://schemas.microsoft.com/office/drawing/2014/main" id="{A8384FB5-9ADC-4DDC-881B-597D56F5B15D}"/>
               </a:ext>
               <a:ext uri="{C183D7F6-B498-43B3-948B-1728B52AA6E4}">
                 <adec:decorative xmlns:adec="http://schemas.microsoft.com/office/drawing/2017/decorative" val="1"/>
@@ -7600,6 +12039,129 @@
           <a:prstGeom prst="rect">
             <a:avLst/>
           </a:prstGeom>
+          <a:ln w="12700" cap="flat" cmpd="sng" algn="ctr">
+            <a:noFill/>
+            <a:prstDash val="solid"/>
+            <a:miter lim="800000"/>
+          </a:ln>
+          <a:effectLst/>
+          <a:extLst>
+            <a:ext uri="{91240B29-F687-4F45-9708-019B960494DF}">
+              <a14:hiddenLine xmlns:a14="http://schemas.microsoft.com/office/drawing/2010/main" w="12700" cap="flat" cmpd="sng" algn="ctr">
+                <a:solidFill>
+                  <a:schemeClr val="accent1">
+                    <a:shade val="50000"/>
+                  </a:schemeClr>
+                </a:solidFill>
+                <a:prstDash val="solid"/>
+                <a:miter lim="800000"/>
+              </a14:hiddenLine>
+            </a:ext>
+          </a:extLst>
+        </p:spPr>
+        <p:style>
+          <a:lnRef idx="2">
+            <a:schemeClr val="accent1">
+              <a:shade val="50000"/>
+            </a:schemeClr>
+          </a:lnRef>
+          <a:fillRef idx="1">
+            <a:schemeClr val="accent1"/>
+          </a:fillRef>
+          <a:effectRef idx="0">
+            <a:schemeClr val="accent1"/>
+          </a:effectRef>
+          <a:fontRef idx="minor">
+            <a:schemeClr val="lt1"/>
+          </a:fontRef>
+        </p:style>
+        <p:txBody>
+          <a:bodyPr rtlCol="0" anchor="ctr"/>
+          <a:lstStyle/>
+          <a:p>
+            <a:pPr algn="ctr"/>
+            <a:endParaRPr lang="en-US"/>
+          </a:p>
+        </p:txBody>
+      </p:sp>
+      <p:sp>
+        <p:nvSpPr>
+          <p:cNvPr id="2" name="Title 1">
+            <a:extLst>
+              <a:ext uri="{FF2B5EF4-FFF2-40B4-BE49-F238E27FC236}">
+                <a16:creationId xmlns:a16="http://schemas.microsoft.com/office/drawing/2014/main" id="{65C54F60-4CD2-714E-B25F-FB51C99D225A}"/>
+              </a:ext>
+            </a:extLst>
+          </p:cNvPr>
+          <p:cNvSpPr>
+            <a:spLocks noGrp="1"/>
+          </p:cNvSpPr>
+          <p:nvPr>
+            <p:ph type="ctrTitle"/>
+          </p:nvPr>
+        </p:nvSpPr>
+        <p:spPr>
+          <a:xfrm>
+            <a:off x="628435" y="921715"/>
+            <a:ext cx="5566207" cy="2635993"/>
+          </a:xfrm>
+        </p:spPr>
+        <p:txBody>
+          <a:bodyPr anchor="b">
+            <a:normAutofit/>
+          </a:bodyPr>
+          <a:lstStyle/>
+          <a:p>
+            <a:pPr algn="l"/>
+            <a:r>
+              <a:rPr lang="en-US" sz="4400" dirty="0"/>
+              <a:t>Immersive Model for Tri State Water Bank to Get More Water to GSL</a:t>
+            </a:r>
+          </a:p>
+        </p:txBody>
+      </p:sp>
+      <p:sp>
+        <p:nvSpPr>
+          <p:cNvPr id="51" name="Rectangle 50">
+            <a:extLst>
+              <a:ext uri="{FF2B5EF4-FFF2-40B4-BE49-F238E27FC236}">
+                <a16:creationId xmlns:a16="http://schemas.microsoft.com/office/drawing/2014/main" id="{BC05CA36-AD6A-4ABF-9A05-52E5A143D2BB}"/>
+              </a:ext>
+              <a:ext uri="{C183D7F6-B498-43B3-948B-1728B52AA6E4}">
+                <adec:decorative xmlns:adec="http://schemas.microsoft.com/office/drawing/2017/decorative" val="1"/>
+              </a:ext>
+            </a:extLst>
+          </p:cNvPr>
+          <p:cNvSpPr>
+            <a:spLocks noGrp="1" noRot="1" noChangeAspect="1" noMove="1" noResize="1" noEditPoints="1" noAdjustHandles="1" noChangeArrowheads="1" noChangeShapeType="1" noTextEdit="1"/>
+          </p:cNvSpPr>
+          <p:nvPr>
+            <p:extLst>
+              <p:ext uri="{386F3935-93C4-4BCD-93E2-E3B085C9AB24}">
+                <p16:designElem xmlns:p16="http://schemas.microsoft.com/office/powerpoint/2015/main" val="1"/>
+              </p:ext>
+            </p:extLst>
+          </p:nvPr>
+        </p:nvSpPr>
+        <p:spPr>
+          <a:xfrm rot="10800000" flipH="1">
+            <a:off x="0" y="4022214"/>
+            <a:ext cx="12192000" cy="2835786"/>
+          </a:xfrm>
+          <a:prstGeom prst="rect">
+            <a:avLst/>
+          </a:prstGeom>
+          <a:gradFill>
+            <a:gsLst>
+              <a:gs pos="0">
+                <a:schemeClr val="accent1"/>
+              </a:gs>
+              <a:gs pos="78000">
+                <a:srgbClr val="000000"/>
+              </a:gs>
+            </a:gsLst>
+            <a:lin ang="2400000" scaled="0"/>
+          </a:gradFill>
           <a:ln>
             <a:noFill/>
           </a:ln>
@@ -7629,83 +12191,12 @@
           </a:p>
         </p:txBody>
       </p:sp>
-      <p:pic>
-        <p:nvPicPr>
-          <p:cNvPr id="5" name="Picture 4" descr="The image depicts a map showing various locations in the western United States, including Idaho, Wyoming, Salt Lake City, and Utah, with symbols representing cities and a plateau.&#10;&#10;AI-generated content may be incorrect.">
+      <p:sp>
+        <p:nvSpPr>
+          <p:cNvPr id="52" name="Rectangle 51">
             <a:extLst>
               <a:ext uri="{FF2B5EF4-FFF2-40B4-BE49-F238E27FC236}">
-                <a16:creationId xmlns:a16="http://schemas.microsoft.com/office/drawing/2014/main" id="{04C88557-323E-8174-ED33-F9A1E595A5E0}"/>
-              </a:ext>
-            </a:extLst>
-          </p:cNvPr>
-          <p:cNvPicPr>
-            <a:picLocks noChangeAspect="1"/>
-          </p:cNvPicPr>
-          <p:nvPr/>
-        </p:nvPicPr>
-        <p:blipFill>
-          <a:blip r:embed="rId3">
-            <a:extLst>
-              <a:ext uri="{28A0092B-C50C-407E-A947-70E740481C1C}">
-                <a14:useLocalDpi xmlns:a14="http://schemas.microsoft.com/office/drawing/2010/main" val="0"/>
-              </a:ext>
-            </a:extLst>
-          </a:blip>
-          <a:srcRect r="9554" b="1"/>
-          <a:stretch>
-            <a:fillRect/>
-          </a:stretch>
-        </p:blipFill>
-        <p:spPr>
-          <a:xfrm>
-            <a:off x="4110127" y="10"/>
-            <a:ext cx="8081873" cy="6857990"/>
-          </a:xfrm>
-          <a:custGeom>
-            <a:avLst/>
-            <a:gdLst/>
-            <a:ahLst/>
-            <a:cxnLst/>
-            <a:rect l="l" t="t" r="r" b="b"/>
-            <a:pathLst>
-              <a:path w="8081873" h="6858000">
-                <a:moveTo>
-                  <a:pt x="0" y="0"/>
-                </a:moveTo>
-                <a:lnTo>
-                  <a:pt x="8081873" y="0"/>
-                </a:lnTo>
-                <a:lnTo>
-                  <a:pt x="8081873" y="6858000"/>
-                </a:lnTo>
-                <a:lnTo>
-                  <a:pt x="0" y="6858000"/>
-                </a:lnTo>
-                <a:lnTo>
-                  <a:pt x="68897" y="6734633"/>
-                </a:lnTo>
-                <a:cubicBezTo>
-                  <a:pt x="558802" y="5812845"/>
-                  <a:pt x="848920" y="4668597"/>
-                  <a:pt x="848920" y="3429000"/>
-                </a:cubicBezTo>
-                <a:cubicBezTo>
-                  <a:pt x="848920" y="2189404"/>
-                  <a:pt x="558802" y="1045156"/>
-                  <a:pt x="68897" y="123368"/>
-                </a:cubicBezTo>
-                <a:close/>
-              </a:path>
-            </a:pathLst>
-          </a:custGeom>
-        </p:spPr>
-      </p:pic>
-      <p:sp useBgFill="1">
-        <p:nvSpPr>
-          <p:cNvPr id="9" name="Freeform: Shape 8">
-            <a:extLst>
-              <a:ext uri="{FF2B5EF4-FFF2-40B4-BE49-F238E27FC236}">
-                <a16:creationId xmlns:a16="http://schemas.microsoft.com/office/drawing/2014/main" id="{AE9FC877-7FB6-4D22-9988-35420644E202}"/>
+                <a16:creationId xmlns:a16="http://schemas.microsoft.com/office/drawing/2014/main" id="{D4331EE8-85A4-4588-8D9E-70E534D477DB}"/>
               </a:ext>
               <a:ext uri="{C183D7F6-B498-43B3-948B-1728B52AA6E4}">
                 <adec:decorative xmlns:adec="http://schemas.microsoft.com/office/drawing/2017/decorative" val="1"/>
@@ -7724,426 +12215,28 @@
           </p:nvPr>
         </p:nvSpPr>
         <p:spPr>
-          <a:xfrm>
-            <a:off x="0" y="0"/>
-            <a:ext cx="4959047" cy="6858000"/>
-          </a:xfrm>
-          <a:custGeom>
-            <a:avLst/>
-            <a:gdLst>
-              <a:gd name="connsiteX0" fmla="*/ 0 w 4959047"/>
-              <a:gd name="connsiteY0" fmla="*/ 0 h 6858000"/>
-              <a:gd name="connsiteX1" fmla="*/ 4110127 w 4959047"/>
-              <a:gd name="connsiteY1" fmla="*/ 0 h 6858000"/>
-              <a:gd name="connsiteX2" fmla="*/ 4179024 w 4959047"/>
-              <a:gd name="connsiteY2" fmla="*/ 123368 h 6858000"/>
-              <a:gd name="connsiteX3" fmla="*/ 4959047 w 4959047"/>
-              <a:gd name="connsiteY3" fmla="*/ 3429000 h 6858000"/>
-              <a:gd name="connsiteX4" fmla="*/ 4179024 w 4959047"/>
-              <a:gd name="connsiteY4" fmla="*/ 6734633 h 6858000"/>
-              <a:gd name="connsiteX5" fmla="*/ 4110127 w 4959047"/>
-              <a:gd name="connsiteY5" fmla="*/ 6858000 h 6858000"/>
-              <a:gd name="connsiteX6" fmla="*/ 0 w 4959047"/>
-              <a:gd name="connsiteY6" fmla="*/ 6858000 h 6858000"/>
-            </a:gdLst>
-            <a:ahLst/>
-            <a:cxnLst>
-              <a:cxn ang="0">
-                <a:pos x="connsiteX0" y="connsiteY0"/>
-              </a:cxn>
-              <a:cxn ang="0">
-                <a:pos x="connsiteX1" y="connsiteY1"/>
-              </a:cxn>
-              <a:cxn ang="0">
-                <a:pos x="connsiteX2" y="connsiteY2"/>
-              </a:cxn>
-              <a:cxn ang="0">
-                <a:pos x="connsiteX3" y="connsiteY3"/>
-              </a:cxn>
-              <a:cxn ang="0">
-                <a:pos x="connsiteX4" y="connsiteY4"/>
-              </a:cxn>
-              <a:cxn ang="0">
-                <a:pos x="connsiteX5" y="connsiteY5"/>
-              </a:cxn>
-              <a:cxn ang="0">
-                <a:pos x="connsiteX6" y="connsiteY6"/>
-              </a:cxn>
-            </a:cxnLst>
-            <a:rect l="l" t="t" r="r" b="b"/>
-            <a:pathLst>
-              <a:path w="4959047" h="6858000">
-                <a:moveTo>
-                  <a:pt x="0" y="0"/>
-                </a:moveTo>
-                <a:lnTo>
-                  <a:pt x="4110127" y="0"/>
-                </a:lnTo>
-                <a:lnTo>
-                  <a:pt x="4179024" y="123368"/>
-                </a:lnTo>
-                <a:cubicBezTo>
-                  <a:pt x="4668929" y="1045156"/>
-                  <a:pt x="4959047" y="2189404"/>
-                  <a:pt x="4959047" y="3429000"/>
-                </a:cubicBezTo>
-                <a:cubicBezTo>
-                  <a:pt x="4959047" y="4668597"/>
-                  <a:pt x="4668929" y="5812845"/>
-                  <a:pt x="4179024" y="6734633"/>
-                </a:cubicBezTo>
-                <a:lnTo>
-                  <a:pt x="4110127" y="6858000"/>
-                </a:lnTo>
-                <a:lnTo>
-                  <a:pt x="0" y="6858000"/>
-                </a:lnTo>
-                <a:close/>
-              </a:path>
-            </a:pathLst>
-          </a:custGeom>
-          <a:ln w="9525">
-            <a:solidFill>
-              <a:schemeClr val="tx2">
-                <a:lumMod val="10000"/>
-                <a:lumOff val="90000"/>
-              </a:schemeClr>
-            </a:solidFill>
-          </a:ln>
-          <a:effectLst>
-            <a:outerShdw blurRad="50800" dist="38100" algn="l" rotWithShape="0">
-              <a:schemeClr val="bg1">
-                <a:lumMod val="85000"/>
-                <a:alpha val="30000"/>
-              </a:schemeClr>
-            </a:outerShdw>
-          </a:effectLst>
-        </p:spPr>
-        <p:style>
-          <a:lnRef idx="2">
-            <a:schemeClr val="accent1">
-              <a:shade val="50000"/>
-            </a:schemeClr>
-          </a:lnRef>
-          <a:fillRef idx="1">
-            <a:schemeClr val="accent1"/>
-          </a:fillRef>
-          <a:effectRef idx="0">
-            <a:schemeClr val="accent1"/>
-          </a:effectRef>
-          <a:fontRef idx="minor">
-            <a:schemeClr val="lt1"/>
-          </a:fontRef>
-        </p:style>
-        <p:txBody>
-          <a:bodyPr wrap="square" rtlCol="0" anchor="ctr">
-            <a:noAutofit/>
-          </a:bodyPr>
-          <a:lstStyle/>
-          <a:p>
-            <a:pPr marL="0" marR="0" lvl="0" indent="0" algn="ctr" defTabSz="914400" rtl="0" eaLnBrk="1" fontAlgn="auto" latinLnBrk="0" hangingPunct="1">
-              <a:lnSpc>
-                <a:spcPct val="100000"/>
-              </a:lnSpc>
-              <a:spcBef>
-                <a:spcPts val="0"/>
-              </a:spcBef>
-              <a:spcAft>
-                <a:spcPts val="0"/>
-              </a:spcAft>
-              <a:buClrTx/>
-              <a:buSzTx/>
-              <a:buFontTx/>
-              <a:buNone/>
-              <a:tabLst/>
-              <a:defRPr/>
-            </a:pPr>
-            <a:endParaRPr kumimoji="0" lang="en-US" sz="1800" b="0" i="0" u="none" strike="noStrike" kern="1200" cap="none" spc="0" normalizeH="0" baseline="0" noProof="0">
-              <a:ln>
-                <a:noFill/>
-              </a:ln>
-              <a:solidFill>
-                <a:prstClr val="white"/>
-              </a:solidFill>
-              <a:effectLst/>
-              <a:uLnTx/>
-              <a:uFillTx/>
-              <a:latin typeface="Calibri" panose="020F0502020204030204"/>
-              <a:ea typeface="+mn-ea"/>
-              <a:cs typeface="+mn-cs"/>
-            </a:endParaRPr>
-          </a:p>
-        </p:txBody>
-      </p:sp>
-      <p:sp useBgFill="1">
-        <p:nvSpPr>
-          <p:cNvPr id="11" name="Freeform: Shape 10">
-            <a:extLst>
-              <a:ext uri="{FF2B5EF4-FFF2-40B4-BE49-F238E27FC236}">
-                <a16:creationId xmlns:a16="http://schemas.microsoft.com/office/drawing/2014/main" id="{E41809D1-F12E-46BB-B804-5F209D325E8B}"/>
-              </a:ext>
-              <a:ext uri="{C183D7F6-B498-43B3-948B-1728B52AA6E4}">
-                <adec:decorative xmlns:adec="http://schemas.microsoft.com/office/drawing/2017/decorative" val="1"/>
-              </a:ext>
-            </a:extLst>
-          </p:cNvPr>
-          <p:cNvSpPr>
-            <a:spLocks noGrp="1" noRot="1" noChangeAspect="1" noMove="1" noResize="1" noEditPoints="1" noAdjustHandles="1" noChangeArrowheads="1" noChangeShapeType="1" noTextEdit="1"/>
-          </p:cNvSpPr>
-          <p:nvPr>
-            <p:extLst>
-              <p:ext uri="{386F3935-93C4-4BCD-93E2-E3B085C9AB24}">
-                <p16:designElem xmlns:p16="http://schemas.microsoft.com/office/powerpoint/2015/main" val="1"/>
-              </p:ext>
-            </p:extLst>
-          </p:nvPr>
-        </p:nvSpPr>
-        <p:spPr>
-          <a:xfrm>
-            <a:off x="0" y="0"/>
-            <a:ext cx="4948887" cy="6858000"/>
-          </a:xfrm>
-          <a:custGeom>
-            <a:avLst/>
-            <a:gdLst>
-              <a:gd name="connsiteX0" fmla="*/ 0 w 4948887"/>
-              <a:gd name="connsiteY0" fmla="*/ 0 h 6858000"/>
-              <a:gd name="connsiteX1" fmla="*/ 4099967 w 4948887"/>
-              <a:gd name="connsiteY1" fmla="*/ 0 h 6858000"/>
-              <a:gd name="connsiteX2" fmla="*/ 4168864 w 4948887"/>
-              <a:gd name="connsiteY2" fmla="*/ 123368 h 6858000"/>
-              <a:gd name="connsiteX3" fmla="*/ 4948887 w 4948887"/>
-              <a:gd name="connsiteY3" fmla="*/ 3429000 h 6858000"/>
-              <a:gd name="connsiteX4" fmla="*/ 4168864 w 4948887"/>
-              <a:gd name="connsiteY4" fmla="*/ 6734633 h 6858000"/>
-              <a:gd name="connsiteX5" fmla="*/ 4099967 w 4948887"/>
-              <a:gd name="connsiteY5" fmla="*/ 6858000 h 6858000"/>
-              <a:gd name="connsiteX6" fmla="*/ 0 w 4948887"/>
-              <a:gd name="connsiteY6" fmla="*/ 6858000 h 6858000"/>
-            </a:gdLst>
-            <a:ahLst/>
-            <a:cxnLst>
-              <a:cxn ang="0">
-                <a:pos x="connsiteX0" y="connsiteY0"/>
-              </a:cxn>
-              <a:cxn ang="0">
-                <a:pos x="connsiteX1" y="connsiteY1"/>
-              </a:cxn>
-              <a:cxn ang="0">
-                <a:pos x="connsiteX2" y="connsiteY2"/>
-              </a:cxn>
-              <a:cxn ang="0">
-                <a:pos x="connsiteX3" y="connsiteY3"/>
-              </a:cxn>
-              <a:cxn ang="0">
-                <a:pos x="connsiteX4" y="connsiteY4"/>
-              </a:cxn>
-              <a:cxn ang="0">
-                <a:pos x="connsiteX5" y="connsiteY5"/>
-              </a:cxn>
-              <a:cxn ang="0">
-                <a:pos x="connsiteX6" y="connsiteY6"/>
-              </a:cxn>
-            </a:cxnLst>
-            <a:rect l="l" t="t" r="r" b="b"/>
-            <a:pathLst>
-              <a:path w="4948887" h="6858000">
-                <a:moveTo>
-                  <a:pt x="0" y="0"/>
-                </a:moveTo>
-                <a:lnTo>
-                  <a:pt x="4099967" y="0"/>
-                </a:lnTo>
-                <a:lnTo>
-                  <a:pt x="4168864" y="123368"/>
-                </a:lnTo>
-                <a:cubicBezTo>
-                  <a:pt x="4658769" y="1045156"/>
-                  <a:pt x="4948887" y="2189404"/>
-                  <a:pt x="4948887" y="3429000"/>
-                </a:cubicBezTo>
-                <a:cubicBezTo>
-                  <a:pt x="4948887" y="4668597"/>
-                  <a:pt x="4658769" y="5812845"/>
-                  <a:pt x="4168864" y="6734633"/>
-                </a:cubicBezTo>
-                <a:lnTo>
-                  <a:pt x="4099967" y="6858000"/>
-                </a:lnTo>
-                <a:lnTo>
-                  <a:pt x="0" y="6858000"/>
-                </a:lnTo>
-                <a:close/>
-              </a:path>
-            </a:pathLst>
-          </a:custGeom>
-          <a:ln w="9525">
-            <a:noFill/>
-          </a:ln>
-          <a:effectLst/>
-        </p:spPr>
-        <p:style>
-          <a:lnRef idx="2">
-            <a:schemeClr val="accent1">
-              <a:shade val="50000"/>
-            </a:schemeClr>
-          </a:lnRef>
-          <a:fillRef idx="1">
-            <a:schemeClr val="accent1"/>
-          </a:fillRef>
-          <a:effectRef idx="0">
-            <a:schemeClr val="accent1"/>
-          </a:effectRef>
-          <a:fontRef idx="minor">
-            <a:schemeClr val="lt1"/>
-          </a:fontRef>
-        </p:style>
-        <p:txBody>
-          <a:bodyPr wrap="square" rtlCol="0" anchor="ctr">
-            <a:noAutofit/>
-          </a:bodyPr>
-          <a:lstStyle/>
-          <a:p>
-            <a:pPr marL="0" marR="0" lvl="0" indent="0" algn="ctr" defTabSz="914400" rtl="0" eaLnBrk="1" fontAlgn="auto" latinLnBrk="0" hangingPunct="1">
-              <a:lnSpc>
-                <a:spcPct val="100000"/>
-              </a:lnSpc>
-              <a:spcBef>
-                <a:spcPts val="0"/>
-              </a:spcBef>
-              <a:spcAft>
-                <a:spcPts val="0"/>
-              </a:spcAft>
-              <a:buClrTx/>
-              <a:buSzTx/>
-              <a:buFontTx/>
-              <a:buNone/>
-              <a:tabLst/>
-              <a:defRPr/>
-            </a:pPr>
-            <a:endParaRPr kumimoji="0" lang="en-US" sz="1800" b="0" i="0" u="none" strike="noStrike" kern="1200" cap="none" spc="0" normalizeH="0" baseline="0" noProof="0">
-              <a:ln>
-                <a:noFill/>
-              </a:ln>
-              <a:solidFill>
-                <a:prstClr val="white"/>
-              </a:solidFill>
-              <a:effectLst/>
-              <a:uLnTx/>
-              <a:uFillTx/>
-              <a:latin typeface="Calibri" panose="020F0502020204030204"/>
-              <a:ea typeface="+mn-ea"/>
-              <a:cs typeface="+mn-cs"/>
-            </a:endParaRPr>
-          </a:p>
-        </p:txBody>
-      </p:sp>
-      <p:sp>
-        <p:nvSpPr>
-          <p:cNvPr id="2" name="Title 1">
-            <a:extLst>
-              <a:ext uri="{FF2B5EF4-FFF2-40B4-BE49-F238E27FC236}">
-                <a16:creationId xmlns:a16="http://schemas.microsoft.com/office/drawing/2014/main" id="{65C54F60-4CD2-714E-B25F-FB51C99D225A}"/>
-              </a:ext>
-            </a:extLst>
-          </p:cNvPr>
-          <p:cNvSpPr>
-            <a:spLocks noGrp="1"/>
-          </p:cNvSpPr>
-          <p:nvPr>
-            <p:ph type="ctrTitle"/>
-          </p:nvPr>
-        </p:nvSpPr>
-        <p:spPr>
-          <a:xfrm>
-            <a:off x="477981" y="1122363"/>
-            <a:ext cx="4023360" cy="3204134"/>
-          </a:xfrm>
-        </p:spPr>
-        <p:txBody>
-          <a:bodyPr anchor="b">
-            <a:normAutofit/>
-          </a:bodyPr>
-          <a:lstStyle/>
-          <a:p>
-            <a:pPr algn="l"/>
-            <a:r>
-              <a:rPr lang="en-US" sz="4400" dirty="0"/>
-              <a:t>Immersive Model for a Water Bank for Bear River Basin	</a:t>
-            </a:r>
-          </a:p>
-        </p:txBody>
-      </p:sp>
-      <p:sp>
-        <p:nvSpPr>
-          <p:cNvPr id="3" name="Subtitle 2">
-            <a:extLst>
-              <a:ext uri="{FF2B5EF4-FFF2-40B4-BE49-F238E27FC236}">
-                <a16:creationId xmlns:a16="http://schemas.microsoft.com/office/drawing/2014/main" id="{AAFA9286-92DA-528E-C4BD-BD456C809191}"/>
-              </a:ext>
-            </a:extLst>
-          </p:cNvPr>
-          <p:cNvSpPr>
-            <a:spLocks noGrp="1"/>
-          </p:cNvSpPr>
-          <p:nvPr>
-            <p:ph type="subTitle" idx="1"/>
-          </p:nvPr>
-        </p:nvSpPr>
-        <p:spPr>
-          <a:xfrm>
-            <a:off x="477981" y="4872922"/>
-            <a:ext cx="3933306" cy="1208141"/>
-          </a:xfrm>
-        </p:spPr>
-        <p:txBody>
-          <a:bodyPr>
-            <a:normAutofit/>
-          </a:bodyPr>
-          <a:lstStyle/>
-          <a:p>
-            <a:pPr algn="l"/>
-            <a:r>
-              <a:rPr lang="en-US" dirty="0"/>
-              <a:t>Model Guide</a:t>
-            </a:r>
-          </a:p>
-        </p:txBody>
-      </p:sp>
-      <p:sp>
-        <p:nvSpPr>
-          <p:cNvPr id="16" name="Rectangle 15">
-            <a:extLst>
-              <a:ext uri="{FF2B5EF4-FFF2-40B4-BE49-F238E27FC236}">
-                <a16:creationId xmlns:a16="http://schemas.microsoft.com/office/drawing/2014/main" id="{AF2F604E-43BE-4DC3-B983-E071523364F8}"/>
-              </a:ext>
-              <a:ext uri="{C183D7F6-B498-43B3-948B-1728B52AA6E4}">
-                <adec:decorative xmlns:adec="http://schemas.microsoft.com/office/drawing/2017/decorative" val="1"/>
-              </a:ext>
-            </a:extLst>
-          </p:cNvPr>
-          <p:cNvSpPr>
-            <a:spLocks noGrp="1" noRot="1" noChangeAspect="1" noMove="1" noResize="1" noEditPoints="1" noAdjustHandles="1" noChangeArrowheads="1" noChangeShapeType="1" noTextEdit="1"/>
-          </p:cNvSpPr>
-          <p:nvPr>
-            <p:extLst>
-              <p:ext uri="{386F3935-93C4-4BCD-93E2-E3B085C9AB24}">
-                <p16:designElem xmlns:p16="http://schemas.microsoft.com/office/powerpoint/2015/main" val="1"/>
-              </p:ext>
-            </p:extLst>
-          </p:nvPr>
-        </p:nvSpPr>
-        <p:spPr>
-          <a:xfrm rot="5400000">
-            <a:off x="759921" y="346791"/>
-            <a:ext cx="146304" cy="704088"/>
+          <a:xfrm flipH="1">
+            <a:off x="4038600" y="4022220"/>
+            <a:ext cx="8153398" cy="2835780"/>
           </a:xfrm>
           <a:prstGeom prst="rect">
             <a:avLst/>
           </a:prstGeom>
-          <a:solidFill>
-            <a:schemeClr val="accent2"/>
-          </a:solidFill>
+          <a:gradFill>
+            <a:gsLst>
+              <a:gs pos="0">
+                <a:srgbClr val="000000">
+                  <a:alpha val="63000"/>
+                </a:srgbClr>
+              </a:gs>
+              <a:gs pos="100000">
+                <a:schemeClr val="accent1">
+                  <a:lumMod val="75000"/>
+                </a:schemeClr>
+              </a:gs>
+            </a:gsLst>
+            <a:lin ang="6600000" scaled="0"/>
+          </a:gradFill>
           <a:ln>
             <a:noFill/>
           </a:ln>
@@ -8168,46 +12261,17 @@
           <a:bodyPr rtlCol="0" anchor="ctr"/>
           <a:lstStyle/>
           <a:p>
-            <a:pPr marL="0" marR="0" lvl="0" indent="0" algn="ctr" defTabSz="914400" rtl="0" eaLnBrk="1" fontAlgn="auto" latinLnBrk="0" hangingPunct="1">
-              <a:lnSpc>
-                <a:spcPct val="100000"/>
-              </a:lnSpc>
-              <a:spcBef>
-                <a:spcPts val="0"/>
-              </a:spcBef>
-              <a:spcAft>
-                <a:spcPts val="0"/>
-              </a:spcAft>
-              <a:buClrTx/>
-              <a:buSzTx/>
-              <a:buFontTx/>
-              <a:buNone/>
-              <a:tabLst/>
-              <a:defRPr/>
-            </a:pPr>
-            <a:endParaRPr kumimoji="0" lang="en-US" sz="1800" b="0" i="0" u="none" strike="noStrike" kern="1200" cap="none" spc="0" normalizeH="0" baseline="0" noProof="0">
-              <a:ln>
-                <a:noFill/>
-              </a:ln>
-              <a:solidFill>
-                <a:prstClr val="white"/>
-              </a:solidFill>
-              <a:effectLst/>
-              <a:uLnTx/>
-              <a:uFillTx/>
-              <a:latin typeface="Calibri" panose="020F0502020204030204"/>
-              <a:ea typeface="+mn-ea"/>
-              <a:cs typeface="+mn-cs"/>
-            </a:endParaRPr>
+            <a:pPr algn="ctr"/>
+            <a:endParaRPr lang="en-US"/>
           </a:p>
         </p:txBody>
       </p:sp>
       <p:sp>
         <p:nvSpPr>
-          <p:cNvPr id="18" name="Rectangle 17">
+          <p:cNvPr id="53" name="Rectangle 52">
             <a:extLst>
               <a:ext uri="{FF2B5EF4-FFF2-40B4-BE49-F238E27FC236}">
-                <a16:creationId xmlns:a16="http://schemas.microsoft.com/office/drawing/2014/main" id="{08C9B587-E65E-4B52-B37C-ABEBB6E87928}"/>
+                <a16:creationId xmlns:a16="http://schemas.microsoft.com/office/drawing/2014/main" id="{49D6C862-61CC-4B46-8080-96583D653BAB}"/>
               </a:ext>
               <a:ext uri="{C183D7F6-B498-43B3-948B-1728B52AA6E4}">
                 <adec:decorative xmlns:adec="http://schemas.microsoft.com/office/drawing/2017/decorative" val="1"/>
@@ -8226,20 +12290,32 @@
           </p:nvPr>
         </p:nvSpPr>
         <p:spPr>
-          <a:xfrm>
-            <a:off x="481029" y="4546920"/>
-            <a:ext cx="4023360" cy="18288"/>
+          <a:xfrm flipH="1">
+            <a:off x="0" y="4022219"/>
+            <a:ext cx="12253472" cy="2835781"/>
           </a:xfrm>
           <a:prstGeom prst="rect">
             <a:avLst/>
           </a:prstGeom>
-          <a:solidFill>
-            <a:srgbClr val="D5D5D5"/>
-          </a:solidFill>
-          <a:ln w="3175">
+          <a:gradFill>
+            <a:gsLst>
+              <a:gs pos="39000">
+                <a:schemeClr val="accent1">
+                  <a:lumMod val="50000"/>
+                  <a:alpha val="0"/>
+                </a:schemeClr>
+              </a:gs>
+              <a:gs pos="100000">
+                <a:srgbClr val="000000">
+                  <a:alpha val="72000"/>
+                </a:srgbClr>
+              </a:gs>
+            </a:gsLst>
+            <a:lin ang="17400000" scaled="0"/>
+          </a:gradFill>
+          <a:ln>
             <a:noFill/>
           </a:ln>
-          <a:effectLst/>
         </p:spPr>
         <p:style>
           <a:lnRef idx="2">
@@ -8261,37 +12337,160 @@
           <a:bodyPr rtlCol="0" anchor="ctr"/>
           <a:lstStyle/>
           <a:p>
-            <a:pPr marL="0" marR="0" lvl="0" indent="0" algn="ctr" defTabSz="914400" rtl="0" eaLnBrk="1" fontAlgn="auto" latinLnBrk="0" hangingPunct="1">
-              <a:lnSpc>
-                <a:spcPct val="100000"/>
-              </a:lnSpc>
-              <a:spcBef>
-                <a:spcPts val="0"/>
-              </a:spcBef>
-              <a:spcAft>
-                <a:spcPts val="0"/>
-              </a:spcAft>
-              <a:buClrTx/>
-              <a:buSzTx/>
-              <a:buFontTx/>
-              <a:buNone/>
-              <a:tabLst/>
-              <a:defRPr/>
-            </a:pPr>
-            <a:endParaRPr kumimoji="0" lang="en-US" sz="1800" b="0" i="0" u="none" strike="noStrike" kern="1200" cap="none" spc="0" normalizeH="0" baseline="0" noProof="0">
-              <a:ln>
-                <a:noFill/>
-              </a:ln>
-              <a:solidFill>
-                <a:prstClr val="white"/>
-              </a:solidFill>
-              <a:effectLst/>
-              <a:uLnTx/>
-              <a:uFillTx/>
-              <a:latin typeface="Calibri" panose="020F0502020204030204"/>
-              <a:ea typeface="+mn-ea"/>
-              <a:cs typeface="+mn-cs"/>
-            </a:endParaRPr>
+            <a:pPr algn="ctr"/>
+            <a:endParaRPr lang="en-US" dirty="0"/>
+          </a:p>
+        </p:txBody>
+      </p:sp>
+      <p:sp>
+        <p:nvSpPr>
+          <p:cNvPr id="3" name="Subtitle 2">
+            <a:extLst>
+              <a:ext uri="{FF2B5EF4-FFF2-40B4-BE49-F238E27FC236}">
+                <a16:creationId xmlns:a16="http://schemas.microsoft.com/office/drawing/2014/main" id="{AAFA9286-92DA-528E-C4BD-BD456C809191}"/>
+              </a:ext>
+            </a:extLst>
+          </p:cNvPr>
+          <p:cNvSpPr>
+            <a:spLocks noGrp="1"/>
+          </p:cNvSpPr>
+          <p:nvPr>
+            <p:ph type="subTitle" idx="1"/>
+          </p:nvPr>
+        </p:nvSpPr>
+        <p:spPr>
+          <a:xfrm>
+            <a:off x="823442" y="4541263"/>
+            <a:ext cx="4662957" cy="1395022"/>
+          </a:xfrm>
+        </p:spPr>
+        <p:txBody>
+          <a:bodyPr anchor="t">
+            <a:normAutofit/>
+          </a:bodyPr>
+          <a:lstStyle/>
+          <a:p>
+            <a:pPr algn="l"/>
+            <a:r>
+              <a:rPr lang="en-US" dirty="0">
+                <a:solidFill>
+                  <a:srgbClr val="FFFFFF"/>
+                </a:solidFill>
+              </a:rPr>
+              <a:t>Model Guide</a:t>
+            </a:r>
+          </a:p>
+        </p:txBody>
+      </p:sp>
+      <p:pic>
+        <p:nvPicPr>
+          <p:cNvPr id="6" name="Picture 5" descr="The image depicts a map highlighting Idaho, Wyoming, Salt Lake City, Great, Denver, and Utah.&#10;&#10;AI-generated content may be incorrect.">
+            <a:extLst>
+              <a:ext uri="{FF2B5EF4-FFF2-40B4-BE49-F238E27FC236}">
+                <a16:creationId xmlns:a16="http://schemas.microsoft.com/office/drawing/2014/main" id="{DB227495-A140-F9B9-9EB3-2A6E168FED00}"/>
+              </a:ext>
+            </a:extLst>
+          </p:cNvPr>
+          <p:cNvPicPr>
+            <a:picLocks noChangeAspect="1"/>
+          </p:cNvPicPr>
+          <p:nvPr/>
+        </p:nvPicPr>
+        <p:blipFill>
+          <a:blip r:embed="rId3">
+            <a:extLst>
+              <a:ext uri="{28A0092B-C50C-407E-A947-70E740481C1C}">
+                <a14:useLocalDpi xmlns:a14="http://schemas.microsoft.com/office/drawing/2010/main" val="0"/>
+              </a:ext>
+            </a:extLst>
+          </a:blip>
+          <a:stretch>
+            <a:fillRect/>
+          </a:stretch>
+        </p:blipFill>
+        <p:spPr>
+          <a:xfrm>
+            <a:off x="6823077" y="463404"/>
+            <a:ext cx="4664682" cy="5553193"/>
+          </a:xfrm>
+          <a:prstGeom prst="rect">
+            <a:avLst/>
+          </a:prstGeom>
+        </p:spPr>
+      </p:pic>
+      <p:sp>
+        <p:nvSpPr>
+          <p:cNvPr id="54" name="Rectangle 53">
+            <a:extLst>
+              <a:ext uri="{FF2B5EF4-FFF2-40B4-BE49-F238E27FC236}">
+                <a16:creationId xmlns:a16="http://schemas.microsoft.com/office/drawing/2014/main" id="{E37EECFC-A684-4391-AE85-4CDAF5565F61}"/>
+              </a:ext>
+              <a:ext uri="{C183D7F6-B498-43B3-948B-1728B52AA6E4}">
+                <adec:decorative xmlns:adec="http://schemas.microsoft.com/office/drawing/2017/decorative" val="1"/>
+              </a:ext>
+            </a:extLst>
+          </p:cNvPr>
+          <p:cNvSpPr>
+            <a:spLocks noGrp="1" noRot="1" noChangeAspect="1" noMove="1" noResize="1" noEditPoints="1" noAdjustHandles="1" noChangeArrowheads="1" noChangeShapeType="1" noTextEdit="1"/>
+          </p:cNvSpPr>
+          <p:nvPr>
+            <p:extLst>
+              <p:ext uri="{386F3935-93C4-4BCD-93E2-E3B085C9AB24}">
+                <p16:designElem xmlns:p16="http://schemas.microsoft.com/office/powerpoint/2015/main" val="1"/>
+              </p:ext>
+            </p:extLst>
+          </p:nvPr>
+        </p:nvSpPr>
+        <p:spPr>
+          <a:xfrm flipH="1">
+            <a:off x="0" y="6400797"/>
+            <a:ext cx="12191998" cy="457203"/>
+          </a:xfrm>
+          <a:prstGeom prst="rect">
+            <a:avLst/>
+          </a:prstGeom>
+          <a:gradFill>
+            <a:gsLst>
+              <a:gs pos="0">
+                <a:srgbClr val="000000">
+                  <a:alpha val="43000"/>
+                </a:srgbClr>
+              </a:gs>
+              <a:gs pos="79000">
+                <a:schemeClr val="accent1">
+                  <a:lumMod val="75000"/>
+                  <a:alpha val="22000"/>
+                </a:schemeClr>
+              </a:gs>
+            </a:gsLst>
+            <a:lin ang="21594000" scaled="0"/>
+          </a:gradFill>
+          <a:ln>
+            <a:noFill/>
+          </a:ln>
+        </p:spPr>
+        <p:style>
+          <a:lnRef idx="2">
+            <a:schemeClr val="accent1">
+              <a:shade val="50000"/>
+            </a:schemeClr>
+          </a:lnRef>
+          <a:fillRef idx="1">
+            <a:schemeClr val="accent1"/>
+          </a:fillRef>
+          <a:effectRef idx="0">
+            <a:schemeClr val="accent1"/>
+          </a:effectRef>
+          <a:fontRef idx="minor">
+            <a:schemeClr val="lt1"/>
+          </a:fontRef>
+        </p:style>
+        <p:txBody>
+          <a:bodyPr rtlCol="0" anchor="ctr"/>
+          <a:lstStyle/>
+          <a:p>
+            <a:pPr algn="ctr"/>
+            <a:endParaRPr lang="en-US"/>
           </a:p>
         </p:txBody>
       </p:sp>
@@ -8331,7 +12530,7 @@
                               <p:par>
                                 <p:cTn id="5" presetID="10" presetClass="entr" presetSubtype="0" fill="hold" grpId="0" nodeType="withEffect">
                                   <p:stCondLst>
-                                    <p:cond delay="1000"/>
+                                    <p:cond delay="1500"/>
                                   </p:stCondLst>
                                   <p:iterate>
                                     <p:tmPct val="10000"/>
@@ -8340,44 +12539,6 @@
                                     <p:set>
                                       <p:cBhvr>
                                         <p:cTn id="6" dur="1" fill="hold">
-                                          <p:stCondLst>
-                                            <p:cond delay="0"/>
-                                          </p:stCondLst>
-                                        </p:cTn>
-                                        <p:tgtEl>
-                                          <p:spTgt spid="2"/>
-                                        </p:tgtEl>
-                                        <p:attrNameLst>
-                                          <p:attrName>style.visibility</p:attrName>
-                                        </p:attrNameLst>
-                                      </p:cBhvr>
-                                      <p:to>
-                                        <p:strVal val="visible"/>
-                                      </p:to>
-                                    </p:set>
-                                    <p:animEffect transition="in" filter="fade">
-                                      <p:cBhvr>
-                                        <p:cTn id="7" dur="700"/>
-                                        <p:tgtEl>
-                                          <p:spTgt spid="2"/>
-                                        </p:tgtEl>
-                                      </p:cBhvr>
-                                    </p:animEffect>
-                                  </p:childTnLst>
-                                </p:cTn>
-                              </p:par>
-                              <p:par>
-                                <p:cTn id="8" presetID="10" presetClass="entr" presetSubtype="0" fill="hold" grpId="0" nodeType="withEffect">
-                                  <p:stCondLst>
-                                    <p:cond delay="1500"/>
-                                  </p:stCondLst>
-                                  <p:iterate>
-                                    <p:tmPct val="10000"/>
-                                  </p:iterate>
-                                  <p:childTnLst>
-                                    <p:set>
-                                      <p:cBhvr>
-                                        <p:cTn id="9" dur="1" fill="hold">
                                           <p:stCondLst>
                                             <p:cond delay="0"/>
                                           </p:stCondLst>
@@ -8399,7 +12560,7 @@
                                     </p:set>
                                     <p:animEffect transition="in" filter="fade">
                                       <p:cBhvr>
-                                        <p:cTn id="10" dur="700"/>
+                                        <p:cTn id="7" dur="700"/>
                                         <p:tgtEl>
                                           <p:spTgt spid="3">
                                             <p:txEl>
@@ -8440,7 +12601,6 @@
       </p:par>
     </p:tnLst>
     <p:bldLst>
-      <p:bldP spid="2" grpId="0"/>
       <p:bldP spid="3" grpId="0" build="p"/>
     </p:bldLst>
   </p:timing>
@@ -8490,8 +12650,8 @@
         </p:nvSpPr>
         <p:spPr>
           <a:xfrm>
-            <a:off x="861794" y="762000"/>
-            <a:ext cx="4436080" cy="1401597"/>
+            <a:off x="610782" y="762000"/>
+            <a:ext cx="5637618" cy="1401597"/>
           </a:xfrm>
         </p:spPr>
         <p:txBody>
@@ -8531,20 +12691,25 @@
         </p:blipFill>
         <p:spPr bwMode="auto">
           <a:xfrm>
-            <a:off x="6894128" y="73644"/>
+            <a:off x="7037563" y="73644"/>
             <a:ext cx="4918846" cy="6710711"/>
           </a:xfrm>
           <a:prstGeom prst="rect">
             <a:avLst/>
           </a:prstGeom>
+          <a:ln w="19050">
+            <a:solidFill>
+              <a:schemeClr val="tx1"/>
+            </a:solidFill>
+          </a:ln>
         </p:spPr>
       </p:pic>
       <p:pic>
         <p:nvPicPr>
-          <p:cNvPr id="25" name="Picture 24" descr="The image depicts a map showing various locations in the western United States, including Idaho, Wyoming, Salt Lake City, and Utah, with symbols representing cities and a plateau.&#10;&#10;AI-generated content may be incorrect.">
+          <p:cNvPr id="4" name="Picture 3" descr="The image depicts a map highlighting Idaho, Wyoming, Salt Lake City, Great, Denver, and Utah.&#10;&#10;AI-generated content may be incorrect.">
             <a:extLst>
               <a:ext uri="{FF2B5EF4-FFF2-40B4-BE49-F238E27FC236}">
-                <a16:creationId xmlns:a16="http://schemas.microsoft.com/office/drawing/2014/main" id="{AF508137-52D0-BAA5-C5E1-222AC5704542}"/>
+                <a16:creationId xmlns:a16="http://schemas.microsoft.com/office/drawing/2014/main" id="{24E79CC9-78C3-BC1B-D785-D9BBED37350E}"/>
               </a:ext>
             </a:extLst>
           </p:cNvPr>
@@ -8561,19 +12726,23 @@
               </a:ext>
             </a:extLst>
           </a:blip>
-          <a:srcRect l="12196" r="32494" b="1"/>
           <a:stretch>
             <a:fillRect/>
           </a:stretch>
         </p:blipFill>
         <p:spPr>
           <a:xfrm>
-            <a:off x="2223247" y="2634985"/>
-            <a:ext cx="2119343" cy="2940843"/>
+            <a:off x="1628773" y="2581835"/>
+            <a:ext cx="3145591" cy="3745496"/>
           </a:xfrm>
           <a:prstGeom prst="rect">
             <a:avLst/>
           </a:prstGeom>
+          <a:ln w="19050">
+            <a:solidFill>
+              <a:schemeClr val="tx1"/>
+            </a:solidFill>
+          </a:ln>
         </p:spPr>
       </p:pic>
     </p:spTree>
@@ -8892,7 +13061,7 @@
             <p:ph idx="1"/>
             <p:extLst>
               <p:ext uri="{D42A27DB-BD31-4B8C-83A1-F6EECF244321}">
-                <p14:modId xmlns:p14="http://schemas.microsoft.com/office/powerpoint/2010/main" val="876813628"/>
+                <p14:modId xmlns:p14="http://schemas.microsoft.com/office/powerpoint/2010/main" val="2612573471"/>
               </p:ext>
             </p:extLst>
           </p:nvPr>
@@ -8923,14 +13092,6 @@
 <file path=ppt/slides/slide4.xml><?xml version="1.0" encoding="utf-8"?>
 <p:sld xmlns:a="http://schemas.openxmlformats.org/drawingml/2006/main" xmlns:r="http://schemas.openxmlformats.org/officeDocument/2006/relationships" xmlns:p="http://schemas.openxmlformats.org/presentationml/2006/main">
   <p:cSld>
-    <p:bg>
-      <p:bgPr>
-        <a:solidFill>
-          <a:schemeClr val="bg1"/>
-        </a:solidFill>
-        <a:effectLst/>
-      </p:bgPr>
-    </p:bg>
     <p:spTree>
       <p:nvGrpSpPr>
         <p:cNvPr id="1" name=""/>
@@ -8945,12 +13106,383 @@
           <a:chExt cx="0" cy="0"/>
         </a:xfrm>
       </p:grpSpPr>
+      <p:graphicFrame>
+        <p:nvGraphicFramePr>
+          <p:cNvPr id="2" name="Diagram 1">
+            <a:extLst>
+              <a:ext uri="{FF2B5EF4-FFF2-40B4-BE49-F238E27FC236}">
+                <a16:creationId xmlns:a16="http://schemas.microsoft.com/office/drawing/2014/main" id="{64291571-4CDA-E81A-0F83-C214C34B52A1}"/>
+              </a:ext>
+            </a:extLst>
+          </p:cNvPr>
+          <p:cNvGraphicFramePr/>
+          <p:nvPr>
+            <p:extLst>
+              <p:ext uri="{D42A27DB-BD31-4B8C-83A1-F6EECF244321}">
+                <p14:modId xmlns:p14="http://schemas.microsoft.com/office/powerpoint/2010/main" val="1027488444"/>
+              </p:ext>
+            </p:extLst>
+          </p:nvPr>
+        </p:nvGraphicFramePr>
+        <p:xfrm>
+          <a:off x="142773" y="524104"/>
+          <a:ext cx="11906452" cy="7411453"/>
+        </p:xfrm>
+        <a:graphic>
+          <a:graphicData uri="http://schemas.openxmlformats.org/drawingml/2006/diagram">
+            <dgm:relIds xmlns:dgm="http://schemas.openxmlformats.org/drawingml/2006/diagram" xmlns:r="http://schemas.openxmlformats.org/officeDocument/2006/relationships" r:dm="rId3" r:lo="rId4" r:qs="rId5" r:cs="rId6"/>
+          </a:graphicData>
+        </a:graphic>
+      </p:graphicFrame>
+      <p:graphicFrame>
+        <p:nvGraphicFramePr>
+          <p:cNvPr id="4" name="Table 3">
+            <a:extLst>
+              <a:ext uri="{FF2B5EF4-FFF2-40B4-BE49-F238E27FC236}">
+                <a16:creationId xmlns:a16="http://schemas.microsoft.com/office/drawing/2014/main" id="{D3FC7B2A-B870-FA58-8FAD-CE5871DD6A60}"/>
+              </a:ext>
+            </a:extLst>
+          </p:cNvPr>
+          <p:cNvGraphicFramePr>
+            <a:graphicFrameLocks noGrp="1"/>
+          </p:cNvGraphicFramePr>
+          <p:nvPr>
+            <p:extLst>
+              <p:ext uri="{D42A27DB-BD31-4B8C-83A1-F6EECF244321}">
+                <p14:modId xmlns:p14="http://schemas.microsoft.com/office/powerpoint/2010/main" val="1211471888"/>
+              </p:ext>
+            </p:extLst>
+          </p:nvPr>
+        </p:nvGraphicFramePr>
+        <p:xfrm>
+          <a:off x="314645" y="979623"/>
+          <a:ext cx="2222367" cy="735217"/>
+        </p:xfrm>
+        <a:graphic>
+          <a:graphicData uri="http://schemas.openxmlformats.org/drawingml/2006/table">
+            <a:tbl>
+              <a:tblPr firstRow="1" bandRow="1">
+                <a:tableStyleId>{5C22544A-7EE6-4342-B048-85BDC9FD1C3A}</a:tableStyleId>
+              </a:tblPr>
+              <a:tblGrid>
+                <a:gridCol w="2222367">
+                  <a:extLst>
+                    <a:ext uri="{9D8B030D-6E8A-4147-A177-3AD203B41FA5}">
+                      <a16:colId xmlns:a16="http://schemas.microsoft.com/office/drawing/2014/main" val="419452389"/>
+                    </a:ext>
+                  </a:extLst>
+                </a:gridCol>
+              </a:tblGrid>
+              <a:tr h="278198">
+                <a:tc>
+                  <a:txBody>
+                    <a:bodyPr/>
+                    <a:lstStyle/>
+                    <a:p>
+                      <a:r>
+                        <a:rPr lang="en-US" dirty="0">
+                          <a:solidFill>
+                            <a:srgbClr val="3333FF"/>
+                          </a:solidFill>
+                        </a:rPr>
+                        <a:t>User Decision</a:t>
+                      </a:r>
+                    </a:p>
+                  </a:txBody>
+                  <a:tcPr>
+                    <a:lnL w="12700" cap="flat" cmpd="sng" algn="ctr">
+                      <a:solidFill>
+                        <a:schemeClr val="tx1"/>
+                      </a:solidFill>
+                      <a:prstDash val="solid"/>
+                      <a:round/>
+                      <a:headEnd type="none" w="med" len="med"/>
+                      <a:tailEnd type="none" w="med" len="med"/>
+                    </a:lnL>
+                    <a:lnR w="12700" cap="flat" cmpd="sng" algn="ctr">
+                      <a:solidFill>
+                        <a:schemeClr val="tx1"/>
+                      </a:solidFill>
+                      <a:prstDash val="solid"/>
+                      <a:round/>
+                      <a:headEnd type="none" w="med" len="med"/>
+                      <a:tailEnd type="none" w="med" len="med"/>
+                    </a:lnR>
+                    <a:lnT w="12700" cap="flat" cmpd="sng" algn="ctr">
+                      <a:solidFill>
+                        <a:schemeClr val="tx1"/>
+                      </a:solidFill>
+                      <a:prstDash val="solid"/>
+                      <a:round/>
+                      <a:headEnd type="none" w="med" len="med"/>
+                      <a:tailEnd type="none" w="med" len="med"/>
+                    </a:lnT>
+                    <a:lnB w="12700" cap="flat" cmpd="sng" algn="ctr">
+                      <a:solidFill>
+                        <a:schemeClr val="tx1"/>
+                      </a:solidFill>
+                      <a:prstDash val="solid"/>
+                      <a:round/>
+                      <a:headEnd type="none" w="med" len="med"/>
+                      <a:tailEnd type="none" w="med" len="med"/>
+                    </a:lnB>
+                    <a:lnTlToBr w="12700" cmpd="sng">
+                      <a:noFill/>
+                      <a:prstDash val="solid"/>
+                    </a:lnTlToBr>
+                    <a:lnBlToTr w="12700" cmpd="sng">
+                      <a:noFill/>
+                      <a:prstDash val="solid"/>
+                    </a:lnBlToTr>
+                    <a:noFill/>
+                  </a:tcPr>
+                </a:tc>
+                <a:extLst>
+                  <a:ext uri="{0D108BD9-81ED-4DB2-BD59-A6C34878D82A}">
+                    <a16:rowId xmlns:a16="http://schemas.microsoft.com/office/drawing/2014/main" val="450230182"/>
+                  </a:ext>
+                </a:extLst>
+              </a:tr>
+              <a:tr h="369457">
+                <a:tc>
+                  <a:txBody>
+                    <a:bodyPr/>
+                    <a:lstStyle/>
+                    <a:p>
+                      <a:r>
+                        <a:rPr lang="en-US" b="1" dirty="0">
+                          <a:solidFill>
+                            <a:srgbClr val="00B050"/>
+                          </a:solidFill>
+                        </a:rPr>
+                        <a:t>Model Calculation</a:t>
+                      </a:r>
+                    </a:p>
+                  </a:txBody>
+                  <a:tcPr>
+                    <a:lnL w="12700" cap="flat" cmpd="sng" algn="ctr">
+                      <a:solidFill>
+                        <a:schemeClr val="tx1"/>
+                      </a:solidFill>
+                      <a:prstDash val="solid"/>
+                      <a:round/>
+                      <a:headEnd type="none" w="med" len="med"/>
+                      <a:tailEnd type="none" w="med" len="med"/>
+                    </a:lnL>
+                    <a:lnR w="12700" cap="flat" cmpd="sng" algn="ctr">
+                      <a:solidFill>
+                        <a:schemeClr val="tx1"/>
+                      </a:solidFill>
+                      <a:prstDash val="solid"/>
+                      <a:round/>
+                      <a:headEnd type="none" w="med" len="med"/>
+                      <a:tailEnd type="none" w="med" len="med"/>
+                    </a:lnR>
+                    <a:lnT w="12700" cap="flat" cmpd="sng" algn="ctr">
+                      <a:solidFill>
+                        <a:schemeClr val="tx1"/>
+                      </a:solidFill>
+                      <a:prstDash val="solid"/>
+                      <a:round/>
+                      <a:headEnd type="none" w="med" len="med"/>
+                      <a:tailEnd type="none" w="med" len="med"/>
+                    </a:lnT>
+                    <a:lnB w="12700" cap="flat" cmpd="sng" algn="ctr">
+                      <a:solidFill>
+                        <a:schemeClr val="tx1"/>
+                      </a:solidFill>
+                      <a:prstDash val="solid"/>
+                      <a:round/>
+                      <a:headEnd type="none" w="med" len="med"/>
+                      <a:tailEnd type="none" w="med" len="med"/>
+                    </a:lnB>
+                    <a:lnTlToBr w="12700" cmpd="sng">
+                      <a:noFill/>
+                      <a:prstDash val="solid"/>
+                    </a:lnTlToBr>
+                    <a:lnBlToTr w="12700" cmpd="sng">
+                      <a:noFill/>
+                      <a:prstDash val="solid"/>
+                    </a:lnBlToTr>
+                    <a:noFill/>
+                  </a:tcPr>
+                </a:tc>
+                <a:extLst>
+                  <a:ext uri="{0D108BD9-81ED-4DB2-BD59-A6C34878D82A}">
+                    <a16:rowId xmlns:a16="http://schemas.microsoft.com/office/drawing/2014/main" val="291137854"/>
+                  </a:ext>
+                </a:extLst>
+              </a:tr>
+            </a:tbl>
+          </a:graphicData>
+        </a:graphic>
+      </p:graphicFrame>
+      <p:sp>
+        <p:nvSpPr>
+          <p:cNvPr id="5" name="TextBox 4">
+            <a:extLst>
+              <a:ext uri="{FF2B5EF4-FFF2-40B4-BE49-F238E27FC236}">
+                <a16:creationId xmlns:a16="http://schemas.microsoft.com/office/drawing/2014/main" id="{1FD8920C-1BE0-6C78-0B56-8C42D019CBDB}"/>
+              </a:ext>
+            </a:extLst>
+          </p:cNvPr>
+          <p:cNvSpPr txBox="1"/>
+          <p:nvPr/>
+        </p:nvSpPr>
+        <p:spPr>
+          <a:xfrm>
+            <a:off x="4685998" y="0"/>
+            <a:ext cx="2820003" cy="646331"/>
+          </a:xfrm>
+          <a:prstGeom prst="rect">
+            <a:avLst/>
+          </a:prstGeom>
+          <a:noFill/>
+        </p:spPr>
+        <p:txBody>
+          <a:bodyPr wrap="none" rtlCol="0">
+            <a:spAutoFit/>
+          </a:bodyPr>
+          <a:lstStyle/>
+          <a:p>
+            <a:pPr marL="0" marR="0" lvl="0" indent="0" algn="l" defTabSz="914400" rtl="0" eaLnBrk="1" fontAlgn="auto" latinLnBrk="0" hangingPunct="1">
+              <a:lnSpc>
+                <a:spcPct val="100000"/>
+              </a:lnSpc>
+              <a:spcBef>
+                <a:spcPts val="0"/>
+              </a:spcBef>
+              <a:spcAft>
+                <a:spcPts val="0"/>
+              </a:spcAft>
+              <a:buClrTx/>
+              <a:buSzTx/>
+              <a:buFontTx/>
+              <a:buNone/>
+              <a:tabLst/>
+              <a:defRPr/>
+            </a:pPr>
+            <a:r>
+              <a:rPr kumimoji="0" lang="en-US" sz="3600" b="1" i="0" u="none" strike="noStrike" kern="1200" cap="none" spc="0" normalizeH="0" baseline="0" noProof="0" dirty="0">
+                <a:ln>
+                  <a:noFill/>
+                </a:ln>
+                <a:solidFill>
+                  <a:prstClr val="black"/>
+                </a:solidFill>
+                <a:effectLst/>
+                <a:uLnTx/>
+                <a:uFillTx/>
+                <a:latin typeface="Aptos" panose="02110004020202020204"/>
+                <a:ea typeface="+mn-ea"/>
+                <a:cs typeface="+mn-cs"/>
+              </a:rPr>
+              <a:t>Model Setup</a:t>
+            </a:r>
+          </a:p>
+        </p:txBody>
+      </p:sp>
+      <p:sp>
+        <p:nvSpPr>
+          <p:cNvPr id="8" name="TextBox 7">
+            <a:extLst>
+              <a:ext uri="{FF2B5EF4-FFF2-40B4-BE49-F238E27FC236}">
+                <a16:creationId xmlns:a16="http://schemas.microsoft.com/office/drawing/2014/main" id="{522E30CC-C1C9-3E29-580D-AD3C7B2F6C14}"/>
+              </a:ext>
+            </a:extLst>
+          </p:cNvPr>
+          <p:cNvSpPr txBox="1"/>
+          <p:nvPr/>
+        </p:nvSpPr>
+        <p:spPr>
+          <a:xfrm>
+            <a:off x="4458001" y="1085621"/>
+            <a:ext cx="6096000" cy="523220"/>
+          </a:xfrm>
+          <a:prstGeom prst="rect">
+            <a:avLst/>
+          </a:prstGeom>
+          <a:noFill/>
+        </p:spPr>
+        <p:txBody>
+          <a:bodyPr wrap="square">
+            <a:spAutoFit/>
+          </a:bodyPr>
+          <a:lstStyle/>
+          <a:p>
+            <a:pPr lvl="0"/>
+            <a:r>
+              <a:rPr lang="en-US" sz="2800" b="1" dirty="0">
+                <a:solidFill>
+                  <a:srgbClr val="3333FF"/>
+                </a:solidFill>
+              </a:rPr>
+              <a:t>1- Define Strategy for Assigned User</a:t>
+            </a:r>
+          </a:p>
+        </p:txBody>
+      </p:sp>
+    </p:spTree>
+    <p:extLst>
+      <p:ext uri="{BB962C8B-B14F-4D97-AF65-F5344CB8AC3E}">
+        <p14:creationId xmlns:p14="http://schemas.microsoft.com/office/powerpoint/2010/main" val="3397881947"/>
+      </p:ext>
+    </p:extLst>
+  </p:cSld>
+  <p:clrMapOvr>
+    <a:masterClrMapping/>
+  </p:clrMapOvr>
+</p:sld>
+</file>
+
+<file path=ppt/slides/slide5.xml><?xml version="1.0" encoding="utf-8"?>
+<p:sld xmlns:a="http://schemas.openxmlformats.org/drawingml/2006/main" xmlns:r="http://schemas.openxmlformats.org/officeDocument/2006/relationships" xmlns:p="http://schemas.openxmlformats.org/presentationml/2006/main">
+  <p:cSld>
+    <p:spTree>
+      <p:nvGrpSpPr>
+        <p:cNvPr id="1" name=""/>
+        <p:cNvGrpSpPr/>
+        <p:nvPr/>
+      </p:nvGrpSpPr>
+      <p:grpSpPr>
+        <a:xfrm>
+          <a:off x="0" y="0"/>
+          <a:ext cx="0" cy="0"/>
+          <a:chOff x="0" y="0"/>
+          <a:chExt cx="0" cy="0"/>
+        </a:xfrm>
+      </p:grpSpPr>
+      <p:sp>
+        <p:nvSpPr>
+          <p:cNvPr id="2" name="Title 1">
+            <a:extLst>
+              <a:ext uri="{FF2B5EF4-FFF2-40B4-BE49-F238E27FC236}">
+                <a16:creationId xmlns:a16="http://schemas.microsoft.com/office/drawing/2014/main" id="{677397B9-32DC-1DA8-48FB-77181BAFA5D8}"/>
+              </a:ext>
+            </a:extLst>
+          </p:cNvPr>
+          <p:cNvSpPr>
+            <a:spLocks noGrp="1"/>
+          </p:cNvSpPr>
+          <p:nvPr>
+            <p:ph type="title"/>
+          </p:nvPr>
+        </p:nvSpPr>
+        <p:spPr/>
+        <p:txBody>
+          <a:bodyPr/>
+          <a:lstStyle/>
+          <a:p>
+            <a:endParaRPr lang="en-US" dirty="0"/>
+          </a:p>
+        </p:txBody>
+      </p:sp>
       <p:pic>
         <p:nvPicPr>
-          <p:cNvPr id="6" name="Figure">
+          <p:cNvPr id="9" name="Picture 8">
             <a:extLst>
               <a:ext uri="{FF2B5EF4-FFF2-40B4-BE49-F238E27FC236}">
-                <a16:creationId xmlns:a16="http://schemas.microsoft.com/office/drawing/2014/main" id="{5F862F3C-E790-A522-6942-17FB31B7AAC9}"/>
+                <a16:creationId xmlns:a16="http://schemas.microsoft.com/office/drawing/2014/main" id="{504CD099-FD1D-A9E1-17F7-A5EC85BB4181}"/>
               </a:ext>
             </a:extLst>
           </p:cNvPr>
@@ -8965,10 +13497,10 @@
             <a:fillRect/>
           </a:stretch>
         </p:blipFill>
-        <p:spPr bwMode="auto">
+        <p:spPr>
           <a:xfrm>
-            <a:off x="232617" y="702528"/>
-            <a:ext cx="11782174" cy="5478710"/>
+            <a:off x="1609164" y="1690688"/>
+            <a:ext cx="5627184" cy="2853220"/>
           </a:xfrm>
           <a:prstGeom prst="rect">
             <a:avLst/>
@@ -8978,7 +13510,7 @@
     </p:spTree>
     <p:extLst>
       <p:ext uri="{BB962C8B-B14F-4D97-AF65-F5344CB8AC3E}">
-        <p14:creationId xmlns:p14="http://schemas.microsoft.com/office/powerpoint/2010/main" val="890402765"/>
+        <p14:creationId xmlns:p14="http://schemas.microsoft.com/office/powerpoint/2010/main" val="3049088380"/>
       </p:ext>
     </p:extLst>
   </p:cSld>

--- a/Session Guide/IntroPresentation.pptx
+++ b/Session Guide/IntroPresentation.pptx
@@ -119,22 +119,12 @@
 </p:presentation>
 </file>
 
-<file path=ppt/revisionInfo.xml><?xml version="1.0" encoding="utf-8"?>
-<p1510:revInfo xmlns:a="http://schemas.openxmlformats.org/drawingml/2006/main" xmlns:r="http://schemas.openxmlformats.org/officeDocument/2006/relationships" xmlns:p1510="http://schemas.microsoft.com/office/powerpoint/2015/10/main">
-  <p1510:revLst>
-    <p1510:client id="{690B3A7B-E81C-46E7-8BEC-E514E51C2AA8}" v="1" dt="2026-08-05T22:58:10.210"/>
-    <p1510:client id="{C41AC06A-C952-4FC7-B486-A623EFA36300}" v="6" dt="2026-08-06T17:28:34.917"/>
-    <p1510:client id="{D389C471-0F27-4572-8BC2-E02D89424FF3}" v="21" dt="2026-08-06T18:03:34.597"/>
-  </p1510:revLst>
-</p1510:revInfo>
-</file>
-
 <file path=ppt/changesInfos/changesInfo1.xml><?xml version="1.0" encoding="utf-8"?>
 <pc:chgInfo xmlns:a="http://schemas.openxmlformats.org/drawingml/2006/main" xmlns:r="http://schemas.openxmlformats.org/officeDocument/2006/relationships" xmlns:ac="http://schemas.microsoft.com/office/drawing/2013/main/command" xmlns:pc="http://schemas.microsoft.com/office/powerpoint/2013/main/command">
   <pc:docChgLst>
     <pc:chgData name="Hadia Akbar" userId="19362115565_tp_box_2" providerId="OAuth2" clId="{FF77DECD-7ECC-48F4-BF82-9D4D4E0BE774}"/>
     <pc:docChg chg="undo redo custSel addSld delSld modSld sldOrd delMainMaster">
-      <pc:chgData name="Hadia Akbar" userId="19362115565_tp_box_2" providerId="OAuth2" clId="{FF77DECD-7ECC-48F4-BF82-9D4D4E0BE774}" dt="2026-08-06T18:04:11.900" v="2191" actId="1076"/>
+      <pc:chgData name="Hadia Akbar" userId="19362115565_tp_box_2" providerId="OAuth2" clId="{FF77DECD-7ECC-48F4-BF82-9D4D4E0BE774}" dt="2026-08-14T20:36:10.797" v="2217" actId="1076"/>
       <pc:docMkLst>
         <pc:docMk/>
       </pc:docMkLst>
@@ -158,126 +148,6 @@
             <pc:docMk/>
             <pc:sldMk cId="4246612416" sldId="256"/>
             <ac:spMk id="3" creationId="{AAFA9286-92DA-528E-C4BD-BD456C809191}"/>
-          </ac:spMkLst>
-        </pc:spChg>
-        <pc:spChg chg="add del">
-          <ac:chgData name="Hadia Akbar" userId="19362115565_tp_box_2" providerId="OAuth2" clId="{FF77DECD-7ECC-48F4-BF82-9D4D4E0BE774}" dt="2026-08-06T17:25:35.069" v="1878" actId="26606"/>
-          <ac:spMkLst>
-            <pc:docMk/>
-            <pc:sldMk cId="4246612416" sldId="256"/>
-            <ac:spMk id="7" creationId="{55666830-9A19-4E01-8505-D6C7F9AC5665}"/>
-          </ac:spMkLst>
-        </pc:spChg>
-        <pc:spChg chg="add del">
-          <ac:chgData name="Hadia Akbar" userId="19362115565_tp_box_2" providerId="OAuth2" clId="{FF77DECD-7ECC-48F4-BF82-9D4D4E0BE774}" dt="2026-08-06T17:25:35.069" v="1878" actId="26606"/>
-          <ac:spMkLst>
-            <pc:docMk/>
-            <pc:sldMk cId="4246612416" sldId="256"/>
-            <ac:spMk id="9" creationId="{AE9FC877-7FB6-4D22-9988-35420644E202}"/>
-          </ac:spMkLst>
-        </pc:spChg>
-        <pc:spChg chg="add del">
-          <ac:chgData name="Hadia Akbar" userId="19362115565_tp_box_2" providerId="OAuth2" clId="{FF77DECD-7ECC-48F4-BF82-9D4D4E0BE774}" dt="2026-08-06T17:25:35.069" v="1878" actId="26606"/>
-          <ac:spMkLst>
-            <pc:docMk/>
-            <pc:sldMk cId="4246612416" sldId="256"/>
-            <ac:spMk id="11" creationId="{E41809D1-F12E-46BB-B804-5F209D325E8B}"/>
-          </ac:spMkLst>
-        </pc:spChg>
-        <pc:spChg chg="add del">
-          <ac:chgData name="Hadia Akbar" userId="19362115565_tp_box_2" providerId="OAuth2" clId="{FF77DECD-7ECC-48F4-BF82-9D4D4E0BE774}" dt="2026-08-06T17:25:35.069" v="1878" actId="26606"/>
-          <ac:spMkLst>
-            <pc:docMk/>
-            <pc:sldMk cId="4246612416" sldId="256"/>
-            <ac:spMk id="16" creationId="{AF2F604E-43BE-4DC3-B983-E071523364F8}"/>
-          </ac:spMkLst>
-        </pc:spChg>
-        <pc:spChg chg="add del">
-          <ac:chgData name="Hadia Akbar" userId="19362115565_tp_box_2" providerId="OAuth2" clId="{FF77DECD-7ECC-48F4-BF82-9D4D4E0BE774}" dt="2026-08-06T17:25:52.923" v="1887" actId="26606"/>
-          <ac:spMkLst>
-            <pc:docMk/>
-            <pc:sldMk cId="4246612416" sldId="256"/>
-            <ac:spMk id="23" creationId="{A8384FB5-9ADC-4DDC-881B-597D56F5B15D}"/>
-          </ac:spMkLst>
-        </pc:spChg>
-        <pc:spChg chg="add del">
-          <ac:chgData name="Hadia Akbar" userId="19362115565_tp_box_2" providerId="OAuth2" clId="{FF77DECD-7ECC-48F4-BF82-9D4D4E0BE774}" dt="2026-08-06T17:25:52.923" v="1887" actId="26606"/>
-          <ac:spMkLst>
-            <pc:docMk/>
-            <pc:sldMk cId="4246612416" sldId="256"/>
-            <ac:spMk id="25" creationId="{BC05CA36-AD6A-4ABF-9A05-52E5A143D2BB}"/>
-          </ac:spMkLst>
-        </pc:spChg>
-        <pc:spChg chg="add del">
-          <ac:chgData name="Hadia Akbar" userId="19362115565_tp_box_2" providerId="OAuth2" clId="{FF77DECD-7ECC-48F4-BF82-9D4D4E0BE774}" dt="2026-08-06T17:25:52.923" v="1887" actId="26606"/>
-          <ac:spMkLst>
-            <pc:docMk/>
-            <pc:sldMk cId="4246612416" sldId="256"/>
-            <ac:spMk id="27" creationId="{D4331EE8-85A4-4588-8D9E-70E534D477DB}"/>
-          </ac:spMkLst>
-        </pc:spChg>
-        <pc:spChg chg="add del">
-          <ac:chgData name="Hadia Akbar" userId="19362115565_tp_box_2" providerId="OAuth2" clId="{FF77DECD-7ECC-48F4-BF82-9D4D4E0BE774}" dt="2026-08-06T17:25:52.923" v="1887" actId="26606"/>
-          <ac:spMkLst>
-            <pc:docMk/>
-            <pc:sldMk cId="4246612416" sldId="256"/>
-            <ac:spMk id="29" creationId="{49D6C862-61CC-4B46-8080-96583D653BAB}"/>
-          </ac:spMkLst>
-        </pc:spChg>
-        <pc:spChg chg="add del">
-          <ac:chgData name="Hadia Akbar" userId="19362115565_tp_box_2" providerId="OAuth2" clId="{FF77DECD-7ECC-48F4-BF82-9D4D4E0BE774}" dt="2026-08-06T17:25:52.923" v="1886" actId="26606"/>
-          <ac:spMkLst>
-            <pc:docMk/>
-            <pc:sldMk cId="4246612416" sldId="256"/>
-            <ac:spMk id="31" creationId="{E37EECFC-A684-4391-AE85-4CDAF5565F61}"/>
-          </ac:spMkLst>
-        </pc:spChg>
-        <pc:spChg chg="add del">
-          <ac:chgData name="Hadia Akbar" userId="19362115565_tp_box_2" providerId="OAuth2" clId="{FF77DECD-7ECC-48F4-BF82-9D4D4E0BE774}" dt="2026-08-06T17:25:52.569" v="1884" actId="26606"/>
-          <ac:spMkLst>
-            <pc:docMk/>
-            <pc:sldMk cId="4246612416" sldId="256"/>
-            <ac:spMk id="38" creationId="{C3D487F7-9050-4871-B351-34A72ADB296C}"/>
-          </ac:spMkLst>
-        </pc:spChg>
-        <pc:spChg chg="add del">
-          <ac:chgData name="Hadia Akbar" userId="19362115565_tp_box_2" providerId="OAuth2" clId="{FF77DECD-7ECC-48F4-BF82-9D4D4E0BE774}" dt="2026-08-06T17:25:52.569" v="1884" actId="26606"/>
-          <ac:spMkLst>
-            <pc:docMk/>
-            <pc:sldMk cId="4246612416" sldId="256"/>
-            <ac:spMk id="40" creationId="{F43C27DD-EF6A-4C48-9669-C2970E71A814}"/>
-          </ac:spMkLst>
-        </pc:spChg>
-        <pc:spChg chg="add del">
-          <ac:chgData name="Hadia Akbar" userId="19362115565_tp_box_2" providerId="OAuth2" clId="{FF77DECD-7ECC-48F4-BF82-9D4D4E0BE774}" dt="2026-08-06T17:25:52.569" v="1884" actId="26606"/>
-          <ac:spMkLst>
-            <pc:docMk/>
-            <pc:sldMk cId="4246612416" sldId="256"/>
-            <ac:spMk id="42" creationId="{C84384FE-1C88-4CAA-8FB8-2313A3AE734D}"/>
-          </ac:spMkLst>
-        </pc:spChg>
-        <pc:spChg chg="add del">
-          <ac:chgData name="Hadia Akbar" userId="19362115565_tp_box_2" providerId="OAuth2" clId="{FF77DECD-7ECC-48F4-BF82-9D4D4E0BE774}" dt="2026-08-06T17:25:52.569" v="1884" actId="26606"/>
-          <ac:spMkLst>
-            <pc:docMk/>
-            <pc:sldMk cId="4246612416" sldId="256"/>
-            <ac:spMk id="44" creationId="{87B6A113-58CD-406C-BCE4-6E1F1F2BE696}"/>
-          </ac:spMkLst>
-        </pc:spChg>
-        <pc:spChg chg="add del">
-          <ac:chgData name="Hadia Akbar" userId="19362115565_tp_box_2" providerId="OAuth2" clId="{FF77DECD-7ECC-48F4-BF82-9D4D4E0BE774}" dt="2026-08-06T17:25:52.569" v="1884" actId="26606"/>
-          <ac:spMkLst>
-            <pc:docMk/>
-            <pc:sldMk cId="4246612416" sldId="256"/>
-            <ac:spMk id="46" creationId="{05A1AA86-B7E6-4C02-AA34-F1A25CD4CCBD}"/>
-          </ac:spMkLst>
-        </pc:spChg>
-        <pc:spChg chg="add del">
-          <ac:chgData name="Hadia Akbar" userId="19362115565_tp_box_2" providerId="OAuth2" clId="{FF77DECD-7ECC-48F4-BF82-9D4D4E0BE774}" dt="2026-08-06T17:25:52.923" v="1886" actId="26606"/>
-          <ac:spMkLst>
-            <pc:docMk/>
-            <pc:sldMk cId="4246612416" sldId="256"/>
-            <ac:spMk id="48" creationId="{06DA9DF9-31F7-4056-B42E-878CC92417B8}"/>
           </ac:spMkLst>
         </pc:spChg>
         <pc:spChg chg="add">
@@ -320,66 +190,12 @@
             <ac:spMk id="54" creationId="{E37EECFC-A684-4391-AE85-4CDAF5565F61}"/>
           </ac:spMkLst>
         </pc:spChg>
-        <pc:picChg chg="add del mod ord">
-          <ac:chgData name="Hadia Akbar" userId="19362115565_tp_box_2" providerId="OAuth2" clId="{FF77DECD-7ECC-48F4-BF82-9D4D4E0BE774}" dt="2026-08-06T17:24:46.665" v="1743" actId="478"/>
-          <ac:picMkLst>
-            <pc:docMk/>
-            <pc:sldMk cId="4246612416" sldId="256"/>
-            <ac:picMk id="5" creationId="{04C88557-323E-8174-ED33-F9A1E595A5E0}"/>
-          </ac:picMkLst>
-        </pc:picChg>
         <pc:picChg chg="add mod">
           <ac:chgData name="Hadia Akbar" userId="19362115565_tp_box_2" providerId="OAuth2" clId="{FF77DECD-7ECC-48F4-BF82-9D4D4E0BE774}" dt="2026-08-06T17:25:52.923" v="1886" actId="26606"/>
           <ac:picMkLst>
             <pc:docMk/>
             <pc:sldMk cId="4246612416" sldId="256"/>
             <ac:picMk id="6" creationId="{DB227495-A140-F9B9-9EB3-2A6E168FED00}"/>
-          </ac:picMkLst>
-        </pc:picChg>
-      </pc:sldChg>
-      <pc:sldChg chg="addSp delSp modSp add del mod">
-        <pc:chgData name="Hadia Akbar" userId="19362115565_tp_box_2" providerId="OAuth2" clId="{FF77DECD-7ECC-48F4-BF82-9D4D4E0BE774}" dt="2026-08-06T18:03:26.490" v="2170" actId="47"/>
-        <pc:sldMkLst>
-          <pc:docMk/>
-          <pc:sldMk cId="235461169" sldId="257"/>
-        </pc:sldMkLst>
-        <pc:graphicFrameChg chg="mod">
-          <ac:chgData name="Hadia Akbar" userId="19362115565_tp_box_2" providerId="OAuth2" clId="{FF77DECD-7ECC-48F4-BF82-9D4D4E0BE774}" dt="2026-08-06T17:53:47.053" v="2062"/>
-          <ac:graphicFrameMkLst>
-            <pc:docMk/>
-            <pc:sldMk cId="235461169" sldId="257"/>
-            <ac:graphicFrameMk id="6" creationId="{C011B49A-A7CA-8A64-8EE8-705D843C87C8}"/>
-          </ac:graphicFrameMkLst>
-        </pc:graphicFrameChg>
-        <pc:picChg chg="add del">
-          <ac:chgData name="Hadia Akbar" userId="19362115565_tp_box_2" providerId="OAuth2" clId="{FF77DECD-7ECC-48F4-BF82-9D4D4E0BE774}" dt="2026-08-06T17:53:37.069" v="2061" actId="478"/>
-          <ac:picMkLst>
-            <pc:docMk/>
-            <pc:sldMk cId="235461169" sldId="257"/>
-            <ac:picMk id="4" creationId="{DE05265B-DD07-4A86-3EF2-01605D6C02D4}"/>
-          </ac:picMkLst>
-        </pc:picChg>
-        <pc:picChg chg="add del">
-          <ac:chgData name="Hadia Akbar" userId="19362115565_tp_box_2" providerId="OAuth2" clId="{FF77DECD-7ECC-48F4-BF82-9D4D4E0BE774}" dt="2026-08-06T17:53:36.846" v="2060" actId="478"/>
-          <ac:picMkLst>
-            <pc:docMk/>
-            <pc:sldMk cId="235461169" sldId="257"/>
-            <ac:picMk id="10" creationId="{66E918FE-E0FB-7551-5100-FF83D57E226D}"/>
-          </ac:picMkLst>
-        </pc:picChg>
-      </pc:sldChg>
-      <pc:sldChg chg="addSp delSp modSp new del mod ord setBg">
-        <pc:chgData name="Hadia Akbar" userId="19362115565_tp_box_2" providerId="OAuth2" clId="{FF77DECD-7ECC-48F4-BF82-9D4D4E0BE774}" dt="2026-08-06T17:52:28.573" v="2045" actId="47"/>
-        <pc:sldMkLst>
-          <pc:docMk/>
-          <pc:sldMk cId="890402765" sldId="257"/>
-        </pc:sldMkLst>
-        <pc:picChg chg="add mod">
-          <ac:chgData name="Hadia Akbar" userId="19362115565_tp_box_2" providerId="OAuth2" clId="{FF77DECD-7ECC-48F4-BF82-9D4D4E0BE774}" dt="2026-08-05T22:58:40.700" v="1715" actId="14100"/>
-          <ac:picMkLst>
-            <pc:docMk/>
-            <pc:sldMk cId="890402765" sldId="257"/>
-            <ac:picMk id="6" creationId="{5F862F3C-E790-A522-6942-17FB31B7AAC9}"/>
           </ac:picMkLst>
         </pc:picChg>
       </pc:sldChg>
@@ -413,14 +229,6 @@
             <ac:graphicFrameMk id="4" creationId="{D3FC7B2A-B870-FA58-8FAD-CE5871DD6A60}"/>
           </ac:graphicFrameMkLst>
         </pc:graphicFrameChg>
-        <pc:picChg chg="add del">
-          <ac:chgData name="Hadia Akbar" userId="19362115565_tp_box_2" providerId="OAuth2" clId="{FF77DECD-7ECC-48F4-BF82-9D4D4E0BE774}" dt="2026-08-06T17:53:03.779" v="2047" actId="22"/>
-          <ac:picMkLst>
-            <pc:docMk/>
-            <pc:sldMk cId="3397881947" sldId="258"/>
-            <ac:picMk id="6" creationId="{0BD05A0F-E136-6927-2665-F65D0A5FD35B}"/>
-          </ac:picMkLst>
-        </pc:picChg>
       </pc:sldChg>
       <pc:sldChg chg="addSp delSp modSp new mod ord setBg addAnim delAnim delDesignElem">
         <pc:chgData name="Hadia Akbar" userId="19362115565_tp_box_2" providerId="OAuth2" clId="{FF77DECD-7ECC-48F4-BF82-9D4D4E0BE774}" dt="2026-08-06T17:43:26.877" v="2042"/>
@@ -450,14 +258,6 @@
             <pc:docMk/>
             <pc:sldMk cId="1480586688" sldId="260"/>
             <ac:picMk id="18" creationId="{E9E2FD9A-CEC4-149A-7AA0-B9A9435CC662}"/>
-          </ac:picMkLst>
-        </pc:picChg>
-        <pc:picChg chg="add del mod">
-          <ac:chgData name="Hadia Akbar" userId="19362115565_tp_box_2" providerId="OAuth2" clId="{FF77DECD-7ECC-48F4-BF82-9D4D4E0BE774}" dt="2026-08-06T17:22:57.696" v="1725" actId="478"/>
-          <ac:picMkLst>
-            <pc:docMk/>
-            <pc:sldMk cId="1480586688" sldId="260"/>
-            <ac:picMk id="25" creationId="{AF508137-52D0-BAA5-C5E1-222AC5704542}"/>
           </ac:picMkLst>
         </pc:picChg>
       </pc:sldChg>
@@ -509,7 +309,7 @@
         </pc:graphicFrameChg>
       </pc:sldChg>
       <pc:sldChg chg="addSp delSp modSp new mod">
-        <pc:chgData name="Hadia Akbar" userId="19362115565_tp_box_2" providerId="OAuth2" clId="{FF77DECD-7ECC-48F4-BF82-9D4D4E0BE774}" dt="2026-08-06T18:04:11.900" v="2191" actId="1076"/>
+        <pc:chgData name="Hadia Akbar" userId="19362115565_tp_box_2" providerId="OAuth2" clId="{FF77DECD-7ECC-48F4-BF82-9D4D4E0BE774}" dt="2026-08-14T20:36:10.797" v="2217" actId="1076"/>
         <pc:sldMkLst>
           <pc:docMk/>
           <pc:sldMk cId="3049088380" sldId="263"/>
@@ -522,166 +322,31 @@
             <ac:spMk id="2" creationId="{677397B9-32DC-1DA8-48FB-77181BAFA5D8}"/>
           </ac:spMkLst>
         </pc:spChg>
-        <pc:spChg chg="del">
-          <ac:chgData name="Hadia Akbar" userId="19362115565_tp_box_2" providerId="OAuth2" clId="{FF77DECD-7ECC-48F4-BF82-9D4D4E0BE774}" dt="2026-08-06T17:59:03.295" v="2157" actId="22"/>
+        <pc:spChg chg="add mod">
+          <ac:chgData name="Hadia Akbar" userId="19362115565_tp_box_2" providerId="OAuth2" clId="{FF77DECD-7ECC-48F4-BF82-9D4D4E0BE774}" dt="2026-08-14T20:35:38.352" v="2204" actId="14100"/>
           <ac:spMkLst>
             <pc:docMk/>
             <pc:sldMk cId="3049088380" sldId="263"/>
-            <ac:spMk id="3" creationId="{FFE6C4C1-8FDB-0727-F9F3-1462F2116C93}"/>
+            <ac:spMk id="3" creationId="{64416FE0-0F99-AABE-B94A-DFB9232898A5}"/>
           </ac:spMkLst>
         </pc:spChg>
-        <pc:spChg chg="add del mod">
-          <ac:chgData name="Hadia Akbar" userId="19362115565_tp_box_2" providerId="OAuth2" clId="{FF77DECD-7ECC-48F4-BF82-9D4D4E0BE774}" dt="2026-08-06T18:00:19.214" v="2165" actId="478"/>
+        <pc:spChg chg="add mod">
+          <ac:chgData name="Hadia Akbar" userId="19362115565_tp_box_2" providerId="OAuth2" clId="{FF77DECD-7ECC-48F4-BF82-9D4D4E0BE774}" dt="2026-08-14T20:36:10.797" v="2217" actId="1076"/>
           <ac:spMkLst>
             <pc:docMk/>
             <pc:sldMk cId="3049088380" sldId="263"/>
-            <ac:spMk id="7" creationId="{BA761D6F-50C2-58CD-4665-5B1AC974E50C}"/>
+            <ac:spMk id="5" creationId="{058C039E-4B72-D823-6332-3B3D9121B1D9}"/>
           </ac:spMkLst>
         </pc:spChg>
-        <pc:picChg chg="add del mod">
-          <ac:chgData name="Hadia Akbar" userId="19362115565_tp_box_2" providerId="OAuth2" clId="{FF77DECD-7ECC-48F4-BF82-9D4D4E0BE774}" dt="2026-08-05T01:52:09.334" v="1489" actId="478"/>
-          <ac:picMkLst>
-            <pc:docMk/>
-            <pc:sldMk cId="3049088380" sldId="263"/>
-            <ac:picMk id="5" creationId="{2DCF294D-696E-B3E7-B4DB-73824B2BC177}"/>
-          </ac:picMkLst>
-        </pc:picChg>
-        <pc:picChg chg="add del mod ord">
-          <ac:chgData name="Hadia Akbar" userId="19362115565_tp_box_2" providerId="OAuth2" clId="{FF77DECD-7ECC-48F4-BF82-9D4D4E0BE774}" dt="2026-08-06T17:59:58.011" v="2161" actId="478"/>
-          <ac:picMkLst>
-            <pc:docMk/>
-            <pc:sldMk cId="3049088380" sldId="263"/>
-            <ac:picMk id="5" creationId="{B07AB3D5-5574-B36A-BB19-BD3B5431A5C2}"/>
-          </ac:picMkLst>
-        </pc:picChg>
-        <pc:picChg chg="add del mod">
-          <ac:chgData name="Hadia Akbar" userId="19362115565_tp_box_2" providerId="OAuth2" clId="{FF77DECD-7ECC-48F4-BF82-9D4D4E0BE774}" dt="2026-08-05T01:56:48.616" v="1504" actId="478"/>
-          <ac:picMkLst>
-            <pc:docMk/>
-            <pc:sldMk cId="3049088380" sldId="263"/>
-            <ac:picMk id="7" creationId="{966DD079-845D-F6BA-0776-163B243F519A}"/>
-          </ac:picMkLst>
-        </pc:picChg>
         <pc:picChg chg="add mod">
-          <ac:chgData name="Hadia Akbar" userId="19362115565_tp_box_2" providerId="OAuth2" clId="{FF77DECD-7ECC-48F4-BF82-9D4D4E0BE774}" dt="2026-08-06T18:04:11.900" v="2191" actId="1076"/>
+          <ac:chgData name="Hadia Akbar" userId="19362115565_tp_box_2" providerId="OAuth2" clId="{FF77DECD-7ECC-48F4-BF82-9D4D4E0BE774}" dt="2026-08-14T20:35:55.355" v="2212" actId="1076"/>
           <ac:picMkLst>
             <pc:docMk/>
             <pc:sldMk cId="3049088380" sldId="263"/>
             <ac:picMk id="9" creationId="{504CD099-FD1D-A9E1-17F7-A5EC85BB4181}"/>
           </ac:picMkLst>
         </pc:picChg>
-        <pc:picChg chg="add del">
-          <ac:chgData name="Hadia Akbar" userId="19362115565_tp_box_2" providerId="OAuth2" clId="{FF77DECD-7ECC-48F4-BF82-9D4D4E0BE774}" dt="2026-08-05T01:56:46.597" v="1503" actId="478"/>
-          <ac:picMkLst>
-            <pc:docMk/>
-            <pc:sldMk cId="3049088380" sldId="263"/>
-            <ac:picMk id="9" creationId="{65C44170-AD83-CE40-01F4-39C7DBBA4A43}"/>
-          </ac:picMkLst>
-        </pc:picChg>
-        <pc:picChg chg="add del mod">
-          <ac:chgData name="Hadia Akbar" userId="19362115565_tp_box_2" providerId="OAuth2" clId="{FF77DECD-7ECC-48F4-BF82-9D4D4E0BE774}" dt="2026-08-06T18:00:23.512" v="2166" actId="478"/>
-          <ac:picMkLst>
-            <pc:docMk/>
-            <pc:sldMk cId="3049088380" sldId="263"/>
-            <ac:picMk id="11" creationId="{C917D0C1-D200-6845-C03F-81BCEF6EA8D6}"/>
-          </ac:picMkLst>
-        </pc:picChg>
       </pc:sldChg>
-      <pc:sldMasterChg chg="del delSldLayout">
-        <pc:chgData name="Hadia Akbar" userId="19362115565_tp_box_2" providerId="OAuth2" clId="{FF77DECD-7ECC-48F4-BF82-9D4D4E0BE774}" dt="2026-08-06T18:03:26.490" v="2170" actId="47"/>
-        <pc:sldMasterMkLst>
-          <pc:docMk/>
-          <pc:sldMasterMk cId="1811082288" sldId="2147483660"/>
-        </pc:sldMasterMkLst>
-        <pc:sldLayoutChg chg="del">
-          <pc:chgData name="Hadia Akbar" userId="19362115565_tp_box_2" providerId="OAuth2" clId="{FF77DECD-7ECC-48F4-BF82-9D4D4E0BE774}" dt="2026-08-06T18:03:26.490" v="2170" actId="47"/>
-          <pc:sldLayoutMkLst>
-            <pc:docMk/>
-            <pc:sldMasterMk cId="1811082288" sldId="2147483660"/>
-            <pc:sldLayoutMk cId="858527832" sldId="2147483661"/>
-          </pc:sldLayoutMkLst>
-        </pc:sldLayoutChg>
-        <pc:sldLayoutChg chg="del">
-          <pc:chgData name="Hadia Akbar" userId="19362115565_tp_box_2" providerId="OAuth2" clId="{FF77DECD-7ECC-48F4-BF82-9D4D4E0BE774}" dt="2026-08-06T18:03:26.490" v="2170" actId="47"/>
-          <pc:sldLayoutMkLst>
-            <pc:docMk/>
-            <pc:sldMasterMk cId="1811082288" sldId="2147483660"/>
-            <pc:sldLayoutMk cId="3388879508" sldId="2147483662"/>
-          </pc:sldLayoutMkLst>
-        </pc:sldLayoutChg>
-        <pc:sldLayoutChg chg="del">
-          <pc:chgData name="Hadia Akbar" userId="19362115565_tp_box_2" providerId="OAuth2" clId="{FF77DECD-7ECC-48F4-BF82-9D4D4E0BE774}" dt="2026-08-06T18:03:26.490" v="2170" actId="47"/>
-          <pc:sldLayoutMkLst>
-            <pc:docMk/>
-            <pc:sldMasterMk cId="1811082288" sldId="2147483660"/>
-            <pc:sldLayoutMk cId="592097471" sldId="2147483663"/>
-          </pc:sldLayoutMkLst>
-        </pc:sldLayoutChg>
-        <pc:sldLayoutChg chg="del">
-          <pc:chgData name="Hadia Akbar" userId="19362115565_tp_box_2" providerId="OAuth2" clId="{FF77DECD-7ECC-48F4-BF82-9D4D4E0BE774}" dt="2026-08-06T18:03:26.490" v="2170" actId="47"/>
-          <pc:sldLayoutMkLst>
-            <pc:docMk/>
-            <pc:sldMasterMk cId="1811082288" sldId="2147483660"/>
-            <pc:sldLayoutMk cId="2487724214" sldId="2147483664"/>
-          </pc:sldLayoutMkLst>
-        </pc:sldLayoutChg>
-        <pc:sldLayoutChg chg="del">
-          <pc:chgData name="Hadia Akbar" userId="19362115565_tp_box_2" providerId="OAuth2" clId="{FF77DECD-7ECC-48F4-BF82-9D4D4E0BE774}" dt="2026-08-06T18:03:26.490" v="2170" actId="47"/>
-          <pc:sldLayoutMkLst>
-            <pc:docMk/>
-            <pc:sldMasterMk cId="1811082288" sldId="2147483660"/>
-            <pc:sldLayoutMk cId="3101536712" sldId="2147483665"/>
-          </pc:sldLayoutMkLst>
-        </pc:sldLayoutChg>
-        <pc:sldLayoutChg chg="del">
-          <pc:chgData name="Hadia Akbar" userId="19362115565_tp_box_2" providerId="OAuth2" clId="{FF77DECD-7ECC-48F4-BF82-9D4D4E0BE774}" dt="2026-08-06T18:03:26.490" v="2170" actId="47"/>
-          <pc:sldLayoutMkLst>
-            <pc:docMk/>
-            <pc:sldMasterMk cId="1811082288" sldId="2147483660"/>
-            <pc:sldLayoutMk cId="83738167" sldId="2147483666"/>
-          </pc:sldLayoutMkLst>
-        </pc:sldLayoutChg>
-        <pc:sldLayoutChg chg="del">
-          <pc:chgData name="Hadia Akbar" userId="19362115565_tp_box_2" providerId="OAuth2" clId="{FF77DECD-7ECC-48F4-BF82-9D4D4E0BE774}" dt="2026-08-06T18:03:26.490" v="2170" actId="47"/>
-          <pc:sldLayoutMkLst>
-            <pc:docMk/>
-            <pc:sldMasterMk cId="1811082288" sldId="2147483660"/>
-            <pc:sldLayoutMk cId="3714056911" sldId="2147483667"/>
-          </pc:sldLayoutMkLst>
-        </pc:sldLayoutChg>
-        <pc:sldLayoutChg chg="del">
-          <pc:chgData name="Hadia Akbar" userId="19362115565_tp_box_2" providerId="OAuth2" clId="{FF77DECD-7ECC-48F4-BF82-9D4D4E0BE774}" dt="2026-08-06T18:03:26.490" v="2170" actId="47"/>
-          <pc:sldLayoutMkLst>
-            <pc:docMk/>
-            <pc:sldMasterMk cId="1811082288" sldId="2147483660"/>
-            <pc:sldLayoutMk cId="4157770685" sldId="2147483668"/>
-          </pc:sldLayoutMkLst>
-        </pc:sldLayoutChg>
-        <pc:sldLayoutChg chg="del">
-          <pc:chgData name="Hadia Akbar" userId="19362115565_tp_box_2" providerId="OAuth2" clId="{FF77DECD-7ECC-48F4-BF82-9D4D4E0BE774}" dt="2026-08-06T18:03:26.490" v="2170" actId="47"/>
-          <pc:sldLayoutMkLst>
-            <pc:docMk/>
-            <pc:sldMasterMk cId="1811082288" sldId="2147483660"/>
-            <pc:sldLayoutMk cId="468236508" sldId="2147483669"/>
-          </pc:sldLayoutMkLst>
-        </pc:sldLayoutChg>
-        <pc:sldLayoutChg chg="del">
-          <pc:chgData name="Hadia Akbar" userId="19362115565_tp_box_2" providerId="OAuth2" clId="{FF77DECD-7ECC-48F4-BF82-9D4D4E0BE774}" dt="2026-08-06T18:03:26.490" v="2170" actId="47"/>
-          <pc:sldLayoutMkLst>
-            <pc:docMk/>
-            <pc:sldMasterMk cId="1811082288" sldId="2147483660"/>
-            <pc:sldLayoutMk cId="3331122569" sldId="2147483670"/>
-          </pc:sldLayoutMkLst>
-        </pc:sldLayoutChg>
-        <pc:sldLayoutChg chg="del">
-          <pc:chgData name="Hadia Akbar" userId="19362115565_tp_box_2" providerId="OAuth2" clId="{FF77DECD-7ECC-48F4-BF82-9D4D4E0BE774}" dt="2026-08-06T18:03:26.490" v="2170" actId="47"/>
-          <pc:sldLayoutMkLst>
-            <pc:docMk/>
-            <pc:sldMasterMk cId="1811082288" sldId="2147483660"/>
-            <pc:sldLayoutMk cId="3414839042" sldId="2147483671"/>
-          </pc:sldLayoutMkLst>
-        </pc:sldLayoutChg>
-      </pc:sldMasterChg>
     </pc:docChg>
   </pc:docChgLst>
 </pc:chgInfo>
@@ -8291,7 +7956,7 @@
           <a:p>
             <a:fld id="{23F5F05C-4C32-48D7-B5AA-52291E739591}" type="datetimeFigureOut">
               <a:rPr lang="en-US" smtClean="0"/>
-              <a:t>8/6/2026</a:t>
+              <a:t>8/14/2026</a:t>
             </a:fld>
             <a:endParaRPr lang="en-US"/>
           </a:p>
@@ -8933,7 +8598,7 @@
           <a:p>
             <a:fld id="{5518E2ED-ACDD-48AE-BEAE-F9B835E4D922}" type="datetimeFigureOut">
               <a:rPr lang="en-US" smtClean="0"/>
-              <a:t>8/6/2026</a:t>
+              <a:t>8/14/2026</a:t>
             </a:fld>
             <a:endParaRPr lang="en-US"/>
           </a:p>
@@ -9131,7 +8796,7 @@
           <a:p>
             <a:fld id="{5518E2ED-ACDD-48AE-BEAE-F9B835E4D922}" type="datetimeFigureOut">
               <a:rPr lang="en-US" smtClean="0"/>
-              <a:t>8/6/2026</a:t>
+              <a:t>8/14/2026</a:t>
             </a:fld>
             <a:endParaRPr lang="en-US"/>
           </a:p>
@@ -9339,7 +9004,7 @@
           <a:p>
             <a:fld id="{5518E2ED-ACDD-48AE-BEAE-F9B835E4D922}" type="datetimeFigureOut">
               <a:rPr lang="en-US" smtClean="0"/>
-              <a:t>8/6/2026</a:t>
+              <a:t>8/14/2026</a:t>
             </a:fld>
             <a:endParaRPr lang="en-US"/>
           </a:p>
@@ -9537,7 +9202,7 @@
           <a:p>
             <a:fld id="{5518E2ED-ACDD-48AE-BEAE-F9B835E4D922}" type="datetimeFigureOut">
               <a:rPr lang="en-US" smtClean="0"/>
-              <a:t>8/6/2026</a:t>
+              <a:t>8/14/2026</a:t>
             </a:fld>
             <a:endParaRPr lang="en-US"/>
           </a:p>
@@ -9812,7 +9477,7 @@
           <a:p>
             <a:fld id="{5518E2ED-ACDD-48AE-BEAE-F9B835E4D922}" type="datetimeFigureOut">
               <a:rPr lang="en-US" smtClean="0"/>
-              <a:t>8/6/2026</a:t>
+              <a:t>8/14/2026</a:t>
             </a:fld>
             <a:endParaRPr lang="en-US"/>
           </a:p>
@@ -10077,7 +9742,7 @@
           <a:p>
             <a:fld id="{5518E2ED-ACDD-48AE-BEAE-F9B835E4D922}" type="datetimeFigureOut">
               <a:rPr lang="en-US" smtClean="0"/>
-              <a:t>8/6/2026</a:t>
+              <a:t>8/14/2026</a:t>
             </a:fld>
             <a:endParaRPr lang="en-US"/>
           </a:p>
@@ -10489,7 +10154,7 @@
           <a:p>
             <a:fld id="{5518E2ED-ACDD-48AE-BEAE-F9B835E4D922}" type="datetimeFigureOut">
               <a:rPr lang="en-US" smtClean="0"/>
-              <a:t>8/6/2026</a:t>
+              <a:t>8/14/2026</a:t>
             </a:fld>
             <a:endParaRPr lang="en-US"/>
           </a:p>
@@ -10630,7 +10295,7 @@
           <a:p>
             <a:fld id="{5518E2ED-ACDD-48AE-BEAE-F9B835E4D922}" type="datetimeFigureOut">
               <a:rPr lang="en-US" smtClean="0"/>
-              <a:t>8/6/2026</a:t>
+              <a:t>8/14/2026</a:t>
             </a:fld>
             <a:endParaRPr lang="en-US"/>
           </a:p>
@@ -10743,7 +10408,7 @@
           <a:p>
             <a:fld id="{5518E2ED-ACDD-48AE-BEAE-F9B835E4D922}" type="datetimeFigureOut">
               <a:rPr lang="en-US" smtClean="0"/>
-              <a:t>8/6/2026</a:t>
+              <a:t>8/14/2026</a:t>
             </a:fld>
             <a:endParaRPr lang="en-US"/>
           </a:p>
@@ -11054,7 +10719,7 @@
           <a:p>
             <a:fld id="{5518E2ED-ACDD-48AE-BEAE-F9B835E4D922}" type="datetimeFigureOut">
               <a:rPr lang="en-US" smtClean="0"/>
-              <a:t>8/6/2026</a:t>
+              <a:t>8/14/2026</a:t>
             </a:fld>
             <a:endParaRPr lang="en-US"/>
           </a:p>
@@ -11342,7 +11007,7 @@
           <a:p>
             <a:fld id="{5518E2ED-ACDD-48AE-BEAE-F9B835E4D922}" type="datetimeFigureOut">
               <a:rPr lang="en-US" smtClean="0"/>
-              <a:t>8/6/2026</a:t>
+              <a:t>8/14/2026</a:t>
             </a:fld>
             <a:endParaRPr lang="en-US"/>
           </a:p>
@@ -11583,7 +11248,7 @@
           <a:p>
             <a:fld id="{5518E2ED-ACDD-48AE-BEAE-F9B835E4D922}" type="datetimeFigureOut">
               <a:rPr lang="en-US" smtClean="0"/>
-              <a:t>8/6/2026</a:t>
+              <a:t>8/14/2026</a:t>
             </a:fld>
             <a:endParaRPr lang="en-US"/>
           </a:p>
@@ -13499,7 +13164,7 @@
         </p:blipFill>
         <p:spPr>
           <a:xfrm>
-            <a:off x="1609164" y="1690688"/>
+            <a:off x="3007658" y="2183747"/>
             <a:ext cx="5627184" cy="2853220"/>
           </a:xfrm>
           <a:prstGeom prst="rect">
@@ -13507,6 +13172,110 @@
           </a:prstGeom>
         </p:spPr>
       </p:pic>
+      <p:sp>
+        <p:nvSpPr>
+          <p:cNvPr id="3" name="Rectangle 2">
+            <a:extLst>
+              <a:ext uri="{FF2B5EF4-FFF2-40B4-BE49-F238E27FC236}">
+                <a16:creationId xmlns:a16="http://schemas.microsoft.com/office/drawing/2014/main" id="{64416FE0-0F99-AABE-B94A-DFB9232898A5}"/>
+              </a:ext>
+            </a:extLst>
+          </p:cNvPr>
+          <p:cNvSpPr/>
+          <p:nvPr/>
+        </p:nvSpPr>
+        <p:spPr>
+          <a:xfrm>
+            <a:off x="5593976" y="2581837"/>
+            <a:ext cx="2922495" cy="430304"/>
+          </a:xfrm>
+          <a:prstGeom prst="rect">
+            <a:avLst/>
+          </a:prstGeom>
+          <a:noFill/>
+          <a:ln w="57150">
+            <a:solidFill>
+              <a:srgbClr val="FF0000"/>
+            </a:solidFill>
+          </a:ln>
+        </p:spPr>
+        <p:style>
+          <a:lnRef idx="2">
+            <a:schemeClr val="accent1">
+              <a:shade val="15000"/>
+            </a:schemeClr>
+          </a:lnRef>
+          <a:fillRef idx="1">
+            <a:schemeClr val="accent1"/>
+          </a:fillRef>
+          <a:effectRef idx="0">
+            <a:schemeClr val="accent1"/>
+          </a:effectRef>
+          <a:fontRef idx="minor">
+            <a:schemeClr val="lt1"/>
+          </a:fontRef>
+        </p:style>
+        <p:txBody>
+          <a:bodyPr rtlCol="0" anchor="ctr"/>
+          <a:lstStyle/>
+          <a:p>
+            <a:pPr algn="ctr"/>
+            <a:endParaRPr lang="en-US"/>
+          </a:p>
+        </p:txBody>
+      </p:sp>
+      <p:sp>
+        <p:nvSpPr>
+          <p:cNvPr id="5" name="Rectangle 4">
+            <a:extLst>
+              <a:ext uri="{FF2B5EF4-FFF2-40B4-BE49-F238E27FC236}">
+                <a16:creationId xmlns:a16="http://schemas.microsoft.com/office/drawing/2014/main" id="{058C039E-4B72-D823-6332-3B3D9121B1D9}"/>
+              </a:ext>
+            </a:extLst>
+          </p:cNvPr>
+          <p:cNvSpPr/>
+          <p:nvPr/>
+        </p:nvSpPr>
+        <p:spPr>
+          <a:xfrm>
+            <a:off x="5746376" y="2734237"/>
+            <a:ext cx="2922495" cy="430304"/>
+          </a:xfrm>
+          <a:prstGeom prst="rect">
+            <a:avLst/>
+          </a:prstGeom>
+          <a:noFill/>
+          <a:ln w="57150">
+            <a:solidFill>
+              <a:srgbClr val="FF0000"/>
+            </a:solidFill>
+          </a:ln>
+        </p:spPr>
+        <p:style>
+          <a:lnRef idx="2">
+            <a:schemeClr val="accent1">
+              <a:shade val="15000"/>
+            </a:schemeClr>
+          </a:lnRef>
+          <a:fillRef idx="1">
+            <a:schemeClr val="accent1"/>
+          </a:fillRef>
+          <a:effectRef idx="0">
+            <a:schemeClr val="accent1"/>
+          </a:effectRef>
+          <a:fontRef idx="minor">
+            <a:schemeClr val="lt1"/>
+          </a:fontRef>
+        </p:style>
+        <p:txBody>
+          <a:bodyPr rtlCol="0" anchor="ctr"/>
+          <a:lstStyle/>
+          <a:p>
+            <a:pPr algn="ctr"/>
+            <a:endParaRPr lang="en-US"/>
+          </a:p>
+        </p:txBody>
+      </p:sp>
     </p:spTree>
     <p:extLst>
       <p:ext uri="{BB962C8B-B14F-4D97-AF65-F5344CB8AC3E}">

--- a/Session Guide/IntroPresentation.pptx
+++ b/Session Guide/IntroPresentation.pptx
@@ -124,7 +124,7 @@
   <pc:docChgLst>
     <pc:chgData name="Hadia Akbar" userId="19362115565_tp_box_2" providerId="OAuth2" clId="{FF77DECD-7ECC-48F4-BF82-9D4D4E0BE774}"/>
     <pc:docChg chg="undo redo custSel addSld delSld modSld sldOrd delMainMaster">
-      <pc:chgData name="Hadia Akbar" userId="19362115565_tp_box_2" providerId="OAuth2" clId="{FF77DECD-7ECC-48F4-BF82-9D4D4E0BE774}" dt="2026-08-14T20:36:10.797" v="2217" actId="1076"/>
+      <pc:chgData name="Hadia Akbar" userId="19362115565_tp_box_2" providerId="OAuth2" clId="{FF77DECD-7ECC-48F4-BF82-9D4D4E0BE774}" dt="2026-08-18T17:59:39.214" v="2218" actId="1076"/>
       <pc:docMkLst>
         <pc:docMk/>
       </pc:docMkLst>
@@ -309,7 +309,7 @@
         </pc:graphicFrameChg>
       </pc:sldChg>
       <pc:sldChg chg="addSp delSp modSp new mod">
-        <pc:chgData name="Hadia Akbar" userId="19362115565_tp_box_2" providerId="OAuth2" clId="{FF77DECD-7ECC-48F4-BF82-9D4D4E0BE774}" dt="2026-08-14T20:36:10.797" v="2217" actId="1076"/>
+        <pc:chgData name="Hadia Akbar" userId="19362115565_tp_box_2" providerId="OAuth2" clId="{FF77DECD-7ECC-48F4-BF82-9D4D4E0BE774}" dt="2026-08-18T17:59:39.214" v="2218" actId="1076"/>
         <pc:sldMkLst>
           <pc:docMk/>
           <pc:sldMk cId="3049088380" sldId="263"/>
@@ -331,7 +331,7 @@
           </ac:spMkLst>
         </pc:spChg>
         <pc:spChg chg="add mod">
-          <ac:chgData name="Hadia Akbar" userId="19362115565_tp_box_2" providerId="OAuth2" clId="{FF77DECD-7ECC-48F4-BF82-9D4D4E0BE774}" dt="2026-08-14T20:36:10.797" v="2217" actId="1076"/>
+          <ac:chgData name="Hadia Akbar" userId="19362115565_tp_box_2" providerId="OAuth2" clId="{FF77DECD-7ECC-48F4-BF82-9D4D4E0BE774}" dt="2026-08-18T17:59:39.214" v="2218" actId="1076"/>
           <ac:spMkLst>
             <pc:docMk/>
             <pc:sldMk cId="3049088380" sldId="263"/>
@@ -7956,7 +7956,7 @@
           <a:p>
             <a:fld id="{23F5F05C-4C32-48D7-B5AA-52291E739591}" type="datetimeFigureOut">
               <a:rPr lang="en-US" smtClean="0"/>
-              <a:t>8/14/2026</a:t>
+              <a:t>8/18/2026</a:t>
             </a:fld>
             <a:endParaRPr lang="en-US"/>
           </a:p>
@@ -8598,7 +8598,7 @@
           <a:p>
             <a:fld id="{5518E2ED-ACDD-48AE-BEAE-F9B835E4D922}" type="datetimeFigureOut">
               <a:rPr lang="en-US" smtClean="0"/>
-              <a:t>8/14/2026</a:t>
+              <a:t>8/18/2026</a:t>
             </a:fld>
             <a:endParaRPr lang="en-US"/>
           </a:p>
@@ -8796,7 +8796,7 @@
           <a:p>
             <a:fld id="{5518E2ED-ACDD-48AE-BEAE-F9B835E4D922}" type="datetimeFigureOut">
               <a:rPr lang="en-US" smtClean="0"/>
-              <a:t>8/14/2026</a:t>
+              <a:t>8/18/2026</a:t>
             </a:fld>
             <a:endParaRPr lang="en-US"/>
           </a:p>
@@ -9004,7 +9004,7 @@
           <a:p>
             <a:fld id="{5518E2ED-ACDD-48AE-BEAE-F9B835E4D922}" type="datetimeFigureOut">
               <a:rPr lang="en-US" smtClean="0"/>
-              <a:t>8/14/2026</a:t>
+              <a:t>8/18/2026</a:t>
             </a:fld>
             <a:endParaRPr lang="en-US"/>
           </a:p>
@@ -9202,7 +9202,7 @@
           <a:p>
             <a:fld id="{5518E2ED-ACDD-48AE-BEAE-F9B835E4D922}" type="datetimeFigureOut">
               <a:rPr lang="en-US" smtClean="0"/>
-              <a:t>8/14/2026</a:t>
+              <a:t>8/18/2026</a:t>
             </a:fld>
             <a:endParaRPr lang="en-US"/>
           </a:p>
@@ -9477,7 +9477,7 @@
           <a:p>
             <a:fld id="{5518E2ED-ACDD-48AE-BEAE-F9B835E4D922}" type="datetimeFigureOut">
               <a:rPr lang="en-US" smtClean="0"/>
-              <a:t>8/14/2026</a:t>
+              <a:t>8/18/2026</a:t>
             </a:fld>
             <a:endParaRPr lang="en-US"/>
           </a:p>
@@ -9742,7 +9742,7 @@
           <a:p>
             <a:fld id="{5518E2ED-ACDD-48AE-BEAE-F9B835E4D922}" type="datetimeFigureOut">
               <a:rPr lang="en-US" smtClean="0"/>
-              <a:t>8/14/2026</a:t>
+              <a:t>8/18/2026</a:t>
             </a:fld>
             <a:endParaRPr lang="en-US"/>
           </a:p>
@@ -10154,7 +10154,7 @@
           <a:p>
             <a:fld id="{5518E2ED-ACDD-48AE-BEAE-F9B835E4D922}" type="datetimeFigureOut">
               <a:rPr lang="en-US" smtClean="0"/>
-              <a:t>8/14/2026</a:t>
+              <a:t>8/18/2026</a:t>
             </a:fld>
             <a:endParaRPr lang="en-US"/>
           </a:p>
@@ -10295,7 +10295,7 @@
           <a:p>
             <a:fld id="{5518E2ED-ACDD-48AE-BEAE-F9B835E4D922}" type="datetimeFigureOut">
               <a:rPr lang="en-US" smtClean="0"/>
-              <a:t>8/14/2026</a:t>
+              <a:t>8/18/2026</a:t>
             </a:fld>
             <a:endParaRPr lang="en-US"/>
           </a:p>
@@ -10408,7 +10408,7 @@
           <a:p>
             <a:fld id="{5518E2ED-ACDD-48AE-BEAE-F9B835E4D922}" type="datetimeFigureOut">
               <a:rPr lang="en-US" smtClean="0"/>
-              <a:t>8/14/2026</a:t>
+              <a:t>8/18/2026</a:t>
             </a:fld>
             <a:endParaRPr lang="en-US"/>
           </a:p>
@@ -10719,7 +10719,7 @@
           <a:p>
             <a:fld id="{5518E2ED-ACDD-48AE-BEAE-F9B835E4D922}" type="datetimeFigureOut">
               <a:rPr lang="en-US" smtClean="0"/>
-              <a:t>8/14/2026</a:t>
+              <a:t>8/18/2026</a:t>
             </a:fld>
             <a:endParaRPr lang="en-US"/>
           </a:p>
@@ -11007,7 +11007,7 @@
           <a:p>
             <a:fld id="{5518E2ED-ACDD-48AE-BEAE-F9B835E4D922}" type="datetimeFigureOut">
               <a:rPr lang="en-US" smtClean="0"/>
-              <a:t>8/14/2026</a:t>
+              <a:t>8/18/2026</a:t>
             </a:fld>
             <a:endParaRPr lang="en-US"/>
           </a:p>
@@ -11248,7 +11248,7 @@
           <a:p>
             <a:fld id="{5518E2ED-ACDD-48AE-BEAE-F9B835E4D922}" type="datetimeFigureOut">
               <a:rPr lang="en-US" smtClean="0"/>
-              <a:t>8/14/2026</a:t>
+              <a:t>8/18/2026</a:t>
             </a:fld>
             <a:endParaRPr lang="en-US"/>
           </a:p>
@@ -13238,7 +13238,7 @@
         </p:nvSpPr>
         <p:spPr>
           <a:xfrm>
-            <a:off x="5746376" y="2734237"/>
+            <a:off x="5360893" y="3845860"/>
             <a:ext cx="2922495" cy="430304"/>
           </a:xfrm>
           <a:prstGeom prst="rect">

--- a/Session Guide/IntroPresentation.pptx
+++ b/Session Guide/IntroPresentation.pptx
@@ -119,12 +119,20 @@
 </p:presentation>
 </file>
 
+<file path=ppt/revisionInfo.xml><?xml version="1.0" encoding="utf-8"?>
+<p1510:revInfo xmlns:a="http://schemas.openxmlformats.org/drawingml/2006/main" xmlns:r="http://schemas.openxmlformats.org/officeDocument/2006/relationships" xmlns:p1510="http://schemas.microsoft.com/office/powerpoint/2015/10/main">
+  <p1510:revLst>
+    <p1510:client id="{E9465A14-C3E6-48BF-871C-4371200A0961}" v="1" dt="2026-08-20T17:58:03.596"/>
+  </p1510:revLst>
+</p1510:revInfo>
+</file>
+
 <file path=ppt/changesInfos/changesInfo1.xml><?xml version="1.0" encoding="utf-8"?>
 <pc:chgInfo xmlns:a="http://schemas.openxmlformats.org/drawingml/2006/main" xmlns:r="http://schemas.openxmlformats.org/officeDocument/2006/relationships" xmlns:ac="http://schemas.microsoft.com/office/drawing/2013/main/command" xmlns:pc="http://schemas.microsoft.com/office/powerpoint/2013/main/command">
   <pc:docChgLst>
     <pc:chgData name="Hadia Akbar" userId="19362115565_tp_box_2" providerId="OAuth2" clId="{FF77DECD-7ECC-48F4-BF82-9D4D4E0BE774}"/>
     <pc:docChg chg="undo redo custSel addSld delSld modSld sldOrd delMainMaster">
-      <pc:chgData name="Hadia Akbar" userId="19362115565_tp_box_2" providerId="OAuth2" clId="{FF77DECD-7ECC-48F4-BF82-9D4D4E0BE774}" dt="2026-08-18T17:59:39.214" v="2218" actId="1076"/>
+      <pc:chgData name="Hadia Akbar" userId="19362115565_tp_box_2" providerId="OAuth2" clId="{FF77DECD-7ECC-48F4-BF82-9D4D4E0BE774}" dt="2026-08-20T17:58:03.596" v="2221" actId="113"/>
       <pc:docMkLst>
         <pc:docMk/>
       </pc:docMkLst>
@@ -231,7 +239,7 @@
         </pc:graphicFrameChg>
       </pc:sldChg>
       <pc:sldChg chg="addSp delSp modSp new mod ord setBg addAnim delAnim delDesignElem">
-        <pc:chgData name="Hadia Akbar" userId="19362115565_tp_box_2" providerId="OAuth2" clId="{FF77DECD-7ECC-48F4-BF82-9D4D4E0BE774}" dt="2026-08-06T17:43:26.877" v="2042"/>
+        <pc:chgData name="Hadia Akbar" userId="19362115565_tp_box_2" providerId="OAuth2" clId="{FF77DECD-7ECC-48F4-BF82-9D4D4E0BE774}" dt="2026-08-20T17:57:45.780" v="2220" actId="1076"/>
         <pc:sldMkLst>
           <pc:docMk/>
           <pc:sldMk cId="1480586688" sldId="260"/>
@@ -245,7 +253,7 @@
           </ac:spMkLst>
         </pc:spChg>
         <pc:picChg chg="add mod">
-          <ac:chgData name="Hadia Akbar" userId="19362115565_tp_box_2" providerId="OAuth2" clId="{FF77DECD-7ECC-48F4-BF82-9D4D4E0BE774}" dt="2026-08-06T17:23:43.157" v="1739" actId="1076"/>
+          <ac:chgData name="Hadia Akbar" userId="19362115565_tp_box_2" providerId="OAuth2" clId="{FF77DECD-7ECC-48F4-BF82-9D4D4E0BE774}" dt="2026-08-20T17:57:45.780" v="2220" actId="1076"/>
           <ac:picMkLst>
             <pc:docMk/>
             <pc:sldMk cId="1480586688" sldId="260"/>
@@ -262,7 +270,7 @@
         </pc:picChg>
       </pc:sldChg>
       <pc:sldChg chg="addSp delSp modSp new mod ord setBg">
-        <pc:chgData name="Hadia Akbar" userId="19362115565_tp_box_2" providerId="OAuth2" clId="{FF77DECD-7ECC-48F4-BF82-9D4D4E0BE774}" dt="2026-08-06T17:41:03.925" v="2039" actId="20577"/>
+        <pc:chgData name="Hadia Akbar" userId="19362115565_tp_box_2" providerId="OAuth2" clId="{FF77DECD-7ECC-48F4-BF82-9D4D4E0BE774}" dt="2026-08-20T17:58:03.596" v="2221" actId="113"/>
         <pc:sldMkLst>
           <pc:docMk/>
           <pc:sldMk cId="1860897597" sldId="262"/>
@@ -300,7 +308,7 @@
           </ac:spMkLst>
         </pc:spChg>
         <pc:graphicFrameChg chg="add mod modGraphic">
-          <ac:chgData name="Hadia Akbar" userId="19362115565_tp_box_2" providerId="OAuth2" clId="{FF77DECD-7ECC-48F4-BF82-9D4D4E0BE774}" dt="2026-08-06T17:41:03.925" v="2039" actId="20577"/>
+          <ac:chgData name="Hadia Akbar" userId="19362115565_tp_box_2" providerId="OAuth2" clId="{FF77DECD-7ECC-48F4-BF82-9D4D4E0BE774}" dt="2026-08-20T17:58:03.596" v="2221" actId="113"/>
           <ac:graphicFrameMkLst>
             <pc:docMk/>
             <pc:sldMk cId="1860897597" sldId="262"/>
@@ -353,7 +361,7 @@
 </file>
 
 <file path=ppt/diagrams/colors1.xml><?xml version="1.0" encoding="utf-8"?>
-<dgm:colorsDef xmlns:dgm="http://schemas.openxmlformats.org/drawingml/2006/diagram" xmlns:a="http://schemas.openxmlformats.org/drawingml/2006/main" uniqueId="urn:microsoft.com/office/officeart/2005/8/colors/accent1_2">
+<dgm:colorsDef xmlns:dgm="http://schemas.openxmlformats.org/drawingml/2006/diagram" xmlns:a="http://schemas.openxmlformats.org/drawingml/2006/main" uniqueId="urn:microsoft.com/office/officeart/2005/8/colors/accent1_2#1">
   <dgm:title val=""/>
   <dgm:desc val=""/>
   <dgm:catLst>
@@ -1100,7 +1108,7 @@
 </file>
 
 <file path=ppt/diagrams/colors2.xml><?xml version="1.0" encoding="utf-8"?>
-<dgm:colorsDef xmlns:dgm="http://schemas.openxmlformats.org/drawingml/2006/diagram" xmlns:a="http://schemas.openxmlformats.org/drawingml/2006/main" uniqueId="urn:microsoft.com/office/officeart/2005/8/colors/accent1_2">
+<dgm:colorsDef xmlns:dgm="http://schemas.openxmlformats.org/drawingml/2006/diagram" xmlns:a="http://schemas.openxmlformats.org/drawingml/2006/main" uniqueId="urn:microsoft.com/office/officeart/2005/8/colors/accent1_2#2">
   <dgm:title val=""/>
   <dgm:desc val=""/>
   <dgm:catLst>
@@ -1850,7 +1858,7 @@
 <dgm:dataModel xmlns:dgm="http://schemas.openxmlformats.org/drawingml/2006/diagram" xmlns:a="http://schemas.openxmlformats.org/drawingml/2006/main">
   <dgm:ptLst>
     <dgm:pt modelId="{332819EA-3386-42B9-9077-01AD17EAD6CF}" type="doc">
-      <dgm:prSet loTypeId="urn:microsoft.com/office/officeart/2008/layout/LinedList" loCatId="list" qsTypeId="urn:microsoft.com/office/officeart/2005/8/quickstyle/simple1" qsCatId="simple" csTypeId="urn:microsoft.com/office/officeart/2005/8/colors/accent1_2" csCatId="accent1" phldr="1"/>
+      <dgm:prSet loTypeId="urn:microsoft.com/office/officeart/2008/layout/LinedList" loCatId="list" qsTypeId="urn:microsoft.com/office/officeart/2005/8/quickstyle/simple1#1" qsCatId="simple" csTypeId="urn:microsoft.com/office/officeart/2005/8/colors/accent1_2#1" csCatId="accent1" phldr="1"/>
       <dgm:spPr/>
       <dgm:t>
         <a:bodyPr/>
@@ -1977,7 +1985,15 @@
         <a:p>
           <a:r>
             <a:rPr lang="en-US" dirty="0"/>
-            <a:t>Users can consume, conserve or sell water.</a:t>
+            <a:t>Users can </a:t>
+          </a:r>
+          <a:r>
+            <a:rPr lang="en-US" b="1" dirty="0"/>
+            <a:t>consume, conserve or sell </a:t>
+          </a:r>
+          <a:r>
+            <a:rPr lang="en-US" dirty="0"/>
+            <a:t>water.</a:t>
           </a:r>
         </a:p>
       </dgm:t>
@@ -2236,7 +2252,7 @@
 <dgm:dataModel xmlns:dgm="http://schemas.openxmlformats.org/drawingml/2006/diagram" xmlns:a="http://schemas.openxmlformats.org/drawingml/2006/main">
   <dgm:ptLst>
     <dgm:pt modelId="{99D1A08B-05C7-4294-99DD-7BE56AF469A8}" type="doc">
-      <dgm:prSet loTypeId="urn:microsoft.com/office/officeart/2005/8/layout/hProcess4" loCatId="process" qsTypeId="urn:microsoft.com/office/officeart/2005/8/quickstyle/simple1" qsCatId="simple" csTypeId="urn:microsoft.com/office/officeart/2005/8/colors/accent1_2" csCatId="accent1" phldr="1"/>
+      <dgm:prSet loTypeId="urn:microsoft.com/office/officeart/2005/8/layout/hProcess4" loCatId="process" qsTypeId="urn:microsoft.com/office/officeart/2005/8/quickstyle/simple1#2" qsCatId="simple" csTypeId="urn:microsoft.com/office/officeart/2005/8/colors/accent1_2#2" csCatId="accent1" phldr="1"/>
       <dgm:spPr/>
       <dgm:t>
         <a:bodyPr/>
@@ -3570,7 +3586,15 @@
           </a:pPr>
           <a:r>
             <a:rPr lang="en-US" sz="3100" kern="1200" dirty="0"/>
-            <a:t>Users can consume, conserve or sell water.</a:t>
+            <a:t>Users can </a:t>
+          </a:r>
+          <a:r>
+            <a:rPr lang="en-US" sz="3100" b="1" kern="1200" dirty="0"/>
+            <a:t>consume, conserve or sell </a:t>
+          </a:r>
+          <a:r>
+            <a:rPr lang="en-US" sz="3100" kern="1200" dirty="0"/>
+            <a:t>water.</a:t>
           </a:r>
         </a:p>
       </dsp:txBody>
@@ -5807,7 +5831,7 @@
 </file>
 
 <file path=ppt/diagrams/quickStyle1.xml><?xml version="1.0" encoding="utf-8"?>
-<dgm:styleDef xmlns:dgm="http://schemas.openxmlformats.org/drawingml/2006/diagram" xmlns:a="http://schemas.openxmlformats.org/drawingml/2006/main" uniqueId="urn:microsoft.com/office/officeart/2005/8/quickstyle/simple1">
+<dgm:styleDef xmlns:dgm="http://schemas.openxmlformats.org/drawingml/2006/diagram" xmlns:a="http://schemas.openxmlformats.org/drawingml/2006/main" uniqueId="urn:microsoft.com/office/officeart/2005/8/quickstyle/simple1#1">
   <dgm:title val=""/>
   <dgm:desc val=""/>
   <dgm:catLst>
@@ -6841,7 +6865,7 @@
 </file>
 
 <file path=ppt/diagrams/quickStyle2.xml><?xml version="1.0" encoding="utf-8"?>
-<dgm:styleDef xmlns:dgm="http://schemas.openxmlformats.org/drawingml/2006/diagram" xmlns:a="http://schemas.openxmlformats.org/drawingml/2006/main" uniqueId="urn:microsoft.com/office/officeart/2005/8/quickstyle/simple1">
+<dgm:styleDef xmlns:dgm="http://schemas.openxmlformats.org/drawingml/2006/diagram" xmlns:a="http://schemas.openxmlformats.org/drawingml/2006/main" uniqueId="urn:microsoft.com/office/officeart/2005/8/quickstyle/simple1#2">
   <dgm:title val=""/>
   <dgm:desc val=""/>
   <dgm:catLst>
@@ -7956,7 +7980,7 @@
           <a:p>
             <a:fld id="{23F5F05C-4C32-48D7-B5AA-52291E739591}" type="datetimeFigureOut">
               <a:rPr lang="en-US" smtClean="0"/>
-              <a:t>8/18/2026</a:t>
+              <a:t>8/20/2026</a:t>
             </a:fld>
             <a:endParaRPr lang="en-US"/>
           </a:p>
@@ -8598,7 +8622,7 @@
           <a:p>
             <a:fld id="{5518E2ED-ACDD-48AE-BEAE-F9B835E4D922}" type="datetimeFigureOut">
               <a:rPr lang="en-US" smtClean="0"/>
-              <a:t>8/18/2026</a:t>
+              <a:t>8/20/2026</a:t>
             </a:fld>
             <a:endParaRPr lang="en-US"/>
           </a:p>
@@ -8796,7 +8820,7 @@
           <a:p>
             <a:fld id="{5518E2ED-ACDD-48AE-BEAE-F9B835E4D922}" type="datetimeFigureOut">
               <a:rPr lang="en-US" smtClean="0"/>
-              <a:t>8/18/2026</a:t>
+              <a:t>8/20/2026</a:t>
             </a:fld>
             <a:endParaRPr lang="en-US"/>
           </a:p>
@@ -9004,7 +9028,7 @@
           <a:p>
             <a:fld id="{5518E2ED-ACDD-48AE-BEAE-F9B835E4D922}" type="datetimeFigureOut">
               <a:rPr lang="en-US" smtClean="0"/>
-              <a:t>8/18/2026</a:t>
+              <a:t>8/20/2026</a:t>
             </a:fld>
             <a:endParaRPr lang="en-US"/>
           </a:p>
@@ -9202,7 +9226,7 @@
           <a:p>
             <a:fld id="{5518E2ED-ACDD-48AE-BEAE-F9B835E4D922}" type="datetimeFigureOut">
               <a:rPr lang="en-US" smtClean="0"/>
-              <a:t>8/18/2026</a:t>
+              <a:t>8/20/2026</a:t>
             </a:fld>
             <a:endParaRPr lang="en-US"/>
           </a:p>
@@ -9477,7 +9501,7 @@
           <a:p>
             <a:fld id="{5518E2ED-ACDD-48AE-BEAE-F9B835E4D922}" type="datetimeFigureOut">
               <a:rPr lang="en-US" smtClean="0"/>
-              <a:t>8/18/2026</a:t>
+              <a:t>8/20/2026</a:t>
             </a:fld>
             <a:endParaRPr lang="en-US"/>
           </a:p>
@@ -9742,7 +9766,7 @@
           <a:p>
             <a:fld id="{5518E2ED-ACDD-48AE-BEAE-F9B835E4D922}" type="datetimeFigureOut">
               <a:rPr lang="en-US" smtClean="0"/>
-              <a:t>8/18/2026</a:t>
+              <a:t>8/20/2026</a:t>
             </a:fld>
             <a:endParaRPr lang="en-US"/>
           </a:p>
@@ -10154,7 +10178,7 @@
           <a:p>
             <a:fld id="{5518E2ED-ACDD-48AE-BEAE-F9B835E4D922}" type="datetimeFigureOut">
               <a:rPr lang="en-US" smtClean="0"/>
-              <a:t>8/18/2026</a:t>
+              <a:t>8/20/2026</a:t>
             </a:fld>
             <a:endParaRPr lang="en-US"/>
           </a:p>
@@ -10295,7 +10319,7 @@
           <a:p>
             <a:fld id="{5518E2ED-ACDD-48AE-BEAE-F9B835E4D922}" type="datetimeFigureOut">
               <a:rPr lang="en-US" smtClean="0"/>
-              <a:t>8/18/2026</a:t>
+              <a:t>8/20/2026</a:t>
             </a:fld>
             <a:endParaRPr lang="en-US"/>
           </a:p>
@@ -10408,7 +10432,7 @@
           <a:p>
             <a:fld id="{5518E2ED-ACDD-48AE-BEAE-F9B835E4D922}" type="datetimeFigureOut">
               <a:rPr lang="en-US" smtClean="0"/>
-              <a:t>8/18/2026</a:t>
+              <a:t>8/20/2026</a:t>
             </a:fld>
             <a:endParaRPr lang="en-US"/>
           </a:p>
@@ -10719,7 +10743,7 @@
           <a:p>
             <a:fld id="{5518E2ED-ACDD-48AE-BEAE-F9B835E4D922}" type="datetimeFigureOut">
               <a:rPr lang="en-US" smtClean="0"/>
-              <a:t>8/18/2026</a:t>
+              <a:t>8/20/2026</a:t>
             </a:fld>
             <a:endParaRPr lang="en-US"/>
           </a:p>
@@ -11007,7 +11031,7 @@
           <a:p>
             <a:fld id="{5518E2ED-ACDD-48AE-BEAE-F9B835E4D922}" type="datetimeFigureOut">
               <a:rPr lang="en-US" smtClean="0"/>
-              <a:t>8/18/2026</a:t>
+              <a:t>8/20/2026</a:t>
             </a:fld>
             <a:endParaRPr lang="en-US"/>
           </a:p>
@@ -11248,7 +11272,7 @@
           <a:p>
             <a:fld id="{5518E2ED-ACDD-48AE-BEAE-F9B835E4D922}" type="datetimeFigureOut">
               <a:rPr lang="en-US" smtClean="0"/>
-              <a:t>8/18/2026</a:t>
+              <a:t>8/20/2026</a:t>
             </a:fld>
             <a:endParaRPr lang="en-US"/>
           </a:p>
@@ -12397,8 +12421,8 @@
         </p:blipFill>
         <p:spPr>
           <a:xfrm>
-            <a:off x="1628773" y="2581835"/>
-            <a:ext cx="3145591" cy="3745496"/>
+            <a:off x="1873623" y="2791492"/>
+            <a:ext cx="2775235" cy="3304508"/>
           </a:xfrm>
           <a:prstGeom prst="rect">
             <a:avLst/>
@@ -12726,7 +12750,7 @@
             <p:ph idx="1"/>
             <p:extLst>
               <p:ext uri="{D42A27DB-BD31-4B8C-83A1-F6EECF244321}">
-                <p14:modId xmlns:p14="http://schemas.microsoft.com/office/powerpoint/2010/main" val="2612573471"/>
+                <p14:modId xmlns:p14="http://schemas.microsoft.com/office/powerpoint/2010/main" val="398504165"/>
               </p:ext>
             </p:extLst>
           </p:nvPr>

--- a/Session Guide/IntroPresentation.pptx
+++ b/Session Guide/IntroPresentation.pptx
@@ -9,8 +9,8 @@
   </p:notesMasterIdLst>
   <p:sldIdLst>
     <p:sldId id="256" r:id="rId2"/>
-    <p:sldId id="260" r:id="rId3"/>
-    <p:sldId id="262" r:id="rId4"/>
+    <p:sldId id="264" r:id="rId3"/>
+    <p:sldId id="265" r:id="rId4"/>
     <p:sldId id="258" r:id="rId5"/>
     <p:sldId id="263" r:id="rId6"/>
   </p:sldIdLst>
@@ -122,7 +122,7 @@
 <file path=ppt/revisionInfo.xml><?xml version="1.0" encoding="utf-8"?>
 <p1510:revInfo xmlns:a="http://schemas.openxmlformats.org/drawingml/2006/main" xmlns:r="http://schemas.openxmlformats.org/officeDocument/2006/relationships" xmlns:p1510="http://schemas.microsoft.com/office/powerpoint/2015/10/main">
   <p1510:revLst>
-    <p1510:client id="{E9465A14-C3E6-48BF-871C-4371200A0961}" v="1" dt="2026-08-20T17:58:03.596"/>
+    <p1510:client id="{0FA96045-9951-4B0B-BD62-76A4AB30A5F9}" v="10" dt="2026-08-24T23:19:05.277"/>
   </p1510:revLst>
 </p1510:revInfo>
 </file>
@@ -132,18 +132,18 @@
   <pc:docChgLst>
     <pc:chgData name="Hadia Akbar" userId="19362115565_tp_box_2" providerId="OAuth2" clId="{FF77DECD-7ECC-48F4-BF82-9D4D4E0BE774}"/>
     <pc:docChg chg="undo redo custSel addSld delSld modSld sldOrd delMainMaster">
-      <pc:chgData name="Hadia Akbar" userId="19362115565_tp_box_2" providerId="OAuth2" clId="{FF77DECD-7ECC-48F4-BF82-9D4D4E0BE774}" dt="2026-08-20T17:58:03.596" v="2221" actId="113"/>
+      <pc:chgData name="Hadia Akbar" userId="19362115565_tp_box_2" providerId="OAuth2" clId="{FF77DECD-7ECC-48F4-BF82-9D4D4E0BE774}" dt="2026-08-24T23:19:05.277" v="2465" actId="12090"/>
       <pc:docMkLst>
         <pc:docMk/>
       </pc:docMkLst>
       <pc:sldChg chg="addSp delSp modSp new mod setBg addAnim modAnim delDesignElem">
-        <pc:chgData name="Hadia Akbar" userId="19362115565_tp_box_2" providerId="OAuth2" clId="{FF77DECD-7ECC-48F4-BF82-9D4D4E0BE774}" dt="2026-08-06T17:26:02.707" v="1889" actId="1076"/>
+        <pc:chgData name="Hadia Akbar" userId="19362115565_tp_box_2" providerId="OAuth2" clId="{FF77DECD-7ECC-48F4-BF82-9D4D4E0BE774}" dt="2026-08-24T23:07:31.014" v="2247" actId="1076"/>
         <pc:sldMkLst>
           <pc:docMk/>
           <pc:sldMk cId="4246612416" sldId="256"/>
         </pc:sldMkLst>
         <pc:spChg chg="mod">
-          <ac:chgData name="Hadia Akbar" userId="19362115565_tp_box_2" providerId="OAuth2" clId="{FF77DECD-7ECC-48F4-BF82-9D4D4E0BE774}" dt="2026-08-06T17:26:02.707" v="1889" actId="1076"/>
+          <ac:chgData name="Hadia Akbar" userId="19362115565_tp_box_2" providerId="OAuth2" clId="{FF77DECD-7ECC-48F4-BF82-9D4D4E0BE774}" dt="2026-08-24T23:06:46.212" v="2225" actId="1076"/>
           <ac:spMkLst>
             <pc:docMk/>
             <pc:sldMk cId="4246612416" sldId="256"/>
@@ -151,7 +151,7 @@
           </ac:spMkLst>
         </pc:spChg>
         <pc:spChg chg="mod">
-          <ac:chgData name="Hadia Akbar" userId="19362115565_tp_box_2" providerId="OAuth2" clId="{FF77DECD-7ECC-48F4-BF82-9D4D4E0BE774}" dt="2026-08-06T17:25:52.923" v="1887" actId="26606"/>
+          <ac:chgData name="Hadia Akbar" userId="19362115565_tp_box_2" providerId="OAuth2" clId="{FF77DECD-7ECC-48F4-BF82-9D4D4E0BE774}" dt="2026-08-24T23:07:31.014" v="2247" actId="1076"/>
           <ac:spMkLst>
             <pc:docMk/>
             <pc:sldMk cId="4246612416" sldId="256"/>
@@ -199,7 +199,15 @@
           </ac:spMkLst>
         </pc:spChg>
         <pc:picChg chg="add mod">
-          <ac:chgData name="Hadia Akbar" userId="19362115565_tp_box_2" providerId="OAuth2" clId="{FF77DECD-7ECC-48F4-BF82-9D4D4E0BE774}" dt="2026-08-06T17:25:52.923" v="1886" actId="26606"/>
+          <ac:chgData name="Hadia Akbar" userId="19362115565_tp_box_2" providerId="OAuth2" clId="{FF77DECD-7ECC-48F4-BF82-9D4D4E0BE774}" dt="2026-08-24T23:07:15.259" v="2240" actId="1076"/>
+          <ac:picMkLst>
+            <pc:docMk/>
+            <pc:sldMk cId="4246612416" sldId="256"/>
+            <ac:picMk id="5" creationId="{013E8E12-46D6-55E9-31F9-2CCFEDCB82BF}"/>
+          </ac:picMkLst>
+        </pc:picChg>
+        <pc:picChg chg="add mod">
+          <ac:chgData name="Hadia Akbar" userId="19362115565_tp_box_2" providerId="OAuth2" clId="{FF77DECD-7ECC-48F4-BF82-9D4D4E0BE774}" dt="2026-08-24T23:07:28.480" v="2246" actId="14100"/>
           <ac:picMkLst>
             <pc:docMk/>
             <pc:sldMk cId="4246612416" sldId="256"/>
@@ -208,7 +216,7 @@
         </pc:picChg>
       </pc:sldChg>
       <pc:sldChg chg="addSp delSp modSp add mod">
-        <pc:chgData name="Hadia Akbar" userId="19362115565_tp_box_2" providerId="OAuth2" clId="{FF77DECD-7ECC-48F4-BF82-9D4D4E0BE774}" dt="2026-08-06T18:03:40.726" v="2190" actId="20577"/>
+        <pc:chgData name="Hadia Akbar" userId="19362115565_tp_box_2" providerId="OAuth2" clId="{FF77DECD-7ECC-48F4-BF82-9D4D4E0BE774}" dt="2026-08-24T23:19:05.277" v="2465" actId="12090"/>
         <pc:sldMkLst>
           <pc:docMk/>
           <pc:sldMk cId="3397881947" sldId="258"/>
@@ -222,7 +230,7 @@
           </ac:spMkLst>
         </pc:spChg>
         <pc:graphicFrameChg chg="mod modGraphic">
-          <ac:chgData name="Hadia Akbar" userId="19362115565_tp_box_2" providerId="OAuth2" clId="{FF77DECD-7ECC-48F4-BF82-9D4D4E0BE774}" dt="2026-08-06T18:03:40.726" v="2190" actId="20577"/>
+          <ac:chgData name="Hadia Akbar" userId="19362115565_tp_box_2" providerId="OAuth2" clId="{FF77DECD-7ECC-48F4-BF82-9D4D4E0BE774}" dt="2026-08-24T23:19:05.277" v="2465" actId="12090"/>
           <ac:graphicFrameMkLst>
             <pc:docMk/>
             <pc:sldMk cId="3397881947" sldId="258"/>
@@ -238,22 +246,14 @@
           </ac:graphicFrameMkLst>
         </pc:graphicFrameChg>
       </pc:sldChg>
-      <pc:sldChg chg="addSp delSp modSp new mod ord setBg addAnim delAnim delDesignElem">
-        <pc:chgData name="Hadia Akbar" userId="19362115565_tp_box_2" providerId="OAuth2" clId="{FF77DECD-7ECC-48F4-BF82-9D4D4E0BE774}" dt="2026-08-20T17:57:45.780" v="2220" actId="1076"/>
+      <pc:sldChg chg="addSp delSp modSp new del mod ord setBg addAnim delAnim delDesignElem">
+        <pc:chgData name="Hadia Akbar" userId="19362115565_tp_box_2" providerId="OAuth2" clId="{FF77DECD-7ECC-48F4-BF82-9D4D4E0BE774}" dt="2026-08-24T23:07:33.993" v="2248" actId="47"/>
         <pc:sldMkLst>
           <pc:docMk/>
           <pc:sldMk cId="1480586688" sldId="260"/>
         </pc:sldMkLst>
-        <pc:spChg chg="mod ord">
-          <ac:chgData name="Hadia Akbar" userId="19362115565_tp_box_2" providerId="OAuth2" clId="{FF77DECD-7ECC-48F4-BF82-9D4D4E0BE774}" dt="2026-08-06T17:23:17.051" v="1732" actId="1076"/>
-          <ac:spMkLst>
-            <pc:docMk/>
-            <pc:sldMk cId="1480586688" sldId="260"/>
-            <ac:spMk id="2" creationId="{81F1C4B3-9A9B-ACA7-FD33-EA866B5A34CE}"/>
-          </ac:spMkLst>
-        </pc:spChg>
         <pc:picChg chg="add mod">
-          <ac:chgData name="Hadia Akbar" userId="19362115565_tp_box_2" providerId="OAuth2" clId="{FF77DECD-7ECC-48F4-BF82-9D4D4E0BE774}" dt="2026-08-20T17:57:45.780" v="2220" actId="1076"/>
+          <ac:chgData name="Hadia Akbar" userId="19362115565_tp_box_2" providerId="OAuth2" clId="{FF77DECD-7ECC-48F4-BF82-9D4D4E0BE774}" dt="2026-08-24T23:06:30.886" v="2222" actId="1076"/>
           <ac:picMkLst>
             <pc:docMk/>
             <pc:sldMk cId="1480586688" sldId="260"/>
@@ -261,7 +261,7 @@
           </ac:picMkLst>
         </pc:picChg>
         <pc:picChg chg="add del mod">
-          <ac:chgData name="Hadia Akbar" userId="19362115565_tp_box_2" providerId="OAuth2" clId="{FF77DECD-7ECC-48F4-BF82-9D4D4E0BE774}" dt="2026-08-06T17:23:56.705" v="1742" actId="1076"/>
+          <ac:chgData name="Hadia Akbar" userId="19362115565_tp_box_2" providerId="OAuth2" clId="{FF77DECD-7ECC-48F4-BF82-9D4D4E0BE774}" dt="2026-08-24T23:06:40.223" v="2223" actId="21"/>
           <ac:picMkLst>
             <pc:docMk/>
             <pc:sldMk cId="1480586688" sldId="260"/>
@@ -269,46 +269,22 @@
           </ac:picMkLst>
         </pc:picChg>
       </pc:sldChg>
-      <pc:sldChg chg="addSp delSp modSp new mod ord setBg">
-        <pc:chgData name="Hadia Akbar" userId="19362115565_tp_box_2" providerId="OAuth2" clId="{FF77DECD-7ECC-48F4-BF82-9D4D4E0BE774}" dt="2026-08-20T17:58:03.596" v="2221" actId="113"/>
+      <pc:sldChg chg="addSp delSp modSp new add del mod ord setBg">
+        <pc:chgData name="Hadia Akbar" userId="19362115565_tp_box_2" providerId="OAuth2" clId="{FF77DECD-7ECC-48F4-BF82-9D4D4E0BE774}" dt="2026-08-24T23:18:46.875" v="2461" actId="47"/>
         <pc:sldMkLst>
           <pc:docMk/>
           <pc:sldMk cId="1860897597" sldId="262"/>
         </pc:sldMkLst>
-        <pc:spChg chg="mod">
-          <ac:chgData name="Hadia Akbar" userId="19362115565_tp_box_2" providerId="OAuth2" clId="{FF77DECD-7ECC-48F4-BF82-9D4D4E0BE774}" dt="2026-08-04T18:03:23.726" v="1483" actId="14100"/>
+        <pc:spChg chg="add mod">
+          <ac:chgData name="Hadia Akbar" userId="19362115565_tp_box_2" providerId="OAuth2" clId="{FF77DECD-7ECC-48F4-BF82-9D4D4E0BE774}" dt="2026-08-24T23:16:46.312" v="2443" actId="21"/>
           <ac:spMkLst>
             <pc:docMk/>
             <pc:sldMk cId="1860897597" sldId="262"/>
-            <ac:spMk id="2" creationId="{82135AE4-D2DF-F18B-908D-5801E8171ADD}"/>
+            <ac:spMk id="4" creationId="{4A9A44C1-D39F-B823-D8E3-FD6C1DF75D70}"/>
           </ac:spMkLst>
         </pc:spChg>
-        <pc:spChg chg="add">
-          <ac:chgData name="Hadia Akbar" userId="19362115565_tp_box_2" providerId="OAuth2" clId="{FF77DECD-7ECC-48F4-BF82-9D4D4E0BE774}" dt="2026-08-04T05:58:01.491" v="1464" actId="26606"/>
-          <ac:spMkLst>
-            <pc:docMk/>
-            <pc:sldMk cId="1860897597" sldId="262"/>
-            <ac:spMk id="21" creationId="{44AD29B6-BF3B-4407-9E75-52DF8E3B29F1}"/>
-          </ac:spMkLst>
-        </pc:spChg>
-        <pc:spChg chg="add">
-          <ac:chgData name="Hadia Akbar" userId="19362115565_tp_box_2" providerId="OAuth2" clId="{FF77DECD-7ECC-48F4-BF82-9D4D4E0BE774}" dt="2026-08-04T05:58:01.491" v="1464" actId="26606"/>
-          <ac:spMkLst>
-            <pc:docMk/>
-            <pc:sldMk cId="1860897597" sldId="262"/>
-            <ac:spMk id="23" creationId="{55F8BA08-3E38-4B70-B93A-74F08E092206}"/>
-          </ac:spMkLst>
-        </pc:spChg>
-        <pc:spChg chg="add">
-          <ac:chgData name="Hadia Akbar" userId="19362115565_tp_box_2" providerId="OAuth2" clId="{FF77DECD-7ECC-48F4-BF82-9D4D4E0BE774}" dt="2026-08-04T05:58:01.491" v="1464" actId="26606"/>
-          <ac:spMkLst>
-            <pc:docMk/>
-            <pc:sldMk cId="1860897597" sldId="262"/>
-            <ac:spMk id="25" creationId="{357F1B33-79AB-4A71-8CEC-4546D709B8C8}"/>
-          </ac:spMkLst>
-        </pc:spChg>
-        <pc:graphicFrameChg chg="add mod modGraphic">
-          <ac:chgData name="Hadia Akbar" userId="19362115565_tp_box_2" providerId="OAuth2" clId="{FF77DECD-7ECC-48F4-BF82-9D4D4E0BE774}" dt="2026-08-20T17:58:03.596" v="2221" actId="113"/>
+        <pc:graphicFrameChg chg="add del mod modGraphic">
+          <ac:chgData name="Hadia Akbar" userId="19362115565_tp_box_2" providerId="OAuth2" clId="{FF77DECD-7ECC-48F4-BF82-9D4D4E0BE774}" dt="2026-08-24T23:16:46.312" v="2443" actId="21"/>
           <ac:graphicFrameMkLst>
             <pc:docMk/>
             <pc:sldMk cId="1860897597" sldId="262"/>
@@ -317,7 +293,7 @@
         </pc:graphicFrameChg>
       </pc:sldChg>
       <pc:sldChg chg="addSp delSp modSp new mod">
-        <pc:chgData name="Hadia Akbar" userId="19362115565_tp_box_2" providerId="OAuth2" clId="{FF77DECD-7ECC-48F4-BF82-9D4D4E0BE774}" dt="2026-08-18T17:59:39.214" v="2218" actId="1076"/>
+        <pc:chgData name="Hadia Akbar" userId="19362115565_tp_box_2" providerId="OAuth2" clId="{FF77DECD-7ECC-48F4-BF82-9D4D4E0BE774}" dt="2026-08-24T23:18:45.216" v="2459" actId="1076"/>
         <pc:sldMkLst>
           <pc:docMk/>
           <pc:sldMk cId="3049088380" sldId="263"/>
@@ -346,12 +322,98 @@
             <ac:spMk id="5" creationId="{058C039E-4B72-D823-6332-3B3D9121B1D9}"/>
           </ac:spMkLst>
         </pc:spChg>
-        <pc:picChg chg="add mod">
-          <ac:chgData name="Hadia Akbar" userId="19362115565_tp_box_2" providerId="OAuth2" clId="{FF77DECD-7ECC-48F4-BF82-9D4D4E0BE774}" dt="2026-08-14T20:35:55.355" v="2212" actId="1076"/>
+        <pc:picChg chg="add del mod">
+          <ac:chgData name="Hadia Akbar" userId="19362115565_tp_box_2" providerId="OAuth2" clId="{FF77DECD-7ECC-48F4-BF82-9D4D4E0BE774}" dt="2026-08-24T23:18:45.216" v="2459" actId="1076"/>
           <ac:picMkLst>
             <pc:docMk/>
             <pc:sldMk cId="3049088380" sldId="263"/>
             <ac:picMk id="9" creationId="{504CD099-FD1D-A9E1-17F7-A5EC85BB4181}"/>
+          </ac:picMkLst>
+        </pc:picChg>
+      </pc:sldChg>
+      <pc:sldChg chg="addSp modSp new mod ord">
+        <pc:chgData name="Hadia Akbar" userId="19362115565_tp_box_2" providerId="OAuth2" clId="{FF77DECD-7ECC-48F4-BF82-9D4D4E0BE774}" dt="2026-08-24T23:16:18.208" v="2438" actId="1076"/>
+        <pc:sldMkLst>
+          <pc:docMk/>
+          <pc:sldMk cId="1233494780" sldId="264"/>
+        </pc:sldMkLst>
+        <pc:spChg chg="add mod">
+          <ac:chgData name="Hadia Akbar" userId="19362115565_tp_box_2" providerId="OAuth2" clId="{FF77DECD-7ECC-48F4-BF82-9D4D4E0BE774}" dt="2026-08-24T23:14:29.194" v="2364"/>
+          <ac:spMkLst>
+            <pc:docMk/>
+            <pc:sldMk cId="1233494780" sldId="264"/>
+            <ac:spMk id="5" creationId="{ACFF18CE-2302-6EB6-7F2D-E27034F4B1D9}"/>
+          </ac:spMkLst>
+        </pc:spChg>
+        <pc:spChg chg="add mod">
+          <ac:chgData name="Hadia Akbar" userId="19362115565_tp_box_2" providerId="OAuth2" clId="{FF77DECD-7ECC-48F4-BF82-9D4D4E0BE774}" dt="2026-08-24T23:15:27.979" v="2401" actId="1076"/>
+          <ac:spMkLst>
+            <pc:docMk/>
+            <pc:sldMk cId="1233494780" sldId="264"/>
+            <ac:spMk id="7" creationId="{613250A1-4841-7097-A001-67EE207071D7}"/>
+          </ac:spMkLst>
+        </pc:spChg>
+        <pc:spChg chg="add mod">
+          <ac:chgData name="Hadia Akbar" userId="19362115565_tp_box_2" providerId="OAuth2" clId="{FF77DECD-7ECC-48F4-BF82-9D4D4E0BE774}" dt="2026-08-24T23:15:41.830" v="2404"/>
+          <ac:spMkLst>
+            <pc:docMk/>
+            <pc:sldMk cId="1233494780" sldId="264"/>
+            <ac:spMk id="9" creationId="{57E19324-00E0-2CF6-0634-64D5B5FDB4E1}"/>
+          </ac:spMkLst>
+        </pc:spChg>
+        <pc:spChg chg="add mod">
+          <ac:chgData name="Hadia Akbar" userId="19362115565_tp_box_2" providerId="OAuth2" clId="{FF77DECD-7ECC-48F4-BF82-9D4D4E0BE774}" dt="2026-08-24T23:16:18.208" v="2438" actId="1076"/>
+          <ac:spMkLst>
+            <pc:docMk/>
+            <pc:sldMk cId="1233494780" sldId="264"/>
+            <ac:spMk id="11" creationId="{DBF63553-0BB4-3734-E060-DE33145904CA}"/>
+          </ac:spMkLst>
+        </pc:spChg>
+        <pc:picChg chg="add mod modCrop">
+          <ac:chgData name="Hadia Akbar" userId="19362115565_tp_box_2" providerId="OAuth2" clId="{FF77DECD-7ECC-48F4-BF82-9D4D4E0BE774}" dt="2026-08-24T23:15:17.685" v="2398" actId="1035"/>
+          <ac:picMkLst>
+            <pc:docMk/>
+            <pc:sldMk cId="1233494780" sldId="264"/>
+            <ac:picMk id="3" creationId="{557EFDC3-1226-0938-F65C-AC0A4CB70C29}"/>
+          </ac:picMkLst>
+        </pc:picChg>
+      </pc:sldChg>
+      <pc:sldChg chg="addSp delSp modSp new mod ord">
+        <pc:chgData name="Hadia Akbar" userId="19362115565_tp_box_2" providerId="OAuth2" clId="{FF77DECD-7ECC-48F4-BF82-9D4D4E0BE774}" dt="2026-08-24T23:17:15.773" v="2454" actId="14100"/>
+        <pc:sldMkLst>
+          <pc:docMk/>
+          <pc:sldMk cId="1077105498" sldId="265"/>
+        </pc:sldMkLst>
+        <pc:spChg chg="del">
+          <ac:chgData name="Hadia Akbar" userId="19362115565_tp_box_2" providerId="OAuth2" clId="{FF77DECD-7ECC-48F4-BF82-9D4D4E0BE774}" dt="2026-08-24T23:17:09.879" v="2452" actId="478"/>
+          <ac:spMkLst>
+            <pc:docMk/>
+            <pc:sldMk cId="1077105498" sldId="265"/>
+            <ac:spMk id="2" creationId="{6812BC6F-D077-4E05-C130-3F2CC3DDECA7}"/>
+          </ac:spMkLst>
+        </pc:spChg>
+        <pc:spChg chg="del">
+          <ac:chgData name="Hadia Akbar" userId="19362115565_tp_box_2" providerId="OAuth2" clId="{FF77DECD-7ECC-48F4-BF82-9D4D4E0BE774}" dt="2026-08-24T23:17:11.632" v="2453" actId="478"/>
+          <ac:spMkLst>
+            <pc:docMk/>
+            <pc:sldMk cId="1077105498" sldId="265"/>
+            <ac:spMk id="3" creationId="{FF8C3D16-A4DC-80A1-9DB8-7698B9BEFF8A}"/>
+          </ac:spMkLst>
+        </pc:spChg>
+        <pc:graphicFrameChg chg="add mod">
+          <ac:chgData name="Hadia Akbar" userId="19362115565_tp_box_2" providerId="OAuth2" clId="{FF77DECD-7ECC-48F4-BF82-9D4D4E0BE774}" dt="2026-08-24T23:16:57.800" v="2447" actId="1076"/>
+          <ac:graphicFrameMkLst>
+            <pc:docMk/>
+            <pc:sldMk cId="1077105498" sldId="265"/>
+            <ac:graphicFrameMk id="6" creationId="{7990CB0E-8803-D419-DBC6-4068A222A4E0}"/>
+          </ac:graphicFrameMkLst>
+        </pc:graphicFrameChg>
+        <pc:picChg chg="add mod">
+          <ac:chgData name="Hadia Akbar" userId="19362115565_tp_box_2" providerId="OAuth2" clId="{FF77DECD-7ECC-48F4-BF82-9D4D4E0BE774}" dt="2026-08-24T23:17:15.773" v="2454" actId="14100"/>
+          <ac:picMkLst>
+            <pc:docMk/>
+            <pc:sldMk cId="1077105498" sldId="265"/>
+            <ac:picMk id="5" creationId="{E444F844-AF34-AA7D-E2E0-6589D214A168}"/>
           </ac:picMkLst>
         </pc:picChg>
       </pc:sldChg>
@@ -2242,7 +2304,7 @@
   <dgm:whole/>
   <dgm:extLst>
     <a:ext uri="http://schemas.microsoft.com/office/drawing/2008/diagram">
-      <dsp:dataModelExt xmlns:dsp="http://schemas.microsoft.com/office/drawing/2008/diagram" relId="rId6" minVer="http://schemas.openxmlformats.org/drawingml/2006/diagram"/>
+      <dsp:dataModelExt xmlns:dsp="http://schemas.microsoft.com/office/drawing/2008/diagram" relId="rId7" minVer="http://schemas.openxmlformats.org/drawingml/2006/diagram"/>
     </a:ext>
   </dgm:extLst>
 </dgm:dataModel>
@@ -2634,18 +2696,13 @@
         <a:lstStyle/>
         <a:p>
           <a:r>
-            <a:rPr lang="en-US" sz="1600" b="1">
+            <a:rPr lang="en-US" sz="1600" b="1" dirty="0">
               <a:solidFill>
                 <a:srgbClr val="3333FF"/>
               </a:solidFill>
             </a:rPr>
             <a:t>Decide Consumption</a:t>
           </a:r>
-          <a:endParaRPr lang="en-US" sz="1600" b="1" dirty="0">
-            <a:solidFill>
-              <a:srgbClr val="3333FF"/>
-            </a:solidFill>
-          </a:endParaRPr>
         </a:p>
       </dgm:t>
     </dgm:pt>
@@ -2908,7 +2965,7 @@
       <dgm:spPr/>
     </dgm:pt>
     <dgm:pt modelId="{30DD4CDA-4812-46C7-BA95-FF21DAD772D9}" type="pres">
-      <dgm:prSet presAssocID="{5C407219-177A-43EE-B67E-B6E75271BA5B}" presName="childNode1" presStyleLbl="bgAcc1" presStyleIdx="0" presStyleCnt="4">
+      <dgm:prSet presAssocID="{5C407219-177A-43EE-B67E-B6E75271BA5B}" presName="childNode1" presStyleLbl="bgAcc1" presStyleIdx="0" presStyleCnt="4" custScaleX="110000" custScaleY="110000">
         <dgm:presLayoutVars>
           <dgm:bulletEnabled val="1"/>
         </dgm:presLayoutVars>
@@ -2949,7 +3006,7 @@
       <dgm:spPr/>
     </dgm:pt>
     <dgm:pt modelId="{D9BDC29B-7D63-4495-A3B2-7C07F9B8C330}" type="pres">
-      <dgm:prSet presAssocID="{5489487A-AE09-4C57-A8FE-3C88CD528A51}" presName="childNode2" presStyleLbl="bgAcc1" presStyleIdx="1" presStyleCnt="4">
+      <dgm:prSet presAssocID="{5489487A-AE09-4C57-A8FE-3C88CD528A51}" presName="childNode2" presStyleLbl="bgAcc1" presStyleIdx="1" presStyleCnt="4" custScaleX="110000" custScaleY="110000">
         <dgm:presLayoutVars>
           <dgm:bulletEnabled val="1"/>
         </dgm:presLayoutVars>
@@ -2990,7 +3047,7 @@
       <dgm:spPr/>
     </dgm:pt>
     <dgm:pt modelId="{686EF4F2-C186-45B2-85A0-F6687D978556}" type="pres">
-      <dgm:prSet presAssocID="{1BCB95D6-B1A4-439C-9AD1-CE00E32D68AA}" presName="childNode1" presStyleLbl="bgAcc1" presStyleIdx="2" presStyleCnt="4">
+      <dgm:prSet presAssocID="{1BCB95D6-B1A4-439C-9AD1-CE00E32D68AA}" presName="childNode1" presStyleLbl="bgAcc1" presStyleIdx="2" presStyleCnt="4" custScaleX="110000" custScaleY="110000">
         <dgm:presLayoutVars>
           <dgm:bulletEnabled val="1"/>
         </dgm:presLayoutVars>
@@ -3031,7 +3088,7 @@
       <dgm:spPr/>
     </dgm:pt>
     <dgm:pt modelId="{DE4AC59B-B8E8-4AE0-82DC-3BD6B4ADF27A}" type="pres">
-      <dgm:prSet presAssocID="{5DA50F34-C831-4850-8B63-CE799FF6C0D5}" presName="childNode2" presStyleLbl="bgAcc1" presStyleIdx="3" presStyleCnt="4">
+      <dgm:prSet presAssocID="{5DA50F34-C831-4850-8B63-CE799FF6C0D5}" presName="childNode2" presStyleLbl="bgAcc1" presStyleIdx="3" presStyleCnt="4" custScaleX="110000" custScaleY="110000">
         <dgm:presLayoutVars>
           <dgm:bulletEnabled val="1"/>
         </dgm:presLayoutVars>
@@ -3842,8 +3899,8 @@
       </dsp:nvSpPr>
       <dsp:spPr>
         <a:xfrm>
-          <a:off x="9648" y="2694975"/>
-          <a:ext cx="2450927" cy="2021502"/>
+          <a:off x="3417" y="2637506"/>
+          <a:ext cx="2591963" cy="2137827"/>
         </a:xfrm>
         <a:prstGeom prst="roundRect">
           <a:avLst>
@@ -3958,8 +4015,8 @@
         </a:p>
       </dsp:txBody>
       <dsp:txXfrm>
-        <a:off x="56168" y="2741495"/>
-        <a:ext cx="2357887" cy="1495283"/>
+        <a:off x="52614" y="2686703"/>
+        <a:ext cx="2493569" cy="1581327"/>
       </dsp:txXfrm>
     </dsp:sp>
     <dsp:sp modelId="{464DE029-02A1-4763-8666-F53A13C6FAAD}">
@@ -3969,16 +4026,16 @@
       </dsp:nvSpPr>
       <dsp:spPr>
         <a:xfrm>
-          <a:off x="1389830" y="3290574"/>
-          <a:ext cx="2584390" cy="2584390"/>
+          <a:off x="1439340" y="3206126"/>
+          <a:ext cx="2620065" cy="2620065"/>
         </a:xfrm>
         <a:prstGeom prst="leftCircularArrow">
           <a:avLst>
-            <a:gd name="adj1" fmla="val 2693"/>
-            <a:gd name="adj2" fmla="val 327803"/>
-            <a:gd name="adj3" fmla="val 1993841"/>
-            <a:gd name="adj4" fmla="val 8915017"/>
-            <a:gd name="adj5" fmla="val 3141"/>
+            <a:gd name="adj1" fmla="val 2554"/>
+            <a:gd name="adj2" fmla="val 309855"/>
+            <a:gd name="adj3" fmla="val 1981885"/>
+            <a:gd name="adj4" fmla="val 8921009"/>
+            <a:gd name="adj5" fmla="val 2979"/>
           </a:avLst>
         </a:prstGeom>
         <a:solidFill>
@@ -4017,8 +4074,8 @@
       </dsp:nvSpPr>
       <dsp:spPr>
         <a:xfrm>
-          <a:off x="554299" y="4350675"/>
-          <a:ext cx="2178602" cy="866358"/>
+          <a:off x="644862" y="4326476"/>
+          <a:ext cx="2094515" cy="832919"/>
         </a:xfrm>
         <a:prstGeom prst="roundRect">
           <a:avLst>
@@ -4094,8 +4151,8 @@
         </a:p>
       </dsp:txBody>
       <dsp:txXfrm>
-        <a:off x="579674" y="4376050"/>
-        <a:ext cx="2127852" cy="815608"/>
+        <a:off x="669257" y="4350871"/>
+        <a:ext cx="2045725" cy="784129"/>
       </dsp:txXfrm>
     </dsp:sp>
     <dsp:sp modelId="{D9BDC29B-7D63-4495-A3B2-7C07F9B8C330}">
@@ -4105,8 +4162,8 @@
       </dsp:nvSpPr>
       <dsp:spPr>
         <a:xfrm>
-          <a:off x="3064282" y="2694975"/>
-          <a:ext cx="2450927" cy="2021502"/>
+          <a:off x="3057969" y="2636118"/>
+          <a:ext cx="2591963" cy="2137827"/>
         </a:xfrm>
         <a:prstGeom prst="roundRect">
           <a:avLst>
@@ -4199,8 +4256,8 @@
         </a:p>
       </dsp:txBody>
       <dsp:txXfrm>
-        <a:off x="3110802" y="3174674"/>
-        <a:ext cx="2357887" cy="1495283"/>
+        <a:off x="3107166" y="3143421"/>
+        <a:ext cx="2493569" cy="1581327"/>
       </dsp:txXfrm>
     </dsp:sp>
     <dsp:sp modelId="{1C299799-9D54-457B-A3C7-0FB93A410866}">
@@ -4210,16 +4267,16 @@
       </dsp:nvSpPr>
       <dsp:spPr>
         <a:xfrm>
-          <a:off x="4443787" y="1491532"/>
-          <a:ext cx="2896330" cy="2896330"/>
+          <a:off x="4493210" y="1542007"/>
+          <a:ext cx="2920031" cy="2920031"/>
         </a:xfrm>
         <a:prstGeom prst="circularArrow">
           <a:avLst>
-            <a:gd name="adj1" fmla="val 2403"/>
-            <a:gd name="adj2" fmla="val 290535"/>
-            <a:gd name="adj3" fmla="val 19533954"/>
+            <a:gd name="adj1" fmla="val 2291"/>
+            <a:gd name="adj2" fmla="val 276342"/>
+            <a:gd name="adj3" fmla="val 19548147"/>
             <a:gd name="adj4" fmla="val 12575511"/>
-            <a:gd name="adj5" fmla="val 2803"/>
+            <a:gd name="adj5" fmla="val 2673"/>
           </a:avLst>
         </a:prstGeom>
         <a:solidFill>
@@ -4258,8 +4315,8 @@
       </dsp:nvSpPr>
       <dsp:spPr>
         <a:xfrm>
-          <a:off x="3608933" y="2261795"/>
-          <a:ext cx="2178602" cy="866358"/>
+          <a:off x="3699414" y="2316832"/>
+          <a:ext cx="2094515" cy="832919"/>
         </a:xfrm>
         <a:prstGeom prst="roundRect">
           <a:avLst>
@@ -4335,8 +4392,8 @@
         </a:p>
       </dsp:txBody>
       <dsp:txXfrm>
-        <a:off x="3634308" y="2287170"/>
-        <a:ext cx="2127852" cy="815608"/>
+        <a:off x="3723809" y="2341227"/>
+        <a:ext cx="2045725" cy="784129"/>
       </dsp:txXfrm>
     </dsp:sp>
     <dsp:sp modelId="{686EF4F2-C186-45B2-85A0-F6687D978556}">
@@ -4346,8 +4403,8 @@
       </dsp:nvSpPr>
       <dsp:spPr>
         <a:xfrm>
-          <a:off x="6118916" y="2694975"/>
-          <a:ext cx="2450927" cy="2021502"/>
+          <a:off x="6112521" y="2637506"/>
+          <a:ext cx="2591963" cy="2137827"/>
         </a:xfrm>
         <a:prstGeom prst="roundRect">
           <a:avLst>
@@ -4430,18 +4487,13 @@
             <a:buChar char="•"/>
           </a:pPr>
           <a:r>
-            <a:rPr lang="en-US" sz="1600" b="1" kern="1200">
+            <a:rPr lang="en-US" sz="1600" b="1" kern="1200" dirty="0">
               <a:solidFill>
                 <a:srgbClr val="3333FF"/>
               </a:solidFill>
             </a:rPr>
             <a:t>Decide Consumption</a:t>
           </a:r>
-          <a:endParaRPr lang="en-US" sz="1600" b="1" kern="1200" dirty="0">
-            <a:solidFill>
-              <a:srgbClr val="3333FF"/>
-            </a:solidFill>
-          </a:endParaRPr>
         </a:p>
         <a:p>
           <a:pPr marL="342900" lvl="2" indent="-171450" algn="l" defTabSz="711200">
@@ -4489,8 +4541,8 @@
         </a:p>
       </dsp:txBody>
       <dsp:txXfrm>
-        <a:off x="6165436" y="2741495"/>
-        <a:ext cx="2357887" cy="1495283"/>
+        <a:off x="6161718" y="2686703"/>
+        <a:ext cx="2493569" cy="1581327"/>
       </dsp:txXfrm>
     </dsp:sp>
     <dsp:sp modelId="{74F3F80A-8B0F-4F29-B321-AD28639C9105}">
@@ -4500,16 +4552,16 @@
       </dsp:nvSpPr>
       <dsp:spPr>
         <a:xfrm>
-          <a:off x="7518845" y="3257502"/>
-          <a:ext cx="2583156" cy="2583156"/>
+          <a:off x="7567398" y="3174298"/>
+          <a:ext cx="2618944" cy="2618944"/>
         </a:xfrm>
         <a:prstGeom prst="leftCircularArrow">
           <a:avLst>
-            <a:gd name="adj1" fmla="val 2694"/>
-            <a:gd name="adj2" fmla="val 327969"/>
-            <a:gd name="adj3" fmla="val 2103480"/>
+            <a:gd name="adj1" fmla="val 2555"/>
+            <a:gd name="adj2" fmla="val 309995"/>
+            <a:gd name="adj3" fmla="val 2085506"/>
             <a:gd name="adj4" fmla="val 9024489"/>
-            <a:gd name="adj5" fmla="val 3143"/>
+            <a:gd name="adj5" fmla="val 2980"/>
           </a:avLst>
         </a:prstGeom>
         <a:solidFill>
@@ -4548,8 +4600,8 @@
       </dsp:nvSpPr>
       <dsp:spPr>
         <a:xfrm>
-          <a:off x="6663566" y="4283298"/>
-          <a:ext cx="2178602" cy="866358"/>
+          <a:off x="6753966" y="4261700"/>
+          <a:ext cx="2094515" cy="832919"/>
         </a:xfrm>
         <a:prstGeom prst="roundRect">
           <a:avLst>
@@ -4617,8 +4669,8 @@
         </a:p>
       </dsp:txBody>
       <dsp:txXfrm>
-        <a:off x="6688941" y="4308673"/>
-        <a:ext cx="2127852" cy="815608"/>
+        <a:off x="6778361" y="4286095"/>
+        <a:ext cx="2045725" cy="784129"/>
       </dsp:txXfrm>
     </dsp:sp>
     <dsp:sp modelId="{DE4AC59B-B8E8-4AE0-82DC-3BD6B4ADF27A}">
@@ -4628,8 +4680,8 @@
       </dsp:nvSpPr>
       <dsp:spPr>
         <a:xfrm>
-          <a:off x="9173550" y="2694975"/>
-          <a:ext cx="2450927" cy="2021502"/>
+          <a:off x="9167073" y="2636118"/>
+          <a:ext cx="2591963" cy="2137827"/>
         </a:xfrm>
         <a:prstGeom prst="roundRect">
           <a:avLst>
@@ -4732,8 +4784,8 @@
         </a:p>
       </dsp:txBody>
       <dsp:txXfrm>
-        <a:off x="9220070" y="3174674"/>
-        <a:ext cx="2357887" cy="1495283"/>
+        <a:off x="9216270" y="3143421"/>
+        <a:ext cx="2493569" cy="1581327"/>
       </dsp:txXfrm>
     </dsp:sp>
     <dsp:sp modelId="{C4D9AE61-43FF-44EC-9E2D-7446ED243914}">
@@ -4743,8 +4795,8 @@
       </dsp:nvSpPr>
       <dsp:spPr>
         <a:xfrm>
-          <a:off x="9718200" y="2261795"/>
-          <a:ext cx="2178602" cy="866358"/>
+          <a:off x="9808518" y="2316832"/>
+          <a:ext cx="2094515" cy="832919"/>
         </a:xfrm>
         <a:prstGeom prst="roundRect">
           <a:avLst>
@@ -4812,8 +4864,8 @@
         </a:p>
       </dsp:txBody>
       <dsp:txXfrm>
-        <a:off x="9743575" y="2287170"/>
-        <a:ext cx="2127852" cy="815608"/>
+        <a:off x="9832913" y="2341227"/>
+        <a:ext cx="2045725" cy="784129"/>
       </dsp:txXfrm>
     </dsp:sp>
   </dsp:spTree>
@@ -7980,7 +8032,7 @@
           <a:p>
             <a:fld id="{23F5F05C-4C32-48D7-B5AA-52291E739591}" type="datetimeFigureOut">
               <a:rPr lang="en-US" smtClean="0"/>
-              <a:t>8/20/2026</a:t>
+              <a:t>8/24/2026</a:t>
             </a:fld>
             <a:endParaRPr lang="en-US"/>
           </a:p>
@@ -8622,7 +8674,7 @@
           <a:p>
             <a:fld id="{5518E2ED-ACDD-48AE-BEAE-F9B835E4D922}" type="datetimeFigureOut">
               <a:rPr lang="en-US" smtClean="0"/>
-              <a:t>8/20/2026</a:t>
+              <a:t>8/24/2026</a:t>
             </a:fld>
             <a:endParaRPr lang="en-US"/>
           </a:p>
@@ -8820,7 +8872,7 @@
           <a:p>
             <a:fld id="{5518E2ED-ACDD-48AE-BEAE-F9B835E4D922}" type="datetimeFigureOut">
               <a:rPr lang="en-US" smtClean="0"/>
-              <a:t>8/20/2026</a:t>
+              <a:t>8/24/2026</a:t>
             </a:fld>
             <a:endParaRPr lang="en-US"/>
           </a:p>
@@ -9028,7 +9080,7 @@
           <a:p>
             <a:fld id="{5518E2ED-ACDD-48AE-BEAE-F9B835E4D922}" type="datetimeFigureOut">
               <a:rPr lang="en-US" smtClean="0"/>
-              <a:t>8/20/2026</a:t>
+              <a:t>8/24/2026</a:t>
             </a:fld>
             <a:endParaRPr lang="en-US"/>
           </a:p>
@@ -9226,7 +9278,7 @@
           <a:p>
             <a:fld id="{5518E2ED-ACDD-48AE-BEAE-F9B835E4D922}" type="datetimeFigureOut">
               <a:rPr lang="en-US" smtClean="0"/>
-              <a:t>8/20/2026</a:t>
+              <a:t>8/24/2026</a:t>
             </a:fld>
             <a:endParaRPr lang="en-US"/>
           </a:p>
@@ -9501,7 +9553,7 @@
           <a:p>
             <a:fld id="{5518E2ED-ACDD-48AE-BEAE-F9B835E4D922}" type="datetimeFigureOut">
               <a:rPr lang="en-US" smtClean="0"/>
-              <a:t>8/20/2026</a:t>
+              <a:t>8/24/2026</a:t>
             </a:fld>
             <a:endParaRPr lang="en-US"/>
           </a:p>
@@ -9766,7 +9818,7 @@
           <a:p>
             <a:fld id="{5518E2ED-ACDD-48AE-BEAE-F9B835E4D922}" type="datetimeFigureOut">
               <a:rPr lang="en-US" smtClean="0"/>
-              <a:t>8/20/2026</a:t>
+              <a:t>8/24/2026</a:t>
             </a:fld>
             <a:endParaRPr lang="en-US"/>
           </a:p>
@@ -10178,7 +10230,7 @@
           <a:p>
             <a:fld id="{5518E2ED-ACDD-48AE-BEAE-F9B835E4D922}" type="datetimeFigureOut">
               <a:rPr lang="en-US" smtClean="0"/>
-              <a:t>8/20/2026</a:t>
+              <a:t>8/24/2026</a:t>
             </a:fld>
             <a:endParaRPr lang="en-US"/>
           </a:p>
@@ -10319,7 +10371,7 @@
           <a:p>
             <a:fld id="{5518E2ED-ACDD-48AE-BEAE-F9B835E4D922}" type="datetimeFigureOut">
               <a:rPr lang="en-US" smtClean="0"/>
-              <a:t>8/20/2026</a:t>
+              <a:t>8/24/2026</a:t>
             </a:fld>
             <a:endParaRPr lang="en-US"/>
           </a:p>
@@ -10432,7 +10484,7 @@
           <a:p>
             <a:fld id="{5518E2ED-ACDD-48AE-BEAE-F9B835E4D922}" type="datetimeFigureOut">
               <a:rPr lang="en-US" smtClean="0"/>
-              <a:t>8/20/2026</a:t>
+              <a:t>8/24/2026</a:t>
             </a:fld>
             <a:endParaRPr lang="en-US"/>
           </a:p>
@@ -10743,7 +10795,7 @@
           <a:p>
             <a:fld id="{5518E2ED-ACDD-48AE-BEAE-F9B835E4D922}" type="datetimeFigureOut">
               <a:rPr lang="en-US" smtClean="0"/>
-              <a:t>8/20/2026</a:t>
+              <a:t>8/24/2026</a:t>
             </a:fld>
             <a:endParaRPr lang="en-US"/>
           </a:p>
@@ -11031,7 +11083,7 @@
           <a:p>
             <a:fld id="{5518E2ED-ACDD-48AE-BEAE-F9B835E4D922}" type="datetimeFigureOut">
               <a:rPr lang="en-US" smtClean="0"/>
-              <a:t>8/20/2026</a:t>
+              <a:t>8/24/2026</a:t>
             </a:fld>
             <a:endParaRPr lang="en-US"/>
           </a:p>
@@ -11272,7 +11324,7 @@
           <a:p>
             <a:fld id="{5518E2ED-ACDD-48AE-BEAE-F9B835E4D922}" type="datetimeFigureOut">
               <a:rPr lang="en-US" smtClean="0"/>
-              <a:t>8/20/2026</a:t>
+              <a:t>8/24/2026</a:t>
             </a:fld>
             <a:endParaRPr lang="en-US"/>
           </a:p>
@@ -11791,8 +11843,8 @@
         </p:nvSpPr>
         <p:spPr>
           <a:xfrm>
-            <a:off x="628435" y="921715"/>
-            <a:ext cx="5566207" cy="2635993"/>
+            <a:off x="371816" y="779929"/>
+            <a:ext cx="5566207" cy="1908202"/>
           </a:xfrm>
         </p:spPr>
         <p:txBody>
@@ -12049,19 +12101,19 @@
         </p:nvSpPr>
         <p:spPr>
           <a:xfrm>
-            <a:off x="823442" y="4541263"/>
-            <a:ext cx="4662957" cy="1395022"/>
+            <a:off x="3365916" y="5295309"/>
+            <a:ext cx="1893644" cy="457203"/>
           </a:xfrm>
         </p:spPr>
         <p:txBody>
           <a:bodyPr anchor="t">
-            <a:normAutofit/>
+            <a:normAutofit fontScale="92500"/>
           </a:bodyPr>
           <a:lstStyle/>
           <a:p>
             <a:pPr algn="l"/>
             <a:r>
-              <a:rPr lang="en-US" dirty="0">
+              <a:rPr lang="en-US" b="1" dirty="0">
                 <a:solidFill>
                   <a:srgbClr val="FFFFFF"/>
                 </a:solidFill>
@@ -12099,8 +12151,8 @@
         </p:blipFill>
         <p:spPr>
           <a:xfrm>
-            <a:off x="6823077" y="463404"/>
-            <a:ext cx="4664682" cy="5553193"/>
+            <a:off x="334492" y="4146457"/>
+            <a:ext cx="2147370" cy="2556393"/>
           </a:xfrm>
           <a:prstGeom prst="rect">
             <a:avLst/>
@@ -12183,6 +12235,36 @@
           </a:p>
         </p:txBody>
       </p:sp>
+      <p:pic>
+        <p:nvPicPr>
+          <p:cNvPr id="5" name="Picture 4" descr="The image depicts a map illustrating various water bodies and regions within Utah, including rivers like the Bear River Basin, Salt Lake, and others, with several reservoirs and lakes marked.&#10;&#10;AI-generated content may be incorrect.">
+            <a:extLst>
+              <a:ext uri="{FF2B5EF4-FFF2-40B4-BE49-F238E27FC236}">
+                <a16:creationId xmlns:a16="http://schemas.microsoft.com/office/drawing/2014/main" id="{013E8E12-46D6-55E9-31F9-2CCFEDCB82BF}"/>
+              </a:ext>
+            </a:extLst>
+          </p:cNvPr>
+          <p:cNvPicPr>
+            <a:picLocks noChangeAspect="1"/>
+          </p:cNvPicPr>
+          <p:nvPr/>
+        </p:nvPicPr>
+        <p:blipFill>
+          <a:blip r:embed="rId4"/>
+          <a:stretch>
+            <a:fillRect/>
+          </a:stretch>
+        </p:blipFill>
+        <p:spPr>
+          <a:xfrm>
+            <a:off x="7152080" y="7495"/>
+            <a:ext cx="5039920" cy="6858001"/>
+          </a:xfrm>
+          <a:prstGeom prst="rect">
+            <a:avLst/>
+          </a:prstGeom>
+        </p:spPr>
+      </p:pic>
     </p:spTree>
     <p:extLst>
       <p:ext uri="{BB962C8B-B14F-4D97-AF65-F5344CB8AC3E}">
@@ -12299,14 +12381,6 @@
 <file path=ppt/slides/slide2.xml><?xml version="1.0" encoding="utf-8"?>
 <p:sld xmlns:a="http://schemas.openxmlformats.org/drawingml/2006/main" xmlns:r="http://schemas.openxmlformats.org/officeDocument/2006/relationships" xmlns:p="http://schemas.openxmlformats.org/presentationml/2006/main">
   <p:cSld>
-    <p:bg>
-      <p:bgPr>
-        <a:solidFill>
-          <a:schemeClr val="bg1"/>
-        </a:solidFill>
-        <a:effectLst/>
-      </p:bgPr>
-    </p:bg>
     <p:spTree>
       <p:nvGrpSpPr>
         <p:cNvPr id="1" name=""/>
@@ -12321,48 +12395,12 @@
           <a:chExt cx="0" cy="0"/>
         </a:xfrm>
       </p:grpSpPr>
-      <p:sp>
-        <p:nvSpPr>
-          <p:cNvPr id="2" name="Title 1">
+      <p:pic>
+        <p:nvPicPr>
+          <p:cNvPr id="3" name="Picture 2" descr="The graph depicts historical elevation data for the Great Salt Lake South Arm, showing a steady rise from 4,188 feet in 1905 to 4,212 feet in 2025.&#10;&#10;AI-generated content may be incorrect.">
             <a:extLst>
               <a:ext uri="{FF2B5EF4-FFF2-40B4-BE49-F238E27FC236}">
-                <a16:creationId xmlns:a16="http://schemas.microsoft.com/office/drawing/2014/main" id="{81F1C4B3-9A9B-ACA7-FD33-EA866B5A34CE}"/>
-              </a:ext>
-            </a:extLst>
-          </p:cNvPr>
-          <p:cNvSpPr>
-            <a:spLocks noGrp="1"/>
-          </p:cNvSpPr>
-          <p:nvPr>
-            <p:ph type="title"/>
-          </p:nvPr>
-        </p:nvSpPr>
-        <p:spPr>
-          <a:xfrm>
-            <a:off x="610782" y="762000"/>
-            <a:ext cx="5637618" cy="1401597"/>
-          </a:xfrm>
-        </p:spPr>
-        <p:txBody>
-          <a:bodyPr vert="horz" lIns="91440" tIns="45720" rIns="91440" bIns="45720" rtlCol="0" anchor="b">
-            <a:normAutofit fontScale="90000"/>
-          </a:bodyPr>
-          <a:lstStyle/>
-          <a:p>
-            <a:pPr algn="ctr"/>
-            <a:r>
-              <a:rPr lang="en-US" sz="4000" dirty="0"/>
-              <a:t>A Tri-State Water Bank to Get More Water to the GSL</a:t>
-            </a:r>
-          </a:p>
-        </p:txBody>
-      </p:sp>
-      <p:pic>
-        <p:nvPicPr>
-          <p:cNvPr id="18" name="Figure">
-            <a:extLst>
-              <a:ext uri="{FF2B5EF4-FFF2-40B4-BE49-F238E27FC236}">
-                <a16:creationId xmlns:a16="http://schemas.microsoft.com/office/drawing/2014/main" id="{E9E2FD9A-CEC4-149A-7AA0-B9A9435CC662}"/>
+                <a16:creationId xmlns:a16="http://schemas.microsoft.com/office/drawing/2014/main" id="{557EFDC3-1226-0938-F65C-AC0A4CB70C29}"/>
               </a:ext>
             </a:extLst>
           </p:cNvPr>
@@ -12373,71 +12411,224 @@
         </p:nvPicPr>
         <p:blipFill>
           <a:blip r:embed="rId2"/>
-          <a:srcRect/>
-          <a:stretch>
-            <a:fillRect/>
-          </a:stretch>
-        </p:blipFill>
-        <p:spPr bwMode="auto">
-          <a:xfrm>
-            <a:off x="7037563" y="73644"/>
-            <a:ext cx="4918846" cy="6710711"/>
-          </a:xfrm>
-          <a:prstGeom prst="rect">
-            <a:avLst/>
-          </a:prstGeom>
-          <a:ln w="19050">
-            <a:solidFill>
-              <a:schemeClr val="tx1"/>
-            </a:solidFill>
-          </a:ln>
-        </p:spPr>
-      </p:pic>
-      <p:pic>
-        <p:nvPicPr>
-          <p:cNvPr id="4" name="Picture 3" descr="The image depicts a map highlighting Idaho, Wyoming, Salt Lake City, Great, Denver, and Utah.&#10;&#10;AI-generated content may be incorrect.">
-            <a:extLst>
-              <a:ext uri="{FF2B5EF4-FFF2-40B4-BE49-F238E27FC236}">
-                <a16:creationId xmlns:a16="http://schemas.microsoft.com/office/drawing/2014/main" id="{24E79CC9-78C3-BC1B-D785-D9BBED37350E}"/>
-              </a:ext>
-            </a:extLst>
-          </p:cNvPr>
-          <p:cNvPicPr>
-            <a:picLocks noChangeAspect="1"/>
-          </p:cNvPicPr>
-          <p:nvPr/>
-        </p:nvPicPr>
-        <p:blipFill>
-          <a:blip r:embed="rId3">
-            <a:extLst>
-              <a:ext uri="{28A0092B-C50C-407E-A947-70E740481C1C}">
-                <a14:useLocalDpi xmlns:a14="http://schemas.microsoft.com/office/drawing/2010/main" val="0"/>
-              </a:ext>
-            </a:extLst>
-          </a:blip>
+          <a:srcRect t="9245" b="3418"/>
           <a:stretch>
             <a:fillRect/>
           </a:stretch>
         </p:blipFill>
         <p:spPr>
           <a:xfrm>
-            <a:off x="1873623" y="2791492"/>
-            <a:ext cx="2775235" cy="3304508"/>
+            <a:off x="228214" y="44819"/>
+            <a:ext cx="11735567" cy="4267199"/>
           </a:xfrm>
           <a:prstGeom prst="rect">
             <a:avLst/>
           </a:prstGeom>
-          <a:ln w="19050">
-            <a:solidFill>
-              <a:schemeClr val="tx1"/>
-            </a:solidFill>
-          </a:ln>
         </p:spPr>
       </p:pic>
+      <p:sp>
+        <p:nvSpPr>
+          <p:cNvPr id="5" name="TextBox 4">
+            <a:extLst>
+              <a:ext uri="{FF2B5EF4-FFF2-40B4-BE49-F238E27FC236}">
+                <a16:creationId xmlns:a16="http://schemas.microsoft.com/office/drawing/2014/main" id="{ACFF18CE-2302-6EB6-7F2D-E27034F4B1D9}"/>
+              </a:ext>
+            </a:extLst>
+          </p:cNvPr>
+          <p:cNvSpPr txBox="1"/>
+          <p:nvPr/>
+        </p:nvSpPr>
+        <p:spPr>
+          <a:xfrm>
+            <a:off x="1035422" y="5699320"/>
+            <a:ext cx="10121153" cy="954107"/>
+          </a:xfrm>
+          <a:prstGeom prst="rect">
+            <a:avLst/>
+          </a:prstGeom>
+          <a:noFill/>
+        </p:spPr>
+        <p:txBody>
+          <a:bodyPr wrap="square">
+            <a:spAutoFit/>
+          </a:bodyPr>
+          <a:lstStyle/>
+          <a:p>
+            <a:pPr algn="ctr"/>
+            <a:r>
+              <a:rPr lang="en-US" sz="2800" b="1" i="0" dirty="0">
+                <a:solidFill>
+                  <a:schemeClr val="tx1"/>
+                </a:solidFill>
+                <a:effectLst/>
+                <a:latin typeface="+mn-lt"/>
+              </a:rPr>
+              <a:t>800,000 acre-feet</a:t>
+            </a:r>
+            <a:r>
+              <a:rPr lang="en-US" sz="2800" b="0" i="0" dirty="0">
+                <a:solidFill>
+                  <a:schemeClr val="tx1"/>
+                </a:solidFill>
+                <a:effectLst/>
+                <a:latin typeface="+mn-lt"/>
+              </a:rPr>
+              <a:t> of sustained additional inflow per year needed to return the lake to healthy levels (4,198 feet) by 2025</a:t>
+            </a:r>
+            <a:endParaRPr lang="en-US" sz="2800" dirty="0"/>
+          </a:p>
+        </p:txBody>
+      </p:sp>
+      <p:sp>
+        <p:nvSpPr>
+          <p:cNvPr id="7" name="TextBox 6">
+            <a:extLst>
+              <a:ext uri="{FF2B5EF4-FFF2-40B4-BE49-F238E27FC236}">
+                <a16:creationId xmlns:a16="http://schemas.microsoft.com/office/drawing/2014/main" id="{613250A1-4841-7097-A001-67EE207071D7}"/>
+              </a:ext>
+            </a:extLst>
+          </p:cNvPr>
+          <p:cNvSpPr txBox="1"/>
+          <p:nvPr/>
+        </p:nvSpPr>
+        <p:spPr>
+          <a:xfrm>
+            <a:off x="179291" y="4312018"/>
+            <a:ext cx="5916706" cy="523220"/>
+          </a:xfrm>
+          <a:prstGeom prst="rect">
+            <a:avLst/>
+          </a:prstGeom>
+          <a:noFill/>
+        </p:spPr>
+        <p:txBody>
+          <a:bodyPr wrap="square">
+            <a:spAutoFit/>
+          </a:bodyPr>
+          <a:lstStyle/>
+          <a:p>
+            <a:r>
+              <a:rPr lang="en-US" sz="2800" i="0" dirty="0">
+                <a:solidFill>
+                  <a:srgbClr val="00B050"/>
+                </a:solidFill>
+                <a:effectLst/>
+                <a:latin typeface="+mn-lt"/>
+              </a:rPr>
+              <a:t>Healthy lake levels: 4,198-4,205 ft </a:t>
+            </a:r>
+            <a:endParaRPr lang="en-US" sz="2800" dirty="0">
+              <a:solidFill>
+                <a:srgbClr val="00B050"/>
+              </a:solidFill>
+            </a:endParaRPr>
+          </a:p>
+        </p:txBody>
+      </p:sp>
+      <p:sp>
+        <p:nvSpPr>
+          <p:cNvPr id="9" name="TextBox 8">
+            <a:extLst>
+              <a:ext uri="{FF2B5EF4-FFF2-40B4-BE49-F238E27FC236}">
+                <a16:creationId xmlns:a16="http://schemas.microsoft.com/office/drawing/2014/main" id="{57E19324-00E0-2CF6-0634-64D5B5FDB4E1}"/>
+              </a:ext>
+            </a:extLst>
+          </p:cNvPr>
+          <p:cNvSpPr txBox="1"/>
+          <p:nvPr/>
+        </p:nvSpPr>
+        <p:spPr>
+          <a:xfrm>
+            <a:off x="7328645" y="4312018"/>
+            <a:ext cx="4939556" cy="523220"/>
+          </a:xfrm>
+          <a:prstGeom prst="rect">
+            <a:avLst/>
+          </a:prstGeom>
+          <a:noFill/>
+        </p:spPr>
+        <p:txBody>
+          <a:bodyPr wrap="square">
+            <a:spAutoFit/>
+          </a:bodyPr>
+          <a:lstStyle/>
+          <a:p>
+            <a:r>
+              <a:rPr lang="en-US" sz="2800">
+                <a:solidFill>
+                  <a:srgbClr val="FF0000"/>
+                </a:solidFill>
+              </a:rPr>
+              <a:t>H</a:t>
+            </a:r>
+            <a:r>
+              <a:rPr lang="en-US" sz="2800" b="0" i="0">
+                <a:solidFill>
+                  <a:srgbClr val="FF0000"/>
+                </a:solidFill>
+                <a:effectLst/>
+                <a:latin typeface="+mn-lt"/>
+              </a:rPr>
+              <a:t>istoric low : 4,188.5 ft (2022)</a:t>
+            </a:r>
+            <a:endParaRPr lang="en-US" sz="2800" dirty="0">
+              <a:solidFill>
+                <a:srgbClr val="FF0000"/>
+              </a:solidFill>
+            </a:endParaRPr>
+          </a:p>
+        </p:txBody>
+      </p:sp>
+      <p:sp>
+        <p:nvSpPr>
+          <p:cNvPr id="11" name="TextBox 10">
+            <a:extLst>
+              <a:ext uri="{FF2B5EF4-FFF2-40B4-BE49-F238E27FC236}">
+                <a16:creationId xmlns:a16="http://schemas.microsoft.com/office/drawing/2014/main" id="{DBF63553-0BB4-3734-E060-DE33145904CA}"/>
+              </a:ext>
+            </a:extLst>
+          </p:cNvPr>
+          <p:cNvSpPr txBox="1"/>
+          <p:nvPr/>
+        </p:nvSpPr>
+        <p:spPr>
+          <a:xfrm>
+            <a:off x="4798358" y="5005669"/>
+            <a:ext cx="3314700" cy="523220"/>
+          </a:xfrm>
+          <a:prstGeom prst="rect">
+            <a:avLst/>
+          </a:prstGeom>
+          <a:noFill/>
+        </p:spPr>
+        <p:txBody>
+          <a:bodyPr wrap="square">
+            <a:spAutoFit/>
+          </a:bodyPr>
+          <a:lstStyle/>
+          <a:p>
+            <a:r>
+              <a:rPr lang="en-US" sz="2800" b="1" dirty="0"/>
+              <a:t>Mid 2026 ~ </a:t>
+            </a:r>
+            <a:r>
+              <a:rPr lang="en-US" sz="2800" b="1" i="0" dirty="0">
+                <a:solidFill>
+                  <a:schemeClr val="tx1"/>
+                </a:solidFill>
+                <a:effectLst/>
+                <a:latin typeface="+mn-lt"/>
+              </a:rPr>
+              <a:t>4,190 ft</a:t>
+            </a:r>
+            <a:endParaRPr lang="en-US" sz="2800" b="1" dirty="0"/>
+          </a:p>
+        </p:txBody>
+      </p:sp>
     </p:spTree>
     <p:extLst>
       <p:ext uri="{BB962C8B-B14F-4D97-AF65-F5344CB8AC3E}">
-        <p14:creationId xmlns:p14="http://schemas.microsoft.com/office/powerpoint/2010/main" val="1480586688"/>
+        <p14:creationId xmlns:p14="http://schemas.microsoft.com/office/powerpoint/2010/main" val="1233494780"/>
       </p:ext>
     </p:extLst>
   </p:cSld>
@@ -12450,14 +12641,6 @@
 <file path=ppt/slides/slide3.xml><?xml version="1.0" encoding="utf-8"?>
 <p:sld xmlns:a="http://schemas.openxmlformats.org/drawingml/2006/main" xmlns:r="http://schemas.openxmlformats.org/officeDocument/2006/relationships" xmlns:p="http://schemas.openxmlformats.org/presentationml/2006/main">
   <p:cSld>
-    <p:bg>
-      <p:bgPr>
-        <a:solidFill>
-          <a:schemeClr val="bg1"/>
-        </a:solidFill>
-        <a:effectLst/>
-      </p:bgPr>
-    </p:bg>
     <p:spTree>
       <p:nvGrpSpPr>
         <p:cNvPr id="1" name=""/>
@@ -12472,271 +12655,39 @@
           <a:chExt cx="0" cy="0"/>
         </a:xfrm>
       </p:grpSpPr>
-      <p:sp useBgFill="1">
-        <p:nvSpPr>
-          <p:cNvPr id="21" name="Rectangle 20">
+      <p:pic>
+        <p:nvPicPr>
+          <p:cNvPr id="5" name="Picture 4" descr="The image depicts a map illustrating various water bodies and regions within Utah, including rivers like the Bear River Basin, Salt Lake, and others, with several reservoirs and lakes marked.&#10;&#10;AI-generated content may be incorrect.">
             <a:extLst>
               <a:ext uri="{FF2B5EF4-FFF2-40B4-BE49-F238E27FC236}">
-                <a16:creationId xmlns:a16="http://schemas.microsoft.com/office/drawing/2014/main" id="{44AD29B6-BF3B-4407-9E75-52DF8E3B29F1}"/>
-              </a:ext>
-              <a:ext uri="{C183D7F6-B498-43B3-948B-1728B52AA6E4}">
-                <adec:decorative xmlns:adec="http://schemas.microsoft.com/office/drawing/2017/decorative" val="1"/>
+                <a16:creationId xmlns:a16="http://schemas.microsoft.com/office/drawing/2014/main" id="{E444F844-AF34-AA7D-E2E0-6589D214A168}"/>
               </a:ext>
             </a:extLst>
           </p:cNvPr>
-          <p:cNvSpPr>
-            <a:spLocks noGrp="1" noRot="1" noChangeAspect="1" noMove="1" noResize="1" noEditPoints="1" noAdjustHandles="1" noChangeArrowheads="1" noChangeShapeType="1" noTextEdit="1"/>
-          </p:cNvSpPr>
-          <p:nvPr>
-            <p:extLst>
-              <p:ext uri="{386F3935-93C4-4BCD-93E2-E3B085C9AB24}">
-                <p16:designElem xmlns:p16="http://schemas.microsoft.com/office/powerpoint/2015/main" val="1"/>
-              </p:ext>
-            </p:extLst>
-          </p:nvPr>
-        </p:nvSpPr>
+          <p:cNvPicPr>
+            <a:picLocks noChangeAspect="1"/>
+          </p:cNvPicPr>
+          <p:nvPr/>
+        </p:nvPicPr>
+        <p:blipFill>
+          <a:blip r:embed="rId2"/>
+          <a:stretch>
+            <a:fillRect/>
+          </a:stretch>
+        </p:blipFill>
         <p:spPr>
           <a:xfrm>
-            <a:off x="0" y="0"/>
-            <a:ext cx="12192000" cy="6858000"/>
+            <a:off x="171764" y="154391"/>
+            <a:ext cx="4641385" cy="6315699"/>
           </a:xfrm>
           <a:prstGeom prst="rect">
             <a:avLst/>
           </a:prstGeom>
-          <a:ln>
-            <a:noFill/>
-          </a:ln>
         </p:spPr>
-        <p:style>
-          <a:lnRef idx="2">
-            <a:schemeClr val="accent1">
-              <a:shade val="50000"/>
-            </a:schemeClr>
-          </a:lnRef>
-          <a:fillRef idx="1">
-            <a:schemeClr val="accent1"/>
-          </a:fillRef>
-          <a:effectRef idx="0">
-            <a:schemeClr val="accent1"/>
-          </a:effectRef>
-          <a:fontRef idx="minor">
-            <a:schemeClr val="lt1"/>
-          </a:fontRef>
-        </p:style>
-        <p:txBody>
-          <a:bodyPr rtlCol="0" anchor="ctr"/>
-          <a:lstStyle/>
-          <a:p>
-            <a:pPr algn="ctr"/>
-            <a:endParaRPr lang="en-US"/>
-          </a:p>
-        </p:txBody>
-      </p:sp>
-      <p:sp useBgFill="1">
-        <p:nvSpPr>
-          <p:cNvPr id="23" name="Rectangle 22">
-            <a:extLst>
-              <a:ext uri="{FF2B5EF4-FFF2-40B4-BE49-F238E27FC236}">
-                <a16:creationId xmlns:a16="http://schemas.microsoft.com/office/drawing/2014/main" id="{55F8BA08-3E38-4B70-B93A-74F08E092206}"/>
-              </a:ext>
-              <a:ext uri="{C183D7F6-B498-43B3-948B-1728B52AA6E4}">
-                <adec:decorative xmlns:adec="http://schemas.microsoft.com/office/drawing/2017/decorative" val="1"/>
-              </a:ext>
-            </a:extLst>
-          </p:cNvPr>
-          <p:cNvSpPr>
-            <a:spLocks noGrp="1" noRot="1" noChangeAspect="1" noMove="1" noResize="1" noEditPoints="1" noAdjustHandles="1" noChangeArrowheads="1" noChangeShapeType="1" noTextEdit="1"/>
-          </p:cNvSpPr>
-          <p:nvPr>
-            <p:extLst>
-              <p:ext uri="{386F3935-93C4-4BCD-93E2-E3B085C9AB24}">
-                <p16:designElem xmlns:p16="http://schemas.microsoft.com/office/powerpoint/2015/main" val="1"/>
-              </p:ext>
-            </p:extLst>
-          </p:nvPr>
-        </p:nvSpPr>
-        <p:spPr>
-          <a:xfrm>
-            <a:off x="558209" y="260019"/>
-            <a:ext cx="11167447" cy="5933012"/>
-          </a:xfrm>
-          <a:prstGeom prst="rect">
-            <a:avLst/>
-          </a:prstGeom>
-          <a:ln w="12700">
-            <a:solidFill>
-              <a:srgbClr val="DEDEDE"/>
-            </a:solidFill>
-          </a:ln>
-          <a:effectLst>
-            <a:outerShdw blurRad="50800" dist="38100" dir="2700000" algn="tl" rotWithShape="0">
-              <a:schemeClr val="bg2">
-                <a:lumMod val="85000"/>
-                <a:alpha val="50000"/>
-              </a:schemeClr>
-            </a:outerShdw>
-          </a:effectLst>
-        </p:spPr>
-        <p:style>
-          <a:lnRef idx="2">
-            <a:schemeClr val="accent1">
-              <a:shade val="50000"/>
-            </a:schemeClr>
-          </a:lnRef>
-          <a:fillRef idx="1">
-            <a:schemeClr val="accent1"/>
-          </a:fillRef>
-          <a:effectRef idx="0">
-            <a:schemeClr val="accent1"/>
-          </a:effectRef>
-          <a:fontRef idx="minor">
-            <a:schemeClr val="lt1"/>
-          </a:fontRef>
-        </p:style>
-        <p:txBody>
-          <a:bodyPr rtlCol="0" anchor="ctr"/>
-          <a:lstStyle/>
-          <a:p>
-            <a:pPr marL="0" marR="0" lvl="0" indent="0" algn="ctr" defTabSz="914400" rtl="0" eaLnBrk="1" fontAlgn="auto" latinLnBrk="0" hangingPunct="1">
-              <a:lnSpc>
-                <a:spcPct val="100000"/>
-              </a:lnSpc>
-              <a:spcBef>
-                <a:spcPts val="0"/>
-              </a:spcBef>
-              <a:spcAft>
-                <a:spcPts val="0"/>
-              </a:spcAft>
-              <a:buClrTx/>
-              <a:buSzTx/>
-              <a:buFontTx/>
-              <a:buNone/>
-              <a:tabLst/>
-              <a:defRPr/>
-            </a:pPr>
-            <a:endParaRPr kumimoji="0" lang="en-US" sz="1800" b="0" i="0" u="none" strike="noStrike" kern="1200" cap="none" spc="0" normalizeH="0" baseline="0" noProof="0">
-              <a:ln>
-                <a:noFill/>
-              </a:ln>
-              <a:solidFill>
-                <a:prstClr val="white"/>
-              </a:solidFill>
-              <a:effectLst/>
-              <a:uLnTx/>
-              <a:uFillTx/>
-              <a:latin typeface="Calibri" panose="020F0502020204030204"/>
-              <a:ea typeface="+mn-ea"/>
-              <a:cs typeface="+mn-cs"/>
-            </a:endParaRPr>
-          </a:p>
-        </p:txBody>
-      </p:sp>
-      <p:sp>
-        <p:nvSpPr>
-          <p:cNvPr id="2" name="Title 1">
-            <a:extLst>
-              <a:ext uri="{FF2B5EF4-FFF2-40B4-BE49-F238E27FC236}">
-                <a16:creationId xmlns:a16="http://schemas.microsoft.com/office/drawing/2014/main" id="{82135AE4-D2DF-F18B-908D-5801E8171ADD}"/>
-              </a:ext>
-            </a:extLst>
-          </p:cNvPr>
-          <p:cNvSpPr>
-            <a:spLocks noGrp="1"/>
-          </p:cNvSpPr>
-          <p:nvPr>
-            <p:ph type="title"/>
-          </p:nvPr>
-        </p:nvSpPr>
-        <p:spPr>
-          <a:xfrm>
-            <a:off x="1045029" y="507160"/>
-            <a:ext cx="3266995" cy="5438730"/>
-          </a:xfrm>
-        </p:spPr>
-        <p:txBody>
-          <a:bodyPr>
-            <a:normAutofit/>
-          </a:bodyPr>
-          <a:lstStyle/>
-          <a:p>
-            <a:r>
-              <a:rPr lang="en-US" dirty="0"/>
-              <a:t>Key Assumptions and Ideas</a:t>
-            </a:r>
-          </a:p>
-        </p:txBody>
-      </p:sp>
-      <p:sp>
-        <p:nvSpPr>
-          <p:cNvPr id="25" name="Rectangle 24">
-            <a:extLst>
-              <a:ext uri="{FF2B5EF4-FFF2-40B4-BE49-F238E27FC236}">
-                <a16:creationId xmlns:a16="http://schemas.microsoft.com/office/drawing/2014/main" id="{357F1B33-79AB-4A71-8CEC-4546D709B8C8}"/>
-              </a:ext>
-              <a:ext uri="{C183D7F6-B498-43B3-948B-1728B52AA6E4}">
-                <adec:decorative xmlns:adec="http://schemas.microsoft.com/office/drawing/2017/decorative" val="1"/>
-              </a:ext>
-            </a:extLst>
-          </p:cNvPr>
-          <p:cNvSpPr>
-            <a:spLocks noGrp="1" noRot="1" noChangeAspect="1" noMove="1" noResize="1" noEditPoints="1" noAdjustHandles="1" noChangeArrowheads="1" noChangeShapeType="1" noTextEdit="1"/>
-          </p:cNvSpPr>
-          <p:nvPr>
-            <p:extLst>
-              <p:ext uri="{386F3935-93C4-4BCD-93E2-E3B085C9AB24}">
-                <p16:designElem xmlns:p16="http://schemas.microsoft.com/office/powerpoint/2015/main" val="1"/>
-              </p:ext>
-            </p:extLst>
-          </p:nvPr>
-        </p:nvSpPr>
-        <p:spPr>
-          <a:xfrm>
-            <a:off x="498834" y="2874481"/>
-            <a:ext cx="128016" cy="704088"/>
-          </a:xfrm>
-          <a:prstGeom prst="rect">
-            <a:avLst/>
-          </a:prstGeom>
-          <a:solidFill>
-            <a:schemeClr val="accent2"/>
-          </a:solidFill>
-          <a:ln>
-            <a:noFill/>
-          </a:ln>
-        </p:spPr>
-        <p:style>
-          <a:lnRef idx="2">
-            <a:schemeClr val="accent1">
-              <a:shade val="50000"/>
-            </a:schemeClr>
-          </a:lnRef>
-          <a:fillRef idx="1">
-            <a:schemeClr val="accent1"/>
-          </a:fillRef>
-          <a:effectRef idx="0">
-            <a:schemeClr val="accent1"/>
-          </a:effectRef>
-          <a:fontRef idx="minor">
-            <a:schemeClr val="lt1"/>
-          </a:fontRef>
-        </p:style>
-        <p:txBody>
-          <a:bodyPr rtlCol="0" anchor="ctr"/>
-          <a:lstStyle/>
-          <a:p>
-            <a:pPr algn="ctr"/>
-            <a:endParaRPr lang="en-US">
-              <a:solidFill>
-                <a:prstClr val="white"/>
-              </a:solidFill>
-              <a:latin typeface="Calibri" panose="020F0502020204030204"/>
-            </a:endParaRPr>
-          </a:p>
-        </p:txBody>
-      </p:sp>
+      </p:pic>
       <p:graphicFrame>
         <p:nvGraphicFramePr>
-          <p:cNvPr id="5" name="Content Placeholder 2">
+          <p:cNvPr id="6" name="Content Placeholder 2">
             <a:extLst>
               <a:ext uri="{FF2B5EF4-FFF2-40B4-BE49-F238E27FC236}">
                 <a16:creationId xmlns:a16="http://schemas.microsoft.com/office/drawing/2014/main" id="{7990CB0E-8803-D419-DBC6-4068A222A4E0}"/>
@@ -12744,31 +12695,30 @@
             </a:extLst>
           </p:cNvPr>
           <p:cNvGraphicFramePr>
-            <a:graphicFrameLocks noGrp="1"/>
+            <a:graphicFrameLocks/>
           </p:cNvGraphicFramePr>
           <p:nvPr>
-            <p:ph idx="1"/>
             <p:extLst>
               <p:ext uri="{D42A27DB-BD31-4B8C-83A1-F6EECF244321}">
-                <p14:modId xmlns:p14="http://schemas.microsoft.com/office/powerpoint/2010/main" val="398504165"/>
+                <p14:modId xmlns:p14="http://schemas.microsoft.com/office/powerpoint/2010/main" val="889738938"/>
               </p:ext>
             </p:extLst>
           </p:nvPr>
         </p:nvGraphicFramePr>
         <p:xfrm>
-          <a:off x="4526280" y="74428"/>
+          <a:off x="5189668" y="217864"/>
           <a:ext cx="6830568" cy="6783572"/>
         </p:xfrm>
         <a:graphic>
           <a:graphicData uri="http://schemas.openxmlformats.org/drawingml/2006/diagram">
-            <dgm:relIds xmlns:dgm="http://schemas.openxmlformats.org/drawingml/2006/diagram" xmlns:r="http://schemas.openxmlformats.org/officeDocument/2006/relationships" r:dm="rId2" r:lo="rId3" r:qs="rId4" r:cs="rId5"/>
+            <dgm:relIds xmlns:dgm="http://schemas.openxmlformats.org/drawingml/2006/diagram" xmlns:r="http://schemas.openxmlformats.org/officeDocument/2006/relationships" r:dm="rId3" r:lo="rId4" r:qs="rId5" r:cs="rId6"/>
           </a:graphicData>
         </a:graphic>
       </p:graphicFrame>
     </p:spTree>
     <p:extLst>
       <p:ext uri="{BB962C8B-B14F-4D97-AF65-F5344CB8AC3E}">
-        <p14:creationId xmlns:p14="http://schemas.microsoft.com/office/powerpoint/2010/main" val="1860897597"/>
+        <p14:creationId xmlns:p14="http://schemas.microsoft.com/office/powerpoint/2010/main" val="1077105498"/>
       </p:ext>
     </p:extLst>
   </p:cSld>
@@ -12808,7 +12758,7 @@
           <p:nvPr>
             <p:extLst>
               <p:ext uri="{D42A27DB-BD31-4B8C-83A1-F6EECF244321}">
-                <p14:modId xmlns:p14="http://schemas.microsoft.com/office/powerpoint/2010/main" val="1027488444"/>
+                <p14:modId xmlns:p14="http://schemas.microsoft.com/office/powerpoint/2010/main" val="3276213830"/>
               </p:ext>
             </p:extLst>
           </p:nvPr>

--- a/Session Guide/IntroPresentation.pptx
+++ b/Session Guide/IntroPresentation.pptx
@@ -123,6 +123,7 @@
 <p1510:revInfo xmlns:a="http://schemas.openxmlformats.org/drawingml/2006/main" xmlns:r="http://schemas.openxmlformats.org/officeDocument/2006/relationships" xmlns:p1510="http://schemas.microsoft.com/office/powerpoint/2015/10/main">
   <p1510:revLst>
     <p1510:client id="{0FA96045-9951-4B0B-BD62-76A4AB30A5F9}" v="10" dt="2026-08-24T23:19:05.277"/>
+    <p1510:client id="{BE72FB7B-DAE7-44E6-A59E-4031D98A4453}" v="1" dt="2026-08-25T17:57:17.673"/>
   </p1510:revLst>
 </p1510:revInfo>
 </file>
@@ -132,18 +133,18 @@
   <pc:docChgLst>
     <pc:chgData name="Hadia Akbar" userId="19362115565_tp_box_2" providerId="OAuth2" clId="{FF77DECD-7ECC-48F4-BF82-9D4D4E0BE774}"/>
     <pc:docChg chg="undo redo custSel addSld delSld modSld sldOrd delMainMaster">
-      <pc:chgData name="Hadia Akbar" userId="19362115565_tp_box_2" providerId="OAuth2" clId="{FF77DECD-7ECC-48F4-BF82-9D4D4E0BE774}" dt="2026-08-24T23:19:05.277" v="2465" actId="12090"/>
+      <pc:chgData name="Hadia Akbar" userId="19362115565_tp_box_2" providerId="OAuth2" clId="{FF77DECD-7ECC-48F4-BF82-9D4D4E0BE774}" dt="2026-08-25T18:40:44.123" v="2533" actId="1076"/>
       <pc:docMkLst>
         <pc:docMk/>
       </pc:docMkLst>
       <pc:sldChg chg="addSp delSp modSp new mod setBg addAnim modAnim delDesignElem">
-        <pc:chgData name="Hadia Akbar" userId="19362115565_tp_box_2" providerId="OAuth2" clId="{FF77DECD-7ECC-48F4-BF82-9D4D4E0BE774}" dt="2026-08-24T23:07:31.014" v="2247" actId="1076"/>
+        <pc:chgData name="Hadia Akbar" userId="19362115565_tp_box_2" providerId="OAuth2" clId="{FF77DECD-7ECC-48F4-BF82-9D4D4E0BE774}" dt="2026-08-25T17:55:47.286" v="2470" actId="1076"/>
         <pc:sldMkLst>
           <pc:docMk/>
           <pc:sldMk cId="4246612416" sldId="256"/>
         </pc:sldMkLst>
         <pc:spChg chg="mod">
-          <ac:chgData name="Hadia Akbar" userId="19362115565_tp_box_2" providerId="OAuth2" clId="{FF77DECD-7ECC-48F4-BF82-9D4D4E0BE774}" dt="2026-08-24T23:06:46.212" v="2225" actId="1076"/>
+          <ac:chgData name="Hadia Akbar" userId="19362115565_tp_box_2" providerId="OAuth2" clId="{FF77DECD-7ECC-48F4-BF82-9D4D4E0BE774}" dt="2026-08-25T17:55:47.286" v="2470" actId="1076"/>
           <ac:spMkLst>
             <pc:docMk/>
             <pc:sldMk cId="4246612416" sldId="256"/>
@@ -216,13 +217,13 @@
         </pc:picChg>
       </pc:sldChg>
       <pc:sldChg chg="addSp delSp modSp add mod">
-        <pc:chgData name="Hadia Akbar" userId="19362115565_tp_box_2" providerId="OAuth2" clId="{FF77DECD-7ECC-48F4-BF82-9D4D4E0BE774}" dt="2026-08-24T23:19:05.277" v="2465" actId="12090"/>
+        <pc:chgData name="Hadia Akbar" userId="19362115565_tp_box_2" providerId="OAuth2" clId="{FF77DECD-7ECC-48F4-BF82-9D4D4E0BE774}" dt="2026-08-25T17:57:38.535" v="2508" actId="20577"/>
         <pc:sldMkLst>
           <pc:docMk/>
           <pc:sldMk cId="3397881947" sldId="258"/>
         </pc:sldMkLst>
         <pc:spChg chg="add mod">
-          <ac:chgData name="Hadia Akbar" userId="19362115565_tp_box_2" providerId="OAuth2" clId="{FF77DECD-7ECC-48F4-BF82-9D4D4E0BE774}" dt="2026-08-06T17:56:02.933" v="2156" actId="20577"/>
+          <ac:chgData name="Hadia Akbar" userId="19362115565_tp_box_2" providerId="OAuth2" clId="{FF77DECD-7ECC-48F4-BF82-9D4D4E0BE774}" dt="2026-08-25T17:56:57.966" v="2477" actId="1076"/>
           <ac:spMkLst>
             <pc:docMk/>
             <pc:sldMk cId="3397881947" sldId="258"/>
@@ -230,7 +231,7 @@
           </ac:spMkLst>
         </pc:spChg>
         <pc:graphicFrameChg chg="mod modGraphic">
-          <ac:chgData name="Hadia Akbar" userId="19362115565_tp_box_2" providerId="OAuth2" clId="{FF77DECD-7ECC-48F4-BF82-9D4D4E0BE774}" dt="2026-08-24T23:19:05.277" v="2465" actId="12090"/>
+          <ac:chgData name="Hadia Akbar" userId="19362115565_tp_box_2" providerId="OAuth2" clId="{FF77DECD-7ECC-48F4-BF82-9D4D4E0BE774}" dt="2026-08-25T17:57:38.535" v="2508" actId="20577"/>
           <ac:graphicFrameMkLst>
             <pc:docMk/>
             <pc:sldMk cId="3397881947" sldId="258"/>
@@ -332,13 +333,13 @@
         </pc:picChg>
       </pc:sldChg>
       <pc:sldChg chg="addSp modSp new mod ord">
-        <pc:chgData name="Hadia Akbar" userId="19362115565_tp_box_2" providerId="OAuth2" clId="{FF77DECD-7ECC-48F4-BF82-9D4D4E0BE774}" dt="2026-08-24T23:16:18.208" v="2438" actId="1076"/>
+        <pc:chgData name="Hadia Akbar" userId="19362115565_tp_box_2" providerId="OAuth2" clId="{FF77DECD-7ECC-48F4-BF82-9D4D4E0BE774}" dt="2026-08-25T18:40:44.123" v="2533" actId="1076"/>
         <pc:sldMkLst>
           <pc:docMk/>
           <pc:sldMk cId="1233494780" sldId="264"/>
         </pc:sldMkLst>
         <pc:spChg chg="add mod">
-          <ac:chgData name="Hadia Akbar" userId="19362115565_tp_box_2" providerId="OAuth2" clId="{FF77DECD-7ECC-48F4-BF82-9D4D4E0BE774}" dt="2026-08-24T23:14:29.194" v="2364"/>
+          <ac:chgData name="Hadia Akbar" userId="19362115565_tp_box_2" providerId="OAuth2" clId="{FF77DECD-7ECC-48F4-BF82-9D4D4E0BE774}" dt="2026-08-25T18:40:44.123" v="2533" actId="1076"/>
           <ac:spMkLst>
             <pc:docMk/>
             <pc:sldMk cId="1233494780" sldId="264"/>
@@ -346,7 +347,7 @@
           </ac:spMkLst>
         </pc:spChg>
         <pc:spChg chg="add mod">
-          <ac:chgData name="Hadia Akbar" userId="19362115565_tp_box_2" providerId="OAuth2" clId="{FF77DECD-7ECC-48F4-BF82-9D4D4E0BE774}" dt="2026-08-24T23:15:27.979" v="2401" actId="1076"/>
+          <ac:chgData name="Hadia Akbar" userId="19362115565_tp_box_2" providerId="OAuth2" clId="{FF77DECD-7ECC-48F4-BF82-9D4D4E0BE774}" dt="2026-08-25T18:39:37.737" v="2516" actId="1076"/>
           <ac:spMkLst>
             <pc:docMk/>
             <pc:sldMk cId="1233494780" sldId="264"/>
@@ -354,7 +355,7 @@
           </ac:spMkLst>
         </pc:spChg>
         <pc:spChg chg="add mod">
-          <ac:chgData name="Hadia Akbar" userId="19362115565_tp_box_2" providerId="OAuth2" clId="{FF77DECD-7ECC-48F4-BF82-9D4D4E0BE774}" dt="2026-08-24T23:15:41.830" v="2404"/>
+          <ac:chgData name="Hadia Akbar" userId="19362115565_tp_box_2" providerId="OAuth2" clId="{FF77DECD-7ECC-48F4-BF82-9D4D4E0BE774}" dt="2026-08-25T18:40:33.218" v="2530" actId="1076"/>
           <ac:spMkLst>
             <pc:docMk/>
             <pc:sldMk cId="1233494780" sldId="264"/>
@@ -362,7 +363,7 @@
           </ac:spMkLst>
         </pc:spChg>
         <pc:spChg chg="add mod">
-          <ac:chgData name="Hadia Akbar" userId="19362115565_tp_box_2" providerId="OAuth2" clId="{FF77DECD-7ECC-48F4-BF82-9D4D4E0BE774}" dt="2026-08-24T23:16:18.208" v="2438" actId="1076"/>
+          <ac:chgData name="Hadia Akbar" userId="19362115565_tp_box_2" providerId="OAuth2" clId="{FF77DECD-7ECC-48F4-BF82-9D4D4E0BE774}" dt="2026-08-25T18:40:22.757" v="2529" actId="1076"/>
           <ac:spMkLst>
             <pc:docMk/>
             <pc:sldMk cId="1233494780" sldId="264"/>
@@ -370,7 +371,7 @@
           </ac:spMkLst>
         </pc:spChg>
         <pc:picChg chg="add mod modCrop">
-          <ac:chgData name="Hadia Akbar" userId="19362115565_tp_box_2" providerId="OAuth2" clId="{FF77DECD-7ECC-48F4-BF82-9D4D4E0BE774}" dt="2026-08-24T23:15:17.685" v="2398" actId="1035"/>
+          <ac:chgData name="Hadia Akbar" userId="19362115565_tp_box_2" providerId="OAuth2" clId="{FF77DECD-7ECC-48F4-BF82-9D4D4E0BE774}" dt="2026-08-25T18:40:19.720" v="2528" actId="1076"/>
           <ac:picMkLst>
             <pc:docMk/>
             <pc:sldMk cId="1233494780" sldId="264"/>
@@ -2650,7 +2651,14 @@
     </dgm:pt>
     <dgm:pt modelId="{FB1AC2EB-2A73-487E-BFFC-E85DCC33CF70}">
       <dgm:prSet phldrT="[Text]" phldr="0" custT="1"/>
-      <dgm:spPr/>
+      <dgm:spPr>
+        <a:solidFill>
+          <a:schemeClr val="accent2">
+            <a:lumMod val="20000"/>
+            <a:lumOff val="80000"/>
+          </a:schemeClr>
+        </a:solidFill>
+      </dgm:spPr>
       <dgm:t>
         <a:bodyPr/>
         <a:lstStyle/>
@@ -2690,7 +2698,14 @@
     </dgm:pt>
     <dgm:pt modelId="{EB9EEFA8-E354-4F52-BA0E-F1E23DACFF23}">
       <dgm:prSet phldrT="[Text]" phldr="0" custT="1"/>
-      <dgm:spPr/>
+      <dgm:spPr>
+        <a:solidFill>
+          <a:schemeClr val="accent2">
+            <a:lumMod val="20000"/>
+            <a:lumOff val="80000"/>
+          </a:schemeClr>
+        </a:solidFill>
+      </dgm:spPr>
       <dgm:t>
         <a:bodyPr/>
         <a:lstStyle/>
@@ -2854,49 +2869,16 @@
         </a:p>
       </dgm:t>
     </dgm:pt>
-    <dgm:pt modelId="{3679B97A-32D2-4172-BEF9-560A1496BE56}">
+    <dgm:pt modelId="{067E8FF9-061C-4CD3-A921-26E66C8903EA}">
       <dgm:prSet phldrT="[Text]" phldr="0" custT="1"/>
-      <dgm:spPr/>
-      <dgm:t>
-        <a:bodyPr/>
-        <a:lstStyle/>
-        <a:p>
-          <a:r>
-            <a:rPr lang="en-US" sz="1600" b="1" dirty="0">
-              <a:solidFill>
-                <a:srgbClr val="3333FF"/>
-              </a:solidFill>
-            </a:rPr>
-            <a:t>Negotiate Price</a:t>
-          </a:r>
-        </a:p>
-      </dgm:t>
-    </dgm:pt>
-    <dgm:pt modelId="{B180FB7C-C893-47CE-AC8C-F0A6527F33DC}" type="parTrans" cxnId="{A16A5AFB-4236-4673-9CB5-BE389EB3EF8C}">
-      <dgm:prSet/>
-      <dgm:spPr/>
-      <dgm:t>
-        <a:bodyPr/>
-        <a:lstStyle/>
-        <a:p>
-          <a:endParaRPr lang="en-US"/>
-        </a:p>
-      </dgm:t>
-    </dgm:pt>
-    <dgm:pt modelId="{0D2383D4-47E1-4D36-90BF-8D7B53F07E5B}" type="sibTrans" cxnId="{A16A5AFB-4236-4673-9CB5-BE389EB3EF8C}">
-      <dgm:prSet/>
-      <dgm:spPr/>
-      <dgm:t>
-        <a:bodyPr/>
-        <a:lstStyle/>
-        <a:p>
-          <a:endParaRPr lang="en-US"/>
-        </a:p>
-      </dgm:t>
-    </dgm:pt>
-    <dgm:pt modelId="{428AB112-F44A-4DBD-9A72-307227A48835}">
-      <dgm:prSet phldrT="[Text]" phldr="0" custT="1"/>
-      <dgm:spPr/>
+      <dgm:spPr>
+        <a:solidFill>
+          <a:schemeClr val="accent2">
+            <a:lumMod val="20000"/>
+            <a:lumOff val="80000"/>
+          </a:schemeClr>
+        </a:solidFill>
+      </dgm:spPr>
       <dgm:t>
         <a:bodyPr/>
         <a:lstStyle/>
@@ -2912,27 +2894,46 @@
         </a:p>
       </dgm:t>
     </dgm:pt>
-    <dgm:pt modelId="{DE48C9E4-0BEC-4D80-A91C-82920DE858EA}" type="parTrans" cxnId="{6B257843-4F5E-4AFE-A2EB-DCD7EC2836DE}">
+    <dgm:pt modelId="{4BDED4F2-CDF9-49DB-8ABB-3FB5C36045BA}" type="parTrans" cxnId="{FB0716F9-6BD9-4536-8DCF-134146E022B6}">
       <dgm:prSet/>
       <dgm:spPr/>
+    </dgm:pt>
+    <dgm:pt modelId="{94AFE86B-7BC3-489D-8D06-70F5EE494AE4}" type="sibTrans" cxnId="{FB0716F9-6BD9-4536-8DCF-134146E022B6}">
+      <dgm:prSet/>
+      <dgm:spPr/>
+    </dgm:pt>
+    <dgm:pt modelId="{463F1166-29D7-4D0E-BEAE-3FEA4539912F}">
+      <dgm:prSet phldrT="[Text]" phldr="0" custT="1"/>
+      <dgm:spPr>
+        <a:solidFill>
+          <a:schemeClr val="accent2">
+            <a:lumMod val="20000"/>
+            <a:lumOff val="80000"/>
+          </a:schemeClr>
+        </a:solidFill>
+      </dgm:spPr>
       <dgm:t>
         <a:bodyPr/>
         <a:lstStyle/>
         <a:p>
-          <a:endParaRPr lang="en-US"/>
+          <a:r>
+            <a:rPr lang="en-US" sz="1600" b="1" dirty="0">
+              <a:solidFill>
+                <a:srgbClr val="3333FF"/>
+              </a:solidFill>
+            </a:rPr>
+            <a:t>Negotiate Price with the bank</a:t>
+          </a:r>
         </a:p>
       </dgm:t>
     </dgm:pt>
-    <dgm:pt modelId="{364B18D5-CB61-44ED-85B8-E92D9EE279E9}" type="sibTrans" cxnId="{6B257843-4F5E-4AFE-A2EB-DCD7EC2836DE}">
+    <dgm:pt modelId="{4FCCC525-2284-43CB-B379-561F45AA5620}" type="parTrans" cxnId="{E9390139-F794-4D9D-8BD8-8206907484F4}">
       <dgm:prSet/>
       <dgm:spPr/>
-      <dgm:t>
-        <a:bodyPr/>
-        <a:lstStyle/>
-        <a:p>
-          <a:endParaRPr lang="en-US"/>
-        </a:p>
-      </dgm:t>
+    </dgm:pt>
+    <dgm:pt modelId="{D965F5A8-311F-48EC-8A78-501A3170B2FD}" type="sibTrans" cxnId="{E9390139-F794-4D9D-8BD8-8206907484F4}">
+      <dgm:prSet/>
+      <dgm:spPr/>
     </dgm:pt>
     <dgm:pt modelId="{1641139E-5806-4ED1-AA40-CDBBD9ABB873}" type="pres">
       <dgm:prSet presAssocID="{99D1A08B-05C7-4294-99DD-7BE56AF469A8}" presName="Name0" presStyleCnt="0">
@@ -3118,81 +3119,81 @@
     </dgm:pt>
   </dgm:ptLst>
   <dgm:cxnLst>
+    <dgm:cxn modelId="{3DC6A201-5771-43DA-B9D7-5C5BDCF46D32}" type="presOf" srcId="{067E8FF9-061C-4CD3-A921-26E66C8903EA}" destId="{686EF4F2-C186-45B2-85A0-F6687D978556}" srcOrd="0" destOrd="2" presId="urn:microsoft.com/office/officeart/2005/8/layout/hProcess4"/>
     <dgm:cxn modelId="{792D4403-5B5E-411A-82AE-D483DFE10AAB}" srcId="{99D1A08B-05C7-4294-99DD-7BE56AF469A8}" destId="{5DA50F34-C831-4850-8B63-CE799FF6C0D5}" srcOrd="3" destOrd="0" parTransId="{B7130E8A-5AA5-407D-9187-C73B81606744}" sibTransId="{27D0D650-91D1-4215-B213-38A33A97C818}"/>
     <dgm:cxn modelId="{22D14C08-B102-444F-8400-735B14327DF4}" srcId="{1BCB95D6-B1A4-439C-9AD1-CE00E32D68AA}" destId="{EB9EEFA8-E354-4F52-BA0E-F1E23DACFF23}" srcOrd="1" destOrd="0" parTransId="{FBDD0822-3C20-4EF0-B91D-23A882EE7DCF}" sibTransId="{81CF5625-CEBF-44C9-BA20-42ED0CDF8DE9}"/>
-    <dgm:cxn modelId="{3AA8EF0A-0856-4B67-8239-D4811C9B9A20}" type="presOf" srcId="{36A43055-FF1E-4000-92DC-E1996435069B}" destId="{3A5BFE43-F020-43A7-BFCC-87B32E6976A9}" srcOrd="1" destOrd="0" presId="urn:microsoft.com/office/officeart/2005/8/layout/hProcess4"/>
+    <dgm:cxn modelId="{B2114C0C-9AC9-41D6-8A6B-DA4291CE8593}" type="presOf" srcId="{5C407219-177A-43EE-B67E-B6E75271BA5B}" destId="{22CBB4AF-36EB-417C-B703-FAF0662ACF49}" srcOrd="0" destOrd="0" presId="urn:microsoft.com/office/officeart/2005/8/layout/hProcess4"/>
     <dgm:cxn modelId="{0695140D-8D64-47F6-820C-E3C788A10897}" srcId="{5C407219-177A-43EE-B67E-B6E75271BA5B}" destId="{269C76F2-6A3F-4463-A37D-34DF9557723A}" srcOrd="1" destOrd="0" parTransId="{6FBEEE41-A564-4BEC-881C-34C8762D68EC}" sibTransId="{45AFFE97-47BA-4DAA-829A-7C59AE051FBD}"/>
-    <dgm:cxn modelId="{E2C1BF0F-D514-4126-8BC4-A61CBF22795D}" type="presOf" srcId="{FB1AC2EB-2A73-487E-BFFC-E85DCC33CF70}" destId="{686EF4F2-C186-45B2-85A0-F6687D978556}" srcOrd="0" destOrd="0" presId="urn:microsoft.com/office/officeart/2005/8/layout/hProcess4"/>
-    <dgm:cxn modelId="{C28AC818-B414-421E-8463-AB316EB8EB6D}" type="presOf" srcId="{97225384-B3A3-4246-BB0C-554A34D4B7EE}" destId="{21C25EF7-5122-4CB4-922C-C536D59390E7}" srcOrd="1" destOrd="0" presId="urn:microsoft.com/office/officeart/2005/8/layout/hProcess4"/>
-    <dgm:cxn modelId="{64ECB721-0461-41EC-8F41-CB09C952C4FE}" type="presOf" srcId="{5C407219-177A-43EE-B67E-B6E75271BA5B}" destId="{22CBB4AF-36EB-417C-B703-FAF0662ACF49}" srcOrd="0" destOrd="0" presId="urn:microsoft.com/office/officeart/2005/8/layout/hProcess4"/>
+    <dgm:cxn modelId="{68DDD513-74E0-4FBC-A484-DA1F093513A4}" type="presOf" srcId="{463F1166-29D7-4D0E-BEAE-3FEA4539912F}" destId="{22FAA828-71BC-4F47-855C-19152EC671EC}" srcOrd="1" destOrd="3" presId="urn:microsoft.com/office/officeart/2005/8/layout/hProcess4"/>
+    <dgm:cxn modelId="{571D9C18-79A1-4301-8875-8859B57A90DF}" type="presOf" srcId="{0C420126-164A-4514-A51E-AB2C4502F253}" destId="{74F3F80A-8B0F-4F29-B321-AD28639C9105}" srcOrd="0" destOrd="0" presId="urn:microsoft.com/office/officeart/2005/8/layout/hProcess4"/>
+    <dgm:cxn modelId="{CF03821E-C648-4156-9BF5-EB8FEF4BE68F}" type="presOf" srcId="{8E1FD376-005E-46DD-AB7C-3AD5F0C68AF6}" destId="{464DE029-02A1-4763-8666-F53A13C6FAAD}" srcOrd="0" destOrd="0" presId="urn:microsoft.com/office/officeart/2005/8/layout/hProcess4"/>
+    <dgm:cxn modelId="{6B1BAF1E-47AC-4383-AA5B-E6E6B7165D83}" type="presOf" srcId="{18DC73F0-EDC3-4451-98EA-91C847F5E375}" destId="{D9BDC29B-7D63-4495-A3B2-7C07F9B8C330}" srcOrd="0" destOrd="1" presId="urn:microsoft.com/office/officeart/2005/8/layout/hProcess4"/>
     <dgm:cxn modelId="{440F9726-70B7-42A5-AB88-B53C3894826F}" srcId="{269C76F2-6A3F-4463-A37D-34DF9557723A}" destId="{DCFD0921-E245-4A02-B3A7-0E9B55127B04}" srcOrd="0" destOrd="0" parTransId="{70B824C9-F3CD-40A2-B5BA-784C85902FF3}" sibTransId="{69013C8D-2C94-4B00-9813-3B8C02617849}"/>
     <dgm:cxn modelId="{F305BA26-4492-4867-9F9B-5A8ACF3514B4}" srcId="{5DA50F34-C831-4850-8B63-CE799FF6C0D5}" destId="{F945E611-CD2E-4C69-9DAE-2D0D3822A0EA}" srcOrd="1" destOrd="0" parTransId="{E05F5CE7-8C2A-4ACE-81D4-21183E002FC5}" sibTransId="{25BB5900-0641-407C-8ED9-9C929C16D5E9}"/>
-    <dgm:cxn modelId="{5997E327-E8CC-401F-8736-7BC1AA7001BC}" type="presOf" srcId="{8111E655-AA73-4919-8D88-D2AFAC6203BA}" destId="{3C445FF9-93F1-4683-A6D2-EC9DB43AA93D}" srcOrd="1" destOrd="0" presId="urn:microsoft.com/office/officeart/2005/8/layout/hProcess4"/>
-    <dgm:cxn modelId="{E8CA3328-6D59-4724-88B8-D6684CCFD216}" type="presOf" srcId="{F945E611-CD2E-4C69-9DAE-2D0D3822A0EA}" destId="{3C445FF9-93F1-4683-A6D2-EC9DB43AA93D}" srcOrd="1" destOrd="1" presId="urn:microsoft.com/office/officeart/2005/8/layout/hProcess4"/>
+    <dgm:cxn modelId="{77073B2A-B0D1-4503-ADA9-FF4494A3E902}" type="presOf" srcId="{463F1166-29D7-4D0E-BEAE-3FEA4539912F}" destId="{686EF4F2-C186-45B2-85A0-F6687D978556}" srcOrd="0" destOrd="3" presId="urn:microsoft.com/office/officeart/2005/8/layout/hProcess4"/>
+    <dgm:cxn modelId="{3F01E32A-C783-4512-AA9F-A382056589FF}" type="presOf" srcId="{A5277286-5511-4E9A-9AF8-737B622E3223}" destId="{1C299799-9D54-457B-A3C7-0FB93A410866}" srcOrd="0" destOrd="0" presId="urn:microsoft.com/office/officeart/2005/8/layout/hProcess4"/>
     <dgm:cxn modelId="{1D8D772B-181D-4909-B145-E899F3EF30EF}" type="presOf" srcId="{99D1A08B-05C7-4294-99DD-7BE56AF469A8}" destId="{1641139E-5806-4ED1-AA40-CDBBD9ABB873}" srcOrd="0" destOrd="0" presId="urn:microsoft.com/office/officeart/2005/8/layout/hProcess4"/>
-    <dgm:cxn modelId="{F1D3D530-B984-418C-B652-57E1E301F4DE}" type="presOf" srcId="{0C420126-164A-4514-A51E-AB2C4502F253}" destId="{74F3F80A-8B0F-4F29-B321-AD28639C9105}" srcOrd="0" destOrd="0" presId="urn:microsoft.com/office/officeart/2005/8/layout/hProcess4"/>
-    <dgm:cxn modelId="{1629ED30-2BD7-424A-906E-0DAD0AA696C2}" type="presOf" srcId="{F945E611-CD2E-4C69-9DAE-2D0D3822A0EA}" destId="{DE4AC59B-B8E8-4AE0-82DC-3BD6B4ADF27A}" srcOrd="0" destOrd="1" presId="urn:microsoft.com/office/officeart/2005/8/layout/hProcess4"/>
+    <dgm:cxn modelId="{04320F2C-8EB7-4DC8-94C8-FB84A97372FE}" type="presOf" srcId="{269C76F2-6A3F-4463-A37D-34DF9557723A}" destId="{30DD4CDA-4812-46C7-BA95-FF21DAD772D9}" srcOrd="0" destOrd="1" presId="urn:microsoft.com/office/officeart/2005/8/layout/hProcess4"/>
+    <dgm:cxn modelId="{C64CED34-0BC3-41A2-81AE-DF9E04A7B236}" type="presOf" srcId="{EB9EEFA8-E354-4F52-BA0E-F1E23DACFF23}" destId="{686EF4F2-C186-45B2-85A0-F6687D978556}" srcOrd="0" destOrd="1" presId="urn:microsoft.com/office/officeart/2005/8/layout/hProcess4"/>
     <dgm:cxn modelId="{63DD5235-EEA8-4C62-812F-84E36FEF1592}" srcId="{1BCB95D6-B1A4-439C-9AD1-CE00E32D68AA}" destId="{FB1AC2EB-2A73-487E-BFFC-E85DCC33CF70}" srcOrd="0" destOrd="0" parTransId="{E19BCDDB-747D-419A-A20E-A9AAFEF8A011}" sibTransId="{86A587C2-A658-4B6E-9679-4F54844F90F0}"/>
-    <dgm:cxn modelId="{178C6A5B-5781-42D4-90C0-2603702C6FEC}" type="presOf" srcId="{3679B97A-32D2-4172-BEF9-560A1496BE56}" destId="{22FAA828-71BC-4F47-855C-19152EC671EC}" srcOrd="1" destOrd="3" presId="urn:microsoft.com/office/officeart/2005/8/layout/hProcess4"/>
-    <dgm:cxn modelId="{B640D65E-9BAB-40E1-9A90-1DF268BFCE38}" type="presOf" srcId="{8E1FD376-005E-46DD-AB7C-3AD5F0C68AF6}" destId="{464DE029-02A1-4763-8666-F53A13C6FAAD}" srcOrd="0" destOrd="0" presId="urn:microsoft.com/office/officeart/2005/8/layout/hProcess4"/>
-    <dgm:cxn modelId="{CA3F9942-3020-409B-85BB-456C14616609}" type="presOf" srcId="{18DC73F0-EDC3-4451-98EA-91C847F5E375}" destId="{3A5BFE43-F020-43A7-BFCC-87B32E6976A9}" srcOrd="1" destOrd="1" presId="urn:microsoft.com/office/officeart/2005/8/layout/hProcess4"/>
-    <dgm:cxn modelId="{6B257843-4F5E-4AFE-A2EB-DCD7EC2836DE}" srcId="{EB9EEFA8-E354-4F52-BA0E-F1E23DACFF23}" destId="{428AB112-F44A-4DBD-9A72-307227A48835}" srcOrd="0" destOrd="0" parTransId="{DE48C9E4-0BEC-4D80-A91C-82920DE858EA}" sibTransId="{364B18D5-CB61-44ED-85B8-E92D9EE279E9}"/>
+    <dgm:cxn modelId="{E9390139-F794-4D9D-8BD8-8206907484F4}" srcId="{1BCB95D6-B1A4-439C-9AD1-CE00E32D68AA}" destId="{463F1166-29D7-4D0E-BEAE-3FEA4539912F}" srcOrd="3" destOrd="0" parTransId="{4FCCC525-2284-43CB-B379-561F45AA5620}" sibTransId="{D965F5A8-311F-48EC-8A78-501A3170B2FD}"/>
+    <dgm:cxn modelId="{B7AB723B-6EC3-4C62-84FF-6E1D5EA1F9CB}" type="presOf" srcId="{97225384-B3A3-4246-BB0C-554A34D4B7EE}" destId="{30DD4CDA-4812-46C7-BA95-FF21DAD772D9}" srcOrd="0" destOrd="0" presId="urn:microsoft.com/office/officeart/2005/8/layout/hProcess4"/>
+    <dgm:cxn modelId="{E02FD53C-0E3C-4F7A-BB14-6DE44DDED801}" type="presOf" srcId="{18DC73F0-EDC3-4451-98EA-91C847F5E375}" destId="{3A5BFE43-F020-43A7-BFCC-87B32E6976A9}" srcOrd="1" destOrd="1" presId="urn:microsoft.com/office/officeart/2005/8/layout/hProcess4"/>
+    <dgm:cxn modelId="{C7202E40-7748-4972-8B42-9BA792EEF703}" type="presOf" srcId="{8111E655-AA73-4919-8D88-D2AFAC6203BA}" destId="{DE4AC59B-B8E8-4AE0-82DC-3BD6B4ADF27A}" srcOrd="0" destOrd="0" presId="urn:microsoft.com/office/officeart/2005/8/layout/hProcess4"/>
+    <dgm:cxn modelId="{8A4D0D43-928B-40DF-A566-5650AD89ADFD}" type="presOf" srcId="{F945E611-CD2E-4C69-9DAE-2D0D3822A0EA}" destId="{DE4AC59B-B8E8-4AE0-82DC-3BD6B4ADF27A}" srcOrd="0" destOrd="1" presId="urn:microsoft.com/office/officeart/2005/8/layout/hProcess4"/>
+    <dgm:cxn modelId="{D1412143-9041-4B79-A22D-37B6C3E0698C}" type="presOf" srcId="{067E8FF9-061C-4CD3-A921-26E66C8903EA}" destId="{22FAA828-71BC-4F47-855C-19152EC671EC}" srcOrd="1" destOrd="2" presId="urn:microsoft.com/office/officeart/2005/8/layout/hProcess4"/>
+    <dgm:cxn modelId="{F9416E63-D4B2-4C02-88EF-C514CF4E74D7}" type="presOf" srcId="{269C76F2-6A3F-4463-A37D-34DF9557723A}" destId="{21C25EF7-5122-4CB4-922C-C536D59390E7}" srcOrd="1" destOrd="1" presId="urn:microsoft.com/office/officeart/2005/8/layout/hProcess4"/>
+    <dgm:cxn modelId="{3FA23464-5E58-40BD-93DD-DB3C42BA7DAA}" type="presOf" srcId="{1BCB95D6-B1A4-439C-9AD1-CE00E32D68AA}" destId="{94FE265A-D377-4872-8AAD-6D9586E0C18A}" srcOrd="0" destOrd="0" presId="urn:microsoft.com/office/officeart/2005/8/layout/hProcess4"/>
     <dgm:cxn modelId="{BDFEF269-CF52-44E1-90F3-093DB5486581}" srcId="{5489487A-AE09-4C57-A8FE-3C88CD528A51}" destId="{36A43055-FF1E-4000-92DC-E1996435069B}" srcOrd="0" destOrd="0" parTransId="{F952DEC6-66D8-4998-8A9C-A930577EC2D2}" sibTransId="{86D954EB-E373-4698-A5D0-017BAF56FA0A}"/>
-    <dgm:cxn modelId="{9F09F24A-90A1-422B-B5DA-B38130F44CE8}" type="presOf" srcId="{36A43055-FF1E-4000-92DC-E1996435069B}" destId="{D9BDC29B-7D63-4495-A3B2-7C07F9B8C330}" srcOrd="0" destOrd="0" presId="urn:microsoft.com/office/officeart/2005/8/layout/hProcess4"/>
-    <dgm:cxn modelId="{3BA51A6D-6778-4A76-81C2-F27BF63FFE4F}" type="presOf" srcId="{428AB112-F44A-4DBD-9A72-307227A48835}" destId="{22FAA828-71BC-4F47-855C-19152EC671EC}" srcOrd="1" destOrd="2" presId="urn:microsoft.com/office/officeart/2005/8/layout/hProcess4"/>
-    <dgm:cxn modelId="{05D31F52-AB99-41FE-B518-7A810335A1BA}" type="presOf" srcId="{FB1AC2EB-2A73-487E-BFFC-E85DCC33CF70}" destId="{22FAA828-71BC-4F47-855C-19152EC671EC}" srcOrd="1" destOrd="0" presId="urn:microsoft.com/office/officeart/2005/8/layout/hProcess4"/>
-    <dgm:cxn modelId="{284B5854-B03F-43A1-A980-1E2CA9E3F355}" type="presOf" srcId="{8111E655-AA73-4919-8D88-D2AFAC6203BA}" destId="{DE4AC59B-B8E8-4AE0-82DC-3BD6B4ADF27A}" srcOrd="0" destOrd="0" presId="urn:microsoft.com/office/officeart/2005/8/layout/hProcess4"/>
-    <dgm:cxn modelId="{AF464776-F375-42C1-A960-13E9CEAD8FA3}" type="presOf" srcId="{A5277286-5511-4E9A-9AF8-737B622E3223}" destId="{1C299799-9D54-457B-A3C7-0FB93A410866}" srcOrd="0" destOrd="0" presId="urn:microsoft.com/office/officeart/2005/8/layout/hProcess4"/>
-    <dgm:cxn modelId="{B4C2015A-3E27-4822-AFDD-CB4131CA6FDC}" type="presOf" srcId="{428AB112-F44A-4DBD-9A72-307227A48835}" destId="{686EF4F2-C186-45B2-85A0-F6687D978556}" srcOrd="0" destOrd="2" presId="urn:microsoft.com/office/officeart/2005/8/layout/hProcess4"/>
-    <dgm:cxn modelId="{E402FD5A-86DA-4AA4-BB63-19D2FC1A9CFA}" type="presOf" srcId="{3679B97A-32D2-4172-BEF9-560A1496BE56}" destId="{686EF4F2-C186-45B2-85A0-F6687D978556}" srcOrd="0" destOrd="3" presId="urn:microsoft.com/office/officeart/2005/8/layout/hProcess4"/>
+    <dgm:cxn modelId="{E96F876E-CE3C-4C0C-A22A-CE43289A11C3}" type="presOf" srcId="{FB1AC2EB-2A73-487E-BFFC-E85DCC33CF70}" destId="{686EF4F2-C186-45B2-85A0-F6687D978556}" srcOrd="0" destOrd="0" presId="urn:microsoft.com/office/officeart/2005/8/layout/hProcess4"/>
+    <dgm:cxn modelId="{54DB877C-7458-49B5-A638-5F58ED1F4F97}" type="presOf" srcId="{F945E611-CD2E-4C69-9DAE-2D0D3822A0EA}" destId="{3C445FF9-93F1-4683-A6D2-EC9DB43AA93D}" srcOrd="1" destOrd="1" presId="urn:microsoft.com/office/officeart/2005/8/layout/hProcess4"/>
     <dgm:cxn modelId="{8BC42789-7A8C-4F3C-9F4C-2F71DA98F207}" srcId="{5489487A-AE09-4C57-A8FE-3C88CD528A51}" destId="{18DC73F0-EDC3-4451-98EA-91C847F5E375}" srcOrd="1" destOrd="0" parTransId="{49516162-687F-4DFA-BEBA-7A284363F675}" sibTransId="{60465BCF-9C95-4637-8D4C-5290976EB2A0}"/>
-    <dgm:cxn modelId="{2A4DB68A-A8F5-4013-BA1D-CB9791661462}" type="presOf" srcId="{1BCB95D6-B1A4-439C-9AD1-CE00E32D68AA}" destId="{94FE265A-D377-4872-8AAD-6D9586E0C18A}" srcOrd="0" destOrd="0" presId="urn:microsoft.com/office/officeart/2005/8/layout/hProcess4"/>
+    <dgm:cxn modelId="{CA76AA8A-3F24-47F2-88B3-204762E4744F}" type="presOf" srcId="{5DA50F34-C831-4850-8B63-CE799FF6C0D5}" destId="{C4D9AE61-43FF-44EC-9E2D-7446ED243914}" srcOrd="0" destOrd="0" presId="urn:microsoft.com/office/officeart/2005/8/layout/hProcess4"/>
+    <dgm:cxn modelId="{91C92990-DB73-4150-B506-4A7866514440}" type="presOf" srcId="{FB1AC2EB-2A73-487E-BFFC-E85DCC33CF70}" destId="{22FAA828-71BC-4F47-855C-19152EC671EC}" srcOrd="1" destOrd="0" presId="urn:microsoft.com/office/officeart/2005/8/layout/hProcess4"/>
+    <dgm:cxn modelId="{E16B2192-D5C7-44D8-BF47-E282E92085C8}" type="presOf" srcId="{5489487A-AE09-4C57-A8FE-3C88CD528A51}" destId="{57A9CED2-870E-4BB2-8BB0-97EB3CDBF401}" srcOrd="0" destOrd="0" presId="urn:microsoft.com/office/officeart/2005/8/layout/hProcess4"/>
     <dgm:cxn modelId="{46FA7699-0760-422D-95EC-7D257C462A6A}" srcId="{99D1A08B-05C7-4294-99DD-7BE56AF469A8}" destId="{5C407219-177A-43EE-B67E-B6E75271BA5B}" srcOrd="0" destOrd="0" parTransId="{78EA6105-D13A-4F17-AB97-952ED6E1056F}" sibTransId="{8E1FD376-005E-46DD-AB7C-3AD5F0C68AF6}"/>
     <dgm:cxn modelId="{A778DC99-B49C-4DDC-91A4-BC2F4970DD00}" srcId="{99D1A08B-05C7-4294-99DD-7BE56AF469A8}" destId="{5489487A-AE09-4C57-A8FE-3C88CD528A51}" srcOrd="1" destOrd="0" parTransId="{3491C758-4628-4476-8033-6CEC21F5D7B6}" sibTransId="{A5277286-5511-4E9A-9AF8-737B622E3223}"/>
-    <dgm:cxn modelId="{8589B7AB-6823-4989-8C6C-DD6B72F4F6E1}" type="presOf" srcId="{5489487A-AE09-4C57-A8FE-3C88CD528A51}" destId="{57A9CED2-870E-4BB2-8BB0-97EB3CDBF401}" srcOrd="0" destOrd="0" presId="urn:microsoft.com/office/officeart/2005/8/layout/hProcess4"/>
-    <dgm:cxn modelId="{EE041FAD-318D-41BF-A178-1F05CAEA8438}" type="presOf" srcId="{EB9EEFA8-E354-4F52-BA0E-F1E23DACFF23}" destId="{686EF4F2-C186-45B2-85A0-F6687D978556}" srcOrd="0" destOrd="1" presId="urn:microsoft.com/office/officeart/2005/8/layout/hProcess4"/>
-    <dgm:cxn modelId="{680D46B5-D7AA-4A7A-9B62-35116464C916}" type="presOf" srcId="{5DA50F34-C831-4850-8B63-CE799FF6C0D5}" destId="{C4D9AE61-43FF-44EC-9E2D-7446ED243914}" srcOrd="0" destOrd="0" presId="urn:microsoft.com/office/officeart/2005/8/layout/hProcess4"/>
+    <dgm:cxn modelId="{1570DE9D-57B7-4A63-97B7-2A52B65A8E12}" type="presOf" srcId="{36A43055-FF1E-4000-92DC-E1996435069B}" destId="{3A5BFE43-F020-43A7-BFCC-87B32E6976A9}" srcOrd="1" destOrd="0" presId="urn:microsoft.com/office/officeart/2005/8/layout/hProcess4"/>
+    <dgm:cxn modelId="{01F028B3-4A66-4134-B6C9-9F2E2201375B}" type="presOf" srcId="{8111E655-AA73-4919-8D88-D2AFAC6203BA}" destId="{3C445FF9-93F1-4683-A6D2-EC9DB43AA93D}" srcOrd="1" destOrd="0" presId="urn:microsoft.com/office/officeart/2005/8/layout/hProcess4"/>
+    <dgm:cxn modelId="{285767B9-1933-455B-8C38-53C68F793F3D}" type="presOf" srcId="{DCFD0921-E245-4A02-B3A7-0E9B55127B04}" destId="{30DD4CDA-4812-46C7-BA95-FF21DAD772D9}" srcOrd="0" destOrd="2" presId="urn:microsoft.com/office/officeart/2005/8/layout/hProcess4"/>
     <dgm:cxn modelId="{D4C2C2BA-4EF0-4E8C-8B23-D309E73EFFAB}" srcId="{5DA50F34-C831-4850-8B63-CE799FF6C0D5}" destId="{8111E655-AA73-4919-8D88-D2AFAC6203BA}" srcOrd="0" destOrd="0" parTransId="{1D01C444-95C3-40B7-A96E-5D3C98D5EFB1}" sibTransId="{734582F4-7C5B-4397-B295-2E2F146BB4BE}"/>
     <dgm:cxn modelId="{E0FBC2CB-959A-4226-9ACB-4CB07C4E9F88}" srcId="{5C407219-177A-43EE-B67E-B6E75271BA5B}" destId="{97225384-B3A3-4246-BB0C-554A34D4B7EE}" srcOrd="0" destOrd="0" parTransId="{2032F91E-C142-4D3C-947C-7455714058C6}" sibTransId="{6E3C3B18-981D-4F6C-AB72-2F298617B885}"/>
-    <dgm:cxn modelId="{2FD1C1D0-5F39-44A4-B0CC-E3EB141EBCCB}" type="presOf" srcId="{97225384-B3A3-4246-BB0C-554A34D4B7EE}" destId="{30DD4CDA-4812-46C7-BA95-FF21DAD772D9}" srcOrd="0" destOrd="0" presId="urn:microsoft.com/office/officeart/2005/8/layout/hProcess4"/>
+    <dgm:cxn modelId="{5B97F5CF-45BD-4062-B8B5-695D81AFA186}" type="presOf" srcId="{97225384-B3A3-4246-BB0C-554A34D4B7EE}" destId="{21C25EF7-5122-4CB4-922C-C536D59390E7}" srcOrd="1" destOrd="0" presId="urn:microsoft.com/office/officeart/2005/8/layout/hProcess4"/>
+    <dgm:cxn modelId="{741FD1D5-8134-400B-B927-38E195CEFBC9}" type="presOf" srcId="{EB9EEFA8-E354-4F52-BA0E-F1E23DACFF23}" destId="{22FAA828-71BC-4F47-855C-19152EC671EC}" srcOrd="1" destOrd="1" presId="urn:microsoft.com/office/officeart/2005/8/layout/hProcess4"/>
     <dgm:cxn modelId="{8B4A27D9-7DF5-407D-9FE0-9F9C17CD667A}" srcId="{99D1A08B-05C7-4294-99DD-7BE56AF469A8}" destId="{1BCB95D6-B1A4-439C-9AD1-CE00E32D68AA}" srcOrd="2" destOrd="0" parTransId="{565DC6A8-BFE9-4A7B-9AAF-B0195AFAE88E}" sibTransId="{0C420126-164A-4514-A51E-AB2C4502F253}"/>
-    <dgm:cxn modelId="{5B3F16EF-AC5B-440F-8E59-25BAE29FFE54}" type="presOf" srcId="{269C76F2-6A3F-4463-A37D-34DF9557723A}" destId="{30DD4CDA-4812-46C7-BA95-FF21DAD772D9}" srcOrd="0" destOrd="1" presId="urn:microsoft.com/office/officeart/2005/8/layout/hProcess4"/>
-    <dgm:cxn modelId="{F10086F6-2B83-44CF-93ED-1F8A2C82CF12}" type="presOf" srcId="{DCFD0921-E245-4A02-B3A7-0E9B55127B04}" destId="{21C25EF7-5122-4CB4-922C-C536D59390E7}" srcOrd="1" destOrd="2" presId="urn:microsoft.com/office/officeart/2005/8/layout/hProcess4"/>
-    <dgm:cxn modelId="{4B33FAF7-D5A5-4826-B602-E6AE618B2650}" type="presOf" srcId="{18DC73F0-EDC3-4451-98EA-91C847F5E375}" destId="{D9BDC29B-7D63-4495-A3B2-7C07F9B8C330}" srcOrd="0" destOrd="1" presId="urn:microsoft.com/office/officeart/2005/8/layout/hProcess4"/>
-    <dgm:cxn modelId="{A16A5AFB-4236-4673-9CB5-BE389EB3EF8C}" srcId="{EB9EEFA8-E354-4F52-BA0E-F1E23DACFF23}" destId="{3679B97A-32D2-4172-BEF9-560A1496BE56}" srcOrd="1" destOrd="0" parTransId="{B180FB7C-C893-47CE-AC8C-F0A6527F33DC}" sibTransId="{0D2383D4-47E1-4D36-90BF-8D7B53F07E5B}"/>
-    <dgm:cxn modelId="{1E13F9FB-220A-448A-8179-D4B3A4973A41}" type="presOf" srcId="{DCFD0921-E245-4A02-B3A7-0E9B55127B04}" destId="{30DD4CDA-4812-46C7-BA95-FF21DAD772D9}" srcOrd="0" destOrd="2" presId="urn:microsoft.com/office/officeart/2005/8/layout/hProcess4"/>
-    <dgm:cxn modelId="{173BCDFC-1277-40BA-BD6B-344D8C682E92}" type="presOf" srcId="{EB9EEFA8-E354-4F52-BA0E-F1E23DACFF23}" destId="{22FAA828-71BC-4F47-855C-19152EC671EC}" srcOrd="1" destOrd="1" presId="urn:microsoft.com/office/officeart/2005/8/layout/hProcess4"/>
-    <dgm:cxn modelId="{823F82FE-5345-496E-965A-8D2A66E30149}" type="presOf" srcId="{269C76F2-6A3F-4463-A37D-34DF9557723A}" destId="{21C25EF7-5122-4CB4-922C-C536D59390E7}" srcOrd="1" destOrd="1" presId="urn:microsoft.com/office/officeart/2005/8/layout/hProcess4"/>
-    <dgm:cxn modelId="{868EC685-D5D7-444D-89C5-13F64F183C9F}" type="presParOf" srcId="{1641139E-5806-4ED1-AA40-CDBBD9ABB873}" destId="{A69DC343-962C-4193-B759-C426D90ADEBE}" srcOrd="0" destOrd="0" presId="urn:microsoft.com/office/officeart/2005/8/layout/hProcess4"/>
-    <dgm:cxn modelId="{1D10B392-4277-486F-AB90-8A3420E1DE74}" type="presParOf" srcId="{1641139E-5806-4ED1-AA40-CDBBD9ABB873}" destId="{D44F98B8-7C0E-44E6-B339-45D9858C4485}" srcOrd="1" destOrd="0" presId="urn:microsoft.com/office/officeart/2005/8/layout/hProcess4"/>
-    <dgm:cxn modelId="{8B76E9A5-6F1E-4C8C-82BF-ECCC8C5C15E0}" type="presParOf" srcId="{1641139E-5806-4ED1-AA40-CDBBD9ABB873}" destId="{D414F4B2-7830-4056-8693-7152B494301A}" srcOrd="2" destOrd="0" presId="urn:microsoft.com/office/officeart/2005/8/layout/hProcess4"/>
-    <dgm:cxn modelId="{6484AFA7-8DC6-495D-8242-9DD0439C76B9}" type="presParOf" srcId="{D414F4B2-7830-4056-8693-7152B494301A}" destId="{31228088-885C-49E3-AE4E-7F1B0118071C}" srcOrd="0" destOrd="0" presId="urn:microsoft.com/office/officeart/2005/8/layout/hProcess4"/>
-    <dgm:cxn modelId="{F2E60E5F-8F6C-4E87-9E82-C801329E65FF}" type="presParOf" srcId="{31228088-885C-49E3-AE4E-7F1B0118071C}" destId="{FCC3BD23-997E-4674-8B26-CC365D097590}" srcOrd="0" destOrd="0" presId="urn:microsoft.com/office/officeart/2005/8/layout/hProcess4"/>
-    <dgm:cxn modelId="{B2680729-65C5-49AA-953C-C2B390DB0607}" type="presParOf" srcId="{31228088-885C-49E3-AE4E-7F1B0118071C}" destId="{30DD4CDA-4812-46C7-BA95-FF21DAD772D9}" srcOrd="1" destOrd="0" presId="urn:microsoft.com/office/officeart/2005/8/layout/hProcess4"/>
-    <dgm:cxn modelId="{C89937A3-E3D0-41E1-B6E0-D64ADEA7C4D4}" type="presParOf" srcId="{31228088-885C-49E3-AE4E-7F1B0118071C}" destId="{21C25EF7-5122-4CB4-922C-C536D59390E7}" srcOrd="2" destOrd="0" presId="urn:microsoft.com/office/officeart/2005/8/layout/hProcess4"/>
-    <dgm:cxn modelId="{C6DE746F-5EA4-4A57-BDA5-3B68A59F2A80}" type="presParOf" srcId="{31228088-885C-49E3-AE4E-7F1B0118071C}" destId="{22CBB4AF-36EB-417C-B703-FAF0662ACF49}" srcOrd="3" destOrd="0" presId="urn:microsoft.com/office/officeart/2005/8/layout/hProcess4"/>
-    <dgm:cxn modelId="{840EF5FC-C947-4712-BDB8-67DCF9F4EFD4}" type="presParOf" srcId="{31228088-885C-49E3-AE4E-7F1B0118071C}" destId="{CD953644-E5C6-4A75-8B8E-A06C97C3F536}" srcOrd="4" destOrd="0" presId="urn:microsoft.com/office/officeart/2005/8/layout/hProcess4"/>
-    <dgm:cxn modelId="{46355112-69E3-4666-89F1-1090E9564E88}" type="presParOf" srcId="{D414F4B2-7830-4056-8693-7152B494301A}" destId="{464DE029-02A1-4763-8666-F53A13C6FAAD}" srcOrd="1" destOrd="0" presId="urn:microsoft.com/office/officeart/2005/8/layout/hProcess4"/>
-    <dgm:cxn modelId="{7764998B-92B0-428C-99FC-2B9BBB6C85B5}" type="presParOf" srcId="{D414F4B2-7830-4056-8693-7152B494301A}" destId="{AFDFC40E-DDD3-4BC8-8BEB-A1A8244FD812}" srcOrd="2" destOrd="0" presId="urn:microsoft.com/office/officeart/2005/8/layout/hProcess4"/>
-    <dgm:cxn modelId="{8071F2CA-3430-428B-A83B-C7333389DC8D}" type="presParOf" srcId="{AFDFC40E-DDD3-4BC8-8BEB-A1A8244FD812}" destId="{3D3FE732-BEE4-4789-B501-EFE8520C98A6}" srcOrd="0" destOrd="0" presId="urn:microsoft.com/office/officeart/2005/8/layout/hProcess4"/>
-    <dgm:cxn modelId="{8DE57368-5989-4A99-B116-BE07676BA4CE}" type="presParOf" srcId="{AFDFC40E-DDD3-4BC8-8BEB-A1A8244FD812}" destId="{D9BDC29B-7D63-4495-A3B2-7C07F9B8C330}" srcOrd="1" destOrd="0" presId="urn:microsoft.com/office/officeart/2005/8/layout/hProcess4"/>
-    <dgm:cxn modelId="{3C7E37CD-5A38-4A43-B6DC-219012EC2D82}" type="presParOf" srcId="{AFDFC40E-DDD3-4BC8-8BEB-A1A8244FD812}" destId="{3A5BFE43-F020-43A7-BFCC-87B32E6976A9}" srcOrd="2" destOrd="0" presId="urn:microsoft.com/office/officeart/2005/8/layout/hProcess4"/>
-    <dgm:cxn modelId="{DCD055DB-A0B8-49B5-8E0B-6F67F1DA1339}" type="presParOf" srcId="{AFDFC40E-DDD3-4BC8-8BEB-A1A8244FD812}" destId="{57A9CED2-870E-4BB2-8BB0-97EB3CDBF401}" srcOrd="3" destOrd="0" presId="urn:microsoft.com/office/officeart/2005/8/layout/hProcess4"/>
-    <dgm:cxn modelId="{C6B7BA88-7E61-4407-BF9F-E01006E93A57}" type="presParOf" srcId="{AFDFC40E-DDD3-4BC8-8BEB-A1A8244FD812}" destId="{9A6587D4-7582-4D83-A90E-1B1B29100CB4}" srcOrd="4" destOrd="0" presId="urn:microsoft.com/office/officeart/2005/8/layout/hProcess4"/>
-    <dgm:cxn modelId="{72695B40-C40F-4D8E-AFA0-2FEBF87B179D}" type="presParOf" srcId="{D414F4B2-7830-4056-8693-7152B494301A}" destId="{1C299799-9D54-457B-A3C7-0FB93A410866}" srcOrd="3" destOrd="0" presId="urn:microsoft.com/office/officeart/2005/8/layout/hProcess4"/>
-    <dgm:cxn modelId="{B07C2893-6AE9-4493-B502-8C87EB7E097F}" type="presParOf" srcId="{D414F4B2-7830-4056-8693-7152B494301A}" destId="{64364D03-C473-454F-AF21-95C000F5F884}" srcOrd="4" destOrd="0" presId="urn:microsoft.com/office/officeart/2005/8/layout/hProcess4"/>
-    <dgm:cxn modelId="{B2B8AF69-7887-4ABC-B586-557C62451496}" type="presParOf" srcId="{64364D03-C473-454F-AF21-95C000F5F884}" destId="{44F76157-1425-47BB-9E5D-B9F240E12A0A}" srcOrd="0" destOrd="0" presId="urn:microsoft.com/office/officeart/2005/8/layout/hProcess4"/>
-    <dgm:cxn modelId="{75013056-5681-4951-8F5F-75A39543F466}" type="presParOf" srcId="{64364D03-C473-454F-AF21-95C000F5F884}" destId="{686EF4F2-C186-45B2-85A0-F6687D978556}" srcOrd="1" destOrd="0" presId="urn:microsoft.com/office/officeart/2005/8/layout/hProcess4"/>
-    <dgm:cxn modelId="{A985696B-6300-40F9-AEDF-0FA5046B4F5D}" type="presParOf" srcId="{64364D03-C473-454F-AF21-95C000F5F884}" destId="{22FAA828-71BC-4F47-855C-19152EC671EC}" srcOrd="2" destOrd="0" presId="urn:microsoft.com/office/officeart/2005/8/layout/hProcess4"/>
-    <dgm:cxn modelId="{AC328C89-0436-4032-A154-250E0CAD91E4}" type="presParOf" srcId="{64364D03-C473-454F-AF21-95C000F5F884}" destId="{94FE265A-D377-4872-8AAD-6D9586E0C18A}" srcOrd="3" destOrd="0" presId="urn:microsoft.com/office/officeart/2005/8/layout/hProcess4"/>
-    <dgm:cxn modelId="{69A2CD07-030E-41AC-AF4B-980188515A39}" type="presParOf" srcId="{64364D03-C473-454F-AF21-95C000F5F884}" destId="{B6B4BA71-2269-473A-9B34-EE3A92EF3F26}" srcOrd="4" destOrd="0" presId="urn:microsoft.com/office/officeart/2005/8/layout/hProcess4"/>
-    <dgm:cxn modelId="{7CCD34AB-813D-4C41-8F6C-AF4294376AA8}" type="presParOf" srcId="{D414F4B2-7830-4056-8693-7152B494301A}" destId="{74F3F80A-8B0F-4F29-B321-AD28639C9105}" srcOrd="5" destOrd="0" presId="urn:microsoft.com/office/officeart/2005/8/layout/hProcess4"/>
-    <dgm:cxn modelId="{5E906BC3-28C0-467D-B483-43C158B8EF07}" type="presParOf" srcId="{D414F4B2-7830-4056-8693-7152B494301A}" destId="{EA78CE16-E317-4FEA-996D-E0EE0A893B5C}" srcOrd="6" destOrd="0" presId="urn:microsoft.com/office/officeart/2005/8/layout/hProcess4"/>
-    <dgm:cxn modelId="{FAEF8719-B83A-428A-886D-0F5DC26E5929}" type="presParOf" srcId="{EA78CE16-E317-4FEA-996D-E0EE0A893B5C}" destId="{60BAA0C7-18DD-413F-B007-B92B7FACDBD8}" srcOrd="0" destOrd="0" presId="urn:microsoft.com/office/officeart/2005/8/layout/hProcess4"/>
-    <dgm:cxn modelId="{0837C6E1-A9B4-496C-9C14-3287438F8F61}" type="presParOf" srcId="{EA78CE16-E317-4FEA-996D-E0EE0A893B5C}" destId="{DE4AC59B-B8E8-4AE0-82DC-3BD6B4ADF27A}" srcOrd="1" destOrd="0" presId="urn:microsoft.com/office/officeart/2005/8/layout/hProcess4"/>
-    <dgm:cxn modelId="{78CCDABC-5B6F-417A-8408-6379AA8A9341}" type="presParOf" srcId="{EA78CE16-E317-4FEA-996D-E0EE0A893B5C}" destId="{3C445FF9-93F1-4683-A6D2-EC9DB43AA93D}" srcOrd="2" destOrd="0" presId="urn:microsoft.com/office/officeart/2005/8/layout/hProcess4"/>
-    <dgm:cxn modelId="{A73D4E6C-3615-4D7E-8C81-9F9C2170771C}" type="presParOf" srcId="{EA78CE16-E317-4FEA-996D-E0EE0A893B5C}" destId="{C4D9AE61-43FF-44EC-9E2D-7446ED243914}" srcOrd="3" destOrd="0" presId="urn:microsoft.com/office/officeart/2005/8/layout/hProcess4"/>
-    <dgm:cxn modelId="{82E58ECF-A263-4E52-981B-7A8BB5397FF7}" type="presParOf" srcId="{EA78CE16-E317-4FEA-996D-E0EE0A893B5C}" destId="{B20B26B3-AC24-4A72-B831-B92A331552E8}" srcOrd="4" destOrd="0" presId="urn:microsoft.com/office/officeart/2005/8/layout/hProcess4"/>
+    <dgm:cxn modelId="{E220B6DE-9DB5-4D4E-9664-FB3339DA7220}" type="presOf" srcId="{DCFD0921-E245-4A02-B3A7-0E9B55127B04}" destId="{21C25EF7-5122-4CB4-922C-C536D59390E7}" srcOrd="1" destOrd="2" presId="urn:microsoft.com/office/officeart/2005/8/layout/hProcess4"/>
+    <dgm:cxn modelId="{A8F984E8-0058-40DA-AC0D-2E007A2056CE}" type="presOf" srcId="{36A43055-FF1E-4000-92DC-E1996435069B}" destId="{D9BDC29B-7D63-4495-A3B2-7C07F9B8C330}" srcOrd="0" destOrd="0" presId="urn:microsoft.com/office/officeart/2005/8/layout/hProcess4"/>
+    <dgm:cxn modelId="{FB0716F9-6BD9-4536-8DCF-134146E022B6}" srcId="{1BCB95D6-B1A4-439C-9AD1-CE00E32D68AA}" destId="{067E8FF9-061C-4CD3-A921-26E66C8903EA}" srcOrd="2" destOrd="0" parTransId="{4BDED4F2-CDF9-49DB-8ABB-3FB5C36045BA}" sibTransId="{94AFE86B-7BC3-489D-8D06-70F5EE494AE4}"/>
+    <dgm:cxn modelId="{9CFC0B7B-7D78-455C-A996-118EB95A90E7}" type="presParOf" srcId="{1641139E-5806-4ED1-AA40-CDBBD9ABB873}" destId="{A69DC343-962C-4193-B759-C426D90ADEBE}" srcOrd="0" destOrd="0" presId="urn:microsoft.com/office/officeart/2005/8/layout/hProcess4"/>
+    <dgm:cxn modelId="{43302216-AE13-4964-8B68-FBF74D3C6213}" type="presParOf" srcId="{1641139E-5806-4ED1-AA40-CDBBD9ABB873}" destId="{D44F98B8-7C0E-44E6-B339-45D9858C4485}" srcOrd="1" destOrd="0" presId="urn:microsoft.com/office/officeart/2005/8/layout/hProcess4"/>
+    <dgm:cxn modelId="{CB5941FC-033B-471F-B72C-596B833A79BA}" type="presParOf" srcId="{1641139E-5806-4ED1-AA40-CDBBD9ABB873}" destId="{D414F4B2-7830-4056-8693-7152B494301A}" srcOrd="2" destOrd="0" presId="urn:microsoft.com/office/officeart/2005/8/layout/hProcess4"/>
+    <dgm:cxn modelId="{828B986C-4A9F-4787-B53E-C0D972A33A52}" type="presParOf" srcId="{D414F4B2-7830-4056-8693-7152B494301A}" destId="{31228088-885C-49E3-AE4E-7F1B0118071C}" srcOrd="0" destOrd="0" presId="urn:microsoft.com/office/officeart/2005/8/layout/hProcess4"/>
+    <dgm:cxn modelId="{39AB3043-8274-45E1-835E-636A4526349C}" type="presParOf" srcId="{31228088-885C-49E3-AE4E-7F1B0118071C}" destId="{FCC3BD23-997E-4674-8B26-CC365D097590}" srcOrd="0" destOrd="0" presId="urn:microsoft.com/office/officeart/2005/8/layout/hProcess4"/>
+    <dgm:cxn modelId="{3CC4F822-2AA6-4CA0-B99B-D70D6DA05244}" type="presParOf" srcId="{31228088-885C-49E3-AE4E-7F1B0118071C}" destId="{30DD4CDA-4812-46C7-BA95-FF21DAD772D9}" srcOrd="1" destOrd="0" presId="urn:microsoft.com/office/officeart/2005/8/layout/hProcess4"/>
+    <dgm:cxn modelId="{94B31F0F-95F6-49AF-A06A-CD8DD96B2FC9}" type="presParOf" srcId="{31228088-885C-49E3-AE4E-7F1B0118071C}" destId="{21C25EF7-5122-4CB4-922C-C536D59390E7}" srcOrd="2" destOrd="0" presId="urn:microsoft.com/office/officeart/2005/8/layout/hProcess4"/>
+    <dgm:cxn modelId="{F5368BE9-7A9F-4BC3-AA6E-58DD5D28E0BC}" type="presParOf" srcId="{31228088-885C-49E3-AE4E-7F1B0118071C}" destId="{22CBB4AF-36EB-417C-B703-FAF0662ACF49}" srcOrd="3" destOrd="0" presId="urn:microsoft.com/office/officeart/2005/8/layout/hProcess4"/>
+    <dgm:cxn modelId="{FD827C74-68B7-4D4F-9674-982C3EE30F8C}" type="presParOf" srcId="{31228088-885C-49E3-AE4E-7F1B0118071C}" destId="{CD953644-E5C6-4A75-8B8E-A06C97C3F536}" srcOrd="4" destOrd="0" presId="urn:microsoft.com/office/officeart/2005/8/layout/hProcess4"/>
+    <dgm:cxn modelId="{BAB0D624-C2D7-4B8D-BAD9-0D7B7DC5C57C}" type="presParOf" srcId="{D414F4B2-7830-4056-8693-7152B494301A}" destId="{464DE029-02A1-4763-8666-F53A13C6FAAD}" srcOrd="1" destOrd="0" presId="urn:microsoft.com/office/officeart/2005/8/layout/hProcess4"/>
+    <dgm:cxn modelId="{7D341361-EF59-4A26-9807-B6CACAA92D12}" type="presParOf" srcId="{D414F4B2-7830-4056-8693-7152B494301A}" destId="{AFDFC40E-DDD3-4BC8-8BEB-A1A8244FD812}" srcOrd="2" destOrd="0" presId="urn:microsoft.com/office/officeart/2005/8/layout/hProcess4"/>
+    <dgm:cxn modelId="{EB156458-42F8-4464-B4F4-7F3A7DC11D8E}" type="presParOf" srcId="{AFDFC40E-DDD3-4BC8-8BEB-A1A8244FD812}" destId="{3D3FE732-BEE4-4789-B501-EFE8520C98A6}" srcOrd="0" destOrd="0" presId="urn:microsoft.com/office/officeart/2005/8/layout/hProcess4"/>
+    <dgm:cxn modelId="{905BBC4B-2980-4D5F-A09D-F9FD79251C30}" type="presParOf" srcId="{AFDFC40E-DDD3-4BC8-8BEB-A1A8244FD812}" destId="{D9BDC29B-7D63-4495-A3B2-7C07F9B8C330}" srcOrd="1" destOrd="0" presId="urn:microsoft.com/office/officeart/2005/8/layout/hProcess4"/>
+    <dgm:cxn modelId="{8F8ED8BA-6718-482D-B5D5-E70C8409182D}" type="presParOf" srcId="{AFDFC40E-DDD3-4BC8-8BEB-A1A8244FD812}" destId="{3A5BFE43-F020-43A7-BFCC-87B32E6976A9}" srcOrd="2" destOrd="0" presId="urn:microsoft.com/office/officeart/2005/8/layout/hProcess4"/>
+    <dgm:cxn modelId="{D0D979DC-FBB4-4B24-83E3-9BC74E6D7D09}" type="presParOf" srcId="{AFDFC40E-DDD3-4BC8-8BEB-A1A8244FD812}" destId="{57A9CED2-870E-4BB2-8BB0-97EB3CDBF401}" srcOrd="3" destOrd="0" presId="urn:microsoft.com/office/officeart/2005/8/layout/hProcess4"/>
+    <dgm:cxn modelId="{18088A21-EEB9-46DD-AF89-DD46C245760E}" type="presParOf" srcId="{AFDFC40E-DDD3-4BC8-8BEB-A1A8244FD812}" destId="{9A6587D4-7582-4D83-A90E-1B1B29100CB4}" srcOrd="4" destOrd="0" presId="urn:microsoft.com/office/officeart/2005/8/layout/hProcess4"/>
+    <dgm:cxn modelId="{77866227-804C-4C91-8158-F9123EDBDCDF}" type="presParOf" srcId="{D414F4B2-7830-4056-8693-7152B494301A}" destId="{1C299799-9D54-457B-A3C7-0FB93A410866}" srcOrd="3" destOrd="0" presId="urn:microsoft.com/office/officeart/2005/8/layout/hProcess4"/>
+    <dgm:cxn modelId="{D0B6553D-7BAC-40BB-97F1-E488FAB9E810}" type="presParOf" srcId="{D414F4B2-7830-4056-8693-7152B494301A}" destId="{64364D03-C473-454F-AF21-95C000F5F884}" srcOrd="4" destOrd="0" presId="urn:microsoft.com/office/officeart/2005/8/layout/hProcess4"/>
+    <dgm:cxn modelId="{B639D78A-C039-4DE8-B4C7-4C2F29670CA0}" type="presParOf" srcId="{64364D03-C473-454F-AF21-95C000F5F884}" destId="{44F76157-1425-47BB-9E5D-B9F240E12A0A}" srcOrd="0" destOrd="0" presId="urn:microsoft.com/office/officeart/2005/8/layout/hProcess4"/>
+    <dgm:cxn modelId="{BC393594-F653-41C7-B530-14B1B08715BF}" type="presParOf" srcId="{64364D03-C473-454F-AF21-95C000F5F884}" destId="{686EF4F2-C186-45B2-85A0-F6687D978556}" srcOrd="1" destOrd="0" presId="urn:microsoft.com/office/officeart/2005/8/layout/hProcess4"/>
+    <dgm:cxn modelId="{4E450598-1989-4098-B25F-5E15D394E5FF}" type="presParOf" srcId="{64364D03-C473-454F-AF21-95C000F5F884}" destId="{22FAA828-71BC-4F47-855C-19152EC671EC}" srcOrd="2" destOrd="0" presId="urn:microsoft.com/office/officeart/2005/8/layout/hProcess4"/>
+    <dgm:cxn modelId="{AE97C12C-D4F3-4BE7-867C-BB3B5ADFEB84}" type="presParOf" srcId="{64364D03-C473-454F-AF21-95C000F5F884}" destId="{94FE265A-D377-4872-8AAD-6D9586E0C18A}" srcOrd="3" destOrd="0" presId="urn:microsoft.com/office/officeart/2005/8/layout/hProcess4"/>
+    <dgm:cxn modelId="{D57697CA-737C-4B66-8B35-97EFE03665B4}" type="presParOf" srcId="{64364D03-C473-454F-AF21-95C000F5F884}" destId="{B6B4BA71-2269-473A-9B34-EE3A92EF3F26}" srcOrd="4" destOrd="0" presId="urn:microsoft.com/office/officeart/2005/8/layout/hProcess4"/>
+    <dgm:cxn modelId="{2683FC65-BD74-4241-BF43-C96840EEA57E}" type="presParOf" srcId="{D414F4B2-7830-4056-8693-7152B494301A}" destId="{74F3F80A-8B0F-4F29-B321-AD28639C9105}" srcOrd="5" destOrd="0" presId="urn:microsoft.com/office/officeart/2005/8/layout/hProcess4"/>
+    <dgm:cxn modelId="{E106140B-2CC6-417A-9E2D-5142C1913C67}" type="presParOf" srcId="{D414F4B2-7830-4056-8693-7152B494301A}" destId="{EA78CE16-E317-4FEA-996D-E0EE0A893B5C}" srcOrd="6" destOrd="0" presId="urn:microsoft.com/office/officeart/2005/8/layout/hProcess4"/>
+    <dgm:cxn modelId="{50296F47-5E60-4E21-8360-7CEEE4E78228}" type="presParOf" srcId="{EA78CE16-E317-4FEA-996D-E0EE0A893B5C}" destId="{60BAA0C7-18DD-413F-B007-B92B7FACDBD8}" srcOrd="0" destOrd="0" presId="urn:microsoft.com/office/officeart/2005/8/layout/hProcess4"/>
+    <dgm:cxn modelId="{F00D6228-91E2-4D41-8532-F1A7B04EF8C9}" type="presParOf" srcId="{EA78CE16-E317-4FEA-996D-E0EE0A893B5C}" destId="{DE4AC59B-B8E8-4AE0-82DC-3BD6B4ADF27A}" srcOrd="1" destOrd="0" presId="urn:microsoft.com/office/officeart/2005/8/layout/hProcess4"/>
+    <dgm:cxn modelId="{4F7202E3-4CF3-40CB-B4CD-A65555869FD4}" type="presParOf" srcId="{EA78CE16-E317-4FEA-996D-E0EE0A893B5C}" destId="{3C445FF9-93F1-4683-A6D2-EC9DB43AA93D}" srcOrd="2" destOrd="0" presId="urn:microsoft.com/office/officeart/2005/8/layout/hProcess4"/>
+    <dgm:cxn modelId="{B4A032B3-58DD-4908-9701-4DA57544D1D8}" type="presParOf" srcId="{EA78CE16-E317-4FEA-996D-E0EE0A893B5C}" destId="{C4D9AE61-43FF-44EC-9E2D-7446ED243914}" srcOrd="3" destOrd="0" presId="urn:microsoft.com/office/officeart/2005/8/layout/hProcess4"/>
+    <dgm:cxn modelId="{AA56AAF2-AA48-4E82-9C17-974B02709EBA}" type="presParOf" srcId="{EA78CE16-E317-4FEA-996D-E0EE0A893B5C}" destId="{B20B26B3-AC24-4A72-B831-B92A331552E8}" srcOrd="4" destOrd="0" presId="urn:microsoft.com/office/officeart/2005/8/layout/hProcess4"/>
   </dgm:cxnLst>
   <dgm:bg/>
   <dgm:whole/>
@@ -4412,12 +4413,9 @@
           </a:avLst>
         </a:prstGeom>
         <a:solidFill>
-          <a:schemeClr val="lt1">
-            <a:alpha val="90000"/>
-            <a:hueOff val="0"/>
-            <a:satOff val="0"/>
-            <a:lumOff val="0"/>
-            <a:alphaOff val="0"/>
+          <a:schemeClr val="accent2">
+            <a:lumMod val="20000"/>
+            <a:lumOff val="80000"/>
           </a:schemeClr>
         </a:solidFill>
         <a:ln w="19050" cap="flat" cmpd="sng" algn="ctr">
@@ -4496,7 +4494,7 @@
           </a:r>
         </a:p>
         <a:p>
-          <a:pPr marL="342900" lvl="2" indent="-171450" algn="l" defTabSz="711200">
+          <a:pPr marL="171450" lvl="1" indent="-171450" algn="l" defTabSz="711200">
             <a:lnSpc>
               <a:spcPct val="90000"/>
             </a:lnSpc>
@@ -4518,7 +4516,7 @@
           </a:r>
         </a:p>
         <a:p>
-          <a:pPr marL="342900" lvl="2" indent="-171450" algn="l" defTabSz="711200">
+          <a:pPr marL="171450" lvl="1" indent="-171450" algn="l" defTabSz="711200">
             <a:lnSpc>
               <a:spcPct val="90000"/>
             </a:lnSpc>
@@ -4536,7 +4534,7 @@
                 <a:srgbClr val="3333FF"/>
               </a:solidFill>
             </a:rPr>
-            <a:t>Negotiate Price</a:t>
+            <a:t>Negotiate Price with the bank</a:t>
           </a:r>
         </a:p>
       </dsp:txBody>
@@ -8032,7 +8030,7 @@
           <a:p>
             <a:fld id="{23F5F05C-4C32-48D7-B5AA-52291E739591}" type="datetimeFigureOut">
               <a:rPr lang="en-US" smtClean="0"/>
-              <a:t>8/24/2026</a:t>
+              <a:t>8/25/2026</a:t>
             </a:fld>
             <a:endParaRPr lang="en-US"/>
           </a:p>
@@ -8674,7 +8672,7 @@
           <a:p>
             <a:fld id="{5518E2ED-ACDD-48AE-BEAE-F9B835E4D922}" type="datetimeFigureOut">
               <a:rPr lang="en-US" smtClean="0"/>
-              <a:t>8/24/2026</a:t>
+              <a:t>8/25/2026</a:t>
             </a:fld>
             <a:endParaRPr lang="en-US"/>
           </a:p>
@@ -8872,7 +8870,7 @@
           <a:p>
             <a:fld id="{5518E2ED-ACDD-48AE-BEAE-F9B835E4D922}" type="datetimeFigureOut">
               <a:rPr lang="en-US" smtClean="0"/>
-              <a:t>8/24/2026</a:t>
+              <a:t>8/25/2026</a:t>
             </a:fld>
             <a:endParaRPr lang="en-US"/>
           </a:p>
@@ -9080,7 +9078,7 @@
           <a:p>
             <a:fld id="{5518E2ED-ACDD-48AE-BEAE-F9B835E4D922}" type="datetimeFigureOut">
               <a:rPr lang="en-US" smtClean="0"/>
-              <a:t>8/24/2026</a:t>
+              <a:t>8/25/2026</a:t>
             </a:fld>
             <a:endParaRPr lang="en-US"/>
           </a:p>
@@ -9278,7 +9276,7 @@
           <a:p>
             <a:fld id="{5518E2ED-ACDD-48AE-BEAE-F9B835E4D922}" type="datetimeFigureOut">
               <a:rPr lang="en-US" smtClean="0"/>
-              <a:t>8/24/2026</a:t>
+              <a:t>8/25/2026</a:t>
             </a:fld>
             <a:endParaRPr lang="en-US"/>
           </a:p>
@@ -9553,7 +9551,7 @@
           <a:p>
             <a:fld id="{5518E2ED-ACDD-48AE-BEAE-F9B835E4D922}" type="datetimeFigureOut">
               <a:rPr lang="en-US" smtClean="0"/>
-              <a:t>8/24/2026</a:t>
+              <a:t>8/25/2026</a:t>
             </a:fld>
             <a:endParaRPr lang="en-US"/>
           </a:p>
@@ -9818,7 +9816,7 @@
           <a:p>
             <a:fld id="{5518E2ED-ACDD-48AE-BEAE-F9B835E4D922}" type="datetimeFigureOut">
               <a:rPr lang="en-US" smtClean="0"/>
-              <a:t>8/24/2026</a:t>
+              <a:t>8/25/2026</a:t>
             </a:fld>
             <a:endParaRPr lang="en-US"/>
           </a:p>
@@ -10230,7 +10228,7 @@
           <a:p>
             <a:fld id="{5518E2ED-ACDD-48AE-BEAE-F9B835E4D922}" type="datetimeFigureOut">
               <a:rPr lang="en-US" smtClean="0"/>
-              <a:t>8/24/2026</a:t>
+              <a:t>8/25/2026</a:t>
             </a:fld>
             <a:endParaRPr lang="en-US"/>
           </a:p>
@@ -10371,7 +10369,7 @@
           <a:p>
             <a:fld id="{5518E2ED-ACDD-48AE-BEAE-F9B835E4D922}" type="datetimeFigureOut">
               <a:rPr lang="en-US" smtClean="0"/>
-              <a:t>8/24/2026</a:t>
+              <a:t>8/25/2026</a:t>
             </a:fld>
             <a:endParaRPr lang="en-US"/>
           </a:p>
@@ -10484,7 +10482,7 @@
           <a:p>
             <a:fld id="{5518E2ED-ACDD-48AE-BEAE-F9B835E4D922}" type="datetimeFigureOut">
               <a:rPr lang="en-US" smtClean="0"/>
-              <a:t>8/24/2026</a:t>
+              <a:t>8/25/2026</a:t>
             </a:fld>
             <a:endParaRPr lang="en-US"/>
           </a:p>
@@ -10795,7 +10793,7 @@
           <a:p>
             <a:fld id="{5518E2ED-ACDD-48AE-BEAE-F9B835E4D922}" type="datetimeFigureOut">
               <a:rPr lang="en-US" smtClean="0"/>
-              <a:t>8/24/2026</a:t>
+              <a:t>8/25/2026</a:t>
             </a:fld>
             <a:endParaRPr lang="en-US"/>
           </a:p>
@@ -11083,7 +11081,7 @@
           <a:p>
             <a:fld id="{5518E2ED-ACDD-48AE-BEAE-F9B835E4D922}" type="datetimeFigureOut">
               <a:rPr lang="en-US" smtClean="0"/>
-              <a:t>8/24/2026</a:t>
+              <a:t>8/25/2026</a:t>
             </a:fld>
             <a:endParaRPr lang="en-US"/>
           </a:p>
@@ -11324,7 +11322,7 @@
           <a:p>
             <a:fld id="{5518E2ED-ACDD-48AE-BEAE-F9B835E4D922}" type="datetimeFigureOut">
               <a:rPr lang="en-US" smtClean="0"/>
-              <a:t>8/24/2026</a:t>
+              <a:t>8/25/2026</a:t>
             </a:fld>
             <a:endParaRPr lang="en-US"/>
           </a:p>
@@ -11843,7 +11841,7 @@
         </p:nvSpPr>
         <p:spPr>
           <a:xfrm>
-            <a:off x="371816" y="779929"/>
+            <a:off x="529792" y="1097792"/>
             <a:ext cx="5566207" cy="1908202"/>
           </a:xfrm>
         </p:spPr>
@@ -11856,7 +11854,7 @@
             <a:pPr algn="l"/>
             <a:r>
               <a:rPr lang="en-US" sz="4400" dirty="0"/>
-              <a:t>Immersive Model for Tri State Water Bank to Get More Water to GSL</a:t>
+              <a:t>Immersive Model for a Tri-State Water Bank to Get More Water to GSL</a:t>
             </a:r>
           </a:p>
         </p:txBody>
@@ -12418,8 +12416,8 @@
         </p:blipFill>
         <p:spPr>
           <a:xfrm>
-            <a:off x="228214" y="44819"/>
-            <a:ext cx="11735567" cy="4267199"/>
+            <a:off x="250615" y="672369"/>
+            <a:ext cx="8341423" cy="3505754"/>
           </a:xfrm>
           <a:prstGeom prst="rect">
             <a:avLst/>
@@ -12440,8 +12438,8 @@
         </p:nvSpPr>
         <p:spPr>
           <a:xfrm>
-            <a:off x="1035422" y="5699320"/>
-            <a:ext cx="10121153" cy="954107"/>
+            <a:off x="2041711" y="4800636"/>
+            <a:ext cx="8108577" cy="1384995"/>
           </a:xfrm>
           <a:prstGeom prst="rect">
             <a:avLst/>
@@ -12493,8 +12491,8 @@
         </p:nvSpPr>
         <p:spPr>
           <a:xfrm>
-            <a:off x="179291" y="4312018"/>
-            <a:ext cx="5916706" cy="523220"/>
+            <a:off x="8546614" y="528918"/>
+            <a:ext cx="3431434" cy="954107"/>
           </a:xfrm>
           <a:prstGeom prst="rect">
             <a:avLst/>
@@ -12507,6 +12505,7 @@
           </a:bodyPr>
           <a:lstStyle/>
           <a:p>
+            <a:pPr algn="ctr"/>
             <a:r>
               <a:rPr lang="en-US" sz="2800" i="0" dirty="0">
                 <a:solidFill>
@@ -12539,8 +12538,8 @@
         </p:nvSpPr>
         <p:spPr>
           <a:xfrm>
-            <a:off x="7328645" y="4312018"/>
-            <a:ext cx="4939556" cy="523220"/>
+            <a:off x="8614750" y="1876466"/>
+            <a:ext cx="3340586" cy="954107"/>
           </a:xfrm>
           <a:prstGeom prst="rect">
             <a:avLst/>
@@ -12553,8 +12552,9 @@
           </a:bodyPr>
           <a:lstStyle/>
           <a:p>
+            <a:pPr algn="ctr"/>
             <a:r>
-              <a:rPr lang="en-US" sz="2800">
+              <a:rPr lang="en-US" sz="2800" dirty="0">
                 <a:solidFill>
                   <a:srgbClr val="FF0000"/>
                 </a:solidFill>
@@ -12562,7 +12562,7 @@
               <a:t>H</a:t>
             </a:r>
             <a:r>
-              <a:rPr lang="en-US" sz="2800" b="0" i="0">
+              <a:rPr lang="en-US" sz="2800" b="0" i="0" dirty="0">
                 <a:solidFill>
                   <a:srgbClr val="FF0000"/>
                 </a:solidFill>
@@ -12593,8 +12593,8 @@
         </p:nvSpPr>
         <p:spPr>
           <a:xfrm>
-            <a:off x="4798358" y="5005669"/>
-            <a:ext cx="3314700" cy="523220"/>
+            <a:off x="8998942" y="3093537"/>
+            <a:ext cx="2572201" cy="954107"/>
           </a:xfrm>
           <a:prstGeom prst="rect">
             <a:avLst/>
@@ -12607,6 +12607,7 @@
           </a:bodyPr>
           <a:lstStyle/>
           <a:p>
+            <a:pPr algn="ctr"/>
             <a:r>
               <a:rPr lang="en-US" sz="2800" b="1" dirty="0"/>
               <a:t>Mid 2026 ~ </a:t>
@@ -12758,7 +12759,7 @@
           <p:nvPr>
             <p:extLst>
               <p:ext uri="{D42A27DB-BD31-4B8C-83A1-F6EECF244321}">
-                <p14:modId xmlns:p14="http://schemas.microsoft.com/office/powerpoint/2010/main" val="3276213830"/>
+                <p14:modId xmlns:p14="http://schemas.microsoft.com/office/powerpoint/2010/main" val="2876486537"/>
               </p:ext>
             </p:extLst>
           </p:nvPr>
@@ -13035,7 +13036,7 @@
         </p:nvSpPr>
         <p:spPr>
           <a:xfrm>
-            <a:off x="4458001" y="1085621"/>
+            <a:off x="2969860" y="1085621"/>
             <a:ext cx="6096000" cy="523220"/>
           </a:xfrm>
           <a:prstGeom prst="rect">

--- a/Session Guide/IntroPresentation.pptx
+++ b/Session Guide/IntroPresentation.pptx
@@ -119,21 +119,12 @@
 </p:presentation>
 </file>
 
-<file path=ppt/revisionInfo.xml><?xml version="1.0" encoding="utf-8"?>
-<p1510:revInfo xmlns:a="http://schemas.openxmlformats.org/drawingml/2006/main" xmlns:r="http://schemas.openxmlformats.org/officeDocument/2006/relationships" xmlns:p1510="http://schemas.microsoft.com/office/powerpoint/2015/10/main">
-  <p1510:revLst>
-    <p1510:client id="{0FA96045-9951-4B0B-BD62-76A4AB30A5F9}" v="10" dt="2026-08-24T23:19:05.277"/>
-    <p1510:client id="{BE72FB7B-DAE7-44E6-A59E-4031D98A4453}" v="1" dt="2026-08-25T17:57:17.673"/>
-  </p1510:revLst>
-</p1510:revInfo>
-</file>
-
 <file path=ppt/changesInfos/changesInfo1.xml><?xml version="1.0" encoding="utf-8"?>
 <pc:chgInfo xmlns:a="http://schemas.openxmlformats.org/drawingml/2006/main" xmlns:r="http://schemas.openxmlformats.org/officeDocument/2006/relationships" xmlns:ac="http://schemas.microsoft.com/office/drawing/2013/main/command" xmlns:pc="http://schemas.microsoft.com/office/powerpoint/2013/main/command">
   <pc:docChgLst>
     <pc:chgData name="Hadia Akbar" userId="19362115565_tp_box_2" providerId="OAuth2" clId="{FF77DECD-7ECC-48F4-BF82-9D4D4E0BE774}"/>
     <pc:docChg chg="undo redo custSel addSld delSld modSld sldOrd delMainMaster">
-      <pc:chgData name="Hadia Akbar" userId="19362115565_tp_box_2" providerId="OAuth2" clId="{FF77DECD-7ECC-48F4-BF82-9D4D4E0BE774}" dt="2026-08-25T18:40:44.123" v="2533" actId="1076"/>
+      <pc:chgData name="Hadia Akbar" userId="19362115565_tp_box_2" providerId="OAuth2" clId="{FF77DECD-7ECC-48F4-BF82-9D4D4E0BE774}" dt="2026-08-28T18:07:09.575" v="2536" actId="20577"/>
       <pc:docMkLst>
         <pc:docMk/>
       </pc:docMkLst>
@@ -247,52 +238,6 @@
           </ac:graphicFrameMkLst>
         </pc:graphicFrameChg>
       </pc:sldChg>
-      <pc:sldChg chg="addSp delSp modSp new del mod ord setBg addAnim delAnim delDesignElem">
-        <pc:chgData name="Hadia Akbar" userId="19362115565_tp_box_2" providerId="OAuth2" clId="{FF77DECD-7ECC-48F4-BF82-9D4D4E0BE774}" dt="2026-08-24T23:07:33.993" v="2248" actId="47"/>
-        <pc:sldMkLst>
-          <pc:docMk/>
-          <pc:sldMk cId="1480586688" sldId="260"/>
-        </pc:sldMkLst>
-        <pc:picChg chg="add mod">
-          <ac:chgData name="Hadia Akbar" userId="19362115565_tp_box_2" providerId="OAuth2" clId="{FF77DECD-7ECC-48F4-BF82-9D4D4E0BE774}" dt="2026-08-24T23:06:30.886" v="2222" actId="1076"/>
-          <ac:picMkLst>
-            <pc:docMk/>
-            <pc:sldMk cId="1480586688" sldId="260"/>
-            <ac:picMk id="4" creationId="{24E79CC9-78C3-BC1B-D785-D9BBED37350E}"/>
-          </ac:picMkLst>
-        </pc:picChg>
-        <pc:picChg chg="add del mod">
-          <ac:chgData name="Hadia Akbar" userId="19362115565_tp_box_2" providerId="OAuth2" clId="{FF77DECD-7ECC-48F4-BF82-9D4D4E0BE774}" dt="2026-08-24T23:06:40.223" v="2223" actId="21"/>
-          <ac:picMkLst>
-            <pc:docMk/>
-            <pc:sldMk cId="1480586688" sldId="260"/>
-            <ac:picMk id="18" creationId="{E9E2FD9A-CEC4-149A-7AA0-B9A9435CC662}"/>
-          </ac:picMkLst>
-        </pc:picChg>
-      </pc:sldChg>
-      <pc:sldChg chg="addSp delSp modSp new add del mod ord setBg">
-        <pc:chgData name="Hadia Akbar" userId="19362115565_tp_box_2" providerId="OAuth2" clId="{FF77DECD-7ECC-48F4-BF82-9D4D4E0BE774}" dt="2026-08-24T23:18:46.875" v="2461" actId="47"/>
-        <pc:sldMkLst>
-          <pc:docMk/>
-          <pc:sldMk cId="1860897597" sldId="262"/>
-        </pc:sldMkLst>
-        <pc:spChg chg="add mod">
-          <ac:chgData name="Hadia Akbar" userId="19362115565_tp_box_2" providerId="OAuth2" clId="{FF77DECD-7ECC-48F4-BF82-9D4D4E0BE774}" dt="2026-08-24T23:16:46.312" v="2443" actId="21"/>
-          <ac:spMkLst>
-            <pc:docMk/>
-            <pc:sldMk cId="1860897597" sldId="262"/>
-            <ac:spMk id="4" creationId="{4A9A44C1-D39F-B823-D8E3-FD6C1DF75D70}"/>
-          </ac:spMkLst>
-        </pc:spChg>
-        <pc:graphicFrameChg chg="add del mod modGraphic">
-          <ac:chgData name="Hadia Akbar" userId="19362115565_tp_box_2" providerId="OAuth2" clId="{FF77DECD-7ECC-48F4-BF82-9D4D4E0BE774}" dt="2026-08-24T23:16:46.312" v="2443" actId="21"/>
-          <ac:graphicFrameMkLst>
-            <pc:docMk/>
-            <pc:sldMk cId="1860897597" sldId="262"/>
-            <ac:graphicFrameMk id="5" creationId="{7990CB0E-8803-D419-DBC6-4068A222A4E0}"/>
-          </ac:graphicFrameMkLst>
-        </pc:graphicFrameChg>
-      </pc:sldChg>
       <pc:sldChg chg="addSp delSp modSp new mod">
         <pc:chgData name="Hadia Akbar" userId="19362115565_tp_box_2" providerId="OAuth2" clId="{FF77DECD-7ECC-48F4-BF82-9D4D4E0BE774}" dt="2026-08-24T23:18:45.216" v="2459" actId="1076"/>
         <pc:sldMkLst>
@@ -333,13 +278,13 @@
         </pc:picChg>
       </pc:sldChg>
       <pc:sldChg chg="addSp modSp new mod ord">
-        <pc:chgData name="Hadia Akbar" userId="19362115565_tp_box_2" providerId="OAuth2" clId="{FF77DECD-7ECC-48F4-BF82-9D4D4E0BE774}" dt="2026-08-25T18:40:44.123" v="2533" actId="1076"/>
+        <pc:chgData name="Hadia Akbar" userId="19362115565_tp_box_2" providerId="OAuth2" clId="{FF77DECD-7ECC-48F4-BF82-9D4D4E0BE774}" dt="2026-08-28T18:07:09.575" v="2536" actId="20577"/>
         <pc:sldMkLst>
           <pc:docMk/>
           <pc:sldMk cId="1233494780" sldId="264"/>
         </pc:sldMkLst>
         <pc:spChg chg="add mod">
-          <ac:chgData name="Hadia Akbar" userId="19362115565_tp_box_2" providerId="OAuth2" clId="{FF77DECD-7ECC-48F4-BF82-9D4D4E0BE774}" dt="2026-08-25T18:40:44.123" v="2533" actId="1076"/>
+          <ac:chgData name="Hadia Akbar" userId="19362115565_tp_box_2" providerId="OAuth2" clId="{FF77DECD-7ECC-48F4-BF82-9D4D4E0BE774}" dt="2026-08-28T18:07:09.575" v="2536" actId="20577"/>
           <ac:spMkLst>
             <pc:docMk/>
             <pc:sldMk cId="1233494780" sldId="264"/>
@@ -385,22 +330,6 @@
           <pc:docMk/>
           <pc:sldMk cId="1077105498" sldId="265"/>
         </pc:sldMkLst>
-        <pc:spChg chg="del">
-          <ac:chgData name="Hadia Akbar" userId="19362115565_tp_box_2" providerId="OAuth2" clId="{FF77DECD-7ECC-48F4-BF82-9D4D4E0BE774}" dt="2026-08-24T23:17:09.879" v="2452" actId="478"/>
-          <ac:spMkLst>
-            <pc:docMk/>
-            <pc:sldMk cId="1077105498" sldId="265"/>
-            <ac:spMk id="2" creationId="{6812BC6F-D077-4E05-C130-3F2CC3DDECA7}"/>
-          </ac:spMkLst>
-        </pc:spChg>
-        <pc:spChg chg="del">
-          <ac:chgData name="Hadia Akbar" userId="19362115565_tp_box_2" providerId="OAuth2" clId="{FF77DECD-7ECC-48F4-BF82-9D4D4E0BE774}" dt="2026-08-24T23:17:11.632" v="2453" actId="478"/>
-          <ac:spMkLst>
-            <pc:docMk/>
-            <pc:sldMk cId="1077105498" sldId="265"/>
-            <ac:spMk id="3" creationId="{FF8C3D16-A4DC-80A1-9DB8-7698B9BEFF8A}"/>
-          </ac:spMkLst>
-        </pc:spChg>
         <pc:graphicFrameChg chg="add mod">
           <ac:chgData name="Hadia Akbar" userId="19362115565_tp_box_2" providerId="OAuth2" clId="{FF77DECD-7ECC-48F4-BF82-9D4D4E0BE774}" dt="2026-08-24T23:16:57.800" v="2447" actId="1076"/>
           <ac:graphicFrameMkLst>
@@ -8030,7 +7959,7 @@
           <a:p>
             <a:fld id="{23F5F05C-4C32-48D7-B5AA-52291E739591}" type="datetimeFigureOut">
               <a:rPr lang="en-US" smtClean="0"/>
-              <a:t>8/25/2026</a:t>
+              <a:t>8/28/2026</a:t>
             </a:fld>
             <a:endParaRPr lang="en-US"/>
           </a:p>
@@ -8672,7 +8601,7 @@
           <a:p>
             <a:fld id="{5518E2ED-ACDD-48AE-BEAE-F9B835E4D922}" type="datetimeFigureOut">
               <a:rPr lang="en-US" smtClean="0"/>
-              <a:t>8/25/2026</a:t>
+              <a:t>8/28/2026</a:t>
             </a:fld>
             <a:endParaRPr lang="en-US"/>
           </a:p>
@@ -8870,7 +8799,7 @@
           <a:p>
             <a:fld id="{5518E2ED-ACDD-48AE-BEAE-F9B835E4D922}" type="datetimeFigureOut">
               <a:rPr lang="en-US" smtClean="0"/>
-              <a:t>8/25/2026</a:t>
+              <a:t>8/28/2026</a:t>
             </a:fld>
             <a:endParaRPr lang="en-US"/>
           </a:p>
@@ -9078,7 +9007,7 @@
           <a:p>
             <a:fld id="{5518E2ED-ACDD-48AE-BEAE-F9B835E4D922}" type="datetimeFigureOut">
               <a:rPr lang="en-US" smtClean="0"/>
-              <a:t>8/25/2026</a:t>
+              <a:t>8/28/2026</a:t>
             </a:fld>
             <a:endParaRPr lang="en-US"/>
           </a:p>
@@ -9276,7 +9205,7 @@
           <a:p>
             <a:fld id="{5518E2ED-ACDD-48AE-BEAE-F9B835E4D922}" type="datetimeFigureOut">
               <a:rPr lang="en-US" smtClean="0"/>
-              <a:t>8/25/2026</a:t>
+              <a:t>8/28/2026</a:t>
             </a:fld>
             <a:endParaRPr lang="en-US"/>
           </a:p>
@@ -9551,7 +9480,7 @@
           <a:p>
             <a:fld id="{5518E2ED-ACDD-48AE-BEAE-F9B835E4D922}" type="datetimeFigureOut">
               <a:rPr lang="en-US" smtClean="0"/>
-              <a:t>8/25/2026</a:t>
+              <a:t>8/28/2026</a:t>
             </a:fld>
             <a:endParaRPr lang="en-US"/>
           </a:p>
@@ -9816,7 +9745,7 @@
           <a:p>
             <a:fld id="{5518E2ED-ACDD-48AE-BEAE-F9B835E4D922}" type="datetimeFigureOut">
               <a:rPr lang="en-US" smtClean="0"/>
-              <a:t>8/25/2026</a:t>
+              <a:t>8/28/2026</a:t>
             </a:fld>
             <a:endParaRPr lang="en-US"/>
           </a:p>
@@ -10228,7 +10157,7 @@
           <a:p>
             <a:fld id="{5518E2ED-ACDD-48AE-BEAE-F9B835E4D922}" type="datetimeFigureOut">
               <a:rPr lang="en-US" smtClean="0"/>
-              <a:t>8/25/2026</a:t>
+              <a:t>8/28/2026</a:t>
             </a:fld>
             <a:endParaRPr lang="en-US"/>
           </a:p>
@@ -10369,7 +10298,7 @@
           <a:p>
             <a:fld id="{5518E2ED-ACDD-48AE-BEAE-F9B835E4D922}" type="datetimeFigureOut">
               <a:rPr lang="en-US" smtClean="0"/>
-              <a:t>8/25/2026</a:t>
+              <a:t>8/28/2026</a:t>
             </a:fld>
             <a:endParaRPr lang="en-US"/>
           </a:p>
@@ -10482,7 +10411,7 @@
           <a:p>
             <a:fld id="{5518E2ED-ACDD-48AE-BEAE-F9B835E4D922}" type="datetimeFigureOut">
               <a:rPr lang="en-US" smtClean="0"/>
-              <a:t>8/25/2026</a:t>
+              <a:t>8/28/2026</a:t>
             </a:fld>
             <a:endParaRPr lang="en-US"/>
           </a:p>
@@ -10793,7 +10722,7 @@
           <a:p>
             <a:fld id="{5518E2ED-ACDD-48AE-BEAE-F9B835E4D922}" type="datetimeFigureOut">
               <a:rPr lang="en-US" smtClean="0"/>
-              <a:t>8/25/2026</a:t>
+              <a:t>8/28/2026</a:t>
             </a:fld>
             <a:endParaRPr lang="en-US"/>
           </a:p>
@@ -11081,7 +11010,7 @@
           <a:p>
             <a:fld id="{5518E2ED-ACDD-48AE-BEAE-F9B835E4D922}" type="datetimeFigureOut">
               <a:rPr lang="en-US" smtClean="0"/>
-              <a:t>8/25/2026</a:t>
+              <a:t>8/28/2026</a:t>
             </a:fld>
             <a:endParaRPr lang="en-US"/>
           </a:p>
@@ -11322,7 +11251,7 @@
           <a:p>
             <a:fld id="{5518E2ED-ACDD-48AE-BEAE-F9B835E4D922}" type="datetimeFigureOut">
               <a:rPr lang="en-US" smtClean="0"/>
-              <a:t>8/25/2026</a:t>
+              <a:t>8/28/2026</a:t>
             </a:fld>
             <a:endParaRPr lang="en-US"/>
           </a:p>
@@ -12471,7 +12400,21 @@
                 <a:effectLst/>
                 <a:latin typeface="+mn-lt"/>
               </a:rPr>
-              <a:t> of sustained additional inflow per year needed to return the lake to healthy levels (4,198 feet) by 2025</a:t>
+              <a:t> of sustained additional inflow per year needed to return the lake to healthy levels (</a:t>
+            </a:r>
+            <a:r>
+              <a:rPr lang="en-US" sz="2800" b="0" i="0">
+                <a:solidFill>
+                  <a:schemeClr val="tx1"/>
+                </a:solidFill>
+                <a:effectLst/>
+                <a:latin typeface="+mn-lt"/>
+              </a:rPr>
+              <a:t>4,198 feet</a:t>
+            </a:r>
+            <a:r>
+              <a:rPr lang="en-US" sz="2800"/>
+              <a:t>)</a:t>
             </a:r>
             <a:endParaRPr lang="en-US" sz="2800" dirty="0"/>
           </a:p>
